--- a/presentation/Orpheus-Hospitality-Suite.pptx
+++ b/presentation/Orpheus-Hospitality-Suite.pptx
@@ -1475,7 +1475,7 @@
           <a:p>
             <a:r>
               <a:rPr lang="en-US" dirty="0"/>
-              <a:t>Raise the hospitality-SKU caveat yourself. For an owner it lands as a capex-timing question, not an objection: the platform aligns to the TV refresh cycle already in the plan.</a:t>
+              <a:t>Raise the Android-SKU caveat yourself. For an owner it lands as a capex-timing question, not an objection: the platform aligns to the television refresh cycle already in the plan, and Android hospitality sets are the cheapest end of that market.</a:t>
             </a:r>
             <a:endParaRPr lang="en-US" dirty="0"/>
           </a:p>
@@ -1563,7 +1563,7 @@
           <a:p>
             <a:r>
               <a:rPr lang="en-US" dirty="0"/>
-              <a:t>For a group the survey is a per-property exercise and should be priced as one. Estates are rarely as uniform as the standards manual claims.</a:t>
+              <a:t>Committing to Android is a strength, not a limitation — say it that way. One codebase instead of four, one MDM enrolment, and hardware the group can buy in any market. The cost is honest and on the slide: a Samsung or LG estate needs a small Android device until refresh, so establish early which sets a given property actually has.</a:t>
             </a:r>
             <a:endParaRPr lang="en-US" dirty="0"/>
           </a:p>
@@ -3433,7 +3433,7 @@
                 <a:ea typeface="Calibri" pitchFamily="34" charset="-122"/>
                 <a:cs typeface="Calibri" pitchFamily="34" charset="-120"/>
               </a:rPr>
-              <a:t>Runs on the TV. No set-top box.</a:t>
+              <a:t>One Android app. No set-top box.</a:t>
             </a:r>
             <a:endParaRPr lang="en-US" sz="1150" dirty="0"/>
           </a:p>
@@ -9605,7 +9605,7 @@
                 <a:ea typeface="Calibri" pitchFamily="34" charset="-122"/>
                 <a:cs typeface="Calibri" pitchFamily="34" charset="-120"/>
               </a:rPr>
-              <a:t>One application, one interface, one brand standard, whatever is on the wall.</a:t>
+              <a:t>One Android application, one interface, one brand standard, on every set in the estate.</a:t>
             </a:r>
             <a:endParaRPr lang="en-US" sz="1050" dirty="0"/>
           </a:p>
@@ -10714,7 +10714,7 @@
                 <a:ea typeface="Calibri" pitchFamily="34" charset="-122"/>
                 <a:cs typeface="Calibri" pitchFamily="34" charset="-120"/>
               </a:rPr>
-              <a:t>Requires hospitality-model televisions, which permit managed installation and lockdown. Existing consumer estates run the same application on a small device until refresh.</a:t>
+              <a:t>Requires Android TV or Google TV hospitality models, which permit managed install and lockdown. Tizen and webOS estates run the same app on a small Android device until refresh.</a:t>
             </a:r>
             <a:endParaRPr lang="en-US" sz="900" dirty="0"/>
           </a:p>
@@ -10785,7 +10785,7 @@
                 <a:ea typeface="Calibri" pitchFamily="34" charset="-122"/>
                 <a:cs typeface="Calibri" pitchFamily="34" charset="-120"/>
               </a:rPr>
-              <a:t>PLATFORM-NEUTRAL</a:t>
+              <a:t>ANDROID, END TO END</a:t>
             </a:r>
             <a:endParaRPr lang="en-US" sz="1100" dirty="0"/>
           </a:p>
@@ -10824,7 +10824,7 @@
                 <a:ea typeface="Cambria" pitchFamily="34" charset="-122"/>
                 <a:cs typeface="Cambria" pitchFamily="34" charset="-120"/>
               </a:rPr>
-              <a:t>Whatever is already on the wall</a:t>
+              <a:t>One Android app. Every screen.</a:t>
             </a:r>
             <a:endParaRPr lang="en-US" sz="3300" dirty="0"/>
           </a:p>
@@ -10866,7 +10866,7 @@
                 <a:ea typeface="Calibri" pitchFamily="34" charset="-122"/>
                 <a:cs typeface="Calibri" pitchFamily="34" charset="-120"/>
               </a:rPr>
-              <a:t>One backend, thin clients. Personalisation, ordering and billing all sit server-side; the television renders and takes input. That is what lets a mixed estate converge on one guest experience without a single-vendor hardware commitment.</a:t>
+              <a:t>Every surface in the property runs Android — the television in the room, the tablets on the floor, the handhelds in the corridor, the kiosk in the lobby. One application, one release train, one way to manage a device.</a:t>
             </a:r>
             <a:endParaRPr lang="en-US" sz="1300" dirty="0"/>
           </a:p>
@@ -10880,12 +10880,12 @@
         </p:nvSpPr>
         <p:spPr>
           <a:xfrm>
-            <a:off x="640080" y="2331720"/>
-            <a:ext cx="2670048" cy="1965960"/>
+            <a:off x="640080" y="2286000"/>
+            <a:ext cx="2670048" cy="1874520"/>
           </a:xfrm>
           <a:prstGeom prst="roundRect">
             <a:avLst>
-              <a:gd name="adj" fmla="val 4186"/>
+              <a:gd name="adj" fmla="val 4390"/>
             </a:avLst>
           </a:prstGeom>
           <a:solidFill>
@@ -10914,24 +10914,27 @@
         </p:nvSpPr>
         <p:spPr>
           <a:xfrm>
-            <a:off x="877824" y="2542032"/>
-            <a:ext cx="2194560" cy="329184"/>
-          </a:xfrm>
-          <a:prstGeom prst="rect">
-            <a:avLst/>
-          </a:prstGeom>
-          <a:noFill/>
-          <a:ln/>
-        </p:spPr>
-        <p:txBody>
-          <a:bodyPr wrap="square" lIns="0" tIns="0" rIns="0" bIns="0" rtlCol="0" anchor="ctr"/>
-          <a:lstStyle/>
-          <a:p>
-            <a:pPr indent="0" marL="0">
-              <a:buNone/>
-            </a:pPr>
-            <a:r>
-              <a:rPr lang="en-US" sz="1900" b="1" dirty="0">
+            <a:off x="877824" y="2468880"/>
+            <a:ext cx="2194560" cy="566928"/>
+          </a:xfrm>
+          <a:prstGeom prst="rect">
+            <a:avLst/>
+          </a:prstGeom>
+          <a:noFill/>
+          <a:ln/>
+        </p:spPr>
+        <p:txBody>
+          <a:bodyPr wrap="square" lIns="0" tIns="0" rIns="0" bIns="0" rtlCol="0" anchor="ctr"/>
+          <a:lstStyle/>
+          <a:p>
+            <a:pPr indent="0" marL="0">
+              <a:lnSpc>
+                <a:spcPts val="2100"/>
+              </a:lnSpc>
+              <a:buNone/>
+            </a:pPr>
+            <a:r>
+              <a:rPr lang="en-US" sz="1700" b="1" dirty="0">
                 <a:solidFill>
                   <a:srgbClr val="0B1220"/>
                 </a:solidFill>
@@ -10939,9 +10942,9 @@
                 <a:ea typeface="Cambria" pitchFamily="34" charset="-122"/>
                 <a:cs typeface="Cambria" pitchFamily="34" charset="-120"/>
               </a:rPr>
-              <a:t>TCL</a:t>
-            </a:r>
-            <a:endParaRPr lang="en-US" sz="1900" dirty="0"/>
+              <a:t>In-room television</a:t>
+            </a:r>
+            <a:endParaRPr lang="en-US" sz="1700" dirty="0"/>
           </a:p>
         </p:txBody>
       </p:sp>
@@ -10953,8 +10956,8 @@
         </p:nvSpPr>
         <p:spPr>
           <a:xfrm>
-            <a:off x="877824" y="2907792"/>
-            <a:ext cx="2194560" cy="274320"/>
+            <a:off x="877824" y="3035808"/>
+            <a:ext cx="2194560" cy="256032"/>
           </a:xfrm>
           <a:prstGeom prst="rect">
             <a:avLst/>
@@ -10978,7 +10981,7 @@
                 <a:ea typeface="Calibri" pitchFamily="34" charset="-122"/>
                 <a:cs typeface="Calibri" pitchFamily="34" charset="-120"/>
               </a:rPr>
-              <a:t>Google TV / Android TV</a:t>
+              <a:t>Android TV / Google TV</a:t>
             </a:r>
             <a:endParaRPr lang="en-US" sz="1100" dirty="0"/>
           </a:p>
@@ -10992,8 +10995,8 @@
         </p:nvSpPr>
         <p:spPr>
           <a:xfrm>
-            <a:off x="877824" y="3255264"/>
-            <a:ext cx="2194560" cy="896112"/>
+            <a:off x="877824" y="3346704"/>
+            <a:ext cx="2194560" cy="749808"/>
           </a:xfrm>
           <a:prstGeom prst="rect">
             <a:avLst/>
@@ -11020,7 +11023,7 @@
                 <a:ea typeface="Calibri" pitchFamily="34" charset="-122"/>
                 <a:cs typeface="Calibri" pitchFamily="34" charset="-120"/>
               </a:rPr>
-              <a:t>Native Android TV application, managed install across the estate.</a:t>
+              <a:t>TCL, Sony, Hisense, Philips and others. The guest app runs on the set — nothing behind it.</a:t>
             </a:r>
             <a:endParaRPr lang="en-US" sz="1050" dirty="0"/>
           </a:p>
@@ -11034,12 +11037,12 @@
         </p:nvSpPr>
         <p:spPr>
           <a:xfrm>
-            <a:off x="3593592" y="2331720"/>
-            <a:ext cx="2670048" cy="1965960"/>
+            <a:off x="3593592" y="2286000"/>
+            <a:ext cx="2670048" cy="1874520"/>
           </a:xfrm>
           <a:prstGeom prst="roundRect">
             <a:avLst>
-              <a:gd name="adj" fmla="val 4186"/>
+              <a:gd name="adj" fmla="val 4390"/>
             </a:avLst>
           </a:prstGeom>
           <a:solidFill>
@@ -11068,24 +11071,27 @@
         </p:nvSpPr>
         <p:spPr>
           <a:xfrm>
-            <a:off x="3831336" y="2542032"/>
-            <a:ext cx="2194560" cy="329184"/>
-          </a:xfrm>
-          <a:prstGeom prst="rect">
-            <a:avLst/>
-          </a:prstGeom>
-          <a:noFill/>
-          <a:ln/>
-        </p:spPr>
-        <p:txBody>
-          <a:bodyPr wrap="square" lIns="0" tIns="0" rIns="0" bIns="0" rtlCol="0" anchor="ctr"/>
-          <a:lstStyle/>
-          <a:p>
-            <a:pPr indent="0" marL="0">
-              <a:buNone/>
-            </a:pPr>
-            <a:r>
-              <a:rPr lang="en-US" sz="1900" b="1" dirty="0">
+            <a:off x="3831336" y="2468880"/>
+            <a:ext cx="2194560" cy="566928"/>
+          </a:xfrm>
+          <a:prstGeom prst="rect">
+            <a:avLst/>
+          </a:prstGeom>
+          <a:noFill/>
+          <a:ln/>
+        </p:spPr>
+        <p:txBody>
+          <a:bodyPr wrap="square" lIns="0" tIns="0" rIns="0" bIns="0" rtlCol="0" anchor="ctr"/>
+          <a:lstStyle/>
+          <a:p>
+            <a:pPr indent="0" marL="0">
+              <a:lnSpc>
+                <a:spcPts val="2100"/>
+              </a:lnSpc>
+              <a:buNone/>
+            </a:pPr>
+            <a:r>
+              <a:rPr lang="en-US" sz="1700" b="1" dirty="0">
                 <a:solidFill>
                   <a:srgbClr val="0B1220"/>
                 </a:solidFill>
@@ -11093,9 +11099,9 @@
                 <a:ea typeface="Cambria" pitchFamily="34" charset="-122"/>
                 <a:cs typeface="Cambria" pitchFamily="34" charset="-120"/>
               </a:rPr>
-              <a:t>Samsung</a:t>
-            </a:r>
-            <a:endParaRPr lang="en-US" sz="1900" dirty="0"/>
+              <a:t>Staff tablets</a:t>
+            </a:r>
+            <a:endParaRPr lang="en-US" sz="1700" dirty="0"/>
           </a:p>
         </p:txBody>
       </p:sp>
@@ -11107,8 +11113,8 @@
         </p:nvSpPr>
         <p:spPr>
           <a:xfrm>
-            <a:off x="3831336" y="2907792"/>
-            <a:ext cx="2194560" cy="274320"/>
+            <a:off x="3831336" y="3035808"/>
+            <a:ext cx="2194560" cy="256032"/>
           </a:xfrm>
           <a:prstGeom prst="rect">
             <a:avLst/>
@@ -11132,7 +11138,7 @@
                 <a:ea typeface="Calibri" pitchFamily="34" charset="-122"/>
                 <a:cs typeface="Calibri" pitchFamily="34" charset="-120"/>
               </a:rPr>
-              <a:t>Tizen hospitality</a:t>
+              <a:t>Android</a:t>
             </a:r>
             <a:endParaRPr lang="en-US" sz="1100" dirty="0"/>
           </a:p>
@@ -11146,8 +11152,8 @@
         </p:nvSpPr>
         <p:spPr>
           <a:xfrm>
-            <a:off x="3831336" y="3255264"/>
-            <a:ext cx="2194560" cy="896112"/>
+            <a:off x="3831336" y="3346704"/>
+            <a:ext cx="2194560" cy="749808"/>
           </a:xfrm>
           <a:prstGeom prst="rect">
             <a:avLst/>
@@ -11174,7 +11180,7 @@
                 <a:ea typeface="Calibri" pitchFamily="34" charset="-122"/>
                 <a:cs typeface="Calibri" pitchFamily="34" charset="-120"/>
               </a:rPr>
-              <a:t>HTML5 application on Samsung's hospitality stack.</a:t>
+              <a:t>Restaurant and bar point of sale, kitchen display, housekeeping and inspection boards.</a:t>
             </a:r>
             <a:endParaRPr lang="en-US" sz="1050" dirty="0"/>
           </a:p>
@@ -11188,12 +11194,12 @@
         </p:nvSpPr>
         <p:spPr>
           <a:xfrm>
-            <a:off x="6547104" y="2331720"/>
-            <a:ext cx="2670048" cy="1965960"/>
+            <a:off x="6547104" y="2286000"/>
+            <a:ext cx="2670048" cy="1874520"/>
           </a:xfrm>
           <a:prstGeom prst="roundRect">
             <a:avLst>
-              <a:gd name="adj" fmla="val 4186"/>
+              <a:gd name="adj" fmla="val 4390"/>
             </a:avLst>
           </a:prstGeom>
           <a:solidFill>
@@ -11222,24 +11228,27 @@
         </p:nvSpPr>
         <p:spPr>
           <a:xfrm>
-            <a:off x="6784848" y="2542032"/>
-            <a:ext cx="2194560" cy="329184"/>
-          </a:xfrm>
-          <a:prstGeom prst="rect">
-            <a:avLst/>
-          </a:prstGeom>
-          <a:noFill/>
-          <a:ln/>
-        </p:spPr>
-        <p:txBody>
-          <a:bodyPr wrap="square" lIns="0" tIns="0" rIns="0" bIns="0" rtlCol="0" anchor="ctr"/>
-          <a:lstStyle/>
-          <a:p>
-            <a:pPr indent="0" marL="0">
-              <a:buNone/>
-            </a:pPr>
-            <a:r>
-              <a:rPr lang="en-US" sz="1900" b="1" dirty="0">
+            <a:off x="6784848" y="2468880"/>
+            <a:ext cx="2194560" cy="566928"/>
+          </a:xfrm>
+          <a:prstGeom prst="rect">
+            <a:avLst/>
+          </a:prstGeom>
+          <a:noFill/>
+          <a:ln/>
+        </p:spPr>
+        <p:txBody>
+          <a:bodyPr wrap="square" lIns="0" tIns="0" rIns="0" bIns="0" rtlCol="0" anchor="ctr"/>
+          <a:lstStyle/>
+          <a:p>
+            <a:pPr indent="0" marL="0">
+              <a:lnSpc>
+                <a:spcPts val="2100"/>
+              </a:lnSpc>
+              <a:buNone/>
+            </a:pPr>
+            <a:r>
+              <a:rPr lang="en-US" sz="1700" b="1" dirty="0">
                 <a:solidFill>
                   <a:srgbClr val="0B1220"/>
                 </a:solidFill>
@@ -11247,9 +11256,9 @@
                 <a:ea typeface="Cambria" pitchFamily="34" charset="-122"/>
                 <a:cs typeface="Cambria" pitchFamily="34" charset="-120"/>
               </a:rPr>
-              <a:t>LG</a:t>
-            </a:r>
-            <a:endParaRPr lang="en-US" sz="1900" dirty="0"/>
+              <a:t>Handhelds</a:t>
+            </a:r>
+            <a:endParaRPr lang="en-US" sz="1700" dirty="0"/>
           </a:p>
         </p:txBody>
       </p:sp>
@@ -11261,8 +11270,8 @@
         </p:nvSpPr>
         <p:spPr>
           <a:xfrm>
-            <a:off x="6784848" y="2907792"/>
-            <a:ext cx="2194560" cy="274320"/>
+            <a:off x="6784848" y="3035808"/>
+            <a:ext cx="2194560" cy="256032"/>
           </a:xfrm>
           <a:prstGeom prst="rect">
             <a:avLst/>
@@ -11286,7 +11295,7 @@
                 <a:ea typeface="Calibri" pitchFamily="34" charset="-122"/>
                 <a:cs typeface="Calibri" pitchFamily="34" charset="-120"/>
               </a:rPr>
-              <a:t>webOS hospitality</a:t>
+              <a:t>Android</a:t>
             </a:r>
             <a:endParaRPr lang="en-US" sz="1100" dirty="0"/>
           </a:p>
@@ -11300,8 +11309,8 @@
         </p:nvSpPr>
         <p:spPr>
           <a:xfrm>
-            <a:off x="6784848" y="3255264"/>
-            <a:ext cx="2194560" cy="896112"/>
+            <a:off x="6784848" y="3346704"/>
+            <a:ext cx="2194560" cy="749808"/>
           </a:xfrm>
           <a:prstGeom prst="rect">
             <a:avLst/>
@@ -11328,7 +11337,7 @@
                 <a:ea typeface="Calibri" pitchFamily="34" charset="-122"/>
                 <a:cs typeface="Calibri" pitchFamily="34" charset="-120"/>
               </a:rPr>
-              <a:t>HTML5 application on LG's Pro:Centric stack.</a:t>
+              <a:t>Passport and ID capture at the desk or kerbside, order running, maintenance work orders.</a:t>
             </a:r>
             <a:endParaRPr lang="en-US" sz="1050" dirty="0"/>
           </a:p>
@@ -11342,12 +11351,12 @@
         </p:nvSpPr>
         <p:spPr>
           <a:xfrm>
-            <a:off x="9500616" y="2331720"/>
-            <a:ext cx="2670048" cy="1965960"/>
+            <a:off x="9500616" y="2286000"/>
+            <a:ext cx="2670048" cy="1874520"/>
           </a:xfrm>
           <a:prstGeom prst="roundRect">
             <a:avLst>
-              <a:gd name="adj" fmla="val 4186"/>
+              <a:gd name="adj" fmla="val 4390"/>
             </a:avLst>
           </a:prstGeom>
           <a:solidFill>
@@ -11376,24 +11385,27 @@
         </p:nvSpPr>
         <p:spPr>
           <a:xfrm>
-            <a:off x="9738360" y="2542032"/>
-            <a:ext cx="2194560" cy="329184"/>
-          </a:xfrm>
-          <a:prstGeom prst="rect">
-            <a:avLst/>
-          </a:prstGeom>
-          <a:noFill/>
-          <a:ln/>
-        </p:spPr>
-        <p:txBody>
-          <a:bodyPr wrap="square" lIns="0" tIns="0" rIns="0" bIns="0" rtlCol="0" anchor="ctr"/>
-          <a:lstStyle/>
-          <a:p>
-            <a:pPr indent="0" marL="0">
-              <a:buNone/>
-            </a:pPr>
-            <a:r>
-              <a:rPr lang="en-US" sz="1900" b="1" dirty="0">
+            <a:off x="9738360" y="2468880"/>
+            <a:ext cx="2194560" cy="566928"/>
+          </a:xfrm>
+          <a:prstGeom prst="rect">
+            <a:avLst/>
+          </a:prstGeom>
+          <a:noFill/>
+          <a:ln/>
+        </p:spPr>
+        <p:txBody>
+          <a:bodyPr wrap="square" lIns="0" tIns="0" rIns="0" bIns="0" rtlCol="0" anchor="ctr"/>
+          <a:lstStyle/>
+          <a:p>
+            <a:pPr indent="0" marL="0">
+              <a:lnSpc>
+                <a:spcPts val="2100"/>
+              </a:lnSpc>
+              <a:buNone/>
+            </a:pPr>
+            <a:r>
+              <a:rPr lang="en-US" sz="1700" b="1" dirty="0">
                 <a:solidFill>
                   <a:srgbClr val="0B1220"/>
                 </a:solidFill>
@@ -11401,9 +11413,9 @@
                 <a:ea typeface="Cambria" pitchFamily="34" charset="-122"/>
                 <a:cs typeface="Cambria" pitchFamily="34" charset="-120"/>
               </a:rPr>
-              <a:t>Mixed / legacy</a:t>
-            </a:r>
-            <a:endParaRPr lang="en-US" sz="1900" dirty="0"/>
+              <a:t>Self-service kiosk</a:t>
+            </a:r>
+            <a:endParaRPr lang="en-US" sz="1700" dirty="0"/>
           </a:p>
         </p:txBody>
       </p:sp>
@@ -11415,8 +11427,8 @@
         </p:nvSpPr>
         <p:spPr>
           <a:xfrm>
-            <a:off x="9738360" y="2907792"/>
-            <a:ext cx="2194560" cy="274320"/>
+            <a:off x="9738360" y="3035808"/>
+            <a:ext cx="2194560" cy="256032"/>
           </a:xfrm>
           <a:prstGeom prst="rect">
             <a:avLst/>
@@ -11440,7 +11452,7 @@
                 <a:ea typeface="Calibri" pitchFamily="34" charset="-122"/>
                 <a:cs typeface="Calibri" pitchFamily="34" charset="-120"/>
               </a:rPr>
-              <a:t>Any brand</a:t>
+              <a:t>Android</a:t>
             </a:r>
             <a:endParaRPr lang="en-US" sz="1100" dirty="0"/>
           </a:p>
@@ -11454,8 +11466,8 @@
         </p:nvSpPr>
         <p:spPr>
           <a:xfrm>
-            <a:off x="9738360" y="3255264"/>
-            <a:ext cx="2194560" cy="896112"/>
+            <a:off x="9738360" y="3346704"/>
+            <a:ext cx="2194560" cy="749808"/>
           </a:xfrm>
           <a:prstGeom prst="rect">
             <a:avLst/>
@@ -11482,7 +11494,7 @@
                 <a:ea typeface="Calibri" pitchFamily="34" charset="-122"/>
                 <a:cs typeface="Calibri" pitchFamily="34" charset="-120"/>
               </a:rPr>
-              <a:t>Same application on a small device, until the televisions refresh.</a:t>
+              <a:t>Lobby check-in, document capture and signature, key issue.</a:t>
             </a:r>
             <a:endParaRPr lang="en-US" sz="1050" dirty="0"/>
           </a:p>
@@ -11496,12 +11508,12 @@
         </p:nvSpPr>
         <p:spPr>
           <a:xfrm>
-            <a:off x="640080" y="4526280"/>
-            <a:ext cx="10911535" cy="914400"/>
+            <a:off x="640080" y="4343400"/>
+            <a:ext cx="10911535" cy="1417320"/>
           </a:xfrm>
           <a:prstGeom prst="roundRect">
             <a:avLst>
-              <a:gd name="adj" fmla="val 9000"/>
+              <a:gd name="adj" fmla="val 5806"/>
             </a:avLst>
           </a:prstGeom>
           <a:solidFill>
@@ -11530,8 +11542,8 @@
         </p:nvSpPr>
         <p:spPr>
           <a:xfrm>
-            <a:off x="960120" y="4663440"/>
-            <a:ext cx="3657600" cy="274320"/>
+            <a:off x="960120" y="4526280"/>
+            <a:ext cx="4754880" cy="274320"/>
           </a:xfrm>
           <a:prstGeom prst="rect">
             <a:avLst/>
@@ -11555,6 +11567,87 @@
                 <a:ea typeface="Calibri" pitchFamily="34" charset="-122"/>
                 <a:cs typeface="Calibri" pitchFamily="34" charset="-120"/>
               </a:rPr>
+              <a:t>Why one operating system</a:t>
+            </a:r>
+            <a:endParaRPr lang="en-US" sz="1200" dirty="0"/>
+          </a:p>
+        </p:txBody>
+      </p:sp>
+      <p:sp>
+        <p:nvSpPr>
+          <p:cNvPr id="23" name="Text 21"/>
+          <p:cNvSpPr txBox="1"/>
+          <p:nvPr/>
+        </p:nvSpPr>
+        <p:spPr>
+          <a:xfrm>
+            <a:off x="960120" y="4828032"/>
+            <a:ext cx="4846320" cy="777240"/>
+          </a:xfrm>
+          <a:prstGeom prst="rect">
+            <a:avLst/>
+          </a:prstGeom>
+          <a:noFill/>
+          <a:ln/>
+        </p:spPr>
+        <p:txBody>
+          <a:bodyPr wrap="square" lIns="0" tIns="0" rIns="0" bIns="0" rtlCol="0" anchor="ctr"/>
+          <a:lstStyle/>
+          <a:p>
+            <a:pPr indent="0" marL="0">
+              <a:lnSpc>
+                <a:spcPts val="1450"/>
+              </a:lnSpc>
+              <a:buNone/>
+            </a:pPr>
+            <a:r>
+              <a:rPr lang="en-US" sz="1100" dirty="0">
+                <a:solidFill>
+                  <a:srgbClr val="F4F1EA"/>
+                </a:solidFill>
+                <a:latin typeface="Calibri" pitchFamily="34" charset="0"/>
+                <a:ea typeface="Calibri" pitchFamily="34" charset="-122"/>
+                <a:cs typeface="Calibri" pitchFamily="34" charset="-120"/>
+              </a:rPr>
+              <a:t>One codebase and one release train, not four · one device-management enrolment for the whole estate · commodity hardware the group can source in any market · a single patch and security posture to put in front of your vendor review</a:t>
+            </a:r>
+            <a:endParaRPr lang="en-US" sz="1100" dirty="0"/>
+          </a:p>
+        </p:txBody>
+      </p:sp>
+      <p:sp>
+        <p:nvSpPr>
+          <p:cNvPr id="24" name="Text 22"/>
+          <p:cNvSpPr txBox="1"/>
+          <p:nvPr/>
+        </p:nvSpPr>
+        <p:spPr>
+          <a:xfrm>
+            <a:off x="6400800" y="4526280"/>
+            <a:ext cx="4754880" cy="274320"/>
+          </a:xfrm>
+          <a:prstGeom prst="rect">
+            <a:avLst/>
+          </a:prstGeom>
+          <a:noFill/>
+          <a:ln/>
+        </p:spPr>
+        <p:txBody>
+          <a:bodyPr wrap="square" lIns="0" tIns="0" rIns="0" bIns="0" rtlCol="0" anchor="ctr"/>
+          <a:lstStyle/>
+          <a:p>
+            <a:pPr indent="0" marL="0">
+              <a:buNone/>
+            </a:pPr>
+            <a:r>
+              <a:rPr lang="en-US" sz="1200" b="1" dirty="0">
+                <a:solidFill>
+                  <a:srgbClr val="D4A94A"/>
+                </a:solidFill>
+                <a:latin typeface="Calibri" pitchFamily="34" charset="0"/>
+                <a:ea typeface="Calibri" pitchFamily="34" charset="-122"/>
+                <a:cs typeface="Calibri" pitchFamily="34" charset="-120"/>
+              </a:rPr>
               <a:t>Before we quote, we survey</a:t>
             </a:r>
             <a:endParaRPr lang="en-US" sz="1200" dirty="0"/>
@@ -11563,30 +11656,33 @@
       </p:sp>
       <p:sp>
         <p:nvSpPr>
-          <p:cNvPr id="23" name="Text 21"/>
-          <p:cNvSpPr txBox="1"/>
-          <p:nvPr/>
-        </p:nvSpPr>
-        <p:spPr>
-          <a:xfrm>
-            <a:off x="960120" y="4956048"/>
-            <a:ext cx="10271455" cy="384048"/>
-          </a:xfrm>
-          <a:prstGeom prst="rect">
-            <a:avLst/>
-          </a:prstGeom>
-          <a:noFill/>
-          <a:ln/>
-        </p:spPr>
-        <p:txBody>
-          <a:bodyPr wrap="square" lIns="0" tIns="0" rIns="0" bIns="0" rtlCol="0" anchor="ctr"/>
-          <a:lstStyle/>
-          <a:p>
-            <a:pPr indent="0" marL="0">
-              <a:buNone/>
-            </a:pPr>
-            <a:r>
-              <a:rPr lang="en-US" sz="1150" dirty="0">
+          <p:cNvPr id="25" name="Text 23"/>
+          <p:cNvSpPr txBox="1"/>
+          <p:nvPr/>
+        </p:nvSpPr>
+        <p:spPr>
+          <a:xfrm>
+            <a:off x="6400800" y="4828032"/>
+            <a:ext cx="4846320" cy="777240"/>
+          </a:xfrm>
+          <a:prstGeom prst="rect">
+            <a:avLst/>
+          </a:prstGeom>
+          <a:noFill/>
+          <a:ln/>
+        </p:spPr>
+        <p:txBody>
+          <a:bodyPr wrap="square" lIns="0" tIns="0" rIns="0" bIns="0" rtlCol="0" anchor="ctr"/>
+          <a:lstStyle/>
+          <a:p>
+            <a:pPr indent="0" marL="0">
+              <a:lnSpc>
+                <a:spcPts val="1450"/>
+              </a:lnSpc>
+              <a:buNone/>
+            </a:pPr>
+            <a:r>
+              <a:rPr lang="en-US" sz="1100" dirty="0">
                 <a:solidFill>
                   <a:srgbClr val="F4F1EA"/>
                 </a:solidFill>
@@ -11594,9 +11690,48 @@
                 <a:ea typeface="Calibri" pitchFamily="34" charset="-122"/>
                 <a:cs typeface="Calibri" pitchFamily="34" charset="-120"/>
               </a:rPr>
-              <a:t>Television models per property, and whether they are hospitality SKUs · per-room network to each set · VLAN separation of guest and device traffic · multicast, where live television is carried over IP</a:t>
-            </a:r>
-            <a:endParaRPr lang="en-US" sz="1150" dirty="0"/>
+              <a:t>Television models per property, and whether they are Android hospitality SKUs · per-room network to each set · VLAN separation of guest and device traffic · multicast, where live television is carried over IP</a:t>
+            </a:r>
+            <a:endParaRPr lang="en-US" sz="1100" dirty="0"/>
+          </a:p>
+        </p:txBody>
+      </p:sp>
+      <p:sp>
+        <p:nvSpPr>
+          <p:cNvPr id="26" name="Text 24"/>
+          <p:cNvSpPr txBox="1"/>
+          <p:nvPr/>
+        </p:nvSpPr>
+        <p:spPr>
+          <a:xfrm>
+            <a:off x="640080" y="6291072"/>
+            <a:ext cx="10911535" cy="274320"/>
+          </a:xfrm>
+          <a:prstGeom prst="rect">
+            <a:avLst/>
+          </a:prstGeom>
+          <a:noFill/>
+          <a:ln/>
+        </p:spPr>
+        <p:txBody>
+          <a:bodyPr wrap="square" lIns="0" tIns="0" rIns="0" bIns="0" rtlCol="0" anchor="ctr"/>
+          <a:lstStyle/>
+          <a:p>
+            <a:pPr indent="0" marL="0">
+              <a:buNone/>
+            </a:pPr>
+            <a:r>
+              <a:rPr lang="en-US" sz="900" i="1" dirty="0">
+                <a:solidFill>
+                  <a:srgbClr val="8B96A8"/>
+                </a:solidFill>
+                <a:latin typeface="Calibri" pitchFamily="34" charset="0"/>
+                <a:ea typeface="Calibri" pitchFamily="34" charset="-122"/>
+                <a:cs typeface="Calibri" pitchFamily="34" charset="-120"/>
+              </a:rPr>
+              <a:t>Samsung Tizen and LG webOS sets are not native Android targets. Those properties run the same application on a small Android device until the televisions refresh.</a:t>
+            </a:r>
+            <a:endParaRPr lang="en-US" sz="900" dirty="0"/>
           </a:p>
         </p:txBody>
       </p:sp>

--- a/presentation/Orpheus-Hospitality-Suite.pptx
+++ b/presentation/Orpheus-Hospitality-Suite.pptx
@@ -29,9 +29,10 @@
     <p:sldId id="277" r:id="rId23"/>
     <p:sldId id="278" r:id="rId24"/>
     <p:sldId id="279" r:id="rId25"/>
+    <p:sldId id="280" r:id="rId26"/>
   </p:sldIdLst>
   <p:notesMasterIdLst>
-    <p:notesMasterId r:id="rId26"/>
+    <p:notesMasterId r:id="rId27"/>
   </p:notesMasterIdLst>
   <p:sldSz cx="12192000" cy="6858000"/>
   <p:notesSz cx="6858000" cy="12192000"/>
@@ -1827,7 +1828,7 @@
           <a:p>
             <a:r>
               <a:rPr lang="en-US" dirty="0"/>
-              <a:t>Ask early in the meeting which side of this slide the room sits on. A deck that pitches operator benefits to an owner, or capex savings to a brand team, loses both.</a:t>
+              <a:t>Two things to lead with in the room. First, this is the cheapest module to say yes to: the PBX, the handsets and the numbering plan already exist, so the work is integration rather than replacement. Second, emergency calling — direct dial with no prefix, desk notification and a per-room dispatchable location are legal requirements in several markets and are the fastest way to find out whether a property's current telephony is actually compliant.</a:t>
             </a:r>
             <a:endParaRPr lang="en-US" dirty="0"/>
           </a:p>
@@ -1915,7 +1916,7 @@
           <a:p>
             <a:r>
               <a:rPr lang="en-US" dirty="0"/>
-              <a:t>Say the caveat out loud. For an enterprise buyer, offering to rebuild the model on their numbers during the systems audit is the ask that converts this meeting into a second one.</a:t>
+              <a:t>Ask early in the meeting which side of this slide the room sits on. A deck that pitches operator benefits to an owner, or capex savings to a brand team, loses both.</a:t>
             </a:r>
             <a:endParaRPr lang="en-US" dirty="0"/>
           </a:p>
@@ -2003,7 +2004,7 @@
           <a:p>
             <a:r>
               <a:rPr lang="en-US" dirty="0"/>
-              <a:t>Be exact here. Enterprise procurement will ask for the SOC 2 report; promising it on a date is credible, implying it exists is a deal-ending discovery. Update this slide the moment the audit completes.</a:t>
+              <a:t>Say the caveat out loud. For an enterprise buyer, offering to rebuild the model on their numbers during the systems audit is the ask that converts this meeting into a second one.</a:t>
             </a:r>
             <a:endParaRPr lang="en-US" dirty="0"/>
           </a:p>
@@ -2091,7 +2092,7 @@
           <a:p>
             <a:r>
               <a:rPr lang="en-US" dirty="0"/>
-              <a:t>Phase 3 is the credibility move. Volunteering a measurement gate before estate commitment is what an enterprise buyer expects and what most vendors avoid offering.</a:t>
+              <a:t>Be exact here. Enterprise procurement will ask for the SOC 2 report; promising it on a date is credible, implying it exists is a deal-ending discovery. Update this slide the moment the audit completes.</a:t>
             </a:r>
             <a:endParaRPr lang="en-US" dirty="0"/>
           </a:p>
@@ -2179,7 +2180,7 @@
           <a:p>
             <a:r>
               <a:rPr lang="en-US" dirty="0"/>
-              <a:t>Close on the audit and the integration scoping, not on the product. Both are low-commitment yeses, and both produce the facts every later conversation depends on.</a:t>
+              <a:t>Phase 3 is the credibility move. Volunteering a measurement gate before estate commitment is what an enterprise buyer expects and what most vendors avoid offering.</a:t>
             </a:r>
             <a:endParaRPr lang="en-US" dirty="0"/>
           </a:p>
@@ -2203,6 +2204,94 @@
             <a:fld id="{F7021451-1387-4CA6-816F-3879F97B5CBC}" type="slidenum">
               <a:rPr lang="en-US"/>
               <a:t>24</a:t>
+            </a:fld>
+            <a:endParaRPr lang="en-US"/>
+          </a:p>
+        </p:txBody>
+      </p:sp>
+    </p:spTree>
+    <p:extLst>
+      <p:ext uri="{BB962C8B-B14F-4D97-AF65-F5344CB8AC3E}">
+        <p14:creationId xmlns:p14="http://schemas.microsoft.com/office/powerpoint/2010/main" val="1024086991"/>
+      </p:ext>
+    </p:extLst>
+  </p:cSld>
+  <p:clrMapOvr>
+    <a:masterClrMapping/>
+  </p:clrMapOvr>
+</p:notes>
+</file>
+
+<file path=ppt/notesSlides/notesSlide25.xml><?xml version="1.0" encoding="utf-8"?>
+<p:notes xmlns:a="http://schemas.openxmlformats.org/drawingml/2006/main" xmlns:r="http://schemas.openxmlformats.org/officeDocument/2006/relationships" xmlns:p="http://schemas.openxmlformats.org/presentationml/2006/main">
+  <p:cSld>
+    <p:spTree>
+      <p:nvGrpSpPr>
+        <p:cNvPr id="1" name=""/>
+        <p:cNvGrpSpPr/>
+        <p:nvPr/>
+      </p:nvGrpSpPr>
+      <p:grpSpPr>
+        <a:xfrm>
+          <a:off x="0" y="0"/>
+          <a:ext cx="0" cy="0"/>
+          <a:chOff x="0" y="0"/>
+          <a:chExt cx="0" cy="0"/>
+        </a:xfrm>
+      </p:grpSpPr>
+      <p:sp>
+        <p:nvSpPr>
+          <p:cNvPr id="2" name="Slide Image Placeholder 1"/>
+          <p:cNvSpPr>
+            <a:spLocks noGrp="1" noRot="1" noChangeAspect="1"/>
+          </p:cNvSpPr>
+          <p:nvPr>
+            <p:ph type="sldImg"/>
+          </p:nvPr>
+        </p:nvSpPr>
+        <p:spPr/>
+      </p:sp>
+      <p:sp>
+        <p:nvSpPr>
+          <p:cNvPr id="3" name="Notes Placeholder 2"/>
+          <p:cNvSpPr>
+            <a:spLocks noGrp="1"/>
+          </p:cNvSpPr>
+          <p:nvPr>
+            <p:ph type="body" idx="1"/>
+          </p:nvPr>
+        </p:nvSpPr>
+        <p:spPr/>
+        <p:txBody>
+          <a:bodyPr/>
+          <a:lstStyle/>
+          <a:p>
+            <a:r>
+              <a:rPr lang="en-US" dirty="0"/>
+              <a:t>Close on the audit and the integration scoping, not on the product. Both are low-commitment yeses, and both produce the facts every later conversation depends on.</a:t>
+            </a:r>
+            <a:endParaRPr lang="en-US" dirty="0"/>
+          </a:p>
+        </p:txBody>
+      </p:sp>
+      <p:sp>
+        <p:nvSpPr>
+          <p:cNvPr id="4" name="Slide Number Placeholder 3"/>
+          <p:cNvSpPr>
+            <a:spLocks noGrp="1"/>
+          </p:cNvSpPr>
+          <p:nvPr>
+            <p:ph type="sldNum" sz="quarter" idx="10"/>
+          </p:nvPr>
+        </p:nvSpPr>
+        <p:spPr/>
+        <p:txBody>
+          <a:bodyPr/>
+          <a:lstStyle/>
+          <a:p>
+            <a:fld id="{F7021451-1387-4CA6-816F-3879F97B5CBC}" type="slidenum">
+              <a:rPr lang="en-US"/>
+              <a:t>25</a:t>
             </a:fld>
             <a:endParaRPr lang="en-US"/>
           </a:p>
@@ -2531,7 +2620,7 @@
           <a:p>
             <a:r>
               <a:rPr lang="en-US" dirty="0"/>
-              <a:t>For a mixed estate the module-by-module point matters: a managed property with a strong incumbent POS can take everything except ordering, and still share the guest record.</a:t>
+              <a:t>Voice is the newest module and the easiest sell to a property that already runs a PBX: it is the only one that adds a guest-facing device without adding a platform, because the handset registers to the SIP system they already own.</a:t>
             </a:r>
             <a:endParaRPr lang="en-US" dirty="0"/>
           </a:p>
@@ -8445,7 +8534,7 @@
                 <a:ea typeface="Cambria" pitchFamily="34" charset="-122"/>
                 <a:cs typeface="Cambria" pitchFamily="34" charset="-120"/>
               </a:rPr>
-              <a:t>The screen in the room</a:t>
+              <a:t>The devices in the room</a:t>
             </a:r>
             <a:endParaRPr lang="en-US" sz="4000" dirty="0"/>
           </a:p>
@@ -8487,7 +8576,7 @@
                 <a:ea typeface="Calibri" pitchFamily="34" charset="-122"/>
                 <a:cs typeface="Calibri" pitchFamily="34" charset="-120"/>
               </a:rPr>
-              <a:t>The highest-dwell-time surface in the room, procured locally in most estates,</a:t>
+              <a:t>The two things a guest touches once the door closes: the screen on the wall and</a:t>
             </a:r>
             <a:endParaRPr lang="en-US" sz="1400" dirty="0"/>
           </a:p>
@@ -8507,7 +8596,7 @@
                 <a:ea typeface="Calibri" pitchFamily="34" charset="-122"/>
                 <a:cs typeface="Calibri" pitchFamily="34" charset="-120"/>
               </a:rPr>
-              <a:t>and the least consistent thing a returning guest encounters.</a:t>
+              <a:t>the handset beside the bed. Both bought locally in most estates. Both ours to fix.</a:t>
             </a:r>
             <a:endParaRPr lang="en-US" sz="1400" dirty="0"/>
           </a:p>
@@ -10866,7 +10955,7 @@
                 <a:ea typeface="Calibri" pitchFamily="34" charset="-122"/>
                 <a:cs typeface="Calibri" pitchFamily="34" charset="-120"/>
               </a:rPr>
-              <a:t>Every surface in the property runs Android — the television in the room, the tablets on the floor, the handhelds in the corridor, the kiosk in the lobby. One application, one release train, one way to manage a device.</a:t>
+              <a:t>Every device that runs our application runs Android — the television in the room, the tablets on the floor, the handhelds in the corridor, the kiosk in the lobby. One application, one release train, one way to manage a device.</a:t>
             </a:r>
             <a:endParaRPr lang="en-US" sz="1300" dirty="0"/>
           </a:p>
@@ -11729,7 +11818,7 @@
                 <a:ea typeface="Calibri" pitchFamily="34" charset="-122"/>
                 <a:cs typeface="Calibri" pitchFamily="34" charset="-120"/>
               </a:rPr>
-              <a:t>Samsung Tizen and LG webOS sets are not native Android targets. Those properties run the same application on a small Android device until the televisions refresh.</a:t>
+              <a:t>The in-room handset is the one exception — a standard SIP endpoint on your own PBX, not an Android device. Samsung Tizen and LG webOS sets are not native Android targets either; those properties run the same application on a small Android device until the televisions refresh.</a:t>
             </a:r>
             <a:endParaRPr lang="en-US" sz="900" dirty="0"/>
           </a:p>
@@ -13675,7 +13764,7 @@
                 <a:ea typeface="Calibri" pitchFamily="34" charset="-122"/>
                 <a:cs typeface="Calibri" pitchFamily="34" charset="-120"/>
               </a:rPr>
-              <a:t>WHO GETS WHAT</a:t>
+              <a:t>VOICE</a:t>
             </a:r>
             <a:endParaRPr lang="en-US" sz="1100" dirty="0"/>
           </a:p>
@@ -13714,7 +13803,7 @@
                 <a:ea typeface="Cambria" pitchFamily="34" charset="-122"/>
                 <a:cs typeface="Cambria" pitchFamily="34" charset="-120"/>
               </a:rPr>
-              <a:t>Owner and operator want different things</a:t>
+              <a:t>The phone beside the bed</a:t>
             </a:r>
             <a:endParaRPr lang="en-US" sz="3300" dirty="0"/>
           </a:p>
@@ -13729,7 +13818,7 @@
         <p:spPr>
           <a:xfrm>
             <a:off x="640080" y="1572768"/>
-            <a:ext cx="9601200" cy="411480"/>
+            <a:ext cx="9875520" cy="566928"/>
           </a:xfrm>
           <a:prstGeom prst="rect">
             <a:avLst/>
@@ -13756,7 +13845,7 @@
                 <a:ea typeface="Calibri" pitchFamily="34" charset="-122"/>
                 <a:cs typeface="Calibri" pitchFamily="34" charset="-120"/>
               </a:rPr>
-              <a:t>In a branded estate the party funding the capital expenditure and the party setting the standard are rarely the same. The platform has to answer to both.</a:t>
+              <a:t>The SIP handset registers to the PBX you already run. We do not replace your telephony — we give the handset the guest record, and we put the calls on the folio.</a:t>
             </a:r>
             <a:endParaRPr lang="en-US" sz="1350" dirty="0"/>
           </a:p>
@@ -13770,12 +13859,12 @@
         </p:nvSpPr>
         <p:spPr>
           <a:xfrm>
-            <a:off x="640080" y="2212848"/>
-            <a:ext cx="5440680" cy="3200400"/>
+            <a:off x="640080" y="2286000"/>
+            <a:ext cx="2670048" cy="2103120"/>
           </a:xfrm>
           <a:prstGeom prst="roundRect">
             <a:avLst>
-              <a:gd name="adj" fmla="val 2571"/>
+              <a:gd name="adj" fmla="val 3913"/>
             </a:avLst>
           </a:prstGeom>
           <a:solidFill>
@@ -13798,112 +13887,139 @@
       </p:sp>
       <p:sp>
         <p:nvSpPr>
-          <p:cNvPr id="6" name="Text 4"/>
-          <p:cNvSpPr txBox="1"/>
-          <p:nvPr/>
-        </p:nvSpPr>
-        <p:spPr>
-          <a:xfrm>
-            <a:off x="1005840" y="2432304"/>
-            <a:ext cx="2743200" cy="329184"/>
-          </a:xfrm>
-          <a:prstGeom prst="rect">
-            <a:avLst/>
-          </a:prstGeom>
-          <a:noFill/>
-          <a:ln/>
-        </p:spPr>
-        <p:txBody>
-          <a:bodyPr wrap="square" lIns="0" tIns="0" rIns="0" bIns="0" rtlCol="0" anchor="ctr"/>
-          <a:lstStyle/>
-          <a:p>
-            <a:pPr indent="0" marL="0">
-              <a:buNone/>
-            </a:pPr>
-            <a:r>
-              <a:rPr lang="en-US" sz="2100" b="1" dirty="0">
+          <p:cNvPr id="6" name="Shape 4"/>
+          <p:cNvSpPr/>
+          <p:nvPr/>
+        </p:nvSpPr>
+        <p:spPr>
+          <a:xfrm>
+            <a:off x="859536" y="2487168"/>
+            <a:ext cx="402336" cy="402336"/>
+          </a:xfrm>
+          <a:prstGeom prst="ellipse">
+            <a:avLst/>
+          </a:prstGeom>
+          <a:solidFill>
+            <a:srgbClr val="A87C1F"/>
+          </a:solidFill>
+          <a:ln w="12700">
+            <a:solidFill>
+              <a:srgbClr val="A87C1F"/>
+            </a:solidFill>
+            <a:prstDash val="solid"/>
+          </a:ln>
+        </p:spPr>
+      </p:sp>
+      <p:sp>
+        <p:nvSpPr>
+          <p:cNvPr id="7" name="Text 5"/>
+          <p:cNvSpPr txBox="1"/>
+          <p:nvPr/>
+        </p:nvSpPr>
+        <p:spPr>
+          <a:xfrm>
+            <a:off x="859536" y="2487168"/>
+            <a:ext cx="402336" cy="402336"/>
+          </a:xfrm>
+          <a:prstGeom prst="rect">
+            <a:avLst/>
+          </a:prstGeom>
+          <a:noFill/>
+          <a:ln/>
+        </p:spPr>
+        <p:txBody>
+          <a:bodyPr wrap="square" lIns="0" tIns="0" rIns="0" bIns="0" rtlCol="0" anchor="ctr"/>
+          <a:lstStyle/>
+          <a:p>
+            <a:pPr algn="ctr" indent="0" marL="0">
+              <a:buNone/>
+            </a:pPr>
+            <a:r>
+              <a:rPr lang="en-US" sz="1200" b="1" dirty="0">
+                <a:solidFill>
+                  <a:srgbClr val="FFFFFF"/>
+                </a:solidFill>
+                <a:latin typeface="Calibri" pitchFamily="34" charset="0"/>
+                <a:ea typeface="Calibri" pitchFamily="34" charset="-122"/>
+                <a:cs typeface="Calibri" pitchFamily="34" charset="-120"/>
+              </a:rPr>
+              <a:t>1</a:t>
+            </a:r>
+            <a:endParaRPr lang="en-US" sz="1200" dirty="0"/>
+          </a:p>
+        </p:txBody>
+      </p:sp>
+      <p:sp>
+        <p:nvSpPr>
+          <p:cNvPr id="8" name="Text 6"/>
+          <p:cNvSpPr txBox="1"/>
+          <p:nvPr/>
+        </p:nvSpPr>
+        <p:spPr>
+          <a:xfrm>
+            <a:off x="859536" y="2999232"/>
+            <a:ext cx="2231136" cy="512064"/>
+          </a:xfrm>
+          <a:prstGeom prst="rect">
+            <a:avLst/>
+          </a:prstGeom>
+          <a:noFill/>
+          <a:ln/>
+        </p:spPr>
+        <p:txBody>
+          <a:bodyPr wrap="square" lIns="0" tIns="0" rIns="0" bIns="0" rtlCol="0" anchor="ctr"/>
+          <a:lstStyle/>
+          <a:p>
+            <a:pPr indent="0" marL="0">
+              <a:lnSpc>
+                <a:spcPts val="1600"/>
+              </a:lnSpc>
+              <a:buNone/>
+            </a:pPr>
+            <a:r>
+              <a:rPr lang="en-US" sz="1300" b="1" dirty="0">
                 <a:solidFill>
                   <a:srgbClr val="0B1220"/>
                 </a:solidFill>
-                <a:latin typeface="Cambria" pitchFamily="34" charset="0"/>
-                <a:ea typeface="Cambria" pitchFamily="34" charset="-122"/>
-                <a:cs typeface="Cambria" pitchFamily="34" charset="-120"/>
-              </a:rPr>
-              <a:t>The owner</a:t>
-            </a:r>
-            <a:endParaRPr lang="en-US" sz="2100" dirty="0"/>
-          </a:p>
-        </p:txBody>
-      </p:sp>
-      <p:sp>
-        <p:nvSpPr>
-          <p:cNvPr id="7" name="Text 5"/>
-          <p:cNvSpPr txBox="1"/>
-          <p:nvPr/>
-        </p:nvSpPr>
-        <p:spPr>
-          <a:xfrm>
-            <a:off x="1005840" y="2779776"/>
-            <a:ext cx="3657600" cy="256032"/>
-          </a:xfrm>
-          <a:prstGeom prst="rect">
-            <a:avLst/>
-          </a:prstGeom>
-          <a:noFill/>
-          <a:ln/>
-        </p:spPr>
-        <p:txBody>
-          <a:bodyPr wrap="square" lIns="0" tIns="0" rIns="0" bIns="0" rtlCol="0" anchor="ctr"/>
-          <a:lstStyle/>
-          <a:p>
-            <a:pPr indent="0" marL="0">
-              <a:buNone/>
-            </a:pPr>
-            <a:r>
-              <a:rPr lang="en-US" sz="1100" b="1" spc="150" kern="0" dirty="0">
-                <a:solidFill>
-                  <a:srgbClr val="A87C1F"/>
-                </a:solidFill>
-                <a:latin typeface="Calibri" pitchFamily="34" charset="0"/>
-                <a:ea typeface="Calibri" pitchFamily="34" charset="-122"/>
-                <a:cs typeface="Calibri" pitchFamily="34" charset="-120"/>
-              </a:rPr>
-              <a:t>funds it</a:t>
-            </a:r>
-            <a:endParaRPr lang="en-US" sz="1100" dirty="0"/>
-          </a:p>
-        </p:txBody>
-      </p:sp>
-      <p:sp>
-        <p:nvSpPr>
-          <p:cNvPr id="8" name="Text 6"/>
-          <p:cNvSpPr txBox="1"/>
-          <p:nvPr/>
-        </p:nvSpPr>
-        <p:spPr>
-          <a:xfrm>
-            <a:off x="1005840" y="3154680"/>
-            <a:ext cx="4709160" cy="2148840"/>
-          </a:xfrm>
-          <a:prstGeom prst="rect">
-            <a:avLst/>
-          </a:prstGeom>
-          <a:noFill/>
-          <a:ln/>
-        </p:spPr>
-        <p:txBody>
-          <a:bodyPr wrap="square" lIns="0" tIns="0" rIns="0" bIns="0" rtlCol="0" anchor="t"/>
-          <a:lstStyle/>
-          <a:p>
-            <a:pPr marL="342900" indent="-342900">
-              <a:spcAft>
-                <a:spcPts val="700"/>
-              </a:spcAft>
-              <a:buSzPct val="100000"/>
-              <a:buChar char="•"/>
-            </a:pPr>
-            <a:r>
-              <a:rPr lang="en-US" sz="1150" dirty="0">
+                <a:latin typeface="Calibri" pitchFamily="34" charset="0"/>
+                <a:ea typeface="Calibri" pitchFamily="34" charset="-122"/>
+                <a:cs typeface="Calibri" pitchFamily="34" charset="-120"/>
+              </a:rPr>
+              <a:t>Your PBX, unchanged</a:t>
+            </a:r>
+            <a:endParaRPr lang="en-US" sz="1300" dirty="0"/>
+          </a:p>
+        </p:txBody>
+      </p:sp>
+      <p:sp>
+        <p:nvSpPr>
+          <p:cNvPr id="9" name="Text 7"/>
+          <p:cNvSpPr txBox="1"/>
+          <p:nvPr/>
+        </p:nvSpPr>
+        <p:spPr>
+          <a:xfrm>
+            <a:off x="859536" y="3529584"/>
+            <a:ext cx="2231136" cy="786384"/>
+          </a:xfrm>
+          <a:prstGeom prst="rect">
+            <a:avLst/>
+          </a:prstGeom>
+          <a:noFill/>
+          <a:ln/>
+        </p:spPr>
+        <p:txBody>
+          <a:bodyPr wrap="square" lIns="0" tIns="0" rIns="0" bIns="0" rtlCol="0" anchor="ctr"/>
+          <a:lstStyle/>
+          <a:p>
+            <a:pPr indent="0" marL="0">
+              <a:lnSpc>
+                <a:spcPts val="1400"/>
+              </a:lnSpc>
+              <a:buNone/>
+            </a:pPr>
+            <a:r>
+              <a:rPr lang="en-US" sz="1050" dirty="0">
                 <a:solidFill>
                   <a:srgbClr val="5A6880"/>
                 </a:solidFill>
@@ -13911,110 +14027,26 @@
                 <a:ea typeface="Calibri" pitchFamily="34" charset="-122"/>
                 <a:cs typeface="Calibri" pitchFamily="34" charset="-120"/>
               </a:rPr>
-              <a:t>Ancillary revenue per occupied room, from a screen that previously earned nothing</a:t>
-            </a:r>
-            <a:endParaRPr lang="en-US" sz="1150" dirty="0"/>
-          </a:p>
-          <a:p>
-            <a:pPr marL="342900" indent="-342900">
-              <a:spcAft>
-                <a:spcPts val="700"/>
-              </a:spcAft>
-              <a:buSzPct val="100000"/>
-              <a:buChar char="•"/>
-            </a:pPr>
-            <a:r>
-              <a:rPr lang="en-US" sz="1150" dirty="0">
-                <a:solidFill>
-                  <a:srgbClr val="5A6880"/>
-                </a:solidFill>
-                <a:latin typeface="Calibri" pitchFamily="34" charset="0"/>
-                <a:ea typeface="Calibri" pitchFamily="34" charset="-122"/>
-                <a:cs typeface="Calibri" pitchFamily="34" charset="-120"/>
-              </a:rPr>
-              <a:t>Local vendor contracts consolidated into one line</a:t>
-            </a:r>
-            <a:endParaRPr lang="en-US" sz="1150" dirty="0"/>
-          </a:p>
-          <a:p>
-            <a:pPr marL="342900" indent="-342900">
-              <a:spcAft>
-                <a:spcPts val="700"/>
-              </a:spcAft>
-              <a:buSzPct val="100000"/>
-              <a:buChar char="•"/>
-            </a:pPr>
-            <a:r>
-              <a:rPr lang="en-US" sz="1150" dirty="0">
-                <a:solidFill>
-                  <a:srgbClr val="5A6880"/>
-                </a:solidFill>
-                <a:latin typeface="Calibri" pitchFamily="34" charset="0"/>
-                <a:ea typeface="Calibri" pitchFamily="34" charset="-122"/>
-                <a:cs typeface="Calibri" pitchFamily="34" charset="-120"/>
-              </a:rPr>
-              <a:t>Set-top hardware removed from the refresh plan</a:t>
-            </a:r>
-            <a:endParaRPr lang="en-US" sz="1150" dirty="0"/>
-          </a:p>
-          <a:p>
-            <a:pPr marL="342900" indent="-342900">
-              <a:spcAft>
-                <a:spcPts val="700"/>
-              </a:spcAft>
-              <a:buSzPct val="100000"/>
-              <a:buChar char="•"/>
-            </a:pPr>
-            <a:r>
-              <a:rPr lang="en-US" sz="1150" dirty="0">
-                <a:solidFill>
-                  <a:srgbClr val="5A6880"/>
-                </a:solidFill>
-                <a:latin typeface="Calibri" pitchFamily="34" charset="0"/>
-                <a:ea typeface="Calibri" pitchFamily="34" charset="-122"/>
-                <a:cs typeface="Calibri" pitchFamily="34" charset="-120"/>
-              </a:rPr>
-              <a:t>Labour hours returned at the desk, the outlets and night audit</a:t>
-            </a:r>
-            <a:endParaRPr lang="en-US" sz="1150" dirty="0"/>
-          </a:p>
-          <a:p>
-            <a:pPr marL="342900" indent="-342900">
-              <a:spcAft>
-                <a:spcPts val="700"/>
-              </a:spcAft>
-              <a:buSzPct val="100000"/>
-              <a:buChar char="•"/>
-            </a:pPr>
-            <a:r>
-              <a:rPr lang="en-US" sz="1150" dirty="0">
-                <a:solidFill>
-                  <a:srgbClr val="5A6880"/>
-                </a:solidFill>
-                <a:latin typeface="Calibri" pitchFamily="34" charset="0"/>
-                <a:ea typeface="Calibri" pitchFamily="34" charset="-122"/>
-                <a:cs typeface="Calibri" pitchFamily="34" charset="-120"/>
-              </a:rPr>
-              <a:t>An asset that improves on the schedule the televisions are replaced on anyway</a:t>
-            </a:r>
-            <a:endParaRPr lang="en-US" sz="1150" dirty="0"/>
-          </a:p>
-        </p:txBody>
-      </p:sp>
-      <p:sp>
-        <p:nvSpPr>
-          <p:cNvPr id="9" name="Shape 7"/>
+              <a:t>The handset registers to your existing SIP platform. No forklift, no new call path, no carrier contract to renegotiate.</a:t>
+            </a:r>
+            <a:endParaRPr lang="en-US" sz="1050" dirty="0"/>
+          </a:p>
+        </p:txBody>
+      </p:sp>
+      <p:sp>
+        <p:nvSpPr>
+          <p:cNvPr id="10" name="Shape 8"/>
           <p:cNvSpPr/>
           <p:nvPr/>
         </p:nvSpPr>
         <p:spPr>
           <a:xfrm>
-            <a:off x="6483096" y="2212848"/>
-            <a:ext cx="5440680" cy="3200400"/>
+            <a:off x="3593592" y="2286000"/>
+            <a:ext cx="2670048" cy="2103120"/>
           </a:xfrm>
           <a:prstGeom prst="roundRect">
             <a:avLst>
-              <a:gd name="adj" fmla="val 2571"/>
+              <a:gd name="adj" fmla="val 3913"/>
             </a:avLst>
           </a:prstGeom>
           <a:solidFill>
@@ -14037,77 +14069,626 @@
       </p:sp>
       <p:sp>
         <p:nvSpPr>
-          <p:cNvPr id="10" name="Text 8"/>
-          <p:cNvSpPr txBox="1"/>
-          <p:nvPr/>
-        </p:nvSpPr>
-        <p:spPr>
-          <a:xfrm>
-            <a:off x="6848856" y="2432304"/>
-            <a:ext cx="2743200" cy="329184"/>
-          </a:xfrm>
-          <a:prstGeom prst="rect">
-            <a:avLst/>
-          </a:prstGeom>
-          <a:noFill/>
-          <a:ln/>
-        </p:spPr>
-        <p:txBody>
-          <a:bodyPr wrap="square" lIns="0" tIns="0" rIns="0" bIns="0" rtlCol="0" anchor="ctr"/>
-          <a:lstStyle/>
-          <a:p>
-            <a:pPr indent="0" marL="0">
-              <a:buNone/>
-            </a:pPr>
-            <a:r>
-              <a:rPr lang="en-US" sz="2100" b="1" dirty="0">
+          <p:cNvPr id="11" name="Shape 9"/>
+          <p:cNvSpPr/>
+          <p:nvPr/>
+        </p:nvSpPr>
+        <p:spPr>
+          <a:xfrm>
+            <a:off x="3813048" y="2487168"/>
+            <a:ext cx="402336" cy="402336"/>
+          </a:xfrm>
+          <a:prstGeom prst="ellipse">
+            <a:avLst/>
+          </a:prstGeom>
+          <a:solidFill>
+            <a:srgbClr val="A87C1F"/>
+          </a:solidFill>
+          <a:ln w="12700">
+            <a:solidFill>
+              <a:srgbClr val="A87C1F"/>
+            </a:solidFill>
+            <a:prstDash val="solid"/>
+          </a:ln>
+        </p:spPr>
+      </p:sp>
+      <p:sp>
+        <p:nvSpPr>
+          <p:cNvPr id="12" name="Text 10"/>
+          <p:cNvSpPr txBox="1"/>
+          <p:nvPr/>
+        </p:nvSpPr>
+        <p:spPr>
+          <a:xfrm>
+            <a:off x="3813048" y="2487168"/>
+            <a:ext cx="402336" cy="402336"/>
+          </a:xfrm>
+          <a:prstGeom prst="rect">
+            <a:avLst/>
+          </a:prstGeom>
+          <a:noFill/>
+          <a:ln/>
+        </p:spPr>
+        <p:txBody>
+          <a:bodyPr wrap="square" lIns="0" tIns="0" rIns="0" bIns="0" rtlCol="0" anchor="ctr"/>
+          <a:lstStyle/>
+          <a:p>
+            <a:pPr algn="ctr" indent="0" marL="0">
+              <a:buNone/>
+            </a:pPr>
+            <a:r>
+              <a:rPr lang="en-US" sz="1200" b="1" dirty="0">
+                <a:solidFill>
+                  <a:srgbClr val="FFFFFF"/>
+                </a:solidFill>
+                <a:latin typeface="Calibri" pitchFamily="34" charset="0"/>
+                <a:ea typeface="Calibri" pitchFamily="34" charset="-122"/>
+                <a:cs typeface="Calibri" pitchFamily="34" charset="-120"/>
+              </a:rPr>
+              <a:t>2</a:t>
+            </a:r>
+            <a:endParaRPr lang="en-US" sz="1200" dirty="0"/>
+          </a:p>
+        </p:txBody>
+      </p:sp>
+      <p:sp>
+        <p:nvSpPr>
+          <p:cNvPr id="13" name="Text 11"/>
+          <p:cNvSpPr txBox="1"/>
+          <p:nvPr/>
+        </p:nvSpPr>
+        <p:spPr>
+          <a:xfrm>
+            <a:off x="3813048" y="2999232"/>
+            <a:ext cx="2231136" cy="512064"/>
+          </a:xfrm>
+          <a:prstGeom prst="rect">
+            <a:avLst/>
+          </a:prstGeom>
+          <a:noFill/>
+          <a:ln/>
+        </p:spPr>
+        <p:txBody>
+          <a:bodyPr wrap="square" lIns="0" tIns="0" rIns="0" bIns="0" rtlCol="0" anchor="ctr"/>
+          <a:lstStyle/>
+          <a:p>
+            <a:pPr indent="0" marL="0">
+              <a:lnSpc>
+                <a:spcPts val="1600"/>
+              </a:lnSpc>
+              <a:buNone/>
+            </a:pPr>
+            <a:r>
+              <a:rPr lang="en-US" sz="1300" b="1" dirty="0">
                 <a:solidFill>
                   <a:srgbClr val="0B1220"/>
                 </a:solidFill>
-                <a:latin typeface="Cambria" pitchFamily="34" charset="0"/>
-                <a:ea typeface="Cambria" pitchFamily="34" charset="-122"/>
-                <a:cs typeface="Cambria" pitchFamily="34" charset="-120"/>
-              </a:rPr>
-              <a:t>The operator</a:t>
-            </a:r>
-            <a:endParaRPr lang="en-US" sz="2100" dirty="0"/>
-          </a:p>
-        </p:txBody>
-      </p:sp>
-      <p:sp>
-        <p:nvSpPr>
-          <p:cNvPr id="11" name="Text 9"/>
-          <p:cNvSpPr txBox="1"/>
-          <p:nvPr/>
-        </p:nvSpPr>
-        <p:spPr>
-          <a:xfrm>
-            <a:off x="6848856" y="2779776"/>
-            <a:ext cx="3657600" cy="256032"/>
-          </a:xfrm>
-          <a:prstGeom prst="rect">
-            <a:avLst/>
-          </a:prstGeom>
-          <a:noFill/>
-          <a:ln/>
-        </p:spPr>
-        <p:txBody>
-          <a:bodyPr wrap="square" lIns="0" tIns="0" rIns="0" bIns="0" rtlCol="0" anchor="ctr"/>
-          <a:lstStyle/>
-          <a:p>
-            <a:pPr indent="0" marL="0">
-              <a:buNone/>
-            </a:pPr>
-            <a:r>
-              <a:rPr lang="en-US" sz="1100" b="1" spc="150" kern="0" dirty="0">
-                <a:solidFill>
-                  <a:srgbClr val="A87C1F"/>
-                </a:solidFill>
-                <a:latin typeface="Calibri" pitchFamily="34" charset="0"/>
-                <a:ea typeface="Calibri" pitchFamily="34" charset="-122"/>
-                <a:cs typeface="Calibri" pitchFamily="34" charset="-120"/>
-              </a:rPr>
-              <a:t>sets the standard</a:t>
+                <a:latin typeface="Calibri" pitchFamily="34" charset="0"/>
+                <a:ea typeface="Calibri" pitchFamily="34" charset="-122"/>
+                <a:cs typeface="Calibri" pitchFamily="34" charset="-120"/>
+              </a:rPr>
+              <a:t>It knows who is in the room</a:t>
+            </a:r>
+            <a:endParaRPr lang="en-US" sz="1300" dirty="0"/>
+          </a:p>
+        </p:txBody>
+      </p:sp>
+      <p:sp>
+        <p:nvSpPr>
+          <p:cNvPr id="14" name="Text 12"/>
+          <p:cNvSpPr txBox="1"/>
+          <p:nvPr/>
+        </p:nvSpPr>
+        <p:spPr>
+          <a:xfrm>
+            <a:off x="3813048" y="3529584"/>
+            <a:ext cx="2231136" cy="786384"/>
+          </a:xfrm>
+          <a:prstGeom prst="rect">
+            <a:avLst/>
+          </a:prstGeom>
+          <a:noFill/>
+          <a:ln/>
+        </p:spPr>
+        <p:txBody>
+          <a:bodyPr wrap="square" lIns="0" tIns="0" rIns="0" bIns="0" rtlCol="0" anchor="ctr"/>
+          <a:lstStyle/>
+          <a:p>
+            <a:pPr indent="0" marL="0">
+              <a:lnSpc>
+                <a:spcPts val="1400"/>
+              </a:lnSpc>
+              <a:buNone/>
+            </a:pPr>
+            <a:r>
+              <a:rPr lang="en-US" sz="1050" dirty="0">
+                <a:solidFill>
+                  <a:srgbClr val="5A6880"/>
+                </a:solidFill>
+                <a:latin typeface="Calibri" pitchFamily="34" charset="0"/>
+                <a:ea typeface="Calibri" pitchFamily="34" charset="-122"/>
+                <a:cs typeface="Calibri" pitchFamily="34" charset="-120"/>
+              </a:rPr>
+              <a:t>The display carries the guest's name and language. Dial 0 and the desk sees the profile before the call is answered.</a:t>
+            </a:r>
+            <a:endParaRPr lang="en-US" sz="1050" dirty="0"/>
+          </a:p>
+        </p:txBody>
+      </p:sp>
+      <p:sp>
+        <p:nvSpPr>
+          <p:cNvPr id="15" name="Shape 13"/>
+          <p:cNvSpPr/>
+          <p:nvPr/>
+        </p:nvSpPr>
+        <p:spPr>
+          <a:xfrm>
+            <a:off x="6547104" y="2286000"/>
+            <a:ext cx="2670048" cy="2103120"/>
+          </a:xfrm>
+          <a:prstGeom prst="roundRect">
+            <a:avLst>
+              <a:gd name="adj" fmla="val 3913"/>
+            </a:avLst>
+          </a:prstGeom>
+          <a:solidFill>
+            <a:srgbClr val="F5F7FA"/>
+          </a:solidFill>
+          <a:ln w="12700">
+            <a:solidFill>
+              <a:srgbClr val="DFE5EE"/>
+            </a:solidFill>
+            <a:prstDash val="solid"/>
+          </a:ln>
+          <a:effectLst>
+            <a:outerShdw sx="100000" sy="100000" kx="0" ky="0" algn="bl" rotWithShape="0" blurRad="127000" dist="25400" dir="5400000">
+              <a:srgbClr val="0B1220">
+                <a:alpha val="10000"/>
+              </a:srgbClr>
+            </a:outerShdw>
+          </a:effectLst>
+        </p:spPr>
+      </p:sp>
+      <p:sp>
+        <p:nvSpPr>
+          <p:cNvPr id="16" name="Shape 14"/>
+          <p:cNvSpPr/>
+          <p:nvPr/>
+        </p:nvSpPr>
+        <p:spPr>
+          <a:xfrm>
+            <a:off x="6766560" y="2487168"/>
+            <a:ext cx="402336" cy="402336"/>
+          </a:xfrm>
+          <a:prstGeom prst="ellipse">
+            <a:avLst/>
+          </a:prstGeom>
+          <a:solidFill>
+            <a:srgbClr val="A87C1F"/>
+          </a:solidFill>
+          <a:ln w="12700">
+            <a:solidFill>
+              <a:srgbClr val="A87C1F"/>
+            </a:solidFill>
+            <a:prstDash val="solid"/>
+          </a:ln>
+        </p:spPr>
+      </p:sp>
+      <p:sp>
+        <p:nvSpPr>
+          <p:cNvPr id="17" name="Text 15"/>
+          <p:cNvSpPr txBox="1"/>
+          <p:nvPr/>
+        </p:nvSpPr>
+        <p:spPr>
+          <a:xfrm>
+            <a:off x="6766560" y="2487168"/>
+            <a:ext cx="402336" cy="402336"/>
+          </a:xfrm>
+          <a:prstGeom prst="rect">
+            <a:avLst/>
+          </a:prstGeom>
+          <a:noFill/>
+          <a:ln/>
+        </p:spPr>
+        <p:txBody>
+          <a:bodyPr wrap="square" lIns="0" tIns="0" rIns="0" bIns="0" rtlCol="0" anchor="ctr"/>
+          <a:lstStyle/>
+          <a:p>
+            <a:pPr algn="ctr" indent="0" marL="0">
+              <a:buNone/>
+            </a:pPr>
+            <a:r>
+              <a:rPr lang="en-US" sz="1200" b="1" dirty="0">
+                <a:solidFill>
+                  <a:srgbClr val="FFFFFF"/>
+                </a:solidFill>
+                <a:latin typeface="Calibri" pitchFamily="34" charset="0"/>
+                <a:ea typeface="Calibri" pitchFamily="34" charset="-122"/>
+                <a:cs typeface="Calibri" pitchFamily="34" charset="-120"/>
+              </a:rPr>
+              <a:t>3</a:t>
+            </a:r>
+            <a:endParaRPr lang="en-US" sz="1200" dirty="0"/>
+          </a:p>
+        </p:txBody>
+      </p:sp>
+      <p:sp>
+        <p:nvSpPr>
+          <p:cNvPr id="18" name="Text 16"/>
+          <p:cNvSpPr txBox="1"/>
+          <p:nvPr/>
+        </p:nvSpPr>
+        <p:spPr>
+          <a:xfrm>
+            <a:off x="6766560" y="2999232"/>
+            <a:ext cx="2231136" cy="512064"/>
+          </a:xfrm>
+          <a:prstGeom prst="rect">
+            <a:avLst/>
+          </a:prstGeom>
+          <a:noFill/>
+          <a:ln/>
+        </p:spPr>
+        <p:txBody>
+          <a:bodyPr wrap="square" lIns="0" tIns="0" rIns="0" bIns="0" rtlCol="0" anchor="ctr"/>
+          <a:lstStyle/>
+          <a:p>
+            <a:pPr indent="0" marL="0">
+              <a:lnSpc>
+                <a:spcPts val="1600"/>
+              </a:lnSpc>
+              <a:buNone/>
+            </a:pPr>
+            <a:r>
+              <a:rPr lang="en-US" sz="1300" b="1" dirty="0">
+                <a:solidFill>
+                  <a:srgbClr val="0B1220"/>
+                </a:solidFill>
+                <a:latin typeface="Calibri" pitchFamily="34" charset="0"/>
+                <a:ea typeface="Calibri" pitchFamily="34" charset="-122"/>
+                <a:cs typeface="Calibri" pitchFamily="34" charset="-120"/>
+              </a:rPr>
+              <a:t>Wake-up calls that work</a:t>
+            </a:r>
+            <a:endParaRPr lang="en-US" sz="1300" dirty="0"/>
+          </a:p>
+        </p:txBody>
+      </p:sp>
+      <p:sp>
+        <p:nvSpPr>
+          <p:cNvPr id="19" name="Text 17"/>
+          <p:cNvSpPr txBox="1"/>
+          <p:nvPr/>
+        </p:nvSpPr>
+        <p:spPr>
+          <a:xfrm>
+            <a:off x="6766560" y="3529584"/>
+            <a:ext cx="2231136" cy="786384"/>
+          </a:xfrm>
+          <a:prstGeom prst="rect">
+            <a:avLst/>
+          </a:prstGeom>
+          <a:noFill/>
+          <a:ln/>
+        </p:spPr>
+        <p:txBody>
+          <a:bodyPr wrap="square" lIns="0" tIns="0" rIns="0" bIns="0" rtlCol="0" anchor="ctr"/>
+          <a:lstStyle/>
+          <a:p>
+            <a:pPr indent="0" marL="0">
+              <a:lnSpc>
+                <a:spcPts val="1400"/>
+              </a:lnSpc>
+              <a:buNone/>
+            </a:pPr>
+            <a:r>
+              <a:rPr lang="en-US" sz="1050" dirty="0">
+                <a:solidFill>
+                  <a:srgbClr val="5A6880"/>
+                </a:solidFill>
+                <a:latin typeface="Calibri" pitchFamily="34" charset="0"/>
+                <a:ea typeface="Calibri" pitchFamily="34" charset="-122"/>
+                <a:cs typeface="Calibri" pitchFamily="34" charset="-120"/>
+              </a:rPr>
+              <a:t>Set from the handset, the television or the desk — one schedule, escalating to the desk if the guest does not answer.</a:t>
+            </a:r>
+            <a:endParaRPr lang="en-US" sz="1050" dirty="0"/>
+          </a:p>
+        </p:txBody>
+      </p:sp>
+      <p:sp>
+        <p:nvSpPr>
+          <p:cNvPr id="20" name="Shape 18"/>
+          <p:cNvSpPr/>
+          <p:nvPr/>
+        </p:nvSpPr>
+        <p:spPr>
+          <a:xfrm>
+            <a:off x="9500616" y="2286000"/>
+            <a:ext cx="2670048" cy="2103120"/>
+          </a:xfrm>
+          <a:prstGeom prst="roundRect">
+            <a:avLst>
+              <a:gd name="adj" fmla="val 3913"/>
+            </a:avLst>
+          </a:prstGeom>
+          <a:solidFill>
+            <a:srgbClr val="F5F7FA"/>
+          </a:solidFill>
+          <a:ln w="12700">
+            <a:solidFill>
+              <a:srgbClr val="DFE5EE"/>
+            </a:solidFill>
+            <a:prstDash val="solid"/>
+          </a:ln>
+          <a:effectLst>
+            <a:outerShdw sx="100000" sy="100000" kx="0" ky="0" algn="bl" rotWithShape="0" blurRad="127000" dist="25400" dir="5400000">
+              <a:srgbClr val="0B1220">
+                <a:alpha val="10000"/>
+              </a:srgbClr>
+            </a:outerShdw>
+          </a:effectLst>
+        </p:spPr>
+      </p:sp>
+      <p:sp>
+        <p:nvSpPr>
+          <p:cNvPr id="21" name="Shape 19"/>
+          <p:cNvSpPr/>
+          <p:nvPr/>
+        </p:nvSpPr>
+        <p:spPr>
+          <a:xfrm>
+            <a:off x="9720072" y="2487168"/>
+            <a:ext cx="402336" cy="402336"/>
+          </a:xfrm>
+          <a:prstGeom prst="ellipse">
+            <a:avLst/>
+          </a:prstGeom>
+          <a:solidFill>
+            <a:srgbClr val="A87C1F"/>
+          </a:solidFill>
+          <a:ln w="12700">
+            <a:solidFill>
+              <a:srgbClr val="A87C1F"/>
+            </a:solidFill>
+            <a:prstDash val="solid"/>
+          </a:ln>
+        </p:spPr>
+      </p:sp>
+      <p:sp>
+        <p:nvSpPr>
+          <p:cNvPr id="22" name="Text 20"/>
+          <p:cNvSpPr txBox="1"/>
+          <p:nvPr/>
+        </p:nvSpPr>
+        <p:spPr>
+          <a:xfrm>
+            <a:off x="9720072" y="2487168"/>
+            <a:ext cx="402336" cy="402336"/>
+          </a:xfrm>
+          <a:prstGeom prst="rect">
+            <a:avLst/>
+          </a:prstGeom>
+          <a:noFill/>
+          <a:ln/>
+        </p:spPr>
+        <p:txBody>
+          <a:bodyPr wrap="square" lIns="0" tIns="0" rIns="0" bIns="0" rtlCol="0" anchor="ctr"/>
+          <a:lstStyle/>
+          <a:p>
+            <a:pPr algn="ctr" indent="0" marL="0">
+              <a:buNone/>
+            </a:pPr>
+            <a:r>
+              <a:rPr lang="en-US" sz="1200" b="1" dirty="0">
+                <a:solidFill>
+                  <a:srgbClr val="FFFFFF"/>
+                </a:solidFill>
+                <a:latin typeface="Calibri" pitchFamily="34" charset="0"/>
+                <a:ea typeface="Calibri" pitchFamily="34" charset="-122"/>
+                <a:cs typeface="Calibri" pitchFamily="34" charset="-120"/>
+              </a:rPr>
+              <a:t>4</a:t>
+            </a:r>
+            <a:endParaRPr lang="en-US" sz="1200" dirty="0"/>
+          </a:p>
+        </p:txBody>
+      </p:sp>
+      <p:sp>
+        <p:nvSpPr>
+          <p:cNvPr id="23" name="Text 21"/>
+          <p:cNvSpPr txBox="1"/>
+          <p:nvPr/>
+        </p:nvSpPr>
+        <p:spPr>
+          <a:xfrm>
+            <a:off x="9720072" y="2999232"/>
+            <a:ext cx="2231136" cy="512064"/>
+          </a:xfrm>
+          <a:prstGeom prst="rect">
+            <a:avLst/>
+          </a:prstGeom>
+          <a:noFill/>
+          <a:ln/>
+        </p:spPr>
+        <p:txBody>
+          <a:bodyPr wrap="square" lIns="0" tIns="0" rIns="0" bIns="0" rtlCol="0" anchor="ctr"/>
+          <a:lstStyle/>
+          <a:p>
+            <a:pPr indent="0" marL="0">
+              <a:lnSpc>
+                <a:spcPts val="1600"/>
+              </a:lnSpc>
+              <a:buNone/>
+            </a:pPr>
+            <a:r>
+              <a:rPr lang="en-US" sz="1300" b="1" dirty="0">
+                <a:solidFill>
+                  <a:srgbClr val="0B1220"/>
+                </a:solidFill>
+                <a:latin typeface="Calibri" pitchFamily="34" charset="0"/>
+                <a:ea typeface="Calibri" pitchFamily="34" charset="-122"/>
+                <a:cs typeface="Calibri" pitchFamily="34" charset="-120"/>
+              </a:rPr>
+              <a:t>Calls on the folio</a:t>
+            </a:r>
+            <a:endParaRPr lang="en-US" sz="1300" dirty="0"/>
+          </a:p>
+        </p:txBody>
+      </p:sp>
+      <p:sp>
+        <p:nvSpPr>
+          <p:cNvPr id="24" name="Text 22"/>
+          <p:cNvSpPr txBox="1"/>
+          <p:nvPr/>
+        </p:nvSpPr>
+        <p:spPr>
+          <a:xfrm>
+            <a:off x="9720072" y="3529584"/>
+            <a:ext cx="2231136" cy="786384"/>
+          </a:xfrm>
+          <a:prstGeom prst="rect">
+            <a:avLst/>
+          </a:prstGeom>
+          <a:noFill/>
+          <a:ln/>
+        </p:spPr>
+        <p:txBody>
+          <a:bodyPr wrap="square" lIns="0" tIns="0" rIns="0" bIns="0" rtlCol="0" anchor="ctr"/>
+          <a:lstStyle/>
+          <a:p>
+            <a:pPr indent="0" marL="0">
+              <a:lnSpc>
+                <a:spcPts val="1400"/>
+              </a:lnSpc>
+              <a:buNone/>
+            </a:pPr>
+            <a:r>
+              <a:rPr lang="en-US" sz="1050" dirty="0">
+                <a:solidFill>
+                  <a:srgbClr val="5A6880"/>
+                </a:solidFill>
+                <a:latin typeface="Calibri" pitchFamily="34" charset="0"/>
+                <a:ea typeface="Calibri" pitchFamily="34" charset="-122"/>
+                <a:cs typeface="Calibri" pitchFamily="34" charset="-120"/>
+              </a:rPr>
+              <a:t>Call records priced and posted to the same folio as dinner and the minibar, through the same interface as every other outlet.</a:t>
+            </a:r>
+            <a:endParaRPr lang="en-US" sz="1050" dirty="0"/>
+          </a:p>
+        </p:txBody>
+      </p:sp>
+      <p:sp>
+        <p:nvSpPr>
+          <p:cNvPr id="25" name="Shape 23"/>
+          <p:cNvSpPr/>
+          <p:nvPr/>
+        </p:nvSpPr>
+        <p:spPr>
+          <a:xfrm>
+            <a:off x="640080" y="4572000"/>
+            <a:ext cx="10911535" cy="1234440"/>
+          </a:xfrm>
+          <a:prstGeom prst="roundRect">
+            <a:avLst>
+              <a:gd name="adj" fmla="val 6667"/>
+            </a:avLst>
+          </a:prstGeom>
+          <a:solidFill>
+            <a:srgbClr val="0B1220"/>
+          </a:solidFill>
+          <a:ln w="12700">
+            <a:solidFill>
+              <a:srgbClr val="DFE5EE"/>
+            </a:solidFill>
+            <a:prstDash val="solid"/>
+          </a:ln>
+          <a:effectLst>
+            <a:outerShdw sx="100000" sy="100000" kx="0" ky="0" algn="bl" rotWithShape="0" blurRad="127000" dist="25400" dir="5400000">
+              <a:srgbClr val="0B1220">
+                <a:alpha val="10000"/>
+              </a:srgbClr>
+            </a:outerShdw>
+          </a:effectLst>
+        </p:spPr>
+      </p:sp>
+      <p:sp>
+        <p:nvSpPr>
+          <p:cNvPr id="26" name="Text 24"/>
+          <p:cNvSpPr txBox="1"/>
+          <p:nvPr/>
+        </p:nvSpPr>
+        <p:spPr>
+          <a:xfrm>
+            <a:off x="960120" y="4736592"/>
+            <a:ext cx="4754880" cy="256032"/>
+          </a:xfrm>
+          <a:prstGeom prst="rect">
+            <a:avLst/>
+          </a:prstGeom>
+          <a:noFill/>
+          <a:ln/>
+        </p:spPr>
+        <p:txBody>
+          <a:bodyPr wrap="square" lIns="0" tIns="0" rIns="0" bIns="0" rtlCol="0" anchor="ctr"/>
+          <a:lstStyle/>
+          <a:p>
+            <a:pPr indent="0" marL="0">
+              <a:buNone/>
+            </a:pPr>
+            <a:r>
+              <a:rPr lang="en-US" sz="1200" b="1" dirty="0">
+                <a:solidFill>
+                  <a:srgbClr val="D4A94A"/>
+                </a:solidFill>
+                <a:latin typeface="Calibri" pitchFamily="34" charset="0"/>
+                <a:ea typeface="Calibri" pitchFamily="34" charset="-122"/>
+                <a:cs typeface="Calibri" pitchFamily="34" charset="-120"/>
+              </a:rPr>
+              <a:t>Staff carry extensions, not radios</a:t>
+            </a:r>
+            <a:endParaRPr lang="en-US" sz="1200" dirty="0"/>
+          </a:p>
+        </p:txBody>
+      </p:sp>
+      <p:sp>
+        <p:nvSpPr>
+          <p:cNvPr id="27" name="Text 25"/>
+          <p:cNvSpPr txBox="1"/>
+          <p:nvPr/>
+        </p:nvSpPr>
+        <p:spPr>
+          <a:xfrm>
+            <a:off x="960120" y="5029200"/>
+            <a:ext cx="4846320" cy="640080"/>
+          </a:xfrm>
+          <a:prstGeom prst="rect">
+            <a:avLst/>
+          </a:prstGeom>
+          <a:noFill/>
+          <a:ln/>
+        </p:spPr>
+        <p:txBody>
+          <a:bodyPr wrap="square" lIns="0" tIns="0" rIns="0" bIns="0" rtlCol="0" anchor="ctr"/>
+          <a:lstStyle/>
+          <a:p>
+            <a:pPr indent="0" marL="0">
+              <a:lnSpc>
+                <a:spcPts val="1450"/>
+              </a:lnSpc>
+              <a:buNone/>
+            </a:pPr>
+            <a:r>
+              <a:rPr lang="en-US" sz="1100" dirty="0">
+                <a:solidFill>
+                  <a:srgbClr val="F4F1EA"/>
+                </a:solidFill>
+                <a:latin typeface="Calibri" pitchFamily="34" charset="0"/>
+                <a:ea typeface="Calibri" pitchFamily="34" charset="-122"/>
+                <a:cs typeface="Calibri" pitchFamily="34" charset="-120"/>
+              </a:rPr>
+              <a:t>The same PBX rings the Android handhelds housekeeping and maintenance already carry. One numbering plan, no separate DECT fleet to buy or maintain, and a service ticket that can call the guest back.</a:t>
             </a:r>
             <a:endParaRPr lang="en-US" sz="1100" dirty="0"/>
           </a:p>
@@ -14115,134 +14696,88 @@
       </p:sp>
       <p:sp>
         <p:nvSpPr>
-          <p:cNvPr id="12" name="Text 10"/>
-          <p:cNvSpPr txBox="1"/>
-          <p:nvPr/>
-        </p:nvSpPr>
-        <p:spPr>
-          <a:xfrm>
-            <a:off x="6848856" y="3154680"/>
-            <a:ext cx="4709160" cy="2148840"/>
-          </a:xfrm>
-          <a:prstGeom prst="rect">
-            <a:avLst/>
-          </a:prstGeom>
-          <a:noFill/>
-          <a:ln/>
-        </p:spPr>
-        <p:txBody>
-          <a:bodyPr wrap="square" lIns="0" tIns="0" rIns="0" bIns="0" rtlCol="0" anchor="t"/>
-          <a:lstStyle/>
-          <a:p>
-            <a:pPr marL="342900" indent="-342900">
-              <a:spcAft>
-                <a:spcPts val="700"/>
-              </a:spcAft>
-              <a:buSzPct val="100000"/>
-              <a:buChar char="•"/>
-            </a:pPr>
-            <a:r>
-              <a:rPr lang="en-US" sz="1150" dirty="0">
-                <a:solidFill>
-                  <a:srgbClr val="5A6880"/>
-                </a:solidFill>
-                <a:latin typeface="Calibri" pitchFamily="34" charset="0"/>
-                <a:ea typeface="Calibri" pitchFamily="34" charset="-122"/>
-                <a:cs typeface="Calibri" pitchFamily="34" charset="-120"/>
-              </a:rPr>
-              <a:t>One guest experience across every property, not one per procurement decision</a:t>
-            </a:r>
-            <a:endParaRPr lang="en-US" sz="1150" dirty="0"/>
-          </a:p>
-          <a:p>
-            <a:pPr marL="342900" indent="-342900">
-              <a:spcAft>
-                <a:spcPts val="700"/>
-              </a:spcAft>
-              <a:buSzPct val="100000"/>
-              <a:buChar char="•"/>
-            </a:pPr>
-            <a:r>
-              <a:rPr lang="en-US" sz="1150" dirty="0">
-                <a:solidFill>
-                  <a:srgbClr val="5A6880"/>
-                </a:solidFill>
-                <a:latin typeface="Calibri" pitchFamily="34" charset="0"/>
-                <a:ea typeface="Calibri" pitchFamily="34" charset="-122"/>
-                <a:cs typeface="Calibri" pitchFamily="34" charset="-120"/>
-              </a:rPr>
-              <a:t>Service SLAs measured continuously rather than by mystery shopper</a:t>
-            </a:r>
-            <a:endParaRPr lang="en-US" sz="1150" dirty="0"/>
-          </a:p>
-          <a:p>
-            <a:pPr marL="342900" indent="-342900">
-              <a:spcAft>
-                <a:spcPts val="700"/>
-              </a:spcAft>
-              <a:buSzPct val="100000"/>
-              <a:buChar char="•"/>
-            </a:pPr>
-            <a:r>
-              <a:rPr lang="en-US" sz="1150" dirty="0">
-                <a:solidFill>
-                  <a:srgbClr val="5A6880"/>
-                </a:solidFill>
-                <a:latin typeface="Calibri" pitchFamily="34" charset="0"/>
-                <a:ea typeface="Calibri" pitchFamily="34" charset="-122"/>
-                <a:cs typeface="Calibri" pitchFamily="34" charset="-120"/>
-              </a:rPr>
-              <a:t>Brand standard compliance evidenced from operational data</a:t>
-            </a:r>
-            <a:endParaRPr lang="en-US" sz="1150" dirty="0"/>
-          </a:p>
-          <a:p>
-            <a:pPr marL="342900" indent="-342900">
-              <a:spcAft>
-                <a:spcPts val="700"/>
-              </a:spcAft>
-              <a:buSzPct val="100000"/>
-              <a:buChar char="•"/>
-            </a:pPr>
-            <a:r>
-              <a:rPr lang="en-US" sz="1150" dirty="0">
-                <a:solidFill>
-                  <a:srgbClr val="5A6880"/>
-                </a:solidFill>
-                <a:latin typeface="Calibri" pitchFamily="34" charset="0"/>
-                <a:ea typeface="Calibri" pitchFamily="34" charset="-122"/>
-                <a:cs typeface="Calibri" pitchFamily="34" charset="-120"/>
-              </a:rPr>
-              <a:t>Guest preferences portable between properties in the estate</a:t>
-            </a:r>
-            <a:endParaRPr lang="en-US" sz="1150" dirty="0"/>
-          </a:p>
-          <a:p>
-            <a:pPr marL="342900" indent="-342900">
-              <a:spcAft>
-                <a:spcPts val="700"/>
-              </a:spcAft>
-              <a:buSzPct val="100000"/>
-              <a:buChar char="•"/>
-            </a:pPr>
-            <a:r>
-              <a:rPr lang="en-US" sz="1150" dirty="0">
-                <a:solidFill>
-                  <a:srgbClr val="5A6880"/>
-                </a:solidFill>
-                <a:latin typeface="Calibri" pitchFamily="34" charset="0"/>
-                <a:ea typeface="Calibri" pitchFamily="34" charset="-122"/>
-                <a:cs typeface="Calibri" pitchFamily="34" charset="-120"/>
-              </a:rPr>
-              <a:t>Document retention under one policy, enforced everywhere</a:t>
-            </a:r>
-            <a:endParaRPr lang="en-US" sz="1150" dirty="0"/>
-          </a:p>
-        </p:txBody>
-      </p:sp>
-      <p:sp>
-        <p:nvSpPr>
-          <p:cNvPr id="13" name="Text 11"/>
+          <p:cNvPr id="28" name="Text 26"/>
+          <p:cNvSpPr txBox="1"/>
+          <p:nvPr/>
+        </p:nvSpPr>
+        <p:spPr>
+          <a:xfrm>
+            <a:off x="6400800" y="4736592"/>
+            <a:ext cx="4754880" cy="256032"/>
+          </a:xfrm>
+          <a:prstGeom prst="rect">
+            <a:avLst/>
+          </a:prstGeom>
+          <a:noFill/>
+          <a:ln/>
+        </p:spPr>
+        <p:txBody>
+          <a:bodyPr wrap="square" lIns="0" tIns="0" rIns="0" bIns="0" rtlCol="0" anchor="ctr"/>
+          <a:lstStyle/>
+          <a:p>
+            <a:pPr indent="0" marL="0">
+              <a:buNone/>
+            </a:pPr>
+            <a:r>
+              <a:rPr lang="en-US" sz="1200" b="1" dirty="0">
+                <a:solidFill>
+                  <a:srgbClr val="D4A94A"/>
+                </a:solidFill>
+                <a:latin typeface="Calibri" pitchFamily="34" charset="0"/>
+                <a:ea typeface="Calibri" pitchFamily="34" charset="-122"/>
+                <a:cs typeface="Calibri" pitchFamily="34" charset="-120"/>
+              </a:rPr>
+              <a:t>Emergency calling, verified</a:t>
+            </a:r>
+            <a:endParaRPr lang="en-US" sz="1200" dirty="0"/>
+          </a:p>
+        </p:txBody>
+      </p:sp>
+      <p:sp>
+        <p:nvSpPr>
+          <p:cNvPr id="29" name="Text 27"/>
+          <p:cNvSpPr txBox="1"/>
+          <p:nvPr/>
+        </p:nvSpPr>
+        <p:spPr>
+          <a:xfrm>
+            <a:off x="6400800" y="5029200"/>
+            <a:ext cx="4846320" cy="640080"/>
+          </a:xfrm>
+          <a:prstGeom prst="rect">
+            <a:avLst/>
+          </a:prstGeom>
+          <a:noFill/>
+          <a:ln/>
+        </p:spPr>
+        <p:txBody>
+          <a:bodyPr wrap="square" lIns="0" tIns="0" rIns="0" bIns="0" rtlCol="0" anchor="ctr"/>
+          <a:lstStyle/>
+          <a:p>
+            <a:pPr indent="0" marL="0">
+              <a:lnSpc>
+                <a:spcPts val="1450"/>
+              </a:lnSpc>
+              <a:buNone/>
+            </a:pPr>
+            <a:r>
+              <a:rPr lang="en-US" sz="1100" dirty="0">
+                <a:solidFill>
+                  <a:srgbClr val="F4F1EA"/>
+                </a:solidFill>
+                <a:latin typeface="Calibri" pitchFamily="34" charset="0"/>
+                <a:ea typeface="Calibri" pitchFamily="34" charset="-122"/>
+                <a:cs typeface="Calibri" pitchFamily="34" charset="-120"/>
+              </a:rPr>
+              <a:t>Direct emergency dialling with no prefix, simultaneous notification to the front desk, and a dispatchable location for every room — checked at survey against the rules of each market you operate in.</a:t>
+            </a:r>
+            <a:endParaRPr lang="en-US" sz="1100" dirty="0"/>
+          </a:p>
+        </p:txBody>
+      </p:sp>
+      <p:sp>
+        <p:nvSpPr>
+          <p:cNvPr id="30" name="Text 28"/>
           <p:cNvSpPr txBox="1"/>
           <p:nvPr/>
         </p:nvSpPr>
@@ -14273,7 +14808,7 @@
                 <a:ea typeface="Calibri" pitchFamily="34" charset="-122"/>
                 <a:cs typeface="Calibri" pitchFamily="34" charset="-120"/>
               </a:rPr>
-              <a:t>For managed and franchised properties the split differs — we scope who signs, who pays and who is served, per agreement type.</a:t>
+              <a:t>Analogue handsets in older rooms bridge to the same PBX through an adapter — a room does not have to be rewired to join the platform.</a:t>
             </a:r>
             <a:endParaRPr lang="en-US" sz="900" dirty="0"/>
           </a:p>
@@ -14344,7 +14879,7 @@
                 <a:ea typeface="Calibri" pitchFamily="34" charset="-122"/>
                 <a:cs typeface="Calibri" pitchFamily="34" charset="-120"/>
               </a:rPr>
-              <a:t>THE COMMERCIAL CASE</a:t>
+              <a:t>WHO GETS WHAT</a:t>
             </a:r>
             <a:endParaRPr lang="en-US" sz="1100" dirty="0"/>
           </a:p>
@@ -14383,7 +14918,7 @@
                 <a:ea typeface="Cambria" pitchFamily="34" charset="-122"/>
                 <a:cs typeface="Cambria" pitchFamily="34" charset="-120"/>
               </a:rPr>
-              <a:t>Where the platform pays for itself</a:t>
+              <a:t>Owner and operator want different things</a:t>
             </a:r>
             <a:endParaRPr lang="en-US" sz="3300" dirty="0"/>
           </a:p>
@@ -14397,8 +14932,8 @@
         </p:nvSpPr>
         <p:spPr>
           <a:xfrm>
-            <a:off x="640080" y="1554480"/>
-            <a:ext cx="9875520" cy="548640"/>
+            <a:off x="640080" y="1572768"/>
+            <a:ext cx="9601200" cy="411480"/>
           </a:xfrm>
           <a:prstGeom prst="rect">
             <a:avLst/>
@@ -14412,12 +14947,12 @@
           <a:p>
             <a:pPr indent="0" marL="0">
               <a:lnSpc>
-                <a:spcPts val="1885"/>
+                <a:spcPts val="1958"/>
               </a:lnSpc>
               <a:buNone/>
             </a:pPr>
             <a:r>
-              <a:rPr lang="en-US" sz="1300" dirty="0">
+              <a:rPr lang="en-US" sz="1350" dirty="0">
                 <a:solidFill>
                   <a:srgbClr val="5A6880"/>
                 </a:solidFill>
@@ -14425,46 +14960,30 @@
                 <a:ea typeface="Calibri" pitchFamily="34" charset="-122"/>
                 <a:cs typeface="Calibri" pitchFamily="34" charset="-120"/>
               </a:rPr>
-              <a:t>Five effects, each measurable on a property P&amp;L and each multiplying by the number of properties. The chart is a worked model — we rebuild it on the group's real figures before proposal.</a:t>
-            </a:r>
-            <a:endParaRPr lang="en-US" sz="1300" dirty="0"/>
-          </a:p>
-        </p:txBody>
-      </p:sp>
-      <p:graphicFrame>
-        <p:nvGraphicFramePr>
-          <p:cNvPr id="5" name="Chart 0" descr=""/>
-          <p:cNvGraphicFramePr/>
-          <p:nvPr/>
-        </p:nvGraphicFramePr>
-        <p:xfrm>
-          <a:off x="640080" y="2267712"/>
-          <a:ext cx="6858000" cy="3108960"/>
-        </p:xfrm>
-        <a:graphic xmlns:a="http://schemas.openxmlformats.org/drawingml/2006/main">
-          <a:graphicData uri="http://schemas.openxmlformats.org/drawingml/2006/chart">
-            <c:chart xmlns:c="http://schemas.openxmlformats.org/drawingml/2006/chart" r:id="rId1"/>
-          </a:graphicData>
-        </a:graphic>
-      </p:graphicFrame>
-      <p:sp>
-        <p:nvSpPr>
-          <p:cNvPr id="6" name="Shape 3"/>
+              <a:t>In a branded estate the party funding the capital expenditure and the party setting the standard are rarely the same. The platform has to answer to both.</a:t>
+            </a:r>
+            <a:endParaRPr lang="en-US" sz="1350" dirty="0"/>
+          </a:p>
+        </p:txBody>
+      </p:sp>
+      <p:sp>
+        <p:nvSpPr>
+          <p:cNvPr id="5" name="Shape 3"/>
           <p:cNvSpPr/>
           <p:nvPr/>
         </p:nvSpPr>
         <p:spPr>
           <a:xfrm>
-            <a:off x="7863840" y="2267712"/>
-            <a:ext cx="3687775" cy="3108960"/>
+            <a:off x="640080" y="2212848"/>
+            <a:ext cx="5440680" cy="3200400"/>
           </a:xfrm>
           <a:prstGeom prst="roundRect">
             <a:avLst>
-              <a:gd name="adj" fmla="val 2647"/>
+              <a:gd name="adj" fmla="val 2571"/>
             </a:avLst>
           </a:prstGeom>
           <a:solidFill>
-            <a:srgbClr val="0B1220"/>
+            <a:srgbClr val="FBF6E9"/>
           </a:solidFill>
           <a:ln w="12700">
             <a:solidFill>
@@ -14483,146 +15002,451 @@
       </p:sp>
       <p:sp>
         <p:nvSpPr>
-          <p:cNvPr id="7" name="Text 4"/>
-          <p:cNvSpPr txBox="1"/>
-          <p:nvPr/>
-        </p:nvSpPr>
-        <p:spPr>
-          <a:xfrm>
-            <a:off x="8183880" y="2487168"/>
-            <a:ext cx="3291840" cy="274320"/>
-          </a:xfrm>
-          <a:prstGeom prst="rect">
-            <a:avLst/>
-          </a:prstGeom>
-          <a:noFill/>
-          <a:ln/>
-        </p:spPr>
-        <p:txBody>
-          <a:bodyPr wrap="square" lIns="0" tIns="0" rIns="0" bIns="0" rtlCol="0" anchor="ctr"/>
-          <a:lstStyle/>
-          <a:p>
-            <a:pPr indent="0" marL="0">
-              <a:buNone/>
-            </a:pPr>
-            <a:r>
-              <a:rPr lang="en-US" sz="1300" b="1" dirty="0">
-                <a:solidFill>
-                  <a:srgbClr val="D4A94A"/>
-                </a:solidFill>
-                <a:latin typeface="Calibri" pitchFamily="34" charset="0"/>
-                <a:ea typeface="Calibri" pitchFamily="34" charset="-122"/>
-                <a:cs typeface="Calibri" pitchFamily="34" charset="-120"/>
-              </a:rPr>
-              <a:t>How to read this</a:t>
-            </a:r>
-            <a:endParaRPr lang="en-US" sz="1300" dirty="0"/>
-          </a:p>
-        </p:txBody>
-      </p:sp>
-      <p:sp>
-        <p:nvSpPr>
-          <p:cNvPr id="8" name="Text 5"/>
-          <p:cNvSpPr txBox="1"/>
-          <p:nvPr/>
-        </p:nvSpPr>
-        <p:spPr>
-          <a:xfrm>
-            <a:off x="8183880" y="2834640"/>
-            <a:ext cx="3337560" cy="2377440"/>
-          </a:xfrm>
-          <a:prstGeom prst="rect">
-            <a:avLst/>
-          </a:prstGeom>
-          <a:noFill/>
-          <a:ln/>
-        </p:spPr>
-        <p:txBody>
-          <a:bodyPr wrap="square" lIns="0" tIns="0" rIns="0" bIns="0" rtlCol="0" anchor="ctr"/>
-          <a:lstStyle/>
-          <a:p>
-            <a:pPr indent="0" marL="0">
-              <a:lnSpc>
-                <a:spcPts val="1450"/>
-              </a:lnSpc>
-              <a:buNone/>
-            </a:pPr>
-            <a:r>
-              <a:rPr lang="en-US" sz="1050" dirty="0">
-                <a:solidFill>
-                  <a:srgbClr val="9AA9C2"/>
-                </a:solidFill>
-                <a:latin typeface="Calibri" pitchFamily="34" charset="0"/>
-                <a:ea typeface="Calibri" pitchFamily="34" charset="-122"/>
-                <a:cs typeface="Calibri" pitchFamily="34" charset="-120"/>
-              </a:rPr>
-              <a:t>Bars are relative, not absolute. Ancillary revenue is set to 1.0 and the rest scaled against it.</a:t>
-            </a:r>
-            <a:endParaRPr lang="en-US" sz="1050" dirty="0"/>
-          </a:p>
-          <a:p>
-            <a:pPr indent="0" marL="0">
-              <a:lnSpc>
-                <a:spcPts val="1450"/>
-              </a:lnSpc>
-              <a:buNone/>
-            </a:pPr>
-            <a:endParaRPr lang="en-US" sz="1050" dirty="0"/>
-          </a:p>
-          <a:p>
-            <a:pPr indent="0" marL="0">
-              <a:lnSpc>
-                <a:spcPts val="1450"/>
-              </a:lnSpc>
-              <a:buNone/>
-            </a:pPr>
-            <a:r>
-              <a:rPr lang="en-US" sz="1050" dirty="0">
-                <a:solidFill>
-                  <a:srgbClr val="9AA9C2"/>
-                </a:solidFill>
-                <a:latin typeface="Calibri" pitchFamily="34" charset="0"/>
-                <a:ea typeface="Calibri" pitchFamily="34" charset="-122"/>
-                <a:cs typeface="Calibri" pitchFamily="34" charset="-120"/>
-              </a:rPr>
-              <a:t>The middle three bars are cost, not revenue — contracts not renewed, hours not worked, hardware not bought. They are the least visible effects and usually the most certain.</a:t>
-            </a:r>
-            <a:endParaRPr lang="en-US" sz="1050" dirty="0"/>
-          </a:p>
-          <a:p>
-            <a:pPr indent="0" marL="0">
-              <a:lnSpc>
-                <a:spcPts val="1450"/>
-              </a:lnSpc>
-              <a:buNone/>
-            </a:pPr>
-            <a:endParaRPr lang="en-US" sz="1050" dirty="0"/>
-          </a:p>
-          <a:p>
-            <a:pPr indent="0" marL="0">
-              <a:lnSpc>
-                <a:spcPts val="1450"/>
-              </a:lnSpc>
-              <a:buNone/>
-            </a:pPr>
-            <a:r>
-              <a:rPr lang="en-US" sz="1050" dirty="0">
-                <a:solidFill>
-                  <a:srgbClr val="9AA9C2"/>
-                </a:solidFill>
-                <a:latin typeface="Calibri" pitchFamily="34" charset="0"/>
-                <a:ea typeface="Calibri" pitchFamily="34" charset="-122"/>
-                <a:cs typeface="Calibri" pitchFamily="34" charset="-120"/>
-              </a:rPr>
-              <a:t>At estate scale the multiplier matters more than the per-property figure: a modest, reliable effect across two hundred properties outweighs an optimistic one across ten.</a:t>
-            </a:r>
-            <a:endParaRPr lang="en-US" sz="1050" dirty="0"/>
-          </a:p>
-        </p:txBody>
-      </p:sp>
-      <p:sp>
-        <p:nvSpPr>
-          <p:cNvPr id="9" name="Text 6"/>
+          <p:cNvPr id="6" name="Text 4"/>
+          <p:cNvSpPr txBox="1"/>
+          <p:nvPr/>
+        </p:nvSpPr>
+        <p:spPr>
+          <a:xfrm>
+            <a:off x="1005840" y="2432304"/>
+            <a:ext cx="2743200" cy="329184"/>
+          </a:xfrm>
+          <a:prstGeom prst="rect">
+            <a:avLst/>
+          </a:prstGeom>
+          <a:noFill/>
+          <a:ln/>
+        </p:spPr>
+        <p:txBody>
+          <a:bodyPr wrap="square" lIns="0" tIns="0" rIns="0" bIns="0" rtlCol="0" anchor="ctr"/>
+          <a:lstStyle/>
+          <a:p>
+            <a:pPr indent="0" marL="0">
+              <a:buNone/>
+            </a:pPr>
+            <a:r>
+              <a:rPr lang="en-US" sz="2100" b="1" dirty="0">
+                <a:solidFill>
+                  <a:srgbClr val="0B1220"/>
+                </a:solidFill>
+                <a:latin typeface="Cambria" pitchFamily="34" charset="0"/>
+                <a:ea typeface="Cambria" pitchFamily="34" charset="-122"/>
+                <a:cs typeface="Cambria" pitchFamily="34" charset="-120"/>
+              </a:rPr>
+              <a:t>The owner</a:t>
+            </a:r>
+            <a:endParaRPr lang="en-US" sz="2100" dirty="0"/>
+          </a:p>
+        </p:txBody>
+      </p:sp>
+      <p:sp>
+        <p:nvSpPr>
+          <p:cNvPr id="7" name="Text 5"/>
+          <p:cNvSpPr txBox="1"/>
+          <p:nvPr/>
+        </p:nvSpPr>
+        <p:spPr>
+          <a:xfrm>
+            <a:off x="1005840" y="2779776"/>
+            <a:ext cx="3657600" cy="256032"/>
+          </a:xfrm>
+          <a:prstGeom prst="rect">
+            <a:avLst/>
+          </a:prstGeom>
+          <a:noFill/>
+          <a:ln/>
+        </p:spPr>
+        <p:txBody>
+          <a:bodyPr wrap="square" lIns="0" tIns="0" rIns="0" bIns="0" rtlCol="0" anchor="ctr"/>
+          <a:lstStyle/>
+          <a:p>
+            <a:pPr indent="0" marL="0">
+              <a:buNone/>
+            </a:pPr>
+            <a:r>
+              <a:rPr lang="en-US" sz="1100" b="1" spc="150" kern="0" dirty="0">
+                <a:solidFill>
+                  <a:srgbClr val="A87C1F"/>
+                </a:solidFill>
+                <a:latin typeface="Calibri" pitchFamily="34" charset="0"/>
+                <a:ea typeface="Calibri" pitchFamily="34" charset="-122"/>
+                <a:cs typeface="Calibri" pitchFamily="34" charset="-120"/>
+              </a:rPr>
+              <a:t>funds it</a:t>
+            </a:r>
+            <a:endParaRPr lang="en-US" sz="1100" dirty="0"/>
+          </a:p>
+        </p:txBody>
+      </p:sp>
+      <p:sp>
+        <p:nvSpPr>
+          <p:cNvPr id="8" name="Text 6"/>
+          <p:cNvSpPr txBox="1"/>
+          <p:nvPr/>
+        </p:nvSpPr>
+        <p:spPr>
+          <a:xfrm>
+            <a:off x="1005840" y="3154680"/>
+            <a:ext cx="4709160" cy="2148840"/>
+          </a:xfrm>
+          <a:prstGeom prst="rect">
+            <a:avLst/>
+          </a:prstGeom>
+          <a:noFill/>
+          <a:ln/>
+        </p:spPr>
+        <p:txBody>
+          <a:bodyPr wrap="square" lIns="0" tIns="0" rIns="0" bIns="0" rtlCol="0" anchor="t"/>
+          <a:lstStyle/>
+          <a:p>
+            <a:pPr marL="342900" indent="-342900">
+              <a:spcAft>
+                <a:spcPts val="700"/>
+              </a:spcAft>
+              <a:buSzPct val="100000"/>
+              <a:buChar char="•"/>
+            </a:pPr>
+            <a:r>
+              <a:rPr lang="en-US" sz="1150" dirty="0">
+                <a:solidFill>
+                  <a:srgbClr val="5A6880"/>
+                </a:solidFill>
+                <a:latin typeface="Calibri" pitchFamily="34" charset="0"/>
+                <a:ea typeface="Calibri" pitchFamily="34" charset="-122"/>
+                <a:cs typeface="Calibri" pitchFamily="34" charset="-120"/>
+              </a:rPr>
+              <a:t>Ancillary revenue per occupied room, from a screen that previously earned nothing</a:t>
+            </a:r>
+            <a:endParaRPr lang="en-US" sz="1150" dirty="0"/>
+          </a:p>
+          <a:p>
+            <a:pPr marL="342900" indent="-342900">
+              <a:spcAft>
+                <a:spcPts val="700"/>
+              </a:spcAft>
+              <a:buSzPct val="100000"/>
+              <a:buChar char="•"/>
+            </a:pPr>
+            <a:r>
+              <a:rPr lang="en-US" sz="1150" dirty="0">
+                <a:solidFill>
+                  <a:srgbClr val="5A6880"/>
+                </a:solidFill>
+                <a:latin typeface="Calibri" pitchFamily="34" charset="0"/>
+                <a:ea typeface="Calibri" pitchFamily="34" charset="-122"/>
+                <a:cs typeface="Calibri" pitchFamily="34" charset="-120"/>
+              </a:rPr>
+              <a:t>Local vendor contracts consolidated into one line</a:t>
+            </a:r>
+            <a:endParaRPr lang="en-US" sz="1150" dirty="0"/>
+          </a:p>
+          <a:p>
+            <a:pPr marL="342900" indent="-342900">
+              <a:spcAft>
+                <a:spcPts val="700"/>
+              </a:spcAft>
+              <a:buSzPct val="100000"/>
+              <a:buChar char="•"/>
+            </a:pPr>
+            <a:r>
+              <a:rPr lang="en-US" sz="1150" dirty="0">
+                <a:solidFill>
+                  <a:srgbClr val="5A6880"/>
+                </a:solidFill>
+                <a:latin typeface="Calibri" pitchFamily="34" charset="0"/>
+                <a:ea typeface="Calibri" pitchFamily="34" charset="-122"/>
+                <a:cs typeface="Calibri" pitchFamily="34" charset="-120"/>
+              </a:rPr>
+              <a:t>Set-top hardware removed from the refresh plan</a:t>
+            </a:r>
+            <a:endParaRPr lang="en-US" sz="1150" dirty="0"/>
+          </a:p>
+          <a:p>
+            <a:pPr marL="342900" indent="-342900">
+              <a:spcAft>
+                <a:spcPts val="700"/>
+              </a:spcAft>
+              <a:buSzPct val="100000"/>
+              <a:buChar char="•"/>
+            </a:pPr>
+            <a:r>
+              <a:rPr lang="en-US" sz="1150" dirty="0">
+                <a:solidFill>
+                  <a:srgbClr val="5A6880"/>
+                </a:solidFill>
+                <a:latin typeface="Calibri" pitchFamily="34" charset="0"/>
+                <a:ea typeface="Calibri" pitchFamily="34" charset="-122"/>
+                <a:cs typeface="Calibri" pitchFamily="34" charset="-120"/>
+              </a:rPr>
+              <a:t>Labour hours returned at the desk, the outlets and night audit</a:t>
+            </a:r>
+            <a:endParaRPr lang="en-US" sz="1150" dirty="0"/>
+          </a:p>
+          <a:p>
+            <a:pPr marL="342900" indent="-342900">
+              <a:spcAft>
+                <a:spcPts val="700"/>
+              </a:spcAft>
+              <a:buSzPct val="100000"/>
+              <a:buChar char="•"/>
+            </a:pPr>
+            <a:r>
+              <a:rPr lang="en-US" sz="1150" dirty="0">
+                <a:solidFill>
+                  <a:srgbClr val="5A6880"/>
+                </a:solidFill>
+                <a:latin typeface="Calibri" pitchFamily="34" charset="0"/>
+                <a:ea typeface="Calibri" pitchFamily="34" charset="-122"/>
+                <a:cs typeface="Calibri" pitchFamily="34" charset="-120"/>
+              </a:rPr>
+              <a:t>An asset that improves on the schedule the televisions are replaced on anyway</a:t>
+            </a:r>
+            <a:endParaRPr lang="en-US" sz="1150" dirty="0"/>
+          </a:p>
+        </p:txBody>
+      </p:sp>
+      <p:sp>
+        <p:nvSpPr>
+          <p:cNvPr id="9" name="Shape 7"/>
+          <p:cNvSpPr/>
+          <p:nvPr/>
+        </p:nvSpPr>
+        <p:spPr>
+          <a:xfrm>
+            <a:off x="6483096" y="2212848"/>
+            <a:ext cx="5440680" cy="3200400"/>
+          </a:xfrm>
+          <a:prstGeom prst="roundRect">
+            <a:avLst>
+              <a:gd name="adj" fmla="val 2571"/>
+            </a:avLst>
+          </a:prstGeom>
+          <a:solidFill>
+            <a:srgbClr val="F5F7FA"/>
+          </a:solidFill>
+          <a:ln w="12700">
+            <a:solidFill>
+              <a:srgbClr val="DFE5EE"/>
+            </a:solidFill>
+            <a:prstDash val="solid"/>
+          </a:ln>
+          <a:effectLst>
+            <a:outerShdw sx="100000" sy="100000" kx="0" ky="0" algn="bl" rotWithShape="0" blurRad="127000" dist="25400" dir="5400000">
+              <a:srgbClr val="0B1220">
+                <a:alpha val="10000"/>
+              </a:srgbClr>
+            </a:outerShdw>
+          </a:effectLst>
+        </p:spPr>
+      </p:sp>
+      <p:sp>
+        <p:nvSpPr>
+          <p:cNvPr id="10" name="Text 8"/>
+          <p:cNvSpPr txBox="1"/>
+          <p:nvPr/>
+        </p:nvSpPr>
+        <p:spPr>
+          <a:xfrm>
+            <a:off x="6848856" y="2432304"/>
+            <a:ext cx="2743200" cy="329184"/>
+          </a:xfrm>
+          <a:prstGeom prst="rect">
+            <a:avLst/>
+          </a:prstGeom>
+          <a:noFill/>
+          <a:ln/>
+        </p:spPr>
+        <p:txBody>
+          <a:bodyPr wrap="square" lIns="0" tIns="0" rIns="0" bIns="0" rtlCol="0" anchor="ctr"/>
+          <a:lstStyle/>
+          <a:p>
+            <a:pPr indent="0" marL="0">
+              <a:buNone/>
+            </a:pPr>
+            <a:r>
+              <a:rPr lang="en-US" sz="2100" b="1" dirty="0">
+                <a:solidFill>
+                  <a:srgbClr val="0B1220"/>
+                </a:solidFill>
+                <a:latin typeface="Cambria" pitchFamily="34" charset="0"/>
+                <a:ea typeface="Cambria" pitchFamily="34" charset="-122"/>
+                <a:cs typeface="Cambria" pitchFamily="34" charset="-120"/>
+              </a:rPr>
+              <a:t>The operator</a:t>
+            </a:r>
+            <a:endParaRPr lang="en-US" sz="2100" dirty="0"/>
+          </a:p>
+        </p:txBody>
+      </p:sp>
+      <p:sp>
+        <p:nvSpPr>
+          <p:cNvPr id="11" name="Text 9"/>
+          <p:cNvSpPr txBox="1"/>
+          <p:nvPr/>
+        </p:nvSpPr>
+        <p:spPr>
+          <a:xfrm>
+            <a:off x="6848856" y="2779776"/>
+            <a:ext cx="3657600" cy="256032"/>
+          </a:xfrm>
+          <a:prstGeom prst="rect">
+            <a:avLst/>
+          </a:prstGeom>
+          <a:noFill/>
+          <a:ln/>
+        </p:spPr>
+        <p:txBody>
+          <a:bodyPr wrap="square" lIns="0" tIns="0" rIns="0" bIns="0" rtlCol="0" anchor="ctr"/>
+          <a:lstStyle/>
+          <a:p>
+            <a:pPr indent="0" marL="0">
+              <a:buNone/>
+            </a:pPr>
+            <a:r>
+              <a:rPr lang="en-US" sz="1100" b="1" spc="150" kern="0" dirty="0">
+                <a:solidFill>
+                  <a:srgbClr val="A87C1F"/>
+                </a:solidFill>
+                <a:latin typeface="Calibri" pitchFamily="34" charset="0"/>
+                <a:ea typeface="Calibri" pitchFamily="34" charset="-122"/>
+                <a:cs typeface="Calibri" pitchFamily="34" charset="-120"/>
+              </a:rPr>
+              <a:t>sets the standard</a:t>
+            </a:r>
+            <a:endParaRPr lang="en-US" sz="1100" dirty="0"/>
+          </a:p>
+        </p:txBody>
+      </p:sp>
+      <p:sp>
+        <p:nvSpPr>
+          <p:cNvPr id="12" name="Text 10"/>
+          <p:cNvSpPr txBox="1"/>
+          <p:nvPr/>
+        </p:nvSpPr>
+        <p:spPr>
+          <a:xfrm>
+            <a:off x="6848856" y="3154680"/>
+            <a:ext cx="4709160" cy="2148840"/>
+          </a:xfrm>
+          <a:prstGeom prst="rect">
+            <a:avLst/>
+          </a:prstGeom>
+          <a:noFill/>
+          <a:ln/>
+        </p:spPr>
+        <p:txBody>
+          <a:bodyPr wrap="square" lIns="0" tIns="0" rIns="0" bIns="0" rtlCol="0" anchor="t"/>
+          <a:lstStyle/>
+          <a:p>
+            <a:pPr marL="342900" indent="-342900">
+              <a:spcAft>
+                <a:spcPts val="700"/>
+              </a:spcAft>
+              <a:buSzPct val="100000"/>
+              <a:buChar char="•"/>
+            </a:pPr>
+            <a:r>
+              <a:rPr lang="en-US" sz="1150" dirty="0">
+                <a:solidFill>
+                  <a:srgbClr val="5A6880"/>
+                </a:solidFill>
+                <a:latin typeface="Calibri" pitchFamily="34" charset="0"/>
+                <a:ea typeface="Calibri" pitchFamily="34" charset="-122"/>
+                <a:cs typeface="Calibri" pitchFamily="34" charset="-120"/>
+              </a:rPr>
+              <a:t>One guest experience across every property, not one per procurement decision</a:t>
+            </a:r>
+            <a:endParaRPr lang="en-US" sz="1150" dirty="0"/>
+          </a:p>
+          <a:p>
+            <a:pPr marL="342900" indent="-342900">
+              <a:spcAft>
+                <a:spcPts val="700"/>
+              </a:spcAft>
+              <a:buSzPct val="100000"/>
+              <a:buChar char="•"/>
+            </a:pPr>
+            <a:r>
+              <a:rPr lang="en-US" sz="1150" dirty="0">
+                <a:solidFill>
+                  <a:srgbClr val="5A6880"/>
+                </a:solidFill>
+                <a:latin typeface="Calibri" pitchFamily="34" charset="0"/>
+                <a:ea typeface="Calibri" pitchFamily="34" charset="-122"/>
+                <a:cs typeface="Calibri" pitchFamily="34" charset="-120"/>
+              </a:rPr>
+              <a:t>Service SLAs measured continuously rather than by mystery shopper</a:t>
+            </a:r>
+            <a:endParaRPr lang="en-US" sz="1150" dirty="0"/>
+          </a:p>
+          <a:p>
+            <a:pPr marL="342900" indent="-342900">
+              <a:spcAft>
+                <a:spcPts val="700"/>
+              </a:spcAft>
+              <a:buSzPct val="100000"/>
+              <a:buChar char="•"/>
+            </a:pPr>
+            <a:r>
+              <a:rPr lang="en-US" sz="1150" dirty="0">
+                <a:solidFill>
+                  <a:srgbClr val="5A6880"/>
+                </a:solidFill>
+                <a:latin typeface="Calibri" pitchFamily="34" charset="0"/>
+                <a:ea typeface="Calibri" pitchFamily="34" charset="-122"/>
+                <a:cs typeface="Calibri" pitchFamily="34" charset="-120"/>
+              </a:rPr>
+              <a:t>Brand standard compliance evidenced from operational data</a:t>
+            </a:r>
+            <a:endParaRPr lang="en-US" sz="1150" dirty="0"/>
+          </a:p>
+          <a:p>
+            <a:pPr marL="342900" indent="-342900">
+              <a:spcAft>
+                <a:spcPts val="700"/>
+              </a:spcAft>
+              <a:buSzPct val="100000"/>
+              <a:buChar char="•"/>
+            </a:pPr>
+            <a:r>
+              <a:rPr lang="en-US" sz="1150" dirty="0">
+                <a:solidFill>
+                  <a:srgbClr val="5A6880"/>
+                </a:solidFill>
+                <a:latin typeface="Calibri" pitchFamily="34" charset="0"/>
+                <a:ea typeface="Calibri" pitchFamily="34" charset="-122"/>
+                <a:cs typeface="Calibri" pitchFamily="34" charset="-120"/>
+              </a:rPr>
+              <a:t>Guest preferences portable between properties in the estate</a:t>
+            </a:r>
+            <a:endParaRPr lang="en-US" sz="1150" dirty="0"/>
+          </a:p>
+          <a:p>
+            <a:pPr marL="342900" indent="-342900">
+              <a:spcAft>
+                <a:spcPts val="700"/>
+              </a:spcAft>
+              <a:buSzPct val="100000"/>
+              <a:buChar char="•"/>
+            </a:pPr>
+            <a:r>
+              <a:rPr lang="en-US" sz="1150" dirty="0">
+                <a:solidFill>
+                  <a:srgbClr val="5A6880"/>
+                </a:solidFill>
+                <a:latin typeface="Calibri" pitchFamily="34" charset="0"/>
+                <a:ea typeface="Calibri" pitchFamily="34" charset="-122"/>
+                <a:cs typeface="Calibri" pitchFamily="34" charset="-120"/>
+              </a:rPr>
+              <a:t>Document retention under one policy, enforced everywhere</a:t>
+            </a:r>
+            <a:endParaRPr lang="en-US" sz="1150" dirty="0"/>
+          </a:p>
+        </p:txBody>
+      </p:sp>
+      <p:sp>
+        <p:nvSpPr>
+          <p:cNvPr id="13" name="Text 11"/>
           <p:cNvSpPr txBox="1"/>
           <p:nvPr/>
         </p:nvSpPr>
@@ -14653,7 +15477,7 @@
                 <a:ea typeface="Calibri" pitchFamily="34" charset="-122"/>
                 <a:cs typeface="Calibri" pitchFamily="34" charset="-120"/>
               </a:rPr>
-              <a:t>Illustrative model only. No client figures have been used. Rebuilt on the group's own outlet revenue, vendor spend, payroll and capex plan at proposal stage.</a:t>
+              <a:t>For managed and franchised properties the split differs — we scope who signs, who pays and who is served, per agreement type.</a:t>
             </a:r>
             <a:endParaRPr lang="en-US" sz="900" dirty="0"/>
           </a:p>
@@ -14724,7 +15548,7 @@
                 <a:ea typeface="Calibri" pitchFamily="34" charset="-122"/>
                 <a:cs typeface="Calibri" pitchFamily="34" charset="-120"/>
               </a:rPr>
-              <a:t>ENTERPRISE READINESS</a:t>
+              <a:t>THE COMMERCIAL CASE</a:t>
             </a:r>
             <a:endParaRPr lang="en-US" sz="1100" dirty="0"/>
           </a:p>
@@ -14763,7 +15587,7 @@
                 <a:ea typeface="Cambria" pitchFamily="34" charset="-122"/>
                 <a:cs typeface="Cambria" pitchFamily="34" charset="-120"/>
               </a:rPr>
-              <a:t>Built for your vendor review</a:t>
+              <a:t>Where the platform pays for itself</a:t>
             </a:r>
             <a:endParaRPr lang="en-US" sz="3300" dirty="0"/>
           </a:p>
@@ -14771,22 +15595,80 @@
       </p:sp>
       <p:sp>
         <p:nvSpPr>
-          <p:cNvPr id="4" name="Shape 2"/>
+          <p:cNvPr id="4" name="Text 2"/>
+          <p:cNvSpPr txBox="1"/>
+          <p:nvPr/>
+        </p:nvSpPr>
+        <p:spPr>
+          <a:xfrm>
+            <a:off x="640080" y="1554480"/>
+            <a:ext cx="9875520" cy="548640"/>
+          </a:xfrm>
+          <a:prstGeom prst="rect">
+            <a:avLst/>
+          </a:prstGeom>
+          <a:noFill/>
+          <a:ln/>
+        </p:spPr>
+        <p:txBody>
+          <a:bodyPr wrap="square" lIns="0" tIns="0" rIns="0" bIns="0" rtlCol="0" anchor="t"/>
+          <a:lstStyle/>
+          <a:p>
+            <a:pPr indent="0" marL="0">
+              <a:lnSpc>
+                <a:spcPts val="1885"/>
+              </a:lnSpc>
+              <a:buNone/>
+            </a:pPr>
+            <a:r>
+              <a:rPr lang="en-US" sz="1300" dirty="0">
+                <a:solidFill>
+                  <a:srgbClr val="5A6880"/>
+                </a:solidFill>
+                <a:latin typeface="Calibri" pitchFamily="34" charset="0"/>
+                <a:ea typeface="Calibri" pitchFamily="34" charset="-122"/>
+                <a:cs typeface="Calibri" pitchFamily="34" charset="-120"/>
+              </a:rPr>
+              <a:t>Five effects, each measurable on a property P&amp;L and each multiplying by the number of properties. The chart is a worked model — we rebuild it on the group's real figures before proposal.</a:t>
+            </a:r>
+            <a:endParaRPr lang="en-US" sz="1300" dirty="0"/>
+          </a:p>
+        </p:txBody>
+      </p:sp>
+      <p:graphicFrame>
+        <p:nvGraphicFramePr>
+          <p:cNvPr id="5" name="Chart 0" descr=""/>
+          <p:cNvGraphicFramePr/>
+          <p:nvPr/>
+        </p:nvGraphicFramePr>
+        <p:xfrm>
+          <a:off x="640080" y="2267712"/>
+          <a:ext cx="6858000" cy="3108960"/>
+        </p:xfrm>
+        <a:graphic xmlns:a="http://schemas.openxmlformats.org/drawingml/2006/main">
+          <a:graphicData uri="http://schemas.openxmlformats.org/drawingml/2006/chart">
+            <c:chart xmlns:c="http://schemas.openxmlformats.org/drawingml/2006/chart" r:id="rId1"/>
+          </a:graphicData>
+        </a:graphic>
+      </p:graphicFrame>
+      <p:sp>
+        <p:nvSpPr>
+          <p:cNvPr id="6" name="Shape 3"/>
           <p:cNvSpPr/>
           <p:nvPr/>
         </p:nvSpPr>
         <p:spPr>
           <a:xfrm>
-            <a:off x="640080" y="1664208"/>
-            <a:ext cx="3429000" cy="1481328"/>
+            <a:off x="7863840" y="2267712"/>
+            <a:ext cx="3687775" cy="3108960"/>
           </a:xfrm>
           <a:prstGeom prst="roundRect">
             <a:avLst>
-              <a:gd name="adj" fmla="val 5556"/>
+              <a:gd name="adj" fmla="val 2647"/>
             </a:avLst>
           </a:prstGeom>
           <a:solidFill>
-            <a:srgbClr val="F5F7FA"/>
+            <a:srgbClr val="0B1220"/>
           </a:solidFill>
           <a:ln w="12700">
             <a:solidFill>
@@ -14805,53 +15687,53 @@
       </p:sp>
       <p:sp>
         <p:nvSpPr>
-          <p:cNvPr id="5" name="Text 3"/>
-          <p:cNvSpPr txBox="1"/>
-          <p:nvPr/>
-        </p:nvSpPr>
-        <p:spPr>
-          <a:xfrm>
-            <a:off x="896112" y="1847088"/>
-            <a:ext cx="2916936" cy="274320"/>
-          </a:xfrm>
-          <a:prstGeom prst="rect">
-            <a:avLst/>
-          </a:prstGeom>
-          <a:noFill/>
-          <a:ln/>
-        </p:spPr>
-        <p:txBody>
-          <a:bodyPr wrap="square" lIns="0" tIns="0" rIns="0" bIns="0" rtlCol="0" anchor="ctr"/>
-          <a:lstStyle/>
-          <a:p>
-            <a:pPr indent="0" marL="0">
-              <a:buNone/>
-            </a:pPr>
-            <a:r>
-              <a:rPr lang="en-US" sz="1350" b="1" dirty="0">
-                <a:solidFill>
-                  <a:srgbClr val="0B1220"/>
-                </a:solidFill>
-                <a:latin typeface="Calibri" pitchFamily="34" charset="0"/>
-                <a:ea typeface="Calibri" pitchFamily="34" charset="-122"/>
-                <a:cs typeface="Calibri" pitchFamily="34" charset="-120"/>
-              </a:rPr>
-              <a:t>Guest documents</a:t>
-            </a:r>
-            <a:endParaRPr lang="en-US" sz="1350" dirty="0"/>
-          </a:p>
-        </p:txBody>
-      </p:sp>
-      <p:sp>
-        <p:nvSpPr>
-          <p:cNvPr id="6" name="Text 4"/>
-          <p:cNvSpPr txBox="1"/>
-          <p:nvPr/>
-        </p:nvSpPr>
-        <p:spPr>
-          <a:xfrm>
-            <a:off x="896112" y="2176272"/>
-            <a:ext cx="2916936" cy="896112"/>
+          <p:cNvPr id="7" name="Text 4"/>
+          <p:cNvSpPr txBox="1"/>
+          <p:nvPr/>
+        </p:nvSpPr>
+        <p:spPr>
+          <a:xfrm>
+            <a:off x="8183880" y="2487168"/>
+            <a:ext cx="3291840" cy="274320"/>
+          </a:xfrm>
+          <a:prstGeom prst="rect">
+            <a:avLst/>
+          </a:prstGeom>
+          <a:noFill/>
+          <a:ln/>
+        </p:spPr>
+        <p:txBody>
+          <a:bodyPr wrap="square" lIns="0" tIns="0" rIns="0" bIns="0" rtlCol="0" anchor="ctr"/>
+          <a:lstStyle/>
+          <a:p>
+            <a:pPr indent="0" marL="0">
+              <a:buNone/>
+            </a:pPr>
+            <a:r>
+              <a:rPr lang="en-US" sz="1300" b="1" dirty="0">
+                <a:solidFill>
+                  <a:srgbClr val="D4A94A"/>
+                </a:solidFill>
+                <a:latin typeface="Calibri" pitchFamily="34" charset="0"/>
+                <a:ea typeface="Calibri" pitchFamily="34" charset="-122"/>
+                <a:cs typeface="Calibri" pitchFamily="34" charset="-120"/>
+              </a:rPr>
+              <a:t>How to read this</a:t>
+            </a:r>
+            <a:endParaRPr lang="en-US" sz="1300" dirty="0"/>
+          </a:p>
+        </p:txBody>
+      </p:sp>
+      <p:sp>
+        <p:nvSpPr>
+          <p:cNvPr id="8" name="Text 5"/>
+          <p:cNvSpPr txBox="1"/>
+          <p:nvPr/>
+        </p:nvSpPr>
+        <p:spPr>
+          <a:xfrm>
+            <a:off x="8183880" y="2834640"/>
+            <a:ext cx="3337560" cy="2377440"/>
           </a:xfrm>
           <a:prstGeom prst="rect">
             <a:avLst/>
@@ -14865,250 +15747,78 @@
           <a:p>
             <a:pPr indent="0" marL="0">
               <a:lnSpc>
-                <a:spcPts val="1400"/>
+                <a:spcPts val="1450"/>
               </a:lnSpc>
               <a:buNone/>
             </a:pPr>
             <a:r>
               <a:rPr lang="en-US" sz="1050" dirty="0">
                 <a:solidFill>
-                  <a:srgbClr val="5A6880"/>
-                </a:solidFill>
-                <a:latin typeface="Calibri" pitchFamily="34" charset="0"/>
-                <a:ea typeface="Calibri" pitchFamily="34" charset="-122"/>
-                <a:cs typeface="Calibri" pitchFamily="34" charset="-120"/>
-              </a:rPr>
-              <a:t>Identity scans encrypted under a separately managed key, released only with a reason code, purged on a group-set retention clock.</a:t>
+                  <a:srgbClr val="9AA9C2"/>
+                </a:solidFill>
+                <a:latin typeface="Calibri" pitchFamily="34" charset="0"/>
+                <a:ea typeface="Calibri" pitchFamily="34" charset="-122"/>
+                <a:cs typeface="Calibri" pitchFamily="34" charset="-120"/>
+              </a:rPr>
+              <a:t>Bars are relative, not absolute. Ancillary revenue is set to 1.0 and the rest scaled against it.</a:t>
             </a:r>
             <a:endParaRPr lang="en-US" sz="1050" dirty="0"/>
           </a:p>
-        </p:txBody>
-      </p:sp>
-      <p:sp>
-        <p:nvSpPr>
-          <p:cNvPr id="7" name="Shape 5"/>
-          <p:cNvSpPr/>
-          <p:nvPr/>
-        </p:nvSpPr>
-        <p:spPr>
-          <a:xfrm>
-            <a:off x="4471416" y="1664208"/>
-            <a:ext cx="3429000" cy="1481328"/>
-          </a:xfrm>
-          <a:prstGeom prst="roundRect">
-            <a:avLst>
-              <a:gd name="adj" fmla="val 5556"/>
-            </a:avLst>
-          </a:prstGeom>
-          <a:solidFill>
-            <a:srgbClr val="F5F7FA"/>
-          </a:solidFill>
-          <a:ln w="12700">
-            <a:solidFill>
-              <a:srgbClr val="DFE5EE"/>
-            </a:solidFill>
-            <a:prstDash val="solid"/>
-          </a:ln>
-          <a:effectLst>
-            <a:outerShdw sx="100000" sy="100000" kx="0" ky="0" algn="bl" rotWithShape="0" blurRad="127000" dist="25400" dir="5400000">
-              <a:srgbClr val="0B1220">
-                <a:alpha val="10000"/>
-              </a:srgbClr>
-            </a:outerShdw>
-          </a:effectLst>
-        </p:spPr>
-      </p:sp>
-      <p:sp>
-        <p:nvSpPr>
-          <p:cNvPr id="8" name="Text 6"/>
-          <p:cNvSpPr txBox="1"/>
-          <p:nvPr/>
-        </p:nvSpPr>
-        <p:spPr>
-          <a:xfrm>
-            <a:off x="4727448" y="1847088"/>
-            <a:ext cx="2916936" cy="274320"/>
-          </a:xfrm>
-          <a:prstGeom prst="rect">
-            <a:avLst/>
-          </a:prstGeom>
-          <a:noFill/>
-          <a:ln/>
-        </p:spPr>
-        <p:txBody>
-          <a:bodyPr wrap="square" lIns="0" tIns="0" rIns="0" bIns="0" rtlCol="0" anchor="ctr"/>
-          <a:lstStyle/>
-          <a:p>
-            <a:pPr indent="0" marL="0">
-              <a:buNone/>
-            </a:pPr>
-            <a:r>
-              <a:rPr lang="en-US" sz="1350" b="1" dirty="0">
-                <a:solidFill>
-                  <a:srgbClr val="0B1220"/>
-                </a:solidFill>
-                <a:latin typeface="Calibri" pitchFamily="34" charset="0"/>
-                <a:ea typeface="Calibri" pitchFamily="34" charset="-122"/>
-                <a:cs typeface="Calibri" pitchFamily="34" charset="-120"/>
-              </a:rPr>
-              <a:t>Card data</a:t>
-            </a:r>
-            <a:endParaRPr lang="en-US" sz="1350" dirty="0"/>
-          </a:p>
-        </p:txBody>
-      </p:sp>
-      <p:sp>
-        <p:nvSpPr>
-          <p:cNvPr id="9" name="Text 7"/>
-          <p:cNvSpPr txBox="1"/>
-          <p:nvPr/>
-        </p:nvSpPr>
-        <p:spPr>
-          <a:xfrm>
-            <a:off x="4727448" y="2176272"/>
-            <a:ext cx="2916936" cy="896112"/>
-          </a:xfrm>
-          <a:prstGeom prst="rect">
-            <a:avLst/>
-          </a:prstGeom>
-          <a:noFill/>
-          <a:ln/>
-        </p:spPr>
-        <p:txBody>
-          <a:bodyPr wrap="square" lIns="0" tIns="0" rIns="0" bIns="0" rtlCol="0" anchor="ctr"/>
-          <a:lstStyle/>
           <a:p>
             <a:pPr indent="0" marL="0">
               <a:lnSpc>
-                <a:spcPts val="1400"/>
+                <a:spcPts val="1450"/>
               </a:lnSpc>
               <a:buNone/>
             </a:pPr>
+            <a:endParaRPr lang="en-US" sz="1050" dirty="0"/>
+          </a:p>
+          <a:p>
+            <a:pPr indent="0" marL="0">
+              <a:lnSpc>
+                <a:spcPts val="1450"/>
+              </a:lnSpc>
+              <a:buNone/>
+            </a:pPr>
             <a:r>
               <a:rPr lang="en-US" sz="1050" dirty="0">
                 <a:solidFill>
-                  <a:srgbClr val="5A6880"/>
-                </a:solidFill>
-                <a:latin typeface="Calibri" pitchFamily="34" charset="0"/>
-                <a:ea typeface="Calibri" pitchFamily="34" charset="-122"/>
-                <a:cs typeface="Calibri" pitchFamily="34" charset="-120"/>
-              </a:rPr>
-              <a:t>Never touches the platform. Capture device to acquirer; we hold a token. PCI scope stays on the light-touch assessment.</a:t>
+                  <a:srgbClr val="9AA9C2"/>
+                </a:solidFill>
+                <a:latin typeface="Calibri" pitchFamily="34" charset="0"/>
+                <a:ea typeface="Calibri" pitchFamily="34" charset="-122"/>
+                <a:cs typeface="Calibri" pitchFamily="34" charset="-120"/>
+              </a:rPr>
+              <a:t>The middle three bars are cost, not revenue — contracts not renewed, hours not worked, hardware not bought. They are the least visible effects and usually the most certain.</a:t>
             </a:r>
             <a:endParaRPr lang="en-US" sz="1050" dirty="0"/>
           </a:p>
-        </p:txBody>
-      </p:sp>
-      <p:sp>
-        <p:nvSpPr>
-          <p:cNvPr id="10" name="Shape 8"/>
-          <p:cNvSpPr/>
-          <p:nvPr/>
-        </p:nvSpPr>
-        <p:spPr>
-          <a:xfrm>
-            <a:off x="8302752" y="1664208"/>
-            <a:ext cx="3429000" cy="1481328"/>
-          </a:xfrm>
-          <a:prstGeom prst="roundRect">
-            <a:avLst>
-              <a:gd name="adj" fmla="val 5556"/>
-            </a:avLst>
-          </a:prstGeom>
-          <a:solidFill>
-            <a:srgbClr val="F5F7FA"/>
-          </a:solidFill>
-          <a:ln w="12700">
-            <a:solidFill>
-              <a:srgbClr val="DFE5EE"/>
-            </a:solidFill>
-            <a:prstDash val="solid"/>
-          </a:ln>
-          <a:effectLst>
-            <a:outerShdw sx="100000" sy="100000" kx="0" ky="0" algn="bl" rotWithShape="0" blurRad="127000" dist="25400" dir="5400000">
-              <a:srgbClr val="0B1220">
-                <a:alpha val="10000"/>
-              </a:srgbClr>
-            </a:outerShdw>
-          </a:effectLst>
-        </p:spPr>
-      </p:sp>
-      <p:sp>
-        <p:nvSpPr>
-          <p:cNvPr id="11" name="Text 9"/>
-          <p:cNvSpPr txBox="1"/>
-          <p:nvPr/>
-        </p:nvSpPr>
-        <p:spPr>
-          <a:xfrm>
-            <a:off x="8558784" y="1847088"/>
-            <a:ext cx="2916936" cy="274320"/>
-          </a:xfrm>
-          <a:prstGeom prst="rect">
-            <a:avLst/>
-          </a:prstGeom>
-          <a:noFill/>
-          <a:ln/>
-        </p:spPr>
-        <p:txBody>
-          <a:bodyPr wrap="square" lIns="0" tIns="0" rIns="0" bIns="0" rtlCol="0" anchor="ctr"/>
-          <a:lstStyle/>
-          <a:p>
-            <a:pPr indent="0" marL="0">
-              <a:buNone/>
-            </a:pPr>
-            <a:r>
-              <a:rPr lang="en-US" sz="1350" b="1" dirty="0">
-                <a:solidFill>
-                  <a:srgbClr val="0B1220"/>
-                </a:solidFill>
-                <a:latin typeface="Calibri" pitchFamily="34" charset="0"/>
-                <a:ea typeface="Calibri" pitchFamily="34" charset="-122"/>
-                <a:cs typeface="Calibri" pitchFamily="34" charset="-120"/>
-              </a:rPr>
-              <a:t>Access control</a:t>
-            </a:r>
-            <a:endParaRPr lang="en-US" sz="1350" dirty="0"/>
-          </a:p>
-        </p:txBody>
-      </p:sp>
-      <p:sp>
-        <p:nvSpPr>
-          <p:cNvPr id="12" name="Text 10"/>
-          <p:cNvSpPr txBox="1"/>
-          <p:nvPr/>
-        </p:nvSpPr>
-        <p:spPr>
-          <a:xfrm>
-            <a:off x="8558784" y="2176272"/>
-            <a:ext cx="2916936" cy="896112"/>
-          </a:xfrm>
-          <a:prstGeom prst="rect">
-            <a:avLst/>
-          </a:prstGeom>
-          <a:noFill/>
-          <a:ln/>
-        </p:spPr>
-        <p:txBody>
-          <a:bodyPr wrap="square" lIns="0" tIns="0" rIns="0" bIns="0" rtlCol="0" anchor="ctr"/>
-          <a:lstStyle/>
           <a:p>
             <a:pPr indent="0" marL="0">
               <a:lnSpc>
-                <a:spcPts val="1400"/>
+                <a:spcPts val="1450"/>
               </a:lnSpc>
               <a:buNone/>
             </a:pPr>
+            <a:endParaRPr lang="en-US" sz="1050" dirty="0"/>
+          </a:p>
+          <a:p>
+            <a:pPr indent="0" marL="0">
+              <a:lnSpc>
+                <a:spcPts val="1450"/>
+              </a:lnSpc>
+              <a:buNone/>
+            </a:pPr>
             <a:r>
               <a:rPr lang="en-US" sz="1050" dirty="0">
                 <a:solidFill>
-                  <a:srgbClr val="5A6880"/>
-                </a:solidFill>
-                <a:latin typeface="Calibri" pitchFamily="34" charset="0"/>
-                <a:ea typeface="Calibri" pitchFamily="34" charset="-122"/>
-                <a:cs typeface="Calibri" pitchFamily="34" charset="-120"/>
-              </a:rPr>
-              <a:t>Role-based and least-privilege, federated to your identity provider. Group sees the estate, property sees itself.</a:t>
+                  <a:srgbClr val="9AA9C2"/>
+                </a:solidFill>
+                <a:latin typeface="Calibri" pitchFamily="34" charset="0"/>
+                <a:ea typeface="Calibri" pitchFamily="34" charset="-122"/>
+                <a:cs typeface="Calibri" pitchFamily="34" charset="-120"/>
+              </a:rPr>
+              <a:t>At estate scale the multiplier matters more than the per-property figure: a modest, reliable effect across two hundred properties outweighs an optimistic one across ten.</a:t>
             </a:r>
             <a:endParaRPr lang="en-US" sz="1050" dirty="0"/>
           </a:p>
@@ -15116,352 +15826,7 @@
       </p:sp>
       <p:sp>
         <p:nvSpPr>
-          <p:cNvPr id="13" name="Shape 11"/>
-          <p:cNvSpPr/>
-          <p:nvPr/>
-        </p:nvSpPr>
-        <p:spPr>
-          <a:xfrm>
-            <a:off x="640080" y="3383280"/>
-            <a:ext cx="3429000" cy="1481328"/>
-          </a:xfrm>
-          <a:prstGeom prst="roundRect">
-            <a:avLst>
-              <a:gd name="adj" fmla="val 5556"/>
-            </a:avLst>
-          </a:prstGeom>
-          <a:solidFill>
-            <a:srgbClr val="F5F7FA"/>
-          </a:solidFill>
-          <a:ln w="12700">
-            <a:solidFill>
-              <a:srgbClr val="DFE5EE"/>
-            </a:solidFill>
-            <a:prstDash val="solid"/>
-          </a:ln>
-          <a:effectLst>
-            <a:outerShdw sx="100000" sy="100000" kx="0" ky="0" algn="bl" rotWithShape="0" blurRad="127000" dist="25400" dir="5400000">
-              <a:srgbClr val="0B1220">
-                <a:alpha val="10000"/>
-              </a:srgbClr>
-            </a:outerShdw>
-          </a:effectLst>
-        </p:spPr>
-      </p:sp>
-      <p:sp>
-        <p:nvSpPr>
-          <p:cNvPr id="14" name="Text 12"/>
-          <p:cNvSpPr txBox="1"/>
-          <p:nvPr/>
-        </p:nvSpPr>
-        <p:spPr>
-          <a:xfrm>
-            <a:off x="896112" y="3566160"/>
-            <a:ext cx="2916936" cy="274320"/>
-          </a:xfrm>
-          <a:prstGeom prst="rect">
-            <a:avLst/>
-          </a:prstGeom>
-          <a:noFill/>
-          <a:ln/>
-        </p:spPr>
-        <p:txBody>
-          <a:bodyPr wrap="square" lIns="0" tIns="0" rIns="0" bIns="0" rtlCol="0" anchor="ctr"/>
-          <a:lstStyle/>
-          <a:p>
-            <a:pPr indent="0" marL="0">
-              <a:buNone/>
-            </a:pPr>
-            <a:r>
-              <a:rPr lang="en-US" sz="1350" b="1" dirty="0">
-                <a:solidFill>
-                  <a:srgbClr val="0B1220"/>
-                </a:solidFill>
-                <a:latin typeface="Calibri" pitchFamily="34" charset="0"/>
-                <a:ea typeface="Calibri" pitchFamily="34" charset="-122"/>
-                <a:cs typeface="Calibri" pitchFamily="34" charset="-120"/>
-              </a:rPr>
-              <a:t>Audit trail</a:t>
-            </a:r>
-            <a:endParaRPr lang="en-US" sz="1350" dirty="0"/>
-          </a:p>
-        </p:txBody>
-      </p:sp>
-      <p:sp>
-        <p:nvSpPr>
-          <p:cNvPr id="15" name="Text 13"/>
-          <p:cNvSpPr txBox="1"/>
-          <p:nvPr/>
-        </p:nvSpPr>
-        <p:spPr>
-          <a:xfrm>
-            <a:off x="896112" y="3895344"/>
-            <a:ext cx="2916936" cy="896112"/>
-          </a:xfrm>
-          <a:prstGeom prst="rect">
-            <a:avLst/>
-          </a:prstGeom>
-          <a:noFill/>
-          <a:ln/>
-        </p:spPr>
-        <p:txBody>
-          <a:bodyPr wrap="square" lIns="0" tIns="0" rIns="0" bIns="0" rtlCol="0" anchor="ctr"/>
-          <a:lstStyle/>
-          <a:p>
-            <a:pPr indent="0" marL="0">
-              <a:lnSpc>
-                <a:spcPts val="1400"/>
-              </a:lnSpc>
-              <a:buNone/>
-            </a:pPr>
-            <a:r>
-              <a:rPr lang="en-US" sz="1050" dirty="0">
-                <a:solidFill>
-                  <a:srgbClr val="5A6880"/>
-                </a:solidFill>
-                <a:latin typeface="Calibri" pitchFamily="34" charset="0"/>
-                <a:ea typeface="Calibri" pitchFamily="34" charset="-122"/>
-                <a:cs typeface="Calibri" pitchFamily="34" charset="-120"/>
-              </a:rPr>
-              <a:t>Append-only log of every state change. Every privileged read carries actor, time and reason, exportable for review.</a:t>
-            </a:r>
-            <a:endParaRPr lang="en-US" sz="1050" dirty="0"/>
-          </a:p>
-        </p:txBody>
-      </p:sp>
-      <p:sp>
-        <p:nvSpPr>
-          <p:cNvPr id="16" name="Shape 14"/>
-          <p:cNvSpPr/>
-          <p:nvPr/>
-        </p:nvSpPr>
-        <p:spPr>
-          <a:xfrm>
-            <a:off x="4471416" y="3383280"/>
-            <a:ext cx="3429000" cy="1481328"/>
-          </a:xfrm>
-          <a:prstGeom prst="roundRect">
-            <a:avLst>
-              <a:gd name="adj" fmla="val 5556"/>
-            </a:avLst>
-          </a:prstGeom>
-          <a:solidFill>
-            <a:srgbClr val="F5F7FA"/>
-          </a:solidFill>
-          <a:ln w="12700">
-            <a:solidFill>
-              <a:srgbClr val="DFE5EE"/>
-            </a:solidFill>
-            <a:prstDash val="solid"/>
-          </a:ln>
-          <a:effectLst>
-            <a:outerShdw sx="100000" sy="100000" kx="0" ky="0" algn="bl" rotWithShape="0" blurRad="127000" dist="25400" dir="5400000">
-              <a:srgbClr val="0B1220">
-                <a:alpha val="10000"/>
-              </a:srgbClr>
-            </a:outerShdw>
-          </a:effectLst>
-        </p:spPr>
-      </p:sp>
-      <p:sp>
-        <p:nvSpPr>
-          <p:cNvPr id="17" name="Text 15"/>
-          <p:cNvSpPr txBox="1"/>
-          <p:nvPr/>
-        </p:nvSpPr>
-        <p:spPr>
-          <a:xfrm>
-            <a:off x="4727448" y="3566160"/>
-            <a:ext cx="2916936" cy="274320"/>
-          </a:xfrm>
-          <a:prstGeom prst="rect">
-            <a:avLst/>
-          </a:prstGeom>
-          <a:noFill/>
-          <a:ln/>
-        </p:spPr>
-        <p:txBody>
-          <a:bodyPr wrap="square" lIns="0" tIns="0" rIns="0" bIns="0" rtlCol="0" anchor="ctr"/>
-          <a:lstStyle/>
-          <a:p>
-            <a:pPr indent="0" marL="0">
-              <a:buNone/>
-            </a:pPr>
-            <a:r>
-              <a:rPr lang="en-US" sz="1350" b="1" dirty="0">
-                <a:solidFill>
-                  <a:srgbClr val="0B1220"/>
-                </a:solidFill>
-                <a:latin typeface="Calibri" pitchFamily="34" charset="0"/>
-                <a:ea typeface="Calibri" pitchFamily="34" charset="-122"/>
-                <a:cs typeface="Calibri" pitchFamily="34" charset="-120"/>
-              </a:rPr>
-              <a:t>Data residency</a:t>
-            </a:r>
-            <a:endParaRPr lang="en-US" sz="1350" dirty="0"/>
-          </a:p>
-        </p:txBody>
-      </p:sp>
-      <p:sp>
-        <p:nvSpPr>
-          <p:cNvPr id="18" name="Text 16"/>
-          <p:cNvSpPr txBox="1"/>
-          <p:nvPr/>
-        </p:nvSpPr>
-        <p:spPr>
-          <a:xfrm>
-            <a:off x="4727448" y="3895344"/>
-            <a:ext cx="2916936" cy="896112"/>
-          </a:xfrm>
-          <a:prstGeom prst="rect">
-            <a:avLst/>
-          </a:prstGeom>
-          <a:noFill/>
-          <a:ln/>
-        </p:spPr>
-        <p:txBody>
-          <a:bodyPr wrap="square" lIns="0" tIns="0" rIns="0" bIns="0" rtlCol="0" anchor="ctr"/>
-          <a:lstStyle/>
-          <a:p>
-            <a:pPr indent="0" marL="0">
-              <a:lnSpc>
-                <a:spcPts val="1400"/>
-              </a:lnSpc>
-              <a:buNone/>
-            </a:pPr>
-            <a:r>
-              <a:rPr lang="en-US" sz="1050" dirty="0">
-                <a:solidFill>
-                  <a:srgbClr val="5A6880"/>
-                </a:solidFill>
-                <a:latin typeface="Calibri" pitchFamily="34" charset="0"/>
-                <a:ea typeface="Calibri" pitchFamily="34" charset="-122"/>
-                <a:cs typeface="Calibri" pitchFamily="34" charset="-120"/>
-              </a:rPr>
-              <a:t>Configurable per property and per region — a requirement for any operator across multiple jurisdictions.</a:t>
-            </a:r>
-            <a:endParaRPr lang="en-US" sz="1050" dirty="0"/>
-          </a:p>
-        </p:txBody>
-      </p:sp>
-      <p:sp>
-        <p:nvSpPr>
-          <p:cNvPr id="19" name="Shape 17"/>
-          <p:cNvSpPr/>
-          <p:nvPr/>
-        </p:nvSpPr>
-        <p:spPr>
-          <a:xfrm>
-            <a:off x="8302752" y="3383280"/>
-            <a:ext cx="3429000" cy="1481328"/>
-          </a:xfrm>
-          <a:prstGeom prst="roundRect">
-            <a:avLst>
-              <a:gd name="adj" fmla="val 5556"/>
-            </a:avLst>
-          </a:prstGeom>
-          <a:solidFill>
-            <a:srgbClr val="FBF6E9"/>
-          </a:solidFill>
-          <a:ln w="12700">
-            <a:solidFill>
-              <a:srgbClr val="DFE5EE"/>
-            </a:solidFill>
-            <a:prstDash val="solid"/>
-          </a:ln>
-          <a:effectLst>
-            <a:outerShdw sx="100000" sy="100000" kx="0" ky="0" algn="bl" rotWithShape="0" blurRad="127000" dist="25400" dir="5400000">
-              <a:srgbClr val="0B1220">
-                <a:alpha val="10000"/>
-              </a:srgbClr>
-            </a:outerShdw>
-          </a:effectLst>
-        </p:spPr>
-      </p:sp>
-      <p:sp>
-        <p:nvSpPr>
-          <p:cNvPr id="20" name="Text 18"/>
-          <p:cNvSpPr txBox="1"/>
-          <p:nvPr/>
-        </p:nvSpPr>
-        <p:spPr>
-          <a:xfrm>
-            <a:off x="8558784" y="3566160"/>
-            <a:ext cx="2916936" cy="274320"/>
-          </a:xfrm>
-          <a:prstGeom prst="rect">
-            <a:avLst/>
-          </a:prstGeom>
-          <a:noFill/>
-          <a:ln/>
-        </p:spPr>
-        <p:txBody>
-          <a:bodyPr wrap="square" lIns="0" tIns="0" rIns="0" bIns="0" rtlCol="0" anchor="ctr"/>
-          <a:lstStyle/>
-          <a:p>
-            <a:pPr indent="0" marL="0">
-              <a:buNone/>
-            </a:pPr>
-            <a:r>
-              <a:rPr lang="en-US" sz="1350" b="1" dirty="0">
-                <a:solidFill>
-                  <a:srgbClr val="0B1220"/>
-                </a:solidFill>
-                <a:latin typeface="Calibri" pitchFamily="34" charset="0"/>
-                <a:ea typeface="Calibri" pitchFamily="34" charset="-122"/>
-                <a:cs typeface="Calibri" pitchFamily="34" charset="-120"/>
-              </a:rPr>
-              <a:t>Certification</a:t>
-            </a:r>
-            <a:endParaRPr lang="en-US" sz="1350" dirty="0"/>
-          </a:p>
-        </p:txBody>
-      </p:sp>
-      <p:sp>
-        <p:nvSpPr>
-          <p:cNvPr id="21" name="Text 19"/>
-          <p:cNvSpPr txBox="1"/>
-          <p:nvPr/>
-        </p:nvSpPr>
-        <p:spPr>
-          <a:xfrm>
-            <a:off x="8558784" y="3895344"/>
-            <a:ext cx="2916936" cy="896112"/>
-          </a:xfrm>
-          <a:prstGeom prst="rect">
-            <a:avLst/>
-          </a:prstGeom>
-          <a:noFill/>
-          <a:ln/>
-        </p:spPr>
-        <p:txBody>
-          <a:bodyPr wrap="square" lIns="0" tIns="0" rIns="0" bIns="0" rtlCol="0" anchor="ctr"/>
-          <a:lstStyle/>
-          <a:p>
-            <a:pPr indent="0" marL="0">
-              <a:lnSpc>
-                <a:spcPts val="1400"/>
-              </a:lnSpc>
-              <a:buNone/>
-            </a:pPr>
-            <a:r>
-              <a:rPr lang="en-US" sz="1050" dirty="0">
-                <a:solidFill>
-                  <a:srgbClr val="5A6880"/>
-                </a:solidFill>
-                <a:latin typeface="Calibri" pitchFamily="34" charset="0"/>
-                <a:ea typeface="Calibri" pitchFamily="34" charset="-122"/>
-                <a:cs typeface="Calibri" pitchFamily="34" charset="-120"/>
-              </a:rPr>
-              <a:t>SOC 2 Type II and an independent penetration test are committed deliverables, completed before pilot sign-off.</a:t>
-            </a:r>
-            <a:endParaRPr lang="en-US" sz="1050" dirty="0"/>
-          </a:p>
-        </p:txBody>
-      </p:sp>
-      <p:sp>
-        <p:nvSpPr>
-          <p:cNvPr id="22" name="Text 20"/>
+          <p:cNvPr id="9" name="Text 6"/>
           <p:cNvSpPr txBox="1"/>
           <p:nvPr/>
         </p:nvSpPr>
@@ -15492,7 +15857,7 @@
                 <a:ea typeface="Calibri" pitchFamily="34" charset="-122"/>
                 <a:cs typeface="Calibri" pitchFamily="34" charset="-120"/>
               </a:rPr>
-              <a:t>Certification is stated as a commitment with a date, not as a credential already held. Any claim to the contrary should be corrected before this deck is presented.</a:t>
+              <a:t>Illustrative model only. No client figures have been used. Rebuilt on the group's own outlet revenue, vendor spend, payroll and capex plan at proposal stage.</a:t>
             </a:r>
             <a:endParaRPr lang="en-US" sz="900" dirty="0"/>
           </a:p>
@@ -15563,7 +15928,7 @@
                 <a:ea typeface="Calibri" pitchFamily="34" charset="-122"/>
                 <a:cs typeface="Calibri" pitchFamily="34" charset="-120"/>
               </a:rPr>
-              <a:t>ROLLOUT</a:t>
+              <a:t>ENTERPRISE READINESS</a:t>
             </a:r>
             <a:endParaRPr lang="en-US" sz="1100" dirty="0"/>
           </a:p>
@@ -15602,7 +15967,7 @@
                 <a:ea typeface="Cambria" pitchFamily="34" charset="-122"/>
                 <a:cs typeface="Cambria" pitchFamily="34" charset="-120"/>
               </a:rPr>
-              <a:t>Pilot one property. Then the estate.</a:t>
+              <a:t>Built for your vendor review</a:t>
             </a:r>
             <a:endParaRPr lang="en-US" sz="3300" dirty="0"/>
           </a:p>
@@ -15610,60 +15975,593 @@
       </p:sp>
       <p:sp>
         <p:nvSpPr>
-          <p:cNvPr id="4" name="Text 2"/>
-          <p:cNvSpPr txBox="1"/>
-          <p:nvPr/>
-        </p:nvSpPr>
-        <p:spPr>
-          <a:xfrm>
-            <a:off x="640080" y="1572768"/>
-            <a:ext cx="8229600" cy="365760"/>
-          </a:xfrm>
-          <a:prstGeom prst="rect">
-            <a:avLst/>
-          </a:prstGeom>
-          <a:noFill/>
-          <a:ln/>
-        </p:spPr>
-        <p:txBody>
-          <a:bodyPr wrap="square" lIns="0" tIns="0" rIns="0" bIns="0" rtlCol="0" anchor="t"/>
-          <a:lstStyle/>
-          <a:p>
-            <a:pPr indent="0" marL="0">
-              <a:lnSpc>
-                <a:spcPts val="1958"/>
-              </a:lnSpc>
-              <a:buNone/>
-            </a:pPr>
-            <a:r>
-              <a:rPr lang="en-US" sz="1350" dirty="0">
-                <a:solidFill>
-                  <a:srgbClr val="5A6880"/>
-                </a:solidFill>
-                <a:latin typeface="Calibri" pitchFamily="34" charset="0"/>
-                <a:ea typeface="Calibri" pitchFamily="34" charset="-122"/>
-                <a:cs typeface="Calibri" pitchFamily="34" charset="-120"/>
-              </a:rPr>
-              <a:t>Nothing is committed estate-wide before it is proven in a property the group chooses.</a:t>
-            </a:r>
-            <a:endParaRPr lang="en-US" sz="1350" dirty="0"/>
-          </a:p>
-        </p:txBody>
-      </p:sp>
-      <p:sp>
-        <p:nvSpPr>
-          <p:cNvPr id="5" name="Shape 3"/>
+          <p:cNvPr id="4" name="Shape 2"/>
           <p:cNvSpPr/>
           <p:nvPr/>
         </p:nvSpPr>
         <p:spPr>
           <a:xfrm>
-            <a:off x="640080" y="2121408"/>
-            <a:ext cx="10911535" cy="594360"/>
+            <a:off x="640080" y="1664208"/>
+            <a:ext cx="3429000" cy="1481328"/>
           </a:xfrm>
           <a:prstGeom prst="roundRect">
             <a:avLst>
-              <a:gd name="adj" fmla="val 13846"/>
+              <a:gd name="adj" fmla="val 5556"/>
+            </a:avLst>
+          </a:prstGeom>
+          <a:solidFill>
+            <a:srgbClr val="F5F7FA"/>
+          </a:solidFill>
+          <a:ln w="12700">
+            <a:solidFill>
+              <a:srgbClr val="DFE5EE"/>
+            </a:solidFill>
+            <a:prstDash val="solid"/>
+          </a:ln>
+          <a:effectLst>
+            <a:outerShdw sx="100000" sy="100000" kx="0" ky="0" algn="bl" rotWithShape="0" blurRad="127000" dist="25400" dir="5400000">
+              <a:srgbClr val="0B1220">
+                <a:alpha val="10000"/>
+              </a:srgbClr>
+            </a:outerShdw>
+          </a:effectLst>
+        </p:spPr>
+      </p:sp>
+      <p:sp>
+        <p:nvSpPr>
+          <p:cNvPr id="5" name="Text 3"/>
+          <p:cNvSpPr txBox="1"/>
+          <p:nvPr/>
+        </p:nvSpPr>
+        <p:spPr>
+          <a:xfrm>
+            <a:off x="896112" y="1847088"/>
+            <a:ext cx="2916936" cy="274320"/>
+          </a:xfrm>
+          <a:prstGeom prst="rect">
+            <a:avLst/>
+          </a:prstGeom>
+          <a:noFill/>
+          <a:ln/>
+        </p:spPr>
+        <p:txBody>
+          <a:bodyPr wrap="square" lIns="0" tIns="0" rIns="0" bIns="0" rtlCol="0" anchor="ctr"/>
+          <a:lstStyle/>
+          <a:p>
+            <a:pPr indent="0" marL="0">
+              <a:buNone/>
+            </a:pPr>
+            <a:r>
+              <a:rPr lang="en-US" sz="1350" b="1" dirty="0">
+                <a:solidFill>
+                  <a:srgbClr val="0B1220"/>
+                </a:solidFill>
+                <a:latin typeface="Calibri" pitchFamily="34" charset="0"/>
+                <a:ea typeface="Calibri" pitchFamily="34" charset="-122"/>
+                <a:cs typeface="Calibri" pitchFamily="34" charset="-120"/>
+              </a:rPr>
+              <a:t>Guest documents</a:t>
+            </a:r>
+            <a:endParaRPr lang="en-US" sz="1350" dirty="0"/>
+          </a:p>
+        </p:txBody>
+      </p:sp>
+      <p:sp>
+        <p:nvSpPr>
+          <p:cNvPr id="6" name="Text 4"/>
+          <p:cNvSpPr txBox="1"/>
+          <p:nvPr/>
+        </p:nvSpPr>
+        <p:spPr>
+          <a:xfrm>
+            <a:off x="896112" y="2176272"/>
+            <a:ext cx="2916936" cy="896112"/>
+          </a:xfrm>
+          <a:prstGeom prst="rect">
+            <a:avLst/>
+          </a:prstGeom>
+          <a:noFill/>
+          <a:ln/>
+        </p:spPr>
+        <p:txBody>
+          <a:bodyPr wrap="square" lIns="0" tIns="0" rIns="0" bIns="0" rtlCol="0" anchor="ctr"/>
+          <a:lstStyle/>
+          <a:p>
+            <a:pPr indent="0" marL="0">
+              <a:lnSpc>
+                <a:spcPts val="1400"/>
+              </a:lnSpc>
+              <a:buNone/>
+            </a:pPr>
+            <a:r>
+              <a:rPr lang="en-US" sz="1050" dirty="0">
+                <a:solidFill>
+                  <a:srgbClr val="5A6880"/>
+                </a:solidFill>
+                <a:latin typeface="Calibri" pitchFamily="34" charset="0"/>
+                <a:ea typeface="Calibri" pitchFamily="34" charset="-122"/>
+                <a:cs typeface="Calibri" pitchFamily="34" charset="-120"/>
+              </a:rPr>
+              <a:t>Identity scans encrypted under a separately managed key, released only with a reason code, purged on a group-set retention clock.</a:t>
+            </a:r>
+            <a:endParaRPr lang="en-US" sz="1050" dirty="0"/>
+          </a:p>
+        </p:txBody>
+      </p:sp>
+      <p:sp>
+        <p:nvSpPr>
+          <p:cNvPr id="7" name="Shape 5"/>
+          <p:cNvSpPr/>
+          <p:nvPr/>
+        </p:nvSpPr>
+        <p:spPr>
+          <a:xfrm>
+            <a:off x="4471416" y="1664208"/>
+            <a:ext cx="3429000" cy="1481328"/>
+          </a:xfrm>
+          <a:prstGeom prst="roundRect">
+            <a:avLst>
+              <a:gd name="adj" fmla="val 5556"/>
+            </a:avLst>
+          </a:prstGeom>
+          <a:solidFill>
+            <a:srgbClr val="F5F7FA"/>
+          </a:solidFill>
+          <a:ln w="12700">
+            <a:solidFill>
+              <a:srgbClr val="DFE5EE"/>
+            </a:solidFill>
+            <a:prstDash val="solid"/>
+          </a:ln>
+          <a:effectLst>
+            <a:outerShdw sx="100000" sy="100000" kx="0" ky="0" algn="bl" rotWithShape="0" blurRad="127000" dist="25400" dir="5400000">
+              <a:srgbClr val="0B1220">
+                <a:alpha val="10000"/>
+              </a:srgbClr>
+            </a:outerShdw>
+          </a:effectLst>
+        </p:spPr>
+      </p:sp>
+      <p:sp>
+        <p:nvSpPr>
+          <p:cNvPr id="8" name="Text 6"/>
+          <p:cNvSpPr txBox="1"/>
+          <p:nvPr/>
+        </p:nvSpPr>
+        <p:spPr>
+          <a:xfrm>
+            <a:off x="4727448" y="1847088"/>
+            <a:ext cx="2916936" cy="274320"/>
+          </a:xfrm>
+          <a:prstGeom prst="rect">
+            <a:avLst/>
+          </a:prstGeom>
+          <a:noFill/>
+          <a:ln/>
+        </p:spPr>
+        <p:txBody>
+          <a:bodyPr wrap="square" lIns="0" tIns="0" rIns="0" bIns="0" rtlCol="0" anchor="ctr"/>
+          <a:lstStyle/>
+          <a:p>
+            <a:pPr indent="0" marL="0">
+              <a:buNone/>
+            </a:pPr>
+            <a:r>
+              <a:rPr lang="en-US" sz="1350" b="1" dirty="0">
+                <a:solidFill>
+                  <a:srgbClr val="0B1220"/>
+                </a:solidFill>
+                <a:latin typeface="Calibri" pitchFamily="34" charset="0"/>
+                <a:ea typeface="Calibri" pitchFamily="34" charset="-122"/>
+                <a:cs typeface="Calibri" pitchFamily="34" charset="-120"/>
+              </a:rPr>
+              <a:t>Card data</a:t>
+            </a:r>
+            <a:endParaRPr lang="en-US" sz="1350" dirty="0"/>
+          </a:p>
+        </p:txBody>
+      </p:sp>
+      <p:sp>
+        <p:nvSpPr>
+          <p:cNvPr id="9" name="Text 7"/>
+          <p:cNvSpPr txBox="1"/>
+          <p:nvPr/>
+        </p:nvSpPr>
+        <p:spPr>
+          <a:xfrm>
+            <a:off x="4727448" y="2176272"/>
+            <a:ext cx="2916936" cy="896112"/>
+          </a:xfrm>
+          <a:prstGeom prst="rect">
+            <a:avLst/>
+          </a:prstGeom>
+          <a:noFill/>
+          <a:ln/>
+        </p:spPr>
+        <p:txBody>
+          <a:bodyPr wrap="square" lIns="0" tIns="0" rIns="0" bIns="0" rtlCol="0" anchor="ctr"/>
+          <a:lstStyle/>
+          <a:p>
+            <a:pPr indent="0" marL="0">
+              <a:lnSpc>
+                <a:spcPts val="1400"/>
+              </a:lnSpc>
+              <a:buNone/>
+            </a:pPr>
+            <a:r>
+              <a:rPr lang="en-US" sz="1050" dirty="0">
+                <a:solidFill>
+                  <a:srgbClr val="5A6880"/>
+                </a:solidFill>
+                <a:latin typeface="Calibri" pitchFamily="34" charset="0"/>
+                <a:ea typeface="Calibri" pitchFamily="34" charset="-122"/>
+                <a:cs typeface="Calibri" pitchFamily="34" charset="-120"/>
+              </a:rPr>
+              <a:t>Never touches the platform. Capture device to acquirer; we hold a token. PCI scope stays on the light-touch assessment.</a:t>
+            </a:r>
+            <a:endParaRPr lang="en-US" sz="1050" dirty="0"/>
+          </a:p>
+        </p:txBody>
+      </p:sp>
+      <p:sp>
+        <p:nvSpPr>
+          <p:cNvPr id="10" name="Shape 8"/>
+          <p:cNvSpPr/>
+          <p:nvPr/>
+        </p:nvSpPr>
+        <p:spPr>
+          <a:xfrm>
+            <a:off x="8302752" y="1664208"/>
+            <a:ext cx="3429000" cy="1481328"/>
+          </a:xfrm>
+          <a:prstGeom prst="roundRect">
+            <a:avLst>
+              <a:gd name="adj" fmla="val 5556"/>
+            </a:avLst>
+          </a:prstGeom>
+          <a:solidFill>
+            <a:srgbClr val="F5F7FA"/>
+          </a:solidFill>
+          <a:ln w="12700">
+            <a:solidFill>
+              <a:srgbClr val="DFE5EE"/>
+            </a:solidFill>
+            <a:prstDash val="solid"/>
+          </a:ln>
+          <a:effectLst>
+            <a:outerShdw sx="100000" sy="100000" kx="0" ky="0" algn="bl" rotWithShape="0" blurRad="127000" dist="25400" dir="5400000">
+              <a:srgbClr val="0B1220">
+                <a:alpha val="10000"/>
+              </a:srgbClr>
+            </a:outerShdw>
+          </a:effectLst>
+        </p:spPr>
+      </p:sp>
+      <p:sp>
+        <p:nvSpPr>
+          <p:cNvPr id="11" name="Text 9"/>
+          <p:cNvSpPr txBox="1"/>
+          <p:nvPr/>
+        </p:nvSpPr>
+        <p:spPr>
+          <a:xfrm>
+            <a:off x="8558784" y="1847088"/>
+            <a:ext cx="2916936" cy="274320"/>
+          </a:xfrm>
+          <a:prstGeom prst="rect">
+            <a:avLst/>
+          </a:prstGeom>
+          <a:noFill/>
+          <a:ln/>
+        </p:spPr>
+        <p:txBody>
+          <a:bodyPr wrap="square" lIns="0" tIns="0" rIns="0" bIns="0" rtlCol="0" anchor="ctr"/>
+          <a:lstStyle/>
+          <a:p>
+            <a:pPr indent="0" marL="0">
+              <a:buNone/>
+            </a:pPr>
+            <a:r>
+              <a:rPr lang="en-US" sz="1350" b="1" dirty="0">
+                <a:solidFill>
+                  <a:srgbClr val="0B1220"/>
+                </a:solidFill>
+                <a:latin typeface="Calibri" pitchFamily="34" charset="0"/>
+                <a:ea typeface="Calibri" pitchFamily="34" charset="-122"/>
+                <a:cs typeface="Calibri" pitchFamily="34" charset="-120"/>
+              </a:rPr>
+              <a:t>Access control</a:t>
+            </a:r>
+            <a:endParaRPr lang="en-US" sz="1350" dirty="0"/>
+          </a:p>
+        </p:txBody>
+      </p:sp>
+      <p:sp>
+        <p:nvSpPr>
+          <p:cNvPr id="12" name="Text 10"/>
+          <p:cNvSpPr txBox="1"/>
+          <p:nvPr/>
+        </p:nvSpPr>
+        <p:spPr>
+          <a:xfrm>
+            <a:off x="8558784" y="2176272"/>
+            <a:ext cx="2916936" cy="896112"/>
+          </a:xfrm>
+          <a:prstGeom prst="rect">
+            <a:avLst/>
+          </a:prstGeom>
+          <a:noFill/>
+          <a:ln/>
+        </p:spPr>
+        <p:txBody>
+          <a:bodyPr wrap="square" lIns="0" tIns="0" rIns="0" bIns="0" rtlCol="0" anchor="ctr"/>
+          <a:lstStyle/>
+          <a:p>
+            <a:pPr indent="0" marL="0">
+              <a:lnSpc>
+                <a:spcPts val="1400"/>
+              </a:lnSpc>
+              <a:buNone/>
+            </a:pPr>
+            <a:r>
+              <a:rPr lang="en-US" sz="1050" dirty="0">
+                <a:solidFill>
+                  <a:srgbClr val="5A6880"/>
+                </a:solidFill>
+                <a:latin typeface="Calibri" pitchFamily="34" charset="0"/>
+                <a:ea typeface="Calibri" pitchFamily="34" charset="-122"/>
+                <a:cs typeface="Calibri" pitchFamily="34" charset="-120"/>
+              </a:rPr>
+              <a:t>Role-based and least-privilege, federated to your identity provider. Group sees the estate, property sees itself.</a:t>
+            </a:r>
+            <a:endParaRPr lang="en-US" sz="1050" dirty="0"/>
+          </a:p>
+        </p:txBody>
+      </p:sp>
+      <p:sp>
+        <p:nvSpPr>
+          <p:cNvPr id="13" name="Shape 11"/>
+          <p:cNvSpPr/>
+          <p:nvPr/>
+        </p:nvSpPr>
+        <p:spPr>
+          <a:xfrm>
+            <a:off x="640080" y="3383280"/>
+            <a:ext cx="3429000" cy="1481328"/>
+          </a:xfrm>
+          <a:prstGeom prst="roundRect">
+            <a:avLst>
+              <a:gd name="adj" fmla="val 5556"/>
+            </a:avLst>
+          </a:prstGeom>
+          <a:solidFill>
+            <a:srgbClr val="F5F7FA"/>
+          </a:solidFill>
+          <a:ln w="12700">
+            <a:solidFill>
+              <a:srgbClr val="DFE5EE"/>
+            </a:solidFill>
+            <a:prstDash val="solid"/>
+          </a:ln>
+          <a:effectLst>
+            <a:outerShdw sx="100000" sy="100000" kx="0" ky="0" algn="bl" rotWithShape="0" blurRad="127000" dist="25400" dir="5400000">
+              <a:srgbClr val="0B1220">
+                <a:alpha val="10000"/>
+              </a:srgbClr>
+            </a:outerShdw>
+          </a:effectLst>
+        </p:spPr>
+      </p:sp>
+      <p:sp>
+        <p:nvSpPr>
+          <p:cNvPr id="14" name="Text 12"/>
+          <p:cNvSpPr txBox="1"/>
+          <p:nvPr/>
+        </p:nvSpPr>
+        <p:spPr>
+          <a:xfrm>
+            <a:off x="896112" y="3566160"/>
+            <a:ext cx="2916936" cy="274320"/>
+          </a:xfrm>
+          <a:prstGeom prst="rect">
+            <a:avLst/>
+          </a:prstGeom>
+          <a:noFill/>
+          <a:ln/>
+        </p:spPr>
+        <p:txBody>
+          <a:bodyPr wrap="square" lIns="0" tIns="0" rIns="0" bIns="0" rtlCol="0" anchor="ctr"/>
+          <a:lstStyle/>
+          <a:p>
+            <a:pPr indent="0" marL="0">
+              <a:buNone/>
+            </a:pPr>
+            <a:r>
+              <a:rPr lang="en-US" sz="1350" b="1" dirty="0">
+                <a:solidFill>
+                  <a:srgbClr val="0B1220"/>
+                </a:solidFill>
+                <a:latin typeface="Calibri" pitchFamily="34" charset="0"/>
+                <a:ea typeface="Calibri" pitchFamily="34" charset="-122"/>
+                <a:cs typeface="Calibri" pitchFamily="34" charset="-120"/>
+              </a:rPr>
+              <a:t>Audit trail</a:t>
+            </a:r>
+            <a:endParaRPr lang="en-US" sz="1350" dirty="0"/>
+          </a:p>
+        </p:txBody>
+      </p:sp>
+      <p:sp>
+        <p:nvSpPr>
+          <p:cNvPr id="15" name="Text 13"/>
+          <p:cNvSpPr txBox="1"/>
+          <p:nvPr/>
+        </p:nvSpPr>
+        <p:spPr>
+          <a:xfrm>
+            <a:off x="896112" y="3895344"/>
+            <a:ext cx="2916936" cy="896112"/>
+          </a:xfrm>
+          <a:prstGeom prst="rect">
+            <a:avLst/>
+          </a:prstGeom>
+          <a:noFill/>
+          <a:ln/>
+        </p:spPr>
+        <p:txBody>
+          <a:bodyPr wrap="square" lIns="0" tIns="0" rIns="0" bIns="0" rtlCol="0" anchor="ctr"/>
+          <a:lstStyle/>
+          <a:p>
+            <a:pPr indent="0" marL="0">
+              <a:lnSpc>
+                <a:spcPts val="1400"/>
+              </a:lnSpc>
+              <a:buNone/>
+            </a:pPr>
+            <a:r>
+              <a:rPr lang="en-US" sz="1050" dirty="0">
+                <a:solidFill>
+                  <a:srgbClr val="5A6880"/>
+                </a:solidFill>
+                <a:latin typeface="Calibri" pitchFamily="34" charset="0"/>
+                <a:ea typeface="Calibri" pitchFamily="34" charset="-122"/>
+                <a:cs typeface="Calibri" pitchFamily="34" charset="-120"/>
+              </a:rPr>
+              <a:t>Append-only log of every state change. Every privileged read carries actor, time and reason, exportable for review.</a:t>
+            </a:r>
+            <a:endParaRPr lang="en-US" sz="1050" dirty="0"/>
+          </a:p>
+        </p:txBody>
+      </p:sp>
+      <p:sp>
+        <p:nvSpPr>
+          <p:cNvPr id="16" name="Shape 14"/>
+          <p:cNvSpPr/>
+          <p:nvPr/>
+        </p:nvSpPr>
+        <p:spPr>
+          <a:xfrm>
+            <a:off x="4471416" y="3383280"/>
+            <a:ext cx="3429000" cy="1481328"/>
+          </a:xfrm>
+          <a:prstGeom prst="roundRect">
+            <a:avLst>
+              <a:gd name="adj" fmla="val 5556"/>
+            </a:avLst>
+          </a:prstGeom>
+          <a:solidFill>
+            <a:srgbClr val="F5F7FA"/>
+          </a:solidFill>
+          <a:ln w="12700">
+            <a:solidFill>
+              <a:srgbClr val="DFE5EE"/>
+            </a:solidFill>
+            <a:prstDash val="solid"/>
+          </a:ln>
+          <a:effectLst>
+            <a:outerShdw sx="100000" sy="100000" kx="0" ky="0" algn="bl" rotWithShape="0" blurRad="127000" dist="25400" dir="5400000">
+              <a:srgbClr val="0B1220">
+                <a:alpha val="10000"/>
+              </a:srgbClr>
+            </a:outerShdw>
+          </a:effectLst>
+        </p:spPr>
+      </p:sp>
+      <p:sp>
+        <p:nvSpPr>
+          <p:cNvPr id="17" name="Text 15"/>
+          <p:cNvSpPr txBox="1"/>
+          <p:nvPr/>
+        </p:nvSpPr>
+        <p:spPr>
+          <a:xfrm>
+            <a:off x="4727448" y="3566160"/>
+            <a:ext cx="2916936" cy="274320"/>
+          </a:xfrm>
+          <a:prstGeom prst="rect">
+            <a:avLst/>
+          </a:prstGeom>
+          <a:noFill/>
+          <a:ln/>
+        </p:spPr>
+        <p:txBody>
+          <a:bodyPr wrap="square" lIns="0" tIns="0" rIns="0" bIns="0" rtlCol="0" anchor="ctr"/>
+          <a:lstStyle/>
+          <a:p>
+            <a:pPr indent="0" marL="0">
+              <a:buNone/>
+            </a:pPr>
+            <a:r>
+              <a:rPr lang="en-US" sz="1350" b="1" dirty="0">
+                <a:solidFill>
+                  <a:srgbClr val="0B1220"/>
+                </a:solidFill>
+                <a:latin typeface="Calibri" pitchFamily="34" charset="0"/>
+                <a:ea typeface="Calibri" pitchFamily="34" charset="-122"/>
+                <a:cs typeface="Calibri" pitchFamily="34" charset="-120"/>
+              </a:rPr>
+              <a:t>Data residency</a:t>
+            </a:r>
+            <a:endParaRPr lang="en-US" sz="1350" dirty="0"/>
+          </a:p>
+        </p:txBody>
+      </p:sp>
+      <p:sp>
+        <p:nvSpPr>
+          <p:cNvPr id="18" name="Text 16"/>
+          <p:cNvSpPr txBox="1"/>
+          <p:nvPr/>
+        </p:nvSpPr>
+        <p:spPr>
+          <a:xfrm>
+            <a:off x="4727448" y="3895344"/>
+            <a:ext cx="2916936" cy="896112"/>
+          </a:xfrm>
+          <a:prstGeom prst="rect">
+            <a:avLst/>
+          </a:prstGeom>
+          <a:noFill/>
+          <a:ln/>
+        </p:spPr>
+        <p:txBody>
+          <a:bodyPr wrap="square" lIns="0" tIns="0" rIns="0" bIns="0" rtlCol="0" anchor="ctr"/>
+          <a:lstStyle/>
+          <a:p>
+            <a:pPr indent="0" marL="0">
+              <a:lnSpc>
+                <a:spcPts val="1400"/>
+              </a:lnSpc>
+              <a:buNone/>
+            </a:pPr>
+            <a:r>
+              <a:rPr lang="en-US" sz="1050" dirty="0">
+                <a:solidFill>
+                  <a:srgbClr val="5A6880"/>
+                </a:solidFill>
+                <a:latin typeface="Calibri" pitchFamily="34" charset="0"/>
+                <a:ea typeface="Calibri" pitchFamily="34" charset="-122"/>
+                <a:cs typeface="Calibri" pitchFamily="34" charset="-120"/>
+              </a:rPr>
+              <a:t>Configurable per property and per region — a requirement for any operator across multiple jurisdictions.</a:t>
+            </a:r>
+            <a:endParaRPr lang="en-US" sz="1050" dirty="0"/>
+          </a:p>
+        </p:txBody>
+      </p:sp>
+      <p:sp>
+        <p:nvSpPr>
+          <p:cNvPr id="19" name="Shape 17"/>
+          <p:cNvSpPr/>
+          <p:nvPr/>
+        </p:nvSpPr>
+        <p:spPr>
+          <a:xfrm>
+            <a:off x="8302752" y="3383280"/>
+            <a:ext cx="3429000" cy="1481328"/>
+          </a:xfrm>
+          <a:prstGeom prst="roundRect">
+            <a:avLst>
+              <a:gd name="adj" fmla="val 5556"/>
             </a:avLst>
           </a:prstGeom>
           <a:solidFill>
@@ -15686,194 +16584,285 @@
       </p:sp>
       <p:sp>
         <p:nvSpPr>
-          <p:cNvPr id="6" name="Shape 4"/>
+          <p:cNvPr id="20" name="Text 18"/>
+          <p:cNvSpPr txBox="1"/>
+          <p:nvPr/>
+        </p:nvSpPr>
+        <p:spPr>
+          <a:xfrm>
+            <a:off x="8558784" y="3566160"/>
+            <a:ext cx="2916936" cy="274320"/>
+          </a:xfrm>
+          <a:prstGeom prst="rect">
+            <a:avLst/>
+          </a:prstGeom>
+          <a:noFill/>
+          <a:ln/>
+        </p:spPr>
+        <p:txBody>
+          <a:bodyPr wrap="square" lIns="0" tIns="0" rIns="0" bIns="0" rtlCol="0" anchor="ctr"/>
+          <a:lstStyle/>
+          <a:p>
+            <a:pPr indent="0" marL="0">
+              <a:buNone/>
+            </a:pPr>
+            <a:r>
+              <a:rPr lang="en-US" sz="1350" b="1" dirty="0">
+                <a:solidFill>
+                  <a:srgbClr val="0B1220"/>
+                </a:solidFill>
+                <a:latin typeface="Calibri" pitchFamily="34" charset="0"/>
+                <a:ea typeface="Calibri" pitchFamily="34" charset="-122"/>
+                <a:cs typeface="Calibri" pitchFamily="34" charset="-120"/>
+              </a:rPr>
+              <a:t>Certification</a:t>
+            </a:r>
+            <a:endParaRPr lang="en-US" sz="1350" dirty="0"/>
+          </a:p>
+        </p:txBody>
+      </p:sp>
+      <p:sp>
+        <p:nvSpPr>
+          <p:cNvPr id="21" name="Text 19"/>
+          <p:cNvSpPr txBox="1"/>
+          <p:nvPr/>
+        </p:nvSpPr>
+        <p:spPr>
+          <a:xfrm>
+            <a:off x="8558784" y="3895344"/>
+            <a:ext cx="2916936" cy="896112"/>
+          </a:xfrm>
+          <a:prstGeom prst="rect">
+            <a:avLst/>
+          </a:prstGeom>
+          <a:noFill/>
+          <a:ln/>
+        </p:spPr>
+        <p:txBody>
+          <a:bodyPr wrap="square" lIns="0" tIns="0" rIns="0" bIns="0" rtlCol="0" anchor="ctr"/>
+          <a:lstStyle/>
+          <a:p>
+            <a:pPr indent="0" marL="0">
+              <a:lnSpc>
+                <a:spcPts val="1400"/>
+              </a:lnSpc>
+              <a:buNone/>
+            </a:pPr>
+            <a:r>
+              <a:rPr lang="en-US" sz="1050" dirty="0">
+                <a:solidFill>
+                  <a:srgbClr val="5A6880"/>
+                </a:solidFill>
+                <a:latin typeface="Calibri" pitchFamily="34" charset="0"/>
+                <a:ea typeface="Calibri" pitchFamily="34" charset="-122"/>
+                <a:cs typeface="Calibri" pitchFamily="34" charset="-120"/>
+              </a:rPr>
+              <a:t>SOC 2 Type II and an independent penetration test are committed deliverables, completed before pilot sign-off.</a:t>
+            </a:r>
+            <a:endParaRPr lang="en-US" sz="1050" dirty="0"/>
+          </a:p>
+        </p:txBody>
+      </p:sp>
+      <p:sp>
+        <p:nvSpPr>
+          <p:cNvPr id="22" name="Text 20"/>
+          <p:cNvSpPr txBox="1"/>
+          <p:nvPr/>
+        </p:nvSpPr>
+        <p:spPr>
+          <a:xfrm>
+            <a:off x="640080" y="6291072"/>
+            <a:ext cx="10911535" cy="274320"/>
+          </a:xfrm>
+          <a:prstGeom prst="rect">
+            <a:avLst/>
+          </a:prstGeom>
+          <a:noFill/>
+          <a:ln/>
+        </p:spPr>
+        <p:txBody>
+          <a:bodyPr wrap="square" lIns="0" tIns="0" rIns="0" bIns="0" rtlCol="0" anchor="ctr"/>
+          <a:lstStyle/>
+          <a:p>
+            <a:pPr indent="0" marL="0">
+              <a:buNone/>
+            </a:pPr>
+            <a:r>
+              <a:rPr lang="en-US" sz="900" i="1" dirty="0">
+                <a:solidFill>
+                  <a:srgbClr val="8B96A8"/>
+                </a:solidFill>
+                <a:latin typeface="Calibri" pitchFamily="34" charset="0"/>
+                <a:ea typeface="Calibri" pitchFamily="34" charset="-122"/>
+                <a:cs typeface="Calibri" pitchFamily="34" charset="-120"/>
+              </a:rPr>
+              <a:t>Certification is stated as a commitment with a date, not as a credential already held. Any claim to the contrary should be corrected before this deck is presented.</a:t>
+            </a:r>
+            <a:endParaRPr lang="en-US" sz="900" dirty="0"/>
+          </a:p>
+        </p:txBody>
+      </p:sp>
+    </p:spTree>
+  </p:cSld>
+  <p:clrMapOvr>
+    <a:masterClrMapping/>
+  </p:clrMapOvr>
+</p:sld>
+</file>
+
+<file path=ppt/slides/slide24.xml><?xml version="1.0" encoding="utf-8"?>
+<p:sld xmlns:a="http://schemas.openxmlformats.org/drawingml/2006/main" xmlns:r="http://schemas.openxmlformats.org/officeDocument/2006/relationships" xmlns:p="http://schemas.openxmlformats.org/presentationml/2006/main">
+  <p:cSld name="Slide 24">
+    <p:bg>
+      <p:bgPr>
+        <a:solidFill>
+          <a:srgbClr val="FFFFFF"/>
+        </a:solidFill>
+      </p:bgPr>
+    </p:bg>
+    <p:spTree>
+      <p:nvGrpSpPr>
+        <p:cNvPr id="1" name=""/>
+        <p:cNvGrpSpPr/>
+        <p:nvPr/>
+      </p:nvGrpSpPr>
+      <p:grpSpPr>
+        <a:xfrm>
+          <a:off x="0" y="0"/>
+          <a:ext cx="0" cy="0"/>
+          <a:chOff x="0" y="0"/>
+          <a:chExt cx="0" cy="0"/>
+        </a:xfrm>
+      </p:grpSpPr>
+      <p:sp>
+        <p:nvSpPr>
+          <p:cNvPr id="2" name="Text 0"/>
+          <p:cNvSpPr txBox="1"/>
+          <p:nvPr/>
+        </p:nvSpPr>
+        <p:spPr>
+          <a:xfrm>
+            <a:off x="640080" y="384048"/>
+            <a:ext cx="10911535" cy="256032"/>
+          </a:xfrm>
+          <a:prstGeom prst="rect">
+            <a:avLst/>
+          </a:prstGeom>
+          <a:noFill/>
+          <a:ln/>
+        </p:spPr>
+        <p:txBody>
+          <a:bodyPr wrap="square" lIns="0" tIns="0" rIns="0" bIns="0" rtlCol="0" anchor="ctr"/>
+          <a:lstStyle/>
+          <a:p>
+            <a:pPr indent="0" marL="0">
+              <a:buNone/>
+            </a:pPr>
+            <a:r>
+              <a:rPr lang="en-US" sz="1100" b="1" spc="200" kern="0" dirty="0">
+                <a:solidFill>
+                  <a:srgbClr val="A87C1F"/>
+                </a:solidFill>
+                <a:latin typeface="Calibri" pitchFamily="34" charset="0"/>
+                <a:ea typeface="Calibri" pitchFamily="34" charset="-122"/>
+                <a:cs typeface="Calibri" pitchFamily="34" charset="-120"/>
+              </a:rPr>
+              <a:t>ROLLOUT</a:t>
+            </a:r>
+            <a:endParaRPr lang="en-US" sz="1100" dirty="0"/>
+          </a:p>
+        </p:txBody>
+      </p:sp>
+      <p:sp>
+        <p:nvSpPr>
+          <p:cNvPr id="3" name="Text 1"/>
+          <p:cNvSpPr txBox="1"/>
+          <p:nvPr/>
+        </p:nvSpPr>
+        <p:spPr>
+          <a:xfrm>
+            <a:off x="640080" y="658368"/>
+            <a:ext cx="10911535" cy="777240"/>
+          </a:xfrm>
+          <a:prstGeom prst="rect">
+            <a:avLst/>
+          </a:prstGeom>
+          <a:noFill/>
+          <a:ln/>
+        </p:spPr>
+        <p:txBody>
+          <a:bodyPr wrap="square" lIns="0" tIns="0" rIns="0" bIns="0" rtlCol="0" anchor="t"/>
+          <a:lstStyle/>
+          <a:p>
+            <a:pPr indent="0" marL="0">
+              <a:buNone/>
+            </a:pPr>
+            <a:r>
+              <a:rPr lang="en-US" sz="3300" b="1" dirty="0">
+                <a:solidFill>
+                  <a:srgbClr val="0B1220"/>
+                </a:solidFill>
+                <a:latin typeface="Cambria" pitchFamily="34" charset="0"/>
+                <a:ea typeface="Cambria" pitchFamily="34" charset="-122"/>
+                <a:cs typeface="Cambria" pitchFamily="34" charset="-120"/>
+              </a:rPr>
+              <a:t>Pilot one property. Then the estate.</a:t>
+            </a:r>
+            <a:endParaRPr lang="en-US" sz="3300" dirty="0"/>
+          </a:p>
+        </p:txBody>
+      </p:sp>
+      <p:sp>
+        <p:nvSpPr>
+          <p:cNvPr id="4" name="Text 2"/>
+          <p:cNvSpPr txBox="1"/>
+          <p:nvPr/>
+        </p:nvSpPr>
+        <p:spPr>
+          <a:xfrm>
+            <a:off x="640080" y="1572768"/>
+            <a:ext cx="8229600" cy="365760"/>
+          </a:xfrm>
+          <a:prstGeom prst="rect">
+            <a:avLst/>
+          </a:prstGeom>
+          <a:noFill/>
+          <a:ln/>
+        </p:spPr>
+        <p:txBody>
+          <a:bodyPr wrap="square" lIns="0" tIns="0" rIns="0" bIns="0" rtlCol="0" anchor="t"/>
+          <a:lstStyle/>
+          <a:p>
+            <a:pPr indent="0" marL="0">
+              <a:lnSpc>
+                <a:spcPts val="1958"/>
+              </a:lnSpc>
+              <a:buNone/>
+            </a:pPr>
+            <a:r>
+              <a:rPr lang="en-US" sz="1350" dirty="0">
+                <a:solidFill>
+                  <a:srgbClr val="5A6880"/>
+                </a:solidFill>
+                <a:latin typeface="Calibri" pitchFamily="34" charset="0"/>
+                <a:ea typeface="Calibri" pitchFamily="34" charset="-122"/>
+                <a:cs typeface="Calibri" pitchFamily="34" charset="-120"/>
+              </a:rPr>
+              <a:t>Nothing is committed estate-wide before it is proven in a property the group chooses.</a:t>
+            </a:r>
+            <a:endParaRPr lang="en-US" sz="1350" dirty="0"/>
+          </a:p>
+        </p:txBody>
+      </p:sp>
+      <p:sp>
+        <p:nvSpPr>
+          <p:cNvPr id="5" name="Shape 3"/>
           <p:cNvSpPr/>
           <p:nvPr/>
         </p:nvSpPr>
         <p:spPr>
           <a:xfrm>
-            <a:off x="896112" y="2221992"/>
-            <a:ext cx="393192" cy="393192"/>
-          </a:xfrm>
-          <a:prstGeom prst="ellipse">
-            <a:avLst/>
-          </a:prstGeom>
-          <a:solidFill>
-            <a:srgbClr val="A87C1F"/>
-          </a:solidFill>
-          <a:ln w="12700">
-            <a:solidFill>
-              <a:srgbClr val="A87C1F"/>
-            </a:solidFill>
-            <a:prstDash val="solid"/>
-          </a:ln>
-        </p:spPr>
-      </p:sp>
-      <p:sp>
-        <p:nvSpPr>
-          <p:cNvPr id="7" name="Text 5"/>
-          <p:cNvSpPr txBox="1"/>
-          <p:nvPr/>
-        </p:nvSpPr>
-        <p:spPr>
-          <a:xfrm>
-            <a:off x="896112" y="2221992"/>
-            <a:ext cx="393192" cy="393192"/>
-          </a:xfrm>
-          <a:prstGeom prst="rect">
-            <a:avLst/>
-          </a:prstGeom>
-          <a:noFill/>
-          <a:ln/>
-        </p:spPr>
-        <p:txBody>
-          <a:bodyPr wrap="square" lIns="0" tIns="0" rIns="0" bIns="0" rtlCol="0" anchor="ctr"/>
-          <a:lstStyle/>
-          <a:p>
-            <a:pPr algn="ctr" indent="0" marL="0">
-              <a:buNone/>
-            </a:pPr>
-            <a:r>
-              <a:rPr lang="en-US" sz="1200" b="1" dirty="0">
-                <a:solidFill>
-                  <a:srgbClr val="FFFFFF"/>
-                </a:solidFill>
-                <a:latin typeface="Calibri" pitchFamily="34" charset="0"/>
-                <a:ea typeface="Calibri" pitchFamily="34" charset="-122"/>
-                <a:cs typeface="Calibri" pitchFamily="34" charset="-120"/>
-              </a:rPr>
-              <a:t>1</a:t>
-            </a:r>
-            <a:endParaRPr lang="en-US" sz="1200" dirty="0"/>
-          </a:p>
-        </p:txBody>
-      </p:sp>
-      <p:sp>
-        <p:nvSpPr>
-          <p:cNvPr id="8" name="Text 6"/>
-          <p:cNvSpPr txBox="1"/>
-          <p:nvPr/>
-        </p:nvSpPr>
-        <p:spPr>
-          <a:xfrm>
-            <a:off x="1463040" y="2121408"/>
-            <a:ext cx="3017520" cy="594360"/>
-          </a:xfrm>
-          <a:prstGeom prst="rect">
-            <a:avLst/>
-          </a:prstGeom>
-          <a:noFill/>
-          <a:ln/>
-        </p:spPr>
-        <p:txBody>
-          <a:bodyPr wrap="square" lIns="0" tIns="0" rIns="0" bIns="0" rtlCol="0" anchor="ctr"/>
-          <a:lstStyle/>
-          <a:p>
-            <a:pPr indent="0" marL="0">
-              <a:buNone/>
-            </a:pPr>
-            <a:r>
-              <a:rPr lang="en-US" sz="1250" b="1" dirty="0">
-                <a:solidFill>
-                  <a:srgbClr val="0B1220"/>
-                </a:solidFill>
-                <a:latin typeface="Calibri" pitchFamily="34" charset="0"/>
-                <a:ea typeface="Calibri" pitchFamily="34" charset="-122"/>
-                <a:cs typeface="Calibri" pitchFamily="34" charset="-120"/>
-              </a:rPr>
-              <a:t>Pilot — survey &amp; foundation</a:t>
-            </a:r>
-            <a:endParaRPr lang="en-US" sz="1250" dirty="0"/>
-          </a:p>
-        </p:txBody>
-      </p:sp>
-      <p:sp>
-        <p:nvSpPr>
-          <p:cNvPr id="9" name="Text 7"/>
-          <p:cNvSpPr txBox="1"/>
-          <p:nvPr/>
-        </p:nvSpPr>
-        <p:spPr>
-          <a:xfrm>
-            <a:off x="4572000" y="2121408"/>
-            <a:ext cx="5623560" cy="594360"/>
-          </a:xfrm>
-          <a:prstGeom prst="rect">
-            <a:avLst/>
-          </a:prstGeom>
-          <a:noFill/>
-          <a:ln/>
-        </p:spPr>
-        <p:txBody>
-          <a:bodyPr wrap="square" lIns="0" tIns="0" rIns="0" bIns="0" rtlCol="0" anchor="ctr"/>
-          <a:lstStyle/>
-          <a:p>
-            <a:pPr indent="0" marL="0">
-              <a:buNone/>
-            </a:pPr>
-            <a:r>
-              <a:rPr lang="en-US" sz="1050" dirty="0">
-                <a:solidFill>
-                  <a:srgbClr val="5A6880"/>
-                </a:solidFill>
-                <a:latin typeface="Calibri" pitchFamily="34" charset="0"/>
-                <a:ea typeface="Calibri" pitchFamily="34" charset="-122"/>
-                <a:cs typeface="Calibri" pitchFamily="34" charset="-120"/>
-              </a:rPr>
-              <a:t>Television and network survey. Guest record, identity capture and the document vault live in one property.</a:t>
-            </a:r>
-            <a:endParaRPr lang="en-US" sz="1050" dirty="0"/>
-          </a:p>
-        </p:txBody>
-      </p:sp>
-      <p:sp>
-        <p:nvSpPr>
-          <p:cNvPr id="10" name="Text 8"/>
-          <p:cNvSpPr txBox="1"/>
-          <p:nvPr/>
-        </p:nvSpPr>
-        <p:spPr>
-          <a:xfrm>
-            <a:off x="10287000" y="2121408"/>
-            <a:ext cx="1234440" cy="594360"/>
-          </a:xfrm>
-          <a:prstGeom prst="rect">
-            <a:avLst/>
-          </a:prstGeom>
-          <a:noFill/>
-          <a:ln/>
-        </p:spPr>
-        <p:txBody>
-          <a:bodyPr wrap="square" lIns="0" tIns="0" rIns="0" bIns="0" rtlCol="0" anchor="ctr"/>
-          <a:lstStyle/>
-          <a:p>
-            <a:pPr algn="r" indent="0" marL="0">
-              <a:buNone/>
-            </a:pPr>
-            <a:r>
-              <a:rPr lang="en-US" sz="1050" b="1" dirty="0">
-                <a:solidFill>
-                  <a:srgbClr val="A87C1F"/>
-                </a:solidFill>
-                <a:latin typeface="Calibri" pitchFamily="34" charset="0"/>
-                <a:ea typeface="Calibri" pitchFamily="34" charset="-122"/>
-                <a:cs typeface="Calibri" pitchFamily="34" charset="-120"/>
-              </a:rPr>
-              <a:t>Weeks 1–6</a:t>
-            </a:r>
-            <a:endParaRPr lang="en-US" sz="1050" dirty="0"/>
-          </a:p>
-        </p:txBody>
-      </p:sp>
-      <p:sp>
-        <p:nvSpPr>
-          <p:cNvPr id="11" name="Shape 9"/>
-          <p:cNvSpPr/>
-          <p:nvPr/>
-        </p:nvSpPr>
-        <p:spPr>
-          <a:xfrm>
-            <a:off x="640080" y="2798064"/>
+            <a:off x="640080" y="2121408"/>
             <a:ext cx="10911535" cy="594360"/>
           </a:xfrm>
           <a:prstGeom prst="roundRect">
@@ -15901,13 +16890,13 @@
       </p:sp>
       <p:sp>
         <p:nvSpPr>
-          <p:cNvPr id="12" name="Shape 10"/>
+          <p:cNvPr id="6" name="Shape 4"/>
           <p:cNvSpPr/>
           <p:nvPr/>
         </p:nvSpPr>
         <p:spPr>
           <a:xfrm>
-            <a:off x="896112" y="2898648"/>
+            <a:off x="896112" y="2221992"/>
             <a:ext cx="393192" cy="393192"/>
           </a:xfrm>
           <a:prstGeom prst="ellipse">
@@ -15926,13 +16915,13 @@
       </p:sp>
       <p:sp>
         <p:nvSpPr>
-          <p:cNvPr id="13" name="Text 11"/>
-          <p:cNvSpPr txBox="1"/>
-          <p:nvPr/>
-        </p:nvSpPr>
-        <p:spPr>
-          <a:xfrm>
-            <a:off x="896112" y="2898648"/>
+          <p:cNvPr id="7" name="Text 5"/>
+          <p:cNvSpPr txBox="1"/>
+          <p:nvPr/>
+        </p:nvSpPr>
+        <p:spPr>
+          <a:xfrm>
+            <a:off x="896112" y="2221992"/>
             <a:ext cx="393192" cy="393192"/>
           </a:xfrm>
           <a:prstGeom prst="rect">
@@ -15957,7 +16946,7 @@
                 <a:ea typeface="Calibri" pitchFamily="34" charset="-122"/>
                 <a:cs typeface="Calibri" pitchFamily="34" charset="-120"/>
               </a:rPr>
-              <a:t>2</a:t>
+              <a:t>1</a:t>
             </a:r>
             <a:endParaRPr lang="en-US" sz="1200" dirty="0"/>
           </a:p>
@@ -15965,13 +16954,13 @@
       </p:sp>
       <p:sp>
         <p:nvSpPr>
-          <p:cNvPr id="14" name="Text 12"/>
-          <p:cNvSpPr txBox="1"/>
-          <p:nvPr/>
-        </p:nvSpPr>
-        <p:spPr>
-          <a:xfrm>
-            <a:off x="1463040" y="2798064"/>
+          <p:cNvPr id="8" name="Text 6"/>
+          <p:cNvSpPr txBox="1"/>
+          <p:nvPr/>
+        </p:nvSpPr>
+        <p:spPr>
+          <a:xfrm>
+            <a:off x="1463040" y="2121408"/>
             <a:ext cx="3017520" cy="594360"/>
           </a:xfrm>
           <a:prstGeom prst="rect">
@@ -15996,7 +16985,7 @@
                 <a:ea typeface="Calibri" pitchFamily="34" charset="-122"/>
                 <a:cs typeface="Calibri" pitchFamily="34" charset="-120"/>
               </a:rPr>
-              <a:t>Pilot — money &amp; the room</a:t>
+              <a:t>Pilot — survey &amp; foundation</a:t>
             </a:r>
             <a:endParaRPr lang="en-US" sz="1250" dirty="0"/>
           </a:p>
@@ -16004,13 +16993,13 @@
       </p:sp>
       <p:sp>
         <p:nvSpPr>
-          <p:cNvPr id="15" name="Text 13"/>
-          <p:cNvSpPr txBox="1"/>
-          <p:nvPr/>
-        </p:nvSpPr>
-        <p:spPr>
-          <a:xfrm>
-            <a:off x="4572000" y="2798064"/>
+          <p:cNvPr id="9" name="Text 7"/>
+          <p:cNvSpPr txBox="1"/>
+          <p:nvPr/>
+        </p:nvSpPr>
+        <p:spPr>
+          <a:xfrm>
+            <a:off x="4572000" y="2121408"/>
             <a:ext cx="5623560" cy="594360"/>
           </a:xfrm>
           <a:prstGeom prst="rect">
@@ -16035,7 +17024,7 @@
                 <a:ea typeface="Calibri" pitchFamily="34" charset="-122"/>
                 <a:cs typeface="Calibri" pitchFamily="34" charset="-120"/>
               </a:rPr>
-              <a:t>Payments, folio, one outlet, and the guest television application. The full guest journey, one site.</a:t>
+              <a:t>Television and network survey. Guest record, identity capture and the document vault live in one property.</a:t>
             </a:r>
             <a:endParaRPr lang="en-US" sz="1050" dirty="0"/>
           </a:p>
@@ -16043,13 +17032,13 @@
       </p:sp>
       <p:sp>
         <p:nvSpPr>
-          <p:cNvPr id="16" name="Text 14"/>
-          <p:cNvSpPr txBox="1"/>
-          <p:nvPr/>
-        </p:nvSpPr>
-        <p:spPr>
-          <a:xfrm>
-            <a:off x="10287000" y="2798064"/>
+          <p:cNvPr id="10" name="Text 8"/>
+          <p:cNvSpPr txBox="1"/>
+          <p:nvPr/>
+        </p:nvSpPr>
+        <p:spPr>
+          <a:xfrm>
+            <a:off x="10287000" y="2121408"/>
             <a:ext cx="1234440" cy="594360"/>
           </a:xfrm>
           <a:prstGeom prst="rect">
@@ -16074,7 +17063,7 @@
                 <a:ea typeface="Calibri" pitchFamily="34" charset="-122"/>
                 <a:cs typeface="Calibri" pitchFamily="34" charset="-120"/>
               </a:rPr>
-              <a:t>Weeks 7–16</a:t>
+              <a:t>Weeks 1–6</a:t>
             </a:r>
             <a:endParaRPr lang="en-US" sz="1050" dirty="0"/>
           </a:p>
@@ -16082,13 +17071,13 @@
       </p:sp>
       <p:sp>
         <p:nvSpPr>
-          <p:cNvPr id="17" name="Shape 15"/>
+          <p:cNvPr id="11" name="Shape 9"/>
           <p:cNvSpPr/>
           <p:nvPr/>
         </p:nvSpPr>
         <p:spPr>
           <a:xfrm>
-            <a:off x="640080" y="3474720"/>
+            <a:off x="640080" y="2798064"/>
             <a:ext cx="10911535" cy="594360"/>
           </a:xfrm>
           <a:prstGeom prst="roundRect">
@@ -16116,6 +17105,221 @@
       </p:sp>
       <p:sp>
         <p:nvSpPr>
+          <p:cNvPr id="12" name="Shape 10"/>
+          <p:cNvSpPr/>
+          <p:nvPr/>
+        </p:nvSpPr>
+        <p:spPr>
+          <a:xfrm>
+            <a:off x="896112" y="2898648"/>
+            <a:ext cx="393192" cy="393192"/>
+          </a:xfrm>
+          <a:prstGeom prst="ellipse">
+            <a:avLst/>
+          </a:prstGeom>
+          <a:solidFill>
+            <a:srgbClr val="A87C1F"/>
+          </a:solidFill>
+          <a:ln w="12700">
+            <a:solidFill>
+              <a:srgbClr val="A87C1F"/>
+            </a:solidFill>
+            <a:prstDash val="solid"/>
+          </a:ln>
+        </p:spPr>
+      </p:sp>
+      <p:sp>
+        <p:nvSpPr>
+          <p:cNvPr id="13" name="Text 11"/>
+          <p:cNvSpPr txBox="1"/>
+          <p:nvPr/>
+        </p:nvSpPr>
+        <p:spPr>
+          <a:xfrm>
+            <a:off x="896112" y="2898648"/>
+            <a:ext cx="393192" cy="393192"/>
+          </a:xfrm>
+          <a:prstGeom prst="rect">
+            <a:avLst/>
+          </a:prstGeom>
+          <a:noFill/>
+          <a:ln/>
+        </p:spPr>
+        <p:txBody>
+          <a:bodyPr wrap="square" lIns="0" tIns="0" rIns="0" bIns="0" rtlCol="0" anchor="ctr"/>
+          <a:lstStyle/>
+          <a:p>
+            <a:pPr algn="ctr" indent="0" marL="0">
+              <a:buNone/>
+            </a:pPr>
+            <a:r>
+              <a:rPr lang="en-US" sz="1200" b="1" dirty="0">
+                <a:solidFill>
+                  <a:srgbClr val="FFFFFF"/>
+                </a:solidFill>
+                <a:latin typeface="Calibri" pitchFamily="34" charset="0"/>
+                <a:ea typeface="Calibri" pitchFamily="34" charset="-122"/>
+                <a:cs typeface="Calibri" pitchFamily="34" charset="-120"/>
+              </a:rPr>
+              <a:t>2</a:t>
+            </a:r>
+            <a:endParaRPr lang="en-US" sz="1200" dirty="0"/>
+          </a:p>
+        </p:txBody>
+      </p:sp>
+      <p:sp>
+        <p:nvSpPr>
+          <p:cNvPr id="14" name="Text 12"/>
+          <p:cNvSpPr txBox="1"/>
+          <p:nvPr/>
+        </p:nvSpPr>
+        <p:spPr>
+          <a:xfrm>
+            <a:off x="1463040" y="2798064"/>
+            <a:ext cx="3017520" cy="594360"/>
+          </a:xfrm>
+          <a:prstGeom prst="rect">
+            <a:avLst/>
+          </a:prstGeom>
+          <a:noFill/>
+          <a:ln/>
+        </p:spPr>
+        <p:txBody>
+          <a:bodyPr wrap="square" lIns="0" tIns="0" rIns="0" bIns="0" rtlCol="0" anchor="ctr"/>
+          <a:lstStyle/>
+          <a:p>
+            <a:pPr indent="0" marL="0">
+              <a:buNone/>
+            </a:pPr>
+            <a:r>
+              <a:rPr lang="en-US" sz="1250" b="1" dirty="0">
+                <a:solidFill>
+                  <a:srgbClr val="0B1220"/>
+                </a:solidFill>
+                <a:latin typeface="Calibri" pitchFamily="34" charset="0"/>
+                <a:ea typeface="Calibri" pitchFamily="34" charset="-122"/>
+                <a:cs typeface="Calibri" pitchFamily="34" charset="-120"/>
+              </a:rPr>
+              <a:t>Pilot — money &amp; the room</a:t>
+            </a:r>
+            <a:endParaRPr lang="en-US" sz="1250" dirty="0"/>
+          </a:p>
+        </p:txBody>
+      </p:sp>
+      <p:sp>
+        <p:nvSpPr>
+          <p:cNvPr id="15" name="Text 13"/>
+          <p:cNvSpPr txBox="1"/>
+          <p:nvPr/>
+        </p:nvSpPr>
+        <p:spPr>
+          <a:xfrm>
+            <a:off x="4572000" y="2798064"/>
+            <a:ext cx="5623560" cy="594360"/>
+          </a:xfrm>
+          <a:prstGeom prst="rect">
+            <a:avLst/>
+          </a:prstGeom>
+          <a:noFill/>
+          <a:ln/>
+        </p:spPr>
+        <p:txBody>
+          <a:bodyPr wrap="square" lIns="0" tIns="0" rIns="0" bIns="0" rtlCol="0" anchor="ctr"/>
+          <a:lstStyle/>
+          <a:p>
+            <a:pPr indent="0" marL="0">
+              <a:buNone/>
+            </a:pPr>
+            <a:r>
+              <a:rPr lang="en-US" sz="1050" dirty="0">
+                <a:solidFill>
+                  <a:srgbClr val="5A6880"/>
+                </a:solidFill>
+                <a:latin typeface="Calibri" pitchFamily="34" charset="0"/>
+                <a:ea typeface="Calibri" pitchFamily="34" charset="-122"/>
+                <a:cs typeface="Calibri" pitchFamily="34" charset="-120"/>
+              </a:rPr>
+              <a:t>Payments, folio, one outlet, and the guest television application. The full guest journey, one site.</a:t>
+            </a:r>
+            <a:endParaRPr lang="en-US" sz="1050" dirty="0"/>
+          </a:p>
+        </p:txBody>
+      </p:sp>
+      <p:sp>
+        <p:nvSpPr>
+          <p:cNvPr id="16" name="Text 14"/>
+          <p:cNvSpPr txBox="1"/>
+          <p:nvPr/>
+        </p:nvSpPr>
+        <p:spPr>
+          <a:xfrm>
+            <a:off x="10287000" y="2798064"/>
+            <a:ext cx="1234440" cy="594360"/>
+          </a:xfrm>
+          <a:prstGeom prst="rect">
+            <a:avLst/>
+          </a:prstGeom>
+          <a:noFill/>
+          <a:ln/>
+        </p:spPr>
+        <p:txBody>
+          <a:bodyPr wrap="square" lIns="0" tIns="0" rIns="0" bIns="0" rtlCol="0" anchor="ctr"/>
+          <a:lstStyle/>
+          <a:p>
+            <a:pPr algn="r" indent="0" marL="0">
+              <a:buNone/>
+            </a:pPr>
+            <a:r>
+              <a:rPr lang="en-US" sz="1050" b="1" dirty="0">
+                <a:solidFill>
+                  <a:srgbClr val="A87C1F"/>
+                </a:solidFill>
+                <a:latin typeface="Calibri" pitchFamily="34" charset="0"/>
+                <a:ea typeface="Calibri" pitchFamily="34" charset="-122"/>
+                <a:cs typeface="Calibri" pitchFamily="34" charset="-120"/>
+              </a:rPr>
+              <a:t>Weeks 7–16</a:t>
+            </a:r>
+            <a:endParaRPr lang="en-US" sz="1050" dirty="0"/>
+          </a:p>
+        </p:txBody>
+      </p:sp>
+      <p:sp>
+        <p:nvSpPr>
+          <p:cNvPr id="17" name="Shape 15"/>
+          <p:cNvSpPr/>
+          <p:nvPr/>
+        </p:nvSpPr>
+        <p:spPr>
+          <a:xfrm>
+            <a:off x="640080" y="3474720"/>
+            <a:ext cx="10911535" cy="594360"/>
+          </a:xfrm>
+          <a:prstGeom prst="roundRect">
+            <a:avLst>
+              <a:gd name="adj" fmla="val 13846"/>
+            </a:avLst>
+          </a:prstGeom>
+          <a:solidFill>
+            <a:srgbClr val="FBF6E9"/>
+          </a:solidFill>
+          <a:ln w="12700">
+            <a:solidFill>
+              <a:srgbClr val="DFE5EE"/>
+            </a:solidFill>
+            <a:prstDash val="solid"/>
+          </a:ln>
+          <a:effectLst>
+            <a:outerShdw sx="100000" sy="100000" kx="0" ky="0" algn="bl" rotWithShape="0" blurRad="127000" dist="25400" dir="5400000">
+              <a:srgbClr val="0B1220">
+                <a:alpha val="10000"/>
+              </a:srgbClr>
+            </a:outerShdw>
+          </a:effectLst>
+        </p:spPr>
+      </p:sp>
+      <p:sp>
+        <p:nvSpPr>
           <p:cNvPr id="18" name="Shape 16"/>
           <p:cNvSpPr/>
           <p:nvPr/>
@@ -16772,9 +17976,9 @@
 </p:sld>
 </file>
 
-<file path=ppt/slides/slide24.xml><?xml version="1.0" encoding="utf-8"?>
+<file path=ppt/slides/slide25.xml><?xml version="1.0" encoding="utf-8"?>
 <p:sld xmlns:a="http://schemas.openxmlformats.org/drawingml/2006/main" xmlns:r="http://schemas.openxmlformats.org/officeDocument/2006/relationships" xmlns:p="http://schemas.openxmlformats.org/presentationml/2006/main">
-  <p:cSld name="Slide 24">
+  <p:cSld name="Slide 25">
     <p:bg>
       <p:bgPr>
         <a:solidFill>
@@ -19544,7 +20748,7 @@
         <p:spPr>
           <a:xfrm>
             <a:off x="932688" y="2505456"/>
-            <a:ext cx="2011680" cy="365760"/>
+            <a:ext cx="1627632" cy="365760"/>
           </a:xfrm>
           <a:prstGeom prst="roundRect">
             <a:avLst>
@@ -19571,7 +20775,7 @@
         <p:spPr>
           <a:xfrm>
             <a:off x="932688" y="2505456"/>
-            <a:ext cx="2011680" cy="365760"/>
+            <a:ext cx="1627632" cy="365760"/>
           </a:xfrm>
           <a:prstGeom prst="rect">
             <a:avLst/>
@@ -19587,7 +20791,7 @@
               <a:buNone/>
             </a:pPr>
             <a:r>
-              <a:rPr lang="en-US" sz="950" b="1" dirty="0">
+              <a:rPr lang="en-US" sz="900" b="1" dirty="0">
                 <a:solidFill>
                   <a:srgbClr val="F4F1EA"/>
                 </a:solidFill>
@@ -19597,7 +20801,7 @@
               </a:rPr>
               <a:t>Central reservations</a:t>
             </a:r>
-            <a:endParaRPr lang="en-US" sz="950" dirty="0"/>
+            <a:endParaRPr lang="en-US" sz="900" dirty="0"/>
           </a:p>
         </p:txBody>
       </p:sp>
@@ -19609,8 +20813,8 @@
         </p:nvSpPr>
         <p:spPr>
           <a:xfrm>
-            <a:off x="3072384" y="2505456"/>
-            <a:ext cx="2011680" cy="365760"/>
+            <a:off x="2651760" y="2505456"/>
+            <a:ext cx="1627632" cy="365760"/>
           </a:xfrm>
           <a:prstGeom prst="roundRect">
             <a:avLst>
@@ -19636,8 +20840,8 @@
         </p:nvSpPr>
         <p:spPr>
           <a:xfrm>
-            <a:off x="3072384" y="2505456"/>
-            <a:ext cx="2011680" cy="365760"/>
+            <a:off x="2651760" y="2505456"/>
+            <a:ext cx="1627632" cy="365760"/>
           </a:xfrm>
           <a:prstGeom prst="rect">
             <a:avLst/>
@@ -19653,7 +20857,7 @@
               <a:buNone/>
             </a:pPr>
             <a:r>
-              <a:rPr lang="en-US" sz="950" b="1" dirty="0">
+              <a:rPr lang="en-US" sz="900" b="1" dirty="0">
                 <a:solidFill>
                   <a:srgbClr val="F4F1EA"/>
                 </a:solidFill>
@@ -19661,9 +20865,9 @@
                 <a:ea typeface="Calibri" pitchFamily="34" charset="-122"/>
                 <a:cs typeface="Calibri" pitchFamily="34" charset="-120"/>
               </a:rPr>
-              <a:t>Property management system</a:t>
-            </a:r>
-            <a:endParaRPr lang="en-US" sz="950" dirty="0"/>
+              <a:t>Property management</a:t>
+            </a:r>
+            <a:endParaRPr lang="en-US" sz="900" dirty="0"/>
           </a:p>
         </p:txBody>
       </p:sp>
@@ -19675,8 +20879,8 @@
         </p:nvSpPr>
         <p:spPr>
           <a:xfrm>
-            <a:off x="5212080" y="2505456"/>
-            <a:ext cx="2011680" cy="365760"/>
+            <a:off x="4370832" y="2505456"/>
+            <a:ext cx="1627632" cy="365760"/>
           </a:xfrm>
           <a:prstGeom prst="roundRect">
             <a:avLst>
@@ -19702,8 +20906,8 @@
         </p:nvSpPr>
         <p:spPr>
           <a:xfrm>
-            <a:off x="5212080" y="2505456"/>
-            <a:ext cx="2011680" cy="365760"/>
+            <a:off x="4370832" y="2505456"/>
+            <a:ext cx="1627632" cy="365760"/>
           </a:xfrm>
           <a:prstGeom prst="rect">
             <a:avLst/>
@@ -19719,7 +20923,7 @@
               <a:buNone/>
             </a:pPr>
             <a:r>
-              <a:rPr lang="en-US" sz="950" b="1" dirty="0">
+              <a:rPr lang="en-US" sz="900" b="1" dirty="0">
                 <a:solidFill>
                   <a:srgbClr val="F4F1EA"/>
                 </a:solidFill>
@@ -19729,7 +20933,7 @@
               </a:rPr>
               <a:t>Enterprise loyalty</a:t>
             </a:r>
-            <a:endParaRPr lang="en-US" sz="950" dirty="0"/>
+            <a:endParaRPr lang="en-US" sz="900" dirty="0"/>
           </a:p>
         </p:txBody>
       </p:sp>
@@ -19741,8 +20945,8 @@
         </p:nvSpPr>
         <p:spPr>
           <a:xfrm>
-            <a:off x="7351776" y="2505456"/>
-            <a:ext cx="2011680" cy="365760"/>
+            <a:off x="6089904" y="2505456"/>
+            <a:ext cx="1627632" cy="365760"/>
           </a:xfrm>
           <a:prstGeom prst="roundRect">
             <a:avLst>
@@ -19768,8 +20972,8 @@
         </p:nvSpPr>
         <p:spPr>
           <a:xfrm>
-            <a:off x="7351776" y="2505456"/>
-            <a:ext cx="2011680" cy="365760"/>
+            <a:off x="6089904" y="2505456"/>
+            <a:ext cx="1627632" cy="365760"/>
           </a:xfrm>
           <a:prstGeom prst="rect">
             <a:avLst/>
@@ -19785,7 +20989,7 @@
               <a:buNone/>
             </a:pPr>
             <a:r>
-              <a:rPr lang="en-US" sz="950" b="1" dirty="0">
+              <a:rPr lang="en-US" sz="900" b="1" dirty="0">
                 <a:solidFill>
                   <a:srgbClr val="F4F1EA"/>
                 </a:solidFill>
@@ -19793,9 +20997,9 @@
                 <a:ea typeface="Calibri" pitchFamily="34" charset="-122"/>
                 <a:cs typeface="Calibri" pitchFamily="34" charset="-120"/>
               </a:rPr>
-              <a:t>Corporate finance</a:t>
-            </a:r>
-            <a:endParaRPr lang="en-US" sz="950" dirty="0"/>
+              <a:t>SIP PBX</a:t>
+            </a:r>
+            <a:endParaRPr lang="en-US" sz="900" dirty="0"/>
           </a:p>
         </p:txBody>
       </p:sp>
@@ -19807,8 +21011,8 @@
         </p:nvSpPr>
         <p:spPr>
           <a:xfrm>
-            <a:off x="9491472" y="2505456"/>
-            <a:ext cx="2011680" cy="365760"/>
+            <a:off x="7808976" y="2505456"/>
+            <a:ext cx="1627632" cy="365760"/>
           </a:xfrm>
           <a:prstGeom prst="roundRect">
             <a:avLst>
@@ -19834,8 +21038,8 @@
         </p:nvSpPr>
         <p:spPr>
           <a:xfrm>
-            <a:off x="9491472" y="2505456"/>
-            <a:ext cx="2011680" cy="365760"/>
+            <a:off x="7808976" y="2505456"/>
+            <a:ext cx="1627632" cy="365760"/>
           </a:xfrm>
           <a:prstGeom prst="rect">
             <a:avLst/>
@@ -19851,7 +21055,7 @@
               <a:buNone/>
             </a:pPr>
             <a:r>
-              <a:rPr lang="en-US" sz="950" b="1" dirty="0">
+              <a:rPr lang="en-US" sz="900" b="1" dirty="0">
                 <a:solidFill>
                   <a:srgbClr val="F4F1EA"/>
                 </a:solidFill>
@@ -19859,15 +21063,81 @@
                 <a:ea typeface="Calibri" pitchFamily="34" charset="-122"/>
                 <a:cs typeface="Calibri" pitchFamily="34" charset="-120"/>
               </a:rPr>
+              <a:t>Corporate finance</a:t>
+            </a:r>
+            <a:endParaRPr lang="en-US" sz="900" dirty="0"/>
+          </a:p>
+        </p:txBody>
+      </p:sp>
+      <p:sp>
+        <p:nvSpPr>
+          <p:cNvPr id="17" name="Shape 15"/>
+          <p:cNvSpPr/>
+          <p:nvPr/>
+        </p:nvSpPr>
+        <p:spPr>
+          <a:xfrm>
+            <a:off x="9528048" y="2505456"/>
+            <a:ext cx="1627632" cy="365760"/>
+          </a:xfrm>
+          <a:prstGeom prst="roundRect">
+            <a:avLst>
+              <a:gd name="adj" fmla="val 50000"/>
+            </a:avLst>
+          </a:prstGeom>
+          <a:solidFill>
+            <a:srgbClr val="1C2942"/>
+          </a:solidFill>
+          <a:ln w="12700">
+            <a:solidFill>
+              <a:srgbClr val="27354F"/>
+            </a:solidFill>
+            <a:prstDash val="solid"/>
+          </a:ln>
+        </p:spPr>
+      </p:sp>
+      <p:sp>
+        <p:nvSpPr>
+          <p:cNvPr id="18" name="Text 16"/>
+          <p:cNvSpPr txBox="1"/>
+          <p:nvPr/>
+        </p:nvSpPr>
+        <p:spPr>
+          <a:xfrm>
+            <a:off x="9528048" y="2505456"/>
+            <a:ext cx="1627632" cy="365760"/>
+          </a:xfrm>
+          <a:prstGeom prst="rect">
+            <a:avLst/>
+          </a:prstGeom>
+          <a:noFill/>
+          <a:ln/>
+        </p:spPr>
+        <p:txBody>
+          <a:bodyPr wrap="square" lIns="0" tIns="0" rIns="0" bIns="0" rtlCol="0" anchor="ctr"/>
+          <a:lstStyle/>
+          <a:p>
+            <a:pPr algn="ctr" indent="0" marL="0">
+              <a:buNone/>
+            </a:pPr>
+            <a:r>
+              <a:rPr lang="en-US" sz="900" b="1" dirty="0">
+                <a:solidFill>
+                  <a:srgbClr val="F4F1EA"/>
+                </a:solidFill>
+                <a:latin typeface="Calibri" pitchFamily="34" charset="0"/>
+                <a:ea typeface="Calibri" pitchFamily="34" charset="-122"/>
+                <a:cs typeface="Calibri" pitchFamily="34" charset="-120"/>
+              </a:rPr>
               <a:t>Identity / SSO</a:t>
             </a:r>
-            <a:endParaRPr lang="en-US" sz="950" dirty="0"/>
-          </a:p>
-        </p:txBody>
-      </p:sp>
-      <p:sp>
-        <p:nvSpPr>
-          <p:cNvPr id="17" name="Shape 15"/>
+            <a:endParaRPr lang="en-US" sz="900" dirty="0"/>
+          </a:p>
+        </p:txBody>
+      </p:sp>
+      <p:sp>
+        <p:nvSpPr>
+          <p:cNvPr id="19" name="Shape 17"/>
           <p:cNvSpPr/>
           <p:nvPr/>
         </p:nvSpPr>
@@ -19892,7 +21162,7 @@
       </p:sp>
       <p:sp>
         <p:nvSpPr>
-          <p:cNvPr id="18" name="Shape 16"/>
+          <p:cNvPr id="20" name="Shape 18"/>
           <p:cNvSpPr/>
           <p:nvPr/>
         </p:nvSpPr>
@@ -19917,7 +21187,7 @@
       </p:sp>
       <p:sp>
         <p:nvSpPr>
-          <p:cNvPr id="19" name="Text 17"/>
+          <p:cNvPr id="21" name="Text 19"/>
           <p:cNvSpPr txBox="1"/>
           <p:nvPr/>
         </p:nvSpPr>
@@ -19948,7 +21218,7 @@
                 <a:ea typeface="Calibri" pitchFamily="34" charset="-122"/>
                 <a:cs typeface="Calibri" pitchFamily="34" charset="-120"/>
               </a:rPr>
-              <a:t>guest &amp; stay sync  ·  folio posting  ·  loyalty accrual  ·  single sign-on</a:t>
+              <a:t>guest &amp; stay sync  ·  folio posting  ·  loyalty accrual  ·  call records  ·  single sign-on</a:t>
             </a:r>
             <a:endParaRPr lang="en-US" sz="950" dirty="0"/>
           </a:p>
@@ -19956,7 +21226,7 @@
       </p:sp>
       <p:sp>
         <p:nvSpPr>
-          <p:cNvPr id="20" name="Shape 18"/>
+          <p:cNvPr id="22" name="Shape 20"/>
           <p:cNvSpPr/>
           <p:nvPr/>
         </p:nvSpPr>
@@ -19990,7 +21260,7 @@
       </p:sp>
       <p:sp>
         <p:nvSpPr>
-          <p:cNvPr id="21" name="Text 19"/>
+          <p:cNvPr id="23" name="Text 21"/>
           <p:cNvSpPr txBox="1"/>
           <p:nvPr/>
         </p:nvSpPr>
@@ -20029,14 +21299,14 @@
       </p:sp>
       <p:sp>
         <p:nvSpPr>
-          <p:cNvPr id="22" name="Shape 20"/>
+          <p:cNvPr id="24" name="Shape 22"/>
           <p:cNvSpPr/>
           <p:nvPr/>
         </p:nvSpPr>
         <p:spPr>
           <a:xfrm>
             <a:off x="932688" y="3803904"/>
-            <a:ext cx="1243584" cy="658368"/>
+            <a:ext cx="978408" cy="658368"/>
           </a:xfrm>
           <a:prstGeom prst="roundRect">
             <a:avLst>
@@ -20056,14 +21326,14 @@
       </p:sp>
       <p:sp>
         <p:nvSpPr>
-          <p:cNvPr id="23" name="Text 21"/>
-          <p:cNvSpPr txBox="1"/>
-          <p:nvPr/>
-        </p:nvSpPr>
-        <p:spPr>
-          <a:xfrm>
-            <a:off x="969264" y="3803904"/>
-            <a:ext cx="1170432" cy="658368"/>
+          <p:cNvPr id="25" name="Text 23"/>
+          <p:cNvSpPr txBox="1"/>
+          <p:nvPr/>
+        </p:nvSpPr>
+        <p:spPr>
+          <a:xfrm>
+            <a:off x="941832" y="3803904"/>
+            <a:ext cx="960120" cy="658368"/>
           </a:xfrm>
           <a:prstGeom prst="rect">
             <a:avLst/>
@@ -20077,12 +21347,12 @@
           <a:p>
             <a:pPr algn="ctr" indent="0" marL="0">
               <a:lnSpc>
-                <a:spcPts val="1100"/>
+                <a:spcPts val="1000"/>
               </a:lnSpc>
               <a:buNone/>
             </a:pPr>
             <a:r>
-              <a:rPr lang="en-US" sz="900" b="1" dirty="0">
+              <a:rPr lang="en-US" sz="800" b="1" dirty="0">
                 <a:solidFill>
                   <a:srgbClr val="0B1220"/>
                 </a:solidFill>
@@ -20092,17 +21362,17 @@
               </a:rPr>
               <a:t>Identity</a:t>
             </a:r>
-            <a:endParaRPr lang="en-US" sz="900" dirty="0"/>
+            <a:endParaRPr lang="en-US" sz="800" dirty="0"/>
           </a:p>
           <a:p>
             <a:pPr algn="ctr" indent="0" marL="0">
               <a:lnSpc>
-                <a:spcPts val="1100"/>
+                <a:spcPts val="1000"/>
               </a:lnSpc>
               <a:buNone/>
             </a:pPr>
             <a:r>
-              <a:rPr lang="en-US" sz="900" b="1" dirty="0">
+              <a:rPr lang="en-US" sz="800" b="1" dirty="0">
                 <a:solidFill>
                   <a:srgbClr val="0B1220"/>
                 </a:solidFill>
@@ -20110,22 +21380,22 @@
                 <a:ea typeface="Calibri" pitchFamily="34" charset="-122"/>
                 <a:cs typeface="Calibri" pitchFamily="34" charset="-120"/>
               </a:rPr>
-              <a:t>&amp; documents</a:t>
-            </a:r>
-            <a:endParaRPr lang="en-US" sz="900" dirty="0"/>
-          </a:p>
-        </p:txBody>
-      </p:sp>
-      <p:sp>
-        <p:nvSpPr>
-          <p:cNvPr id="24" name="Shape 22"/>
+              <a:t>&amp; docs</a:t>
+            </a:r>
+            <a:endParaRPr lang="en-US" sz="800" dirty="0"/>
+          </a:p>
+        </p:txBody>
+      </p:sp>
+      <p:sp>
+        <p:nvSpPr>
+          <p:cNvPr id="26" name="Shape 24"/>
           <p:cNvSpPr/>
           <p:nvPr/>
         </p:nvSpPr>
         <p:spPr>
           <a:xfrm>
-            <a:off x="2253996" y="3803904"/>
-            <a:ext cx="1243584" cy="658368"/>
+            <a:off x="1965046" y="3803904"/>
+            <a:ext cx="978408" cy="658368"/>
           </a:xfrm>
           <a:prstGeom prst="roundRect">
             <a:avLst>
@@ -20145,14 +21415,14 @@
       </p:sp>
       <p:sp>
         <p:nvSpPr>
-          <p:cNvPr id="25" name="Text 23"/>
-          <p:cNvSpPr txBox="1"/>
-          <p:nvPr/>
-        </p:nvSpPr>
-        <p:spPr>
-          <a:xfrm>
-            <a:off x="2290572" y="3803904"/>
-            <a:ext cx="1170432" cy="658368"/>
+          <p:cNvPr id="27" name="Text 25"/>
+          <p:cNvSpPr txBox="1"/>
+          <p:nvPr/>
+        </p:nvSpPr>
+        <p:spPr>
+          <a:xfrm>
+            <a:off x="1974190" y="3803904"/>
+            <a:ext cx="960120" cy="658368"/>
           </a:xfrm>
           <a:prstGeom prst="rect">
             <a:avLst/>
@@ -20166,12 +21436,12 @@
           <a:p>
             <a:pPr algn="ctr" indent="0" marL="0">
               <a:lnSpc>
-                <a:spcPts val="1100"/>
+                <a:spcPts val="1000"/>
               </a:lnSpc>
               <a:buNone/>
             </a:pPr>
             <a:r>
-              <a:rPr lang="en-US" sz="900" b="1" dirty="0">
+              <a:rPr lang="en-US" sz="800" b="1" dirty="0">
                 <a:solidFill>
                   <a:srgbClr val="0B1220"/>
                 </a:solidFill>
@@ -20181,17 +21451,17 @@
               </a:rPr>
               <a:t>Guest</a:t>
             </a:r>
-            <a:endParaRPr lang="en-US" sz="900" dirty="0"/>
+            <a:endParaRPr lang="en-US" sz="800" dirty="0"/>
           </a:p>
           <a:p>
             <a:pPr algn="ctr" indent="0" marL="0">
               <a:lnSpc>
-                <a:spcPts val="1100"/>
+                <a:spcPts val="1000"/>
               </a:lnSpc>
               <a:buNone/>
             </a:pPr>
             <a:r>
-              <a:rPr lang="en-US" sz="900" b="1" dirty="0">
+              <a:rPr lang="en-US" sz="800" b="1" dirty="0">
                 <a:solidFill>
                   <a:srgbClr val="0B1220"/>
                 </a:solidFill>
@@ -20201,20 +21471,20 @@
               </a:rPr>
               <a:t>profile</a:t>
             </a:r>
-            <a:endParaRPr lang="en-US" sz="900" dirty="0"/>
-          </a:p>
-        </p:txBody>
-      </p:sp>
-      <p:sp>
-        <p:nvSpPr>
-          <p:cNvPr id="26" name="Shape 24"/>
+            <a:endParaRPr lang="en-US" sz="800" dirty="0"/>
+          </a:p>
+        </p:txBody>
+      </p:sp>
+      <p:sp>
+        <p:nvSpPr>
+          <p:cNvPr id="28" name="Shape 26"/>
           <p:cNvSpPr/>
           <p:nvPr/>
         </p:nvSpPr>
         <p:spPr>
           <a:xfrm>
-            <a:off x="3575304" y="3803904"/>
-            <a:ext cx="1243584" cy="658368"/>
+            <a:off x="2997403" y="3803904"/>
+            <a:ext cx="978408" cy="658368"/>
           </a:xfrm>
           <a:prstGeom prst="roundRect">
             <a:avLst>
@@ -20234,14 +21504,14 @@
       </p:sp>
       <p:sp>
         <p:nvSpPr>
-          <p:cNvPr id="27" name="Text 25"/>
-          <p:cNvSpPr txBox="1"/>
-          <p:nvPr/>
-        </p:nvSpPr>
-        <p:spPr>
-          <a:xfrm>
-            <a:off x="3611880" y="3803904"/>
-            <a:ext cx="1170432" cy="658368"/>
+          <p:cNvPr id="29" name="Text 27"/>
+          <p:cNvSpPr txBox="1"/>
+          <p:nvPr/>
+        </p:nvSpPr>
+        <p:spPr>
+          <a:xfrm>
+            <a:off x="3006547" y="3803904"/>
+            <a:ext cx="960120" cy="658368"/>
           </a:xfrm>
           <a:prstGeom prst="rect">
             <a:avLst/>
@@ -20255,12 +21525,12 @@
           <a:p>
             <a:pPr algn="ctr" indent="0" marL="0">
               <a:lnSpc>
-                <a:spcPts val="1100"/>
+                <a:spcPts val="1000"/>
               </a:lnSpc>
               <a:buNone/>
             </a:pPr>
             <a:r>
-              <a:rPr lang="en-US" sz="900" b="1" dirty="0">
+              <a:rPr lang="en-US" sz="800" b="1" dirty="0">
                 <a:solidFill>
                   <a:srgbClr val="0B1220"/>
                 </a:solidFill>
@@ -20268,19 +21538,19 @@
                 <a:ea typeface="Calibri" pitchFamily="34" charset="-122"/>
                 <a:cs typeface="Calibri" pitchFamily="34" charset="-120"/>
               </a:rPr>
-              <a:t>Facility</a:t>
-            </a:r>
-            <a:endParaRPr lang="en-US" sz="900" dirty="0"/>
+              <a:t>Direct</a:t>
+            </a:r>
+            <a:endParaRPr lang="en-US" sz="800" dirty="0"/>
           </a:p>
           <a:p>
             <a:pPr algn="ctr" indent="0" marL="0">
               <a:lnSpc>
-                <a:spcPts val="1100"/>
+                <a:spcPts val="1000"/>
               </a:lnSpc>
               <a:buNone/>
             </a:pPr>
             <a:r>
-              <a:rPr lang="en-US" sz="900" b="1" dirty="0">
+              <a:rPr lang="en-US" sz="800" b="1" dirty="0">
                 <a:solidFill>
                   <a:srgbClr val="0B1220"/>
                 </a:solidFill>
@@ -20288,22 +21558,22 @@
                 <a:ea typeface="Calibri" pitchFamily="34" charset="-122"/>
                 <a:cs typeface="Calibri" pitchFamily="34" charset="-120"/>
               </a:rPr>
-              <a:t>reservations</a:t>
-            </a:r>
-            <a:endParaRPr lang="en-US" sz="900" dirty="0"/>
-          </a:p>
-        </p:txBody>
-      </p:sp>
-      <p:sp>
-        <p:nvSpPr>
-          <p:cNvPr id="28" name="Shape 26"/>
+              <a:t>booking</a:t>
+            </a:r>
+            <a:endParaRPr lang="en-US" sz="800" dirty="0"/>
+          </a:p>
+        </p:txBody>
+      </p:sp>
+      <p:sp>
+        <p:nvSpPr>
+          <p:cNvPr id="30" name="Shape 28"/>
           <p:cNvSpPr/>
           <p:nvPr/>
         </p:nvSpPr>
         <p:spPr>
           <a:xfrm>
-            <a:off x="4896612" y="3803904"/>
-            <a:ext cx="1243584" cy="658368"/>
+            <a:off x="4029761" y="3803904"/>
+            <a:ext cx="978408" cy="658368"/>
           </a:xfrm>
           <a:prstGeom prst="roundRect">
             <a:avLst>
@@ -20323,14 +21593,14 @@
       </p:sp>
       <p:sp>
         <p:nvSpPr>
-          <p:cNvPr id="29" name="Text 27"/>
-          <p:cNvSpPr txBox="1"/>
-          <p:nvPr/>
-        </p:nvSpPr>
-        <p:spPr>
-          <a:xfrm>
-            <a:off x="4933188" y="3803904"/>
-            <a:ext cx="1170432" cy="658368"/>
+          <p:cNvPr id="31" name="Text 29"/>
+          <p:cNvSpPr txBox="1"/>
+          <p:nvPr/>
+        </p:nvSpPr>
+        <p:spPr>
+          <a:xfrm>
+            <a:off x="4038905" y="3803904"/>
+            <a:ext cx="960120" cy="658368"/>
           </a:xfrm>
           <a:prstGeom prst="rect">
             <a:avLst/>
@@ -20344,12 +21614,12 @@
           <a:p>
             <a:pPr algn="ctr" indent="0" marL="0">
               <a:lnSpc>
-                <a:spcPts val="1100"/>
+                <a:spcPts val="1000"/>
               </a:lnSpc>
               <a:buNone/>
             </a:pPr>
             <a:r>
-              <a:rPr lang="en-US" sz="900" b="1" dirty="0">
+              <a:rPr lang="en-US" sz="800" b="1" dirty="0">
                 <a:solidFill>
                   <a:srgbClr val="0B1220"/>
                 </a:solidFill>
@@ -20357,19 +21627,19 @@
                 <a:ea typeface="Calibri" pitchFamily="34" charset="-122"/>
                 <a:cs typeface="Calibri" pitchFamily="34" charset="-120"/>
               </a:rPr>
-              <a:t>Payments</a:t>
-            </a:r>
-            <a:endParaRPr lang="en-US" sz="900" dirty="0"/>
+              <a:t>Facility</a:t>
+            </a:r>
+            <a:endParaRPr lang="en-US" sz="800" dirty="0"/>
           </a:p>
           <a:p>
             <a:pPr algn="ctr" indent="0" marL="0">
               <a:lnSpc>
-                <a:spcPts val="1100"/>
+                <a:spcPts val="1000"/>
               </a:lnSpc>
               <a:buNone/>
             </a:pPr>
             <a:r>
-              <a:rPr lang="en-US" sz="900" b="1" dirty="0">
+              <a:rPr lang="en-US" sz="800" b="1" dirty="0">
                 <a:solidFill>
                   <a:srgbClr val="0B1220"/>
                 </a:solidFill>
@@ -20377,22 +21647,22 @@
                 <a:ea typeface="Calibri" pitchFamily="34" charset="-122"/>
                 <a:cs typeface="Calibri" pitchFamily="34" charset="-120"/>
               </a:rPr>
-              <a:t>&amp; folio</a:t>
-            </a:r>
-            <a:endParaRPr lang="en-US" sz="900" dirty="0"/>
-          </a:p>
-        </p:txBody>
-      </p:sp>
-      <p:sp>
-        <p:nvSpPr>
-          <p:cNvPr id="30" name="Shape 28"/>
+              <a:t>bookings</a:t>
+            </a:r>
+            <a:endParaRPr lang="en-US" sz="800" dirty="0"/>
+          </a:p>
+        </p:txBody>
+      </p:sp>
+      <p:sp>
+        <p:nvSpPr>
+          <p:cNvPr id="32" name="Shape 30"/>
           <p:cNvSpPr/>
           <p:nvPr/>
         </p:nvSpPr>
         <p:spPr>
           <a:xfrm>
-            <a:off x="6217920" y="3803904"/>
-            <a:ext cx="1243584" cy="658368"/>
+            <a:off x="5062118" y="3803904"/>
+            <a:ext cx="978408" cy="658368"/>
           </a:xfrm>
           <a:prstGeom prst="roundRect">
             <a:avLst>
@@ -20412,14 +21682,14 @@
       </p:sp>
       <p:sp>
         <p:nvSpPr>
-          <p:cNvPr id="31" name="Text 29"/>
-          <p:cNvSpPr txBox="1"/>
-          <p:nvPr/>
-        </p:nvSpPr>
-        <p:spPr>
-          <a:xfrm>
-            <a:off x="6254496" y="3803904"/>
-            <a:ext cx="1170432" cy="658368"/>
+          <p:cNvPr id="33" name="Text 31"/>
+          <p:cNvSpPr txBox="1"/>
+          <p:nvPr/>
+        </p:nvSpPr>
+        <p:spPr>
+          <a:xfrm>
+            <a:off x="5071262" y="3803904"/>
+            <a:ext cx="960120" cy="658368"/>
           </a:xfrm>
           <a:prstGeom prst="rect">
             <a:avLst/>
@@ -20433,12 +21703,12 @@
           <a:p>
             <a:pPr algn="ctr" indent="0" marL="0">
               <a:lnSpc>
-                <a:spcPts val="1100"/>
+                <a:spcPts val="1000"/>
               </a:lnSpc>
               <a:buNone/>
             </a:pPr>
             <a:r>
-              <a:rPr lang="en-US" sz="900" b="1" dirty="0">
+              <a:rPr lang="en-US" sz="800" b="1" dirty="0">
                 <a:solidFill>
                   <a:srgbClr val="0B1220"/>
                 </a:solidFill>
@@ -20446,19 +21716,19 @@
                 <a:ea typeface="Calibri" pitchFamily="34" charset="-122"/>
                 <a:cs typeface="Calibri" pitchFamily="34" charset="-120"/>
               </a:rPr>
-              <a:t>Ordering</a:t>
-            </a:r>
-            <a:endParaRPr lang="en-US" sz="900" dirty="0"/>
+              <a:t>Payments</a:t>
+            </a:r>
+            <a:endParaRPr lang="en-US" sz="800" dirty="0"/>
           </a:p>
           <a:p>
             <a:pPr algn="ctr" indent="0" marL="0">
               <a:lnSpc>
-                <a:spcPts val="1100"/>
+                <a:spcPts val="1000"/>
               </a:lnSpc>
               <a:buNone/>
             </a:pPr>
             <a:r>
-              <a:rPr lang="en-US" sz="900" b="1" dirty="0">
+              <a:rPr lang="en-US" sz="800" b="1" dirty="0">
                 <a:solidFill>
                   <a:srgbClr val="0B1220"/>
                 </a:solidFill>
@@ -20466,22 +21736,22 @@
                 <a:ea typeface="Calibri" pitchFamily="34" charset="-122"/>
                 <a:cs typeface="Calibri" pitchFamily="34" charset="-120"/>
               </a:rPr>
-              <a:t>F&amp;B</a:t>
-            </a:r>
-            <a:endParaRPr lang="en-US" sz="900" dirty="0"/>
-          </a:p>
-        </p:txBody>
-      </p:sp>
-      <p:sp>
-        <p:nvSpPr>
-          <p:cNvPr id="32" name="Shape 30"/>
+              <a:t>&amp; folio</a:t>
+            </a:r>
+            <a:endParaRPr lang="en-US" sz="800" dirty="0"/>
+          </a:p>
+        </p:txBody>
+      </p:sp>
+      <p:sp>
+        <p:nvSpPr>
+          <p:cNvPr id="34" name="Shape 32"/>
           <p:cNvSpPr/>
           <p:nvPr/>
         </p:nvSpPr>
         <p:spPr>
           <a:xfrm>
-            <a:off x="7539228" y="3803904"/>
-            <a:ext cx="1243584" cy="658368"/>
+            <a:off x="6094476" y="3803904"/>
+            <a:ext cx="978408" cy="658368"/>
           </a:xfrm>
           <a:prstGeom prst="roundRect">
             <a:avLst>
@@ -20501,14 +21771,14 @@
       </p:sp>
       <p:sp>
         <p:nvSpPr>
-          <p:cNvPr id="33" name="Text 31"/>
-          <p:cNvSpPr txBox="1"/>
-          <p:nvPr/>
-        </p:nvSpPr>
-        <p:spPr>
-          <a:xfrm>
-            <a:off x="7575804" y="3803904"/>
-            <a:ext cx="1170432" cy="658368"/>
+          <p:cNvPr id="35" name="Text 33"/>
+          <p:cNvSpPr txBox="1"/>
+          <p:nvPr/>
+        </p:nvSpPr>
+        <p:spPr>
+          <a:xfrm>
+            <a:off x="6103620" y="3803904"/>
+            <a:ext cx="960120" cy="658368"/>
           </a:xfrm>
           <a:prstGeom prst="rect">
             <a:avLst/>
@@ -20522,12 +21792,12 @@
           <a:p>
             <a:pPr algn="ctr" indent="0" marL="0">
               <a:lnSpc>
-                <a:spcPts val="1100"/>
+                <a:spcPts val="1000"/>
               </a:lnSpc>
               <a:buNone/>
             </a:pPr>
             <a:r>
-              <a:rPr lang="en-US" sz="900" b="1" dirty="0">
+              <a:rPr lang="en-US" sz="800" b="1" dirty="0">
                 <a:solidFill>
                   <a:srgbClr val="0B1220"/>
                 </a:solidFill>
@@ -20535,19 +21805,19 @@
                 <a:ea typeface="Calibri" pitchFamily="34" charset="-122"/>
                 <a:cs typeface="Calibri" pitchFamily="34" charset="-120"/>
               </a:rPr>
-              <a:t>Concierge</a:t>
-            </a:r>
-            <a:endParaRPr lang="en-US" sz="900" dirty="0"/>
+              <a:t>Ordering</a:t>
+            </a:r>
+            <a:endParaRPr lang="en-US" sz="800" dirty="0"/>
           </a:p>
           <a:p>
             <a:pPr algn="ctr" indent="0" marL="0">
               <a:lnSpc>
-                <a:spcPts val="1100"/>
+                <a:spcPts val="1000"/>
               </a:lnSpc>
               <a:buNone/>
             </a:pPr>
             <a:r>
-              <a:rPr lang="en-US" sz="900" b="1" dirty="0">
+              <a:rPr lang="en-US" sz="800" b="1" dirty="0">
                 <a:solidFill>
                   <a:srgbClr val="0B1220"/>
                 </a:solidFill>
@@ -20555,22 +21825,22 @@
                 <a:ea typeface="Calibri" pitchFamily="34" charset="-122"/>
                 <a:cs typeface="Calibri" pitchFamily="34" charset="-120"/>
               </a:rPr>
-              <a:t>&amp; service</a:t>
-            </a:r>
-            <a:endParaRPr lang="en-US" sz="900" dirty="0"/>
-          </a:p>
-        </p:txBody>
-      </p:sp>
-      <p:sp>
-        <p:nvSpPr>
-          <p:cNvPr id="34" name="Shape 32"/>
+              <a:t>F&amp;B</a:t>
+            </a:r>
+            <a:endParaRPr lang="en-US" sz="800" dirty="0"/>
+          </a:p>
+        </p:txBody>
+      </p:sp>
+      <p:sp>
+        <p:nvSpPr>
+          <p:cNvPr id="36" name="Shape 34"/>
           <p:cNvSpPr/>
           <p:nvPr/>
         </p:nvSpPr>
         <p:spPr>
           <a:xfrm>
-            <a:off x="8860536" y="3803904"/>
-            <a:ext cx="1243584" cy="658368"/>
+            <a:off x="7126834" y="3803904"/>
+            <a:ext cx="978408" cy="658368"/>
           </a:xfrm>
           <a:prstGeom prst="roundRect">
             <a:avLst>
@@ -20590,14 +21860,14 @@
       </p:sp>
       <p:sp>
         <p:nvSpPr>
-          <p:cNvPr id="35" name="Text 33"/>
-          <p:cNvSpPr txBox="1"/>
-          <p:nvPr/>
-        </p:nvSpPr>
-        <p:spPr>
-          <a:xfrm>
-            <a:off x="8897112" y="3803904"/>
-            <a:ext cx="1170432" cy="658368"/>
+          <p:cNvPr id="37" name="Text 35"/>
+          <p:cNvSpPr txBox="1"/>
+          <p:nvPr/>
+        </p:nvSpPr>
+        <p:spPr>
+          <a:xfrm>
+            <a:off x="7135978" y="3803904"/>
+            <a:ext cx="960120" cy="658368"/>
           </a:xfrm>
           <a:prstGeom prst="rect">
             <a:avLst/>
@@ -20611,12 +21881,12 @@
           <a:p>
             <a:pPr algn="ctr" indent="0" marL="0">
               <a:lnSpc>
-                <a:spcPts val="1100"/>
+                <a:spcPts val="1000"/>
               </a:lnSpc>
               <a:buNone/>
             </a:pPr>
             <a:r>
-              <a:rPr lang="en-US" sz="900" b="1" dirty="0">
+              <a:rPr lang="en-US" sz="800" b="1" dirty="0">
                 <a:solidFill>
                   <a:srgbClr val="0B1220"/>
                 </a:solidFill>
@@ -20624,19 +21894,19 @@
                 <a:ea typeface="Calibri" pitchFamily="34" charset="-122"/>
                 <a:cs typeface="Calibri" pitchFamily="34" charset="-120"/>
               </a:rPr>
-              <a:t>Entertainment</a:t>
-            </a:r>
-            <a:endParaRPr lang="en-US" sz="900" dirty="0"/>
+              <a:t>Concierge</a:t>
+            </a:r>
+            <a:endParaRPr lang="en-US" sz="800" dirty="0"/>
           </a:p>
           <a:p>
             <a:pPr algn="ctr" indent="0" marL="0">
               <a:lnSpc>
-                <a:spcPts val="1100"/>
+                <a:spcPts val="1000"/>
               </a:lnSpc>
               <a:buNone/>
             </a:pPr>
             <a:r>
-              <a:rPr lang="en-US" sz="900" b="1" dirty="0">
+              <a:rPr lang="en-US" sz="800" b="1" dirty="0">
                 <a:solidFill>
                   <a:srgbClr val="0B1220"/>
                 </a:solidFill>
@@ -20644,22 +21914,22 @@
                 <a:ea typeface="Calibri" pitchFamily="34" charset="-122"/>
                 <a:cs typeface="Calibri" pitchFamily="34" charset="-120"/>
               </a:rPr>
-              <a:t>&amp; TV</a:t>
-            </a:r>
-            <a:endParaRPr lang="en-US" sz="900" dirty="0"/>
-          </a:p>
-        </p:txBody>
-      </p:sp>
-      <p:sp>
-        <p:nvSpPr>
-          <p:cNvPr id="36" name="Shape 34"/>
+              <a:t>&amp; service</a:t>
+            </a:r>
+            <a:endParaRPr lang="en-US" sz="800" dirty="0"/>
+          </a:p>
+        </p:txBody>
+      </p:sp>
+      <p:sp>
+        <p:nvSpPr>
+          <p:cNvPr id="38" name="Shape 36"/>
           <p:cNvSpPr/>
           <p:nvPr/>
         </p:nvSpPr>
         <p:spPr>
           <a:xfrm>
-            <a:off x="10181844" y="3803904"/>
-            <a:ext cx="1243584" cy="658368"/>
+            <a:off x="8159191" y="3803904"/>
+            <a:ext cx="978408" cy="658368"/>
           </a:xfrm>
           <a:prstGeom prst="roundRect">
             <a:avLst>
@@ -20679,14 +21949,14 @@
       </p:sp>
       <p:sp>
         <p:nvSpPr>
-          <p:cNvPr id="37" name="Text 35"/>
-          <p:cNvSpPr txBox="1"/>
-          <p:nvPr/>
-        </p:nvSpPr>
-        <p:spPr>
-          <a:xfrm>
-            <a:off x="10218420" y="3803904"/>
-            <a:ext cx="1170432" cy="658368"/>
+          <p:cNvPr id="39" name="Text 37"/>
+          <p:cNvSpPr txBox="1"/>
+          <p:nvPr/>
+        </p:nvSpPr>
+        <p:spPr>
+          <a:xfrm>
+            <a:off x="8168335" y="3803904"/>
+            <a:ext cx="960120" cy="658368"/>
           </a:xfrm>
           <a:prstGeom prst="rect">
             <a:avLst/>
@@ -20700,12 +21970,12 @@
           <a:p>
             <a:pPr algn="ctr" indent="0" marL="0">
               <a:lnSpc>
-                <a:spcPts val="1100"/>
+                <a:spcPts val="1000"/>
               </a:lnSpc>
               <a:buNone/>
             </a:pPr>
             <a:r>
-              <a:rPr lang="en-US" sz="900" b="1" dirty="0">
+              <a:rPr lang="en-US" sz="800" b="1" dirty="0">
                 <a:solidFill>
                   <a:srgbClr val="0B1220"/>
                 </a:solidFill>
@@ -20713,19 +21983,19 @@
                 <a:ea typeface="Calibri" pitchFamily="34" charset="-122"/>
                 <a:cs typeface="Calibri" pitchFamily="34" charset="-120"/>
               </a:rPr>
-              <a:t>Operations</a:t>
-            </a:r>
-            <a:endParaRPr lang="en-US" sz="900" dirty="0"/>
+              <a:t>Voice</a:t>
+            </a:r>
+            <a:endParaRPr lang="en-US" sz="800" dirty="0"/>
           </a:p>
           <a:p>
             <a:pPr algn="ctr" indent="0" marL="0">
               <a:lnSpc>
-                <a:spcPts val="1100"/>
+                <a:spcPts val="1000"/>
               </a:lnSpc>
               <a:buNone/>
             </a:pPr>
             <a:r>
-              <a:rPr lang="en-US" sz="900" b="1" dirty="0">
+              <a:rPr lang="en-US" sz="800" b="1" dirty="0">
                 <a:solidFill>
                   <a:srgbClr val="0B1220"/>
                 </a:solidFill>
@@ -20733,15 +22003,193 @@
                 <a:ea typeface="Calibri" pitchFamily="34" charset="-122"/>
                 <a:cs typeface="Calibri" pitchFamily="34" charset="-120"/>
               </a:rPr>
-              <a:t>&amp; analytics</a:t>
-            </a:r>
-            <a:endParaRPr lang="en-US" sz="900" dirty="0"/>
-          </a:p>
-        </p:txBody>
-      </p:sp>
-      <p:sp>
-        <p:nvSpPr>
-          <p:cNvPr id="38" name="Shape 36"/>
+              <a:t>&amp; PBX</a:t>
+            </a:r>
+            <a:endParaRPr lang="en-US" sz="800" dirty="0"/>
+          </a:p>
+        </p:txBody>
+      </p:sp>
+      <p:sp>
+        <p:nvSpPr>
+          <p:cNvPr id="40" name="Shape 38"/>
+          <p:cNvSpPr/>
+          <p:nvPr/>
+        </p:nvSpPr>
+        <p:spPr>
+          <a:xfrm>
+            <a:off x="9191549" y="3803904"/>
+            <a:ext cx="978408" cy="658368"/>
+          </a:xfrm>
+          <a:prstGeom prst="roundRect">
+            <a:avLst>
+              <a:gd name="adj" fmla="val 11111"/>
+            </a:avLst>
+          </a:prstGeom>
+          <a:solidFill>
+            <a:srgbClr val="FFFFFF"/>
+          </a:solidFill>
+          <a:ln w="12700">
+            <a:solidFill>
+              <a:srgbClr val="A87C1F"/>
+            </a:solidFill>
+            <a:prstDash val="solid"/>
+          </a:ln>
+        </p:spPr>
+      </p:sp>
+      <p:sp>
+        <p:nvSpPr>
+          <p:cNvPr id="41" name="Text 39"/>
+          <p:cNvSpPr txBox="1"/>
+          <p:nvPr/>
+        </p:nvSpPr>
+        <p:spPr>
+          <a:xfrm>
+            <a:off x="9200693" y="3803904"/>
+            <a:ext cx="960120" cy="658368"/>
+          </a:xfrm>
+          <a:prstGeom prst="rect">
+            <a:avLst/>
+          </a:prstGeom>
+          <a:noFill/>
+          <a:ln/>
+        </p:spPr>
+        <p:txBody>
+          <a:bodyPr wrap="square" lIns="0" tIns="0" rIns="0" bIns="0" rtlCol="0" anchor="ctr"/>
+          <a:lstStyle/>
+          <a:p>
+            <a:pPr algn="ctr" indent="0" marL="0">
+              <a:lnSpc>
+                <a:spcPts val="1000"/>
+              </a:lnSpc>
+              <a:buNone/>
+            </a:pPr>
+            <a:r>
+              <a:rPr lang="en-US" sz="800" b="1" dirty="0">
+                <a:solidFill>
+                  <a:srgbClr val="0B1220"/>
+                </a:solidFill>
+                <a:latin typeface="Calibri" pitchFamily="34" charset="0"/>
+                <a:ea typeface="Calibri" pitchFamily="34" charset="-122"/>
+                <a:cs typeface="Calibri" pitchFamily="34" charset="-120"/>
+              </a:rPr>
+              <a:t>Entertainment</a:t>
+            </a:r>
+            <a:endParaRPr lang="en-US" sz="800" dirty="0"/>
+          </a:p>
+          <a:p>
+            <a:pPr algn="ctr" indent="0" marL="0">
+              <a:lnSpc>
+                <a:spcPts val="1000"/>
+              </a:lnSpc>
+              <a:buNone/>
+            </a:pPr>
+            <a:r>
+              <a:rPr lang="en-US" sz="800" b="1" dirty="0">
+                <a:solidFill>
+                  <a:srgbClr val="0B1220"/>
+                </a:solidFill>
+                <a:latin typeface="Calibri" pitchFamily="34" charset="0"/>
+                <a:ea typeface="Calibri" pitchFamily="34" charset="-122"/>
+                <a:cs typeface="Calibri" pitchFamily="34" charset="-120"/>
+              </a:rPr>
+              <a:t>&amp; TV</a:t>
+            </a:r>
+            <a:endParaRPr lang="en-US" sz="800" dirty="0"/>
+          </a:p>
+        </p:txBody>
+      </p:sp>
+      <p:sp>
+        <p:nvSpPr>
+          <p:cNvPr id="42" name="Shape 40"/>
+          <p:cNvSpPr/>
+          <p:nvPr/>
+        </p:nvSpPr>
+        <p:spPr>
+          <a:xfrm>
+            <a:off x="10223906" y="3803904"/>
+            <a:ext cx="978408" cy="658368"/>
+          </a:xfrm>
+          <a:prstGeom prst="roundRect">
+            <a:avLst>
+              <a:gd name="adj" fmla="val 11111"/>
+            </a:avLst>
+          </a:prstGeom>
+          <a:solidFill>
+            <a:srgbClr val="FFFFFF"/>
+          </a:solidFill>
+          <a:ln w="12700">
+            <a:solidFill>
+              <a:srgbClr val="A87C1F"/>
+            </a:solidFill>
+            <a:prstDash val="solid"/>
+          </a:ln>
+        </p:spPr>
+      </p:sp>
+      <p:sp>
+        <p:nvSpPr>
+          <p:cNvPr id="43" name="Text 41"/>
+          <p:cNvSpPr txBox="1"/>
+          <p:nvPr/>
+        </p:nvSpPr>
+        <p:spPr>
+          <a:xfrm>
+            <a:off x="10233050" y="3803904"/>
+            <a:ext cx="960120" cy="658368"/>
+          </a:xfrm>
+          <a:prstGeom prst="rect">
+            <a:avLst/>
+          </a:prstGeom>
+          <a:noFill/>
+          <a:ln/>
+        </p:spPr>
+        <p:txBody>
+          <a:bodyPr wrap="square" lIns="0" tIns="0" rIns="0" bIns="0" rtlCol="0" anchor="ctr"/>
+          <a:lstStyle/>
+          <a:p>
+            <a:pPr algn="ctr" indent="0" marL="0">
+              <a:lnSpc>
+                <a:spcPts val="1000"/>
+              </a:lnSpc>
+              <a:buNone/>
+            </a:pPr>
+            <a:r>
+              <a:rPr lang="en-US" sz="800" b="1" dirty="0">
+                <a:solidFill>
+                  <a:srgbClr val="0B1220"/>
+                </a:solidFill>
+                <a:latin typeface="Calibri" pitchFamily="34" charset="0"/>
+                <a:ea typeface="Calibri" pitchFamily="34" charset="-122"/>
+                <a:cs typeface="Calibri" pitchFamily="34" charset="-120"/>
+              </a:rPr>
+              <a:t>Operations</a:t>
+            </a:r>
+            <a:endParaRPr lang="en-US" sz="800" dirty="0"/>
+          </a:p>
+          <a:p>
+            <a:pPr algn="ctr" indent="0" marL="0">
+              <a:lnSpc>
+                <a:spcPts val="1000"/>
+              </a:lnSpc>
+              <a:buNone/>
+            </a:pPr>
+            <a:r>
+              <a:rPr lang="en-US" sz="800" b="1" dirty="0">
+                <a:solidFill>
+                  <a:srgbClr val="0B1220"/>
+                </a:solidFill>
+                <a:latin typeface="Calibri" pitchFamily="34" charset="0"/>
+                <a:ea typeface="Calibri" pitchFamily="34" charset="-122"/>
+                <a:cs typeface="Calibri" pitchFamily="34" charset="-120"/>
+              </a:rPr>
+              <a:t>&amp; data</a:t>
+            </a:r>
+            <a:endParaRPr lang="en-US" sz="800" dirty="0"/>
+          </a:p>
+        </p:txBody>
+      </p:sp>
+      <p:sp>
+        <p:nvSpPr>
+          <p:cNvPr id="44" name="Shape 42"/>
           <p:cNvSpPr/>
           <p:nvPr/>
         </p:nvSpPr>
@@ -20765,7 +22213,7 @@
       </p:sp>
       <p:sp>
         <p:nvSpPr>
-          <p:cNvPr id="39" name="Shape 37"/>
+          <p:cNvPr id="45" name="Shape 43"/>
           <p:cNvSpPr/>
           <p:nvPr/>
         </p:nvSpPr>
@@ -20789,7 +22237,7 @@
       </p:sp>
       <p:sp>
         <p:nvSpPr>
-          <p:cNvPr id="40" name="Shape 38"/>
+          <p:cNvPr id="46" name="Shape 44"/>
           <p:cNvSpPr/>
           <p:nvPr/>
         </p:nvSpPr>
@@ -20813,7 +22261,7 @@
       </p:sp>
       <p:sp>
         <p:nvSpPr>
-          <p:cNvPr id="41" name="Shape 39"/>
+          <p:cNvPr id="47" name="Shape 45"/>
           <p:cNvSpPr/>
           <p:nvPr/>
         </p:nvSpPr>
@@ -20847,7 +22295,7 @@
       </p:sp>
       <p:sp>
         <p:nvSpPr>
-          <p:cNvPr id="42" name="Text 40"/>
+          <p:cNvPr id="48" name="Text 46"/>
           <p:cNvSpPr txBox="1"/>
           <p:nvPr/>
         </p:nvSpPr>
@@ -20886,14 +22334,14 @@
       </p:sp>
       <p:sp>
         <p:nvSpPr>
-          <p:cNvPr id="43" name="Text 41"/>
-          <p:cNvSpPr txBox="1"/>
-          <p:nvPr/>
-        </p:nvSpPr>
-        <p:spPr>
-          <a:xfrm>
-            <a:off x="2926080" y="5074920"/>
-            <a:ext cx="1188720" cy="256032"/>
+          <p:cNvPr id="49" name="Text 47"/>
+          <p:cNvSpPr txBox="1"/>
+          <p:nvPr/>
+        </p:nvSpPr>
+        <p:spPr>
+          <a:xfrm>
+            <a:off x="2651760" y="5074920"/>
+            <a:ext cx="1078992" cy="256032"/>
           </a:xfrm>
           <a:prstGeom prst="rect">
             <a:avLst/>
@@ -20909,7 +22357,7 @@
               <a:buNone/>
             </a:pPr>
             <a:r>
-              <a:rPr lang="en-US" sz="950" b="1" dirty="0">
+              <a:rPr lang="en-US" sz="900" b="1" dirty="0">
                 <a:solidFill>
                   <a:srgbClr val="0B1220"/>
                 </a:solidFill>
@@ -20919,20 +22367,20 @@
               </a:rPr>
               <a:t>In-room TV</a:t>
             </a:r>
-            <a:endParaRPr lang="en-US" sz="950" dirty="0"/>
-          </a:p>
-        </p:txBody>
-      </p:sp>
-      <p:sp>
-        <p:nvSpPr>
-          <p:cNvPr id="44" name="Text 42"/>
-          <p:cNvSpPr txBox="1"/>
-          <p:nvPr/>
-        </p:nvSpPr>
-        <p:spPr>
-          <a:xfrm>
-            <a:off x="4151376" y="5074920"/>
-            <a:ext cx="1188720" cy="256032"/>
+            <a:endParaRPr lang="en-US" sz="900" dirty="0"/>
+          </a:p>
+        </p:txBody>
+      </p:sp>
+      <p:sp>
+        <p:nvSpPr>
+          <p:cNvPr id="50" name="Text 48"/>
+          <p:cNvSpPr txBox="1"/>
+          <p:nvPr/>
+        </p:nvSpPr>
+        <p:spPr>
+          <a:xfrm>
+            <a:off x="3763670" y="5074920"/>
+            <a:ext cx="1078992" cy="256032"/>
           </a:xfrm>
           <a:prstGeom prst="rect">
             <a:avLst/>
@@ -20948,7 +22396,7 @@
               <a:buNone/>
             </a:pPr>
             <a:r>
-              <a:rPr lang="en-US" sz="950" b="1" dirty="0">
+              <a:rPr lang="en-US" sz="900" b="1" dirty="0">
                 <a:solidFill>
                   <a:srgbClr val="0B1220"/>
                 </a:solidFill>
@@ -20956,22 +22404,61 @@
                 <a:ea typeface="Calibri" pitchFamily="34" charset="-122"/>
                 <a:cs typeface="Calibri" pitchFamily="34" charset="-120"/>
               </a:rPr>
+              <a:t>In-room phone</a:t>
+            </a:r>
+            <a:endParaRPr lang="en-US" sz="900" dirty="0"/>
+          </a:p>
+        </p:txBody>
+      </p:sp>
+      <p:sp>
+        <p:nvSpPr>
+          <p:cNvPr id="51" name="Text 49"/>
+          <p:cNvSpPr txBox="1"/>
+          <p:nvPr/>
+        </p:nvSpPr>
+        <p:spPr>
+          <a:xfrm>
+            <a:off x="4875581" y="5074920"/>
+            <a:ext cx="1078992" cy="256032"/>
+          </a:xfrm>
+          <a:prstGeom prst="rect">
+            <a:avLst/>
+          </a:prstGeom>
+          <a:noFill/>
+          <a:ln/>
+        </p:spPr>
+        <p:txBody>
+          <a:bodyPr wrap="square" lIns="0" tIns="0" rIns="0" bIns="0" rtlCol="0" anchor="ctr"/>
+          <a:lstStyle/>
+          <a:p>
+            <a:pPr algn="ctr" indent="0" marL="0">
+              <a:buNone/>
+            </a:pPr>
+            <a:r>
+              <a:rPr lang="en-US" sz="900" b="1" dirty="0">
+                <a:solidFill>
+                  <a:srgbClr val="0B1220"/>
+                </a:solidFill>
+                <a:latin typeface="Calibri" pitchFamily="34" charset="0"/>
+                <a:ea typeface="Calibri" pitchFamily="34" charset="-122"/>
+                <a:cs typeface="Calibri" pitchFamily="34" charset="-120"/>
+              </a:rPr>
               <a:t>Guest mobile</a:t>
             </a:r>
-            <a:endParaRPr lang="en-US" sz="950" dirty="0"/>
-          </a:p>
-        </p:txBody>
-      </p:sp>
-      <p:sp>
-        <p:nvSpPr>
-          <p:cNvPr id="45" name="Text 43"/>
-          <p:cNvSpPr txBox="1"/>
-          <p:nvPr/>
-        </p:nvSpPr>
-        <p:spPr>
-          <a:xfrm>
-            <a:off x="5376672" y="5074920"/>
-            <a:ext cx="1188720" cy="256032"/>
+            <a:endParaRPr lang="en-US" sz="900" dirty="0"/>
+          </a:p>
+        </p:txBody>
+      </p:sp>
+      <p:sp>
+        <p:nvSpPr>
+          <p:cNvPr id="52" name="Text 50"/>
+          <p:cNvSpPr txBox="1"/>
+          <p:nvPr/>
+        </p:nvSpPr>
+        <p:spPr>
+          <a:xfrm>
+            <a:off x="5987491" y="5074920"/>
+            <a:ext cx="1078992" cy="256032"/>
           </a:xfrm>
           <a:prstGeom prst="rect">
             <a:avLst/>
@@ -20987,7 +22474,7 @@
               <a:buNone/>
             </a:pPr>
             <a:r>
-              <a:rPr lang="en-US" sz="950" b="1" dirty="0">
+              <a:rPr lang="en-US" sz="900" b="1" dirty="0">
                 <a:solidFill>
                   <a:srgbClr val="0B1220"/>
                 </a:solidFill>
@@ -20997,20 +22484,20 @@
               </a:rPr>
               <a:t>QR on site</a:t>
             </a:r>
-            <a:endParaRPr lang="en-US" sz="950" dirty="0"/>
-          </a:p>
-        </p:txBody>
-      </p:sp>
-      <p:sp>
-        <p:nvSpPr>
-          <p:cNvPr id="46" name="Text 44"/>
-          <p:cNvSpPr txBox="1"/>
-          <p:nvPr/>
-        </p:nvSpPr>
-        <p:spPr>
-          <a:xfrm>
-            <a:off x="6601968" y="5074920"/>
-            <a:ext cx="1188720" cy="256032"/>
+            <a:endParaRPr lang="en-US" sz="900" dirty="0"/>
+          </a:p>
+        </p:txBody>
+      </p:sp>
+      <p:sp>
+        <p:nvSpPr>
+          <p:cNvPr id="53" name="Text 51"/>
+          <p:cNvSpPr txBox="1"/>
+          <p:nvPr/>
+        </p:nvSpPr>
+        <p:spPr>
+          <a:xfrm>
+            <a:off x="7099402" y="5074920"/>
+            <a:ext cx="1078992" cy="256032"/>
           </a:xfrm>
           <a:prstGeom prst="rect">
             <a:avLst/>
@@ -21026,7 +22513,7 @@
               <a:buNone/>
             </a:pPr>
             <a:r>
-              <a:rPr lang="en-US" sz="950" b="1" dirty="0">
+              <a:rPr lang="en-US" sz="900" b="1" dirty="0">
                 <a:solidFill>
                   <a:srgbClr val="0B1220"/>
                 </a:solidFill>
@@ -21036,20 +22523,20 @@
               </a:rPr>
               <a:t>Front desk</a:t>
             </a:r>
-            <a:endParaRPr lang="en-US" sz="950" dirty="0"/>
-          </a:p>
-        </p:txBody>
-      </p:sp>
-      <p:sp>
-        <p:nvSpPr>
-          <p:cNvPr id="47" name="Text 45"/>
-          <p:cNvSpPr txBox="1"/>
-          <p:nvPr/>
-        </p:nvSpPr>
-        <p:spPr>
-          <a:xfrm>
-            <a:off x="7827264" y="5074920"/>
-            <a:ext cx="1188720" cy="256032"/>
+            <a:endParaRPr lang="en-US" sz="900" dirty="0"/>
+          </a:p>
+        </p:txBody>
+      </p:sp>
+      <p:sp>
+        <p:nvSpPr>
+          <p:cNvPr id="54" name="Text 52"/>
+          <p:cNvSpPr txBox="1"/>
+          <p:nvPr/>
+        </p:nvSpPr>
+        <p:spPr>
+          <a:xfrm>
+            <a:off x="8211312" y="5074920"/>
+            <a:ext cx="1078992" cy="256032"/>
           </a:xfrm>
           <a:prstGeom prst="rect">
             <a:avLst/>
@@ -21065,7 +22552,7 @@
               <a:buNone/>
             </a:pPr>
             <a:r>
-              <a:rPr lang="en-US" sz="950" b="1" dirty="0">
+              <a:rPr lang="en-US" sz="900" b="1" dirty="0">
                 <a:solidFill>
                   <a:srgbClr val="0B1220"/>
                 </a:solidFill>
@@ -21075,20 +22562,20 @@
               </a:rPr>
               <a:t>Kitchen display</a:t>
             </a:r>
-            <a:endParaRPr lang="en-US" sz="950" dirty="0"/>
-          </a:p>
-        </p:txBody>
-      </p:sp>
-      <p:sp>
-        <p:nvSpPr>
-          <p:cNvPr id="48" name="Text 46"/>
-          <p:cNvSpPr txBox="1"/>
-          <p:nvPr/>
-        </p:nvSpPr>
-        <p:spPr>
-          <a:xfrm>
-            <a:off x="9052560" y="5074920"/>
-            <a:ext cx="1188720" cy="256032"/>
+            <a:endParaRPr lang="en-US" sz="900" dirty="0"/>
+          </a:p>
+        </p:txBody>
+      </p:sp>
+      <p:sp>
+        <p:nvSpPr>
+          <p:cNvPr id="55" name="Text 53"/>
+          <p:cNvSpPr txBox="1"/>
+          <p:nvPr/>
+        </p:nvSpPr>
+        <p:spPr>
+          <a:xfrm>
+            <a:off x="9323222" y="5074920"/>
+            <a:ext cx="1078992" cy="256032"/>
           </a:xfrm>
           <a:prstGeom prst="rect">
             <a:avLst/>
@@ -21104,7 +22591,7 @@
               <a:buNone/>
             </a:pPr>
             <a:r>
-              <a:rPr lang="en-US" sz="950" b="1" dirty="0">
+              <a:rPr lang="en-US" sz="900" b="1" dirty="0">
                 <a:solidFill>
                   <a:srgbClr val="0B1220"/>
                 </a:solidFill>
@@ -21114,20 +22601,20 @@
               </a:rPr>
               <a:t>Housekeeping</a:t>
             </a:r>
-            <a:endParaRPr lang="en-US" sz="950" dirty="0"/>
-          </a:p>
-        </p:txBody>
-      </p:sp>
-      <p:sp>
-        <p:nvSpPr>
-          <p:cNvPr id="49" name="Text 47"/>
-          <p:cNvSpPr txBox="1"/>
-          <p:nvPr/>
-        </p:nvSpPr>
-        <p:spPr>
-          <a:xfrm>
-            <a:off x="10277856" y="5074920"/>
-            <a:ext cx="1188720" cy="256032"/>
+            <a:endParaRPr lang="en-US" sz="900" dirty="0"/>
+          </a:p>
+        </p:txBody>
+      </p:sp>
+      <p:sp>
+        <p:nvSpPr>
+          <p:cNvPr id="56" name="Text 54"/>
+          <p:cNvSpPr txBox="1"/>
+          <p:nvPr/>
+        </p:nvSpPr>
+        <p:spPr>
+          <a:xfrm>
+            <a:off x="10435133" y="5074920"/>
+            <a:ext cx="1078992" cy="256032"/>
           </a:xfrm>
           <a:prstGeom prst="rect">
             <a:avLst/>
@@ -21143,7 +22630,7 @@
               <a:buNone/>
             </a:pPr>
             <a:r>
-              <a:rPr lang="en-US" sz="950" b="1" dirty="0">
+              <a:rPr lang="en-US" sz="900" b="1" dirty="0">
                 <a:solidFill>
                   <a:srgbClr val="0B1220"/>
                 </a:solidFill>
@@ -21153,20 +22640,20 @@
               </a:rPr>
               <a:t>Manager view</a:t>
             </a:r>
-            <a:endParaRPr lang="en-US" sz="950" dirty="0"/>
-          </a:p>
-        </p:txBody>
-      </p:sp>
-      <p:sp>
-        <p:nvSpPr>
-          <p:cNvPr id="50" name="Text 48"/>
-          <p:cNvSpPr txBox="1"/>
-          <p:nvPr/>
-        </p:nvSpPr>
-        <p:spPr>
-          <a:xfrm>
-            <a:off x="2926080" y="5468112"/>
-            <a:ext cx="3657600" cy="219456"/>
+            <a:endParaRPr lang="en-US" sz="900" dirty="0"/>
+          </a:p>
+        </p:txBody>
+      </p:sp>
+      <p:sp>
+        <p:nvSpPr>
+          <p:cNvPr id="57" name="Text 55"/>
+          <p:cNvSpPr txBox="1"/>
+          <p:nvPr/>
+        </p:nvSpPr>
+        <p:spPr>
+          <a:xfrm>
+            <a:off x="2651760" y="5468112"/>
+            <a:ext cx="4443984" cy="219456"/>
           </a:xfrm>
           <a:prstGeom prst="rect">
             <a:avLst/>
@@ -21198,14 +22685,14 @@
       </p:sp>
       <p:sp>
         <p:nvSpPr>
-          <p:cNvPr id="51" name="Text 49"/>
-          <p:cNvSpPr txBox="1"/>
-          <p:nvPr/>
-        </p:nvSpPr>
-        <p:spPr>
-          <a:xfrm>
-            <a:off x="6583680" y="5468112"/>
-            <a:ext cx="4846320" cy="219456"/>
+          <p:cNvPr id="58" name="Text 56"/>
+          <p:cNvSpPr txBox="1"/>
+          <p:nvPr/>
+        </p:nvSpPr>
+        <p:spPr>
+          <a:xfrm>
+            <a:off x="7095744" y="5468112"/>
+            <a:ext cx="4443984" cy="219456"/>
           </a:xfrm>
           <a:prstGeom prst="rect">
             <a:avLst/>
@@ -21237,7 +22724,7 @@
       </p:sp>
       <p:sp>
         <p:nvSpPr>
-          <p:cNvPr id="52" name="Text 50"/>
+          <p:cNvPr id="59" name="Text 57"/>
           <p:cNvSpPr txBox="1"/>
           <p:nvPr/>
         </p:nvSpPr>
@@ -21378,7 +22865,7 @@
                 <a:ea typeface="Cambria" pitchFamily="34" charset="-122"/>
                 <a:cs typeface="Cambria" pitchFamily="34" charset="-120"/>
               </a:rPr>
-              <a:t>Nine modules, one platform</a:t>
+              <a:t>Ten modules, one platform</a:t>
             </a:r>
             <a:endParaRPr lang="en-US" sz="3300" dirty="0"/>
           </a:p>
@@ -21392,12 +22879,12 @@
         </p:nvSpPr>
         <p:spPr>
           <a:xfrm>
-            <a:off x="640080" y="1572768"/>
-            <a:ext cx="3429000" cy="1170432"/>
+            <a:off x="640080" y="1691640"/>
+            <a:ext cx="1962302" cy="1828800"/>
           </a:xfrm>
           <a:prstGeom prst="roundRect">
             <a:avLst>
-              <a:gd name="adj" fmla="val 7031"/>
+              <a:gd name="adj" fmla="val 4500"/>
             </a:avLst>
           </a:prstGeom>
           <a:solidFill>
@@ -21426,8 +22913,8 @@
         </p:nvSpPr>
         <p:spPr>
           <a:xfrm>
-            <a:off x="877824" y="1810512"/>
-            <a:ext cx="420624" cy="420624"/>
+            <a:off x="841248" y="1892808"/>
+            <a:ext cx="402336" cy="402336"/>
           </a:xfrm>
           <a:prstGeom prst="ellipse">
             <a:avLst/>
@@ -21451,8 +22938,8 @@
         </p:nvSpPr>
         <p:spPr>
           <a:xfrm>
-            <a:off x="877824" y="1810512"/>
-            <a:ext cx="420624" cy="420624"/>
+            <a:off x="841248" y="1892808"/>
+            <a:ext cx="402336" cy="402336"/>
           </a:xfrm>
           <a:prstGeom prst="rect">
             <a:avLst/>
@@ -21490,24 +22977,27 @@
         </p:nvSpPr>
         <p:spPr>
           <a:xfrm>
-            <a:off x="1417320" y="1792224"/>
-            <a:ext cx="2423160" cy="274320"/>
-          </a:xfrm>
-          <a:prstGeom prst="rect">
-            <a:avLst/>
-          </a:prstGeom>
-          <a:noFill/>
-          <a:ln/>
-        </p:spPr>
-        <p:txBody>
-          <a:bodyPr wrap="square" lIns="0" tIns="0" rIns="0" bIns="0" rtlCol="0" anchor="ctr"/>
-          <a:lstStyle/>
-          <a:p>
-            <a:pPr indent="0" marL="0">
-              <a:buNone/>
-            </a:pPr>
-            <a:r>
-              <a:rPr lang="en-US" sz="1350" b="1" dirty="0">
+            <a:off x="841248" y="2404872"/>
+            <a:ext cx="1559966" cy="493776"/>
+          </a:xfrm>
+          <a:prstGeom prst="rect">
+            <a:avLst/>
+          </a:prstGeom>
+          <a:noFill/>
+          <a:ln/>
+        </p:spPr>
+        <p:txBody>
+          <a:bodyPr wrap="square" lIns="0" tIns="0" rIns="0" bIns="0" rtlCol="0" anchor="ctr"/>
+          <a:lstStyle/>
+          <a:p>
+            <a:pPr indent="0" marL="0">
+              <a:lnSpc>
+                <a:spcPts val="1500"/>
+              </a:lnSpc>
+              <a:buNone/>
+            </a:pPr>
+            <a:r>
+              <a:rPr lang="en-US" sz="1250" b="1" dirty="0">
                 <a:solidFill>
                   <a:srgbClr val="0B1220"/>
                 </a:solidFill>
@@ -21517,7 +23007,7 @@
               </a:rPr>
               <a:t>Identity &amp; Documents</a:t>
             </a:r>
-            <a:endParaRPr lang="en-US" sz="1350" dirty="0"/>
+            <a:endParaRPr lang="en-US" sz="1250" dirty="0"/>
           </a:p>
         </p:txBody>
       </p:sp>
@@ -21529,8 +23019,8 @@
         </p:nvSpPr>
         <p:spPr>
           <a:xfrm>
-            <a:off x="1417320" y="2103120"/>
-            <a:ext cx="2423160" cy="566928"/>
+            <a:off x="841248" y="2898648"/>
+            <a:ext cx="1559966" cy="530352"/>
           </a:xfrm>
           <a:prstGeom prst="rect">
             <a:avLst/>
@@ -21544,12 +23034,12 @@
           <a:p>
             <a:pPr indent="0" marL="0">
               <a:lnSpc>
-                <a:spcPts val="1400"/>
+                <a:spcPts val="1250"/>
               </a:lnSpc>
               <a:buNone/>
             </a:pPr>
             <a:r>
-              <a:rPr lang="en-US" sz="1050" dirty="0">
+              <a:rPr lang="en-US" sz="950" dirty="0">
                 <a:solidFill>
                   <a:srgbClr val="5A6880"/>
                 </a:solidFill>
@@ -21557,9 +23047,9 @@
                 <a:ea typeface="Calibri" pitchFamily="34" charset="-122"/>
                 <a:cs typeface="Calibri" pitchFamily="34" charset="-120"/>
               </a:rPr>
-              <a:t>Scanning, OCR, e-signature, secure vault, statutory guest register</a:t>
-            </a:r>
-            <a:endParaRPr lang="en-US" sz="1050" dirty="0"/>
+              <a:t>Scanning, OCR, e-signature, secure vault</a:t>
+            </a:r>
+            <a:endParaRPr lang="en-US" sz="950" dirty="0"/>
           </a:p>
         </p:txBody>
       </p:sp>
@@ -21571,12 +23061,12 @@
         </p:nvSpPr>
         <p:spPr>
           <a:xfrm>
-            <a:off x="4471416" y="1572768"/>
-            <a:ext cx="3429000" cy="1170432"/>
+            <a:off x="2876702" y="1691640"/>
+            <a:ext cx="1962302" cy="1828800"/>
           </a:xfrm>
           <a:prstGeom prst="roundRect">
             <a:avLst>
-              <a:gd name="adj" fmla="val 7031"/>
+              <a:gd name="adj" fmla="val 4500"/>
             </a:avLst>
           </a:prstGeom>
           <a:solidFill>
@@ -21605,8 +23095,8 @@
         </p:nvSpPr>
         <p:spPr>
           <a:xfrm>
-            <a:off x="4709160" y="1810512"/>
-            <a:ext cx="420624" cy="420624"/>
+            <a:off x="3077870" y="1892808"/>
+            <a:ext cx="402336" cy="402336"/>
           </a:xfrm>
           <a:prstGeom prst="ellipse">
             <a:avLst/>
@@ -21630,8 +23120,8 @@
         </p:nvSpPr>
         <p:spPr>
           <a:xfrm>
-            <a:off x="4709160" y="1810512"/>
-            <a:ext cx="420624" cy="420624"/>
+            <a:off x="3077870" y="1892808"/>
+            <a:ext cx="402336" cy="402336"/>
           </a:xfrm>
           <a:prstGeom prst="rect">
             <a:avLst/>
@@ -21669,24 +23159,27 @@
         </p:nvSpPr>
         <p:spPr>
           <a:xfrm>
-            <a:off x="5248656" y="1792224"/>
-            <a:ext cx="2423160" cy="274320"/>
-          </a:xfrm>
-          <a:prstGeom prst="rect">
-            <a:avLst/>
-          </a:prstGeom>
-          <a:noFill/>
-          <a:ln/>
-        </p:spPr>
-        <p:txBody>
-          <a:bodyPr wrap="square" lIns="0" tIns="0" rIns="0" bIns="0" rtlCol="0" anchor="ctr"/>
-          <a:lstStyle/>
-          <a:p>
-            <a:pPr indent="0" marL="0">
-              <a:buNone/>
-            </a:pPr>
-            <a:r>
-              <a:rPr lang="en-US" sz="1350" b="1" dirty="0">
+            <a:off x="3077870" y="2404872"/>
+            <a:ext cx="1559966" cy="493776"/>
+          </a:xfrm>
+          <a:prstGeom prst="rect">
+            <a:avLst/>
+          </a:prstGeom>
+          <a:noFill/>
+          <a:ln/>
+        </p:spPr>
+        <p:txBody>
+          <a:bodyPr wrap="square" lIns="0" tIns="0" rIns="0" bIns="0" rtlCol="0" anchor="ctr"/>
+          <a:lstStyle/>
+          <a:p>
+            <a:pPr indent="0" marL="0">
+              <a:lnSpc>
+                <a:spcPts val="1500"/>
+              </a:lnSpc>
+              <a:buNone/>
+            </a:pPr>
+            <a:r>
+              <a:rPr lang="en-US" sz="1250" b="1" dirty="0">
                 <a:solidFill>
                   <a:srgbClr val="0B1220"/>
                 </a:solidFill>
@@ -21696,7 +23189,7 @@
               </a:rPr>
               <a:t>Guest Profile</a:t>
             </a:r>
-            <a:endParaRPr lang="en-US" sz="1350" dirty="0"/>
+            <a:endParaRPr lang="en-US" sz="1250" dirty="0"/>
           </a:p>
         </p:txBody>
       </p:sp>
@@ -21708,8 +23201,8 @@
         </p:nvSpPr>
         <p:spPr>
           <a:xfrm>
-            <a:off x="5248656" y="2103120"/>
-            <a:ext cx="2423160" cy="566928"/>
+            <a:off x="3077870" y="2898648"/>
+            <a:ext cx="1559966" cy="530352"/>
           </a:xfrm>
           <a:prstGeom prst="rect">
             <a:avLst/>
@@ -21723,12 +23216,12 @@
           <a:p>
             <a:pPr indent="0" marL="0">
               <a:lnSpc>
-                <a:spcPts val="1400"/>
+                <a:spcPts val="1250"/>
               </a:lnSpc>
               <a:buNone/>
             </a:pPr>
             <a:r>
-              <a:rPr lang="en-US" sz="1050" dirty="0">
+              <a:rPr lang="en-US" sz="950" dirty="0">
                 <a:solidFill>
                   <a:srgbClr val="5A6880"/>
                 </a:solidFill>
@@ -21736,9 +23229,9 @@
                 <a:ea typeface="Calibri" pitchFamily="34" charset="-122"/>
                 <a:cs typeface="Calibri" pitchFamily="34" charset="-120"/>
               </a:rPr>
-              <a:t>Preferences, allergies, stay and spend history, consent ledger</a:t>
-            </a:r>
-            <a:endParaRPr lang="en-US" sz="1050" dirty="0"/>
+              <a:t>Preferences, allergies, history, consent</a:t>
+            </a:r>
+            <a:endParaRPr lang="en-US" sz="950" dirty="0"/>
           </a:p>
         </p:txBody>
       </p:sp>
@@ -21750,12 +23243,12 @@
         </p:nvSpPr>
         <p:spPr>
           <a:xfrm>
-            <a:off x="8302752" y="1572768"/>
-            <a:ext cx="3429000" cy="1170432"/>
+            <a:off x="5113325" y="1691640"/>
+            <a:ext cx="1962302" cy="1828800"/>
           </a:xfrm>
           <a:prstGeom prst="roundRect">
             <a:avLst>
-              <a:gd name="adj" fmla="val 7031"/>
+              <a:gd name="adj" fmla="val 4500"/>
             </a:avLst>
           </a:prstGeom>
           <a:solidFill>
@@ -21784,8 +23277,8 @@
         </p:nvSpPr>
         <p:spPr>
           <a:xfrm>
-            <a:off x="8540496" y="1810512"/>
-            <a:ext cx="420624" cy="420624"/>
+            <a:off x="5314493" y="1892808"/>
+            <a:ext cx="402336" cy="402336"/>
           </a:xfrm>
           <a:prstGeom prst="ellipse">
             <a:avLst/>
@@ -21809,8 +23302,8 @@
         </p:nvSpPr>
         <p:spPr>
           <a:xfrm>
-            <a:off x="8540496" y="1810512"/>
-            <a:ext cx="420624" cy="420624"/>
+            <a:off x="5314493" y="1892808"/>
+            <a:ext cx="402336" cy="402336"/>
           </a:xfrm>
           <a:prstGeom prst="rect">
             <a:avLst/>
@@ -21848,24 +23341,27 @@
         </p:nvSpPr>
         <p:spPr>
           <a:xfrm>
-            <a:off x="9079992" y="1792224"/>
-            <a:ext cx="2423160" cy="274320"/>
-          </a:xfrm>
-          <a:prstGeom prst="rect">
-            <a:avLst/>
-          </a:prstGeom>
-          <a:noFill/>
-          <a:ln/>
-        </p:spPr>
-        <p:txBody>
-          <a:bodyPr wrap="square" lIns="0" tIns="0" rIns="0" bIns="0" rtlCol="0" anchor="ctr"/>
-          <a:lstStyle/>
-          <a:p>
-            <a:pPr indent="0" marL="0">
-              <a:buNone/>
-            </a:pPr>
-            <a:r>
-              <a:rPr lang="en-US" sz="1350" b="1" dirty="0">
+            <a:off x="5314493" y="2404872"/>
+            <a:ext cx="1559966" cy="493776"/>
+          </a:xfrm>
+          <a:prstGeom prst="rect">
+            <a:avLst/>
+          </a:prstGeom>
+          <a:noFill/>
+          <a:ln/>
+        </p:spPr>
+        <p:txBody>
+          <a:bodyPr wrap="square" lIns="0" tIns="0" rIns="0" bIns="0" rtlCol="0" anchor="ctr"/>
+          <a:lstStyle/>
+          <a:p>
+            <a:pPr indent="0" marL="0">
+              <a:lnSpc>
+                <a:spcPts val="1500"/>
+              </a:lnSpc>
+              <a:buNone/>
+            </a:pPr>
+            <a:r>
+              <a:rPr lang="en-US" sz="1250" b="1" dirty="0">
                 <a:solidFill>
                   <a:srgbClr val="0B1220"/>
                 </a:solidFill>
@@ -21875,7 +23371,7 @@
               </a:rPr>
               <a:t>Booking</a:t>
             </a:r>
-            <a:endParaRPr lang="en-US" sz="1350" dirty="0"/>
+            <a:endParaRPr lang="en-US" sz="1250" dirty="0"/>
           </a:p>
         </p:txBody>
       </p:sp>
@@ -21887,8 +23383,8 @@
         </p:nvSpPr>
         <p:spPr>
           <a:xfrm>
-            <a:off x="9079992" y="2103120"/>
-            <a:ext cx="2423160" cy="566928"/>
+            <a:off x="5314493" y="2898648"/>
+            <a:ext cx="1559966" cy="530352"/>
           </a:xfrm>
           <a:prstGeom prst="rect">
             <a:avLst/>
@@ -21902,12 +23398,12 @@
           <a:p>
             <a:pPr indent="0" marL="0">
               <a:lnSpc>
-                <a:spcPts val="1400"/>
+                <a:spcPts val="1250"/>
               </a:lnSpc>
               <a:buNone/>
             </a:pPr>
             <a:r>
-              <a:rPr lang="en-US" sz="1050" dirty="0">
+              <a:rPr lang="en-US" sz="950" dirty="0">
                 <a:solidFill>
                   <a:srgbClr val="5A6880"/>
                 </a:solidFill>
@@ -21915,9 +23411,9 @@
                 <a:ea typeface="Calibri" pitchFamily="34" charset="-122"/>
                 <a:cs typeface="Calibri" pitchFamily="34" charset="-120"/>
               </a:rPr>
-              <a:t>Direct engine where you need one; pre-arrival upsell on every reservation</a:t>
-            </a:r>
-            <a:endParaRPr lang="en-US" sz="1050" dirty="0"/>
+              <a:t>Direct engine, pre-arrival upsell</a:t>
+            </a:r>
+            <a:endParaRPr lang="en-US" sz="950" dirty="0"/>
           </a:p>
         </p:txBody>
       </p:sp>
@@ -21929,12 +23425,12 @@
         </p:nvSpPr>
         <p:spPr>
           <a:xfrm>
-            <a:off x="640080" y="2962656"/>
-            <a:ext cx="3429000" cy="1170432"/>
+            <a:off x="7349947" y="1691640"/>
+            <a:ext cx="1962302" cy="1828800"/>
           </a:xfrm>
           <a:prstGeom prst="roundRect">
             <a:avLst>
-              <a:gd name="adj" fmla="val 7031"/>
+              <a:gd name="adj" fmla="val 4500"/>
             </a:avLst>
           </a:prstGeom>
           <a:solidFill>
@@ -21963,8 +23459,8 @@
         </p:nvSpPr>
         <p:spPr>
           <a:xfrm>
-            <a:off x="877824" y="3200400"/>
-            <a:ext cx="420624" cy="420624"/>
+            <a:off x="7551115" y="1892808"/>
+            <a:ext cx="402336" cy="402336"/>
           </a:xfrm>
           <a:prstGeom prst="ellipse">
             <a:avLst/>
@@ -21988,8 +23484,8 @@
         </p:nvSpPr>
         <p:spPr>
           <a:xfrm>
-            <a:off x="877824" y="3200400"/>
-            <a:ext cx="420624" cy="420624"/>
+            <a:off x="7551115" y="1892808"/>
+            <a:ext cx="402336" cy="402336"/>
           </a:xfrm>
           <a:prstGeom prst="rect">
             <a:avLst/>
@@ -22027,24 +23523,27 @@
         </p:nvSpPr>
         <p:spPr>
           <a:xfrm>
-            <a:off x="1417320" y="3182112"/>
-            <a:ext cx="2423160" cy="274320"/>
-          </a:xfrm>
-          <a:prstGeom prst="rect">
-            <a:avLst/>
-          </a:prstGeom>
-          <a:noFill/>
-          <a:ln/>
-        </p:spPr>
-        <p:txBody>
-          <a:bodyPr wrap="square" lIns="0" tIns="0" rIns="0" bIns="0" rtlCol="0" anchor="ctr"/>
-          <a:lstStyle/>
-          <a:p>
-            <a:pPr indent="0" marL="0">
-              <a:buNone/>
-            </a:pPr>
-            <a:r>
-              <a:rPr lang="en-US" sz="1350" b="1" dirty="0">
+            <a:off x="7551115" y="2404872"/>
+            <a:ext cx="1559966" cy="493776"/>
+          </a:xfrm>
+          <a:prstGeom prst="rect">
+            <a:avLst/>
+          </a:prstGeom>
+          <a:noFill/>
+          <a:ln/>
+        </p:spPr>
+        <p:txBody>
+          <a:bodyPr wrap="square" lIns="0" tIns="0" rIns="0" bIns="0" rtlCol="0" anchor="ctr"/>
+          <a:lstStyle/>
+          <a:p>
+            <a:pPr indent="0" marL="0">
+              <a:lnSpc>
+                <a:spcPts val="1500"/>
+              </a:lnSpc>
+              <a:buNone/>
+            </a:pPr>
+            <a:r>
+              <a:rPr lang="en-US" sz="1250" b="1" dirty="0">
                 <a:solidFill>
                   <a:srgbClr val="0B1220"/>
                 </a:solidFill>
@@ -22054,7 +23553,7 @@
               </a:rPr>
               <a:t>Reservations</a:t>
             </a:r>
-            <a:endParaRPr lang="en-US" sz="1350" dirty="0"/>
+            <a:endParaRPr lang="en-US" sz="1250" dirty="0"/>
           </a:p>
         </p:txBody>
       </p:sp>
@@ -22066,8 +23565,8 @@
         </p:nvSpPr>
         <p:spPr>
           <a:xfrm>
-            <a:off x="1417320" y="3493008"/>
-            <a:ext cx="2423160" cy="566928"/>
+            <a:off x="7551115" y="2898648"/>
+            <a:ext cx="1559966" cy="530352"/>
           </a:xfrm>
           <a:prstGeom prst="rect">
             <a:avLst/>
@@ -22081,12 +23580,12 @@
           <a:p>
             <a:pPr indent="0" marL="0">
               <a:lnSpc>
-                <a:spcPts val="1400"/>
+                <a:spcPts val="1250"/>
               </a:lnSpc>
               <a:buNone/>
             </a:pPr>
             <a:r>
-              <a:rPr lang="en-US" sz="1050" dirty="0">
+              <a:rPr lang="en-US" sz="950" dirty="0">
                 <a:solidFill>
                   <a:srgbClr val="5A6880"/>
                 </a:solidFill>
@@ -22094,9 +23593,9 @@
                 <a:ea typeface="Calibri" pitchFamily="34" charset="-122"/>
                 <a:cs typeface="Calibri" pitchFamily="34" charset="-120"/>
               </a:rPr>
-              <a:t>Tables, spa, gym, function rooms, tours, transfers</a:t>
-            </a:r>
-            <a:endParaRPr lang="en-US" sz="1050" dirty="0"/>
+              <a:t>Tables, spa, function rooms, tours</a:t>
+            </a:r>
+            <a:endParaRPr lang="en-US" sz="950" dirty="0"/>
           </a:p>
         </p:txBody>
       </p:sp>
@@ -22108,12 +23607,12 @@
         </p:nvSpPr>
         <p:spPr>
           <a:xfrm>
-            <a:off x="4471416" y="2962656"/>
-            <a:ext cx="3429000" cy="1170432"/>
+            <a:off x="9586570" y="1691640"/>
+            <a:ext cx="1962302" cy="1828800"/>
           </a:xfrm>
           <a:prstGeom prst="roundRect">
             <a:avLst>
-              <a:gd name="adj" fmla="val 7031"/>
+              <a:gd name="adj" fmla="val 4500"/>
             </a:avLst>
           </a:prstGeom>
           <a:solidFill>
@@ -22142,8 +23641,8 @@
         </p:nvSpPr>
         <p:spPr>
           <a:xfrm>
-            <a:off x="4709160" y="3200400"/>
-            <a:ext cx="420624" cy="420624"/>
+            <a:off x="9787738" y="1892808"/>
+            <a:ext cx="402336" cy="402336"/>
           </a:xfrm>
           <a:prstGeom prst="ellipse">
             <a:avLst/>
@@ -22167,8 +23666,8 @@
         </p:nvSpPr>
         <p:spPr>
           <a:xfrm>
-            <a:off x="4709160" y="3200400"/>
-            <a:ext cx="420624" cy="420624"/>
+            <a:off x="9787738" y="1892808"/>
+            <a:ext cx="402336" cy="402336"/>
           </a:xfrm>
           <a:prstGeom prst="rect">
             <a:avLst/>
@@ -22206,24 +23705,27 @@
         </p:nvSpPr>
         <p:spPr>
           <a:xfrm>
-            <a:off x="5248656" y="3182112"/>
-            <a:ext cx="2423160" cy="274320"/>
-          </a:xfrm>
-          <a:prstGeom prst="rect">
-            <a:avLst/>
-          </a:prstGeom>
-          <a:noFill/>
-          <a:ln/>
-        </p:spPr>
-        <p:txBody>
-          <a:bodyPr wrap="square" lIns="0" tIns="0" rIns="0" bIns="0" rtlCol="0" anchor="ctr"/>
-          <a:lstStyle/>
-          <a:p>
-            <a:pPr indent="0" marL="0">
-              <a:buNone/>
-            </a:pPr>
-            <a:r>
-              <a:rPr lang="en-US" sz="1350" b="1" dirty="0">
+            <a:off x="9787738" y="2404872"/>
+            <a:ext cx="1559966" cy="493776"/>
+          </a:xfrm>
+          <a:prstGeom prst="rect">
+            <a:avLst/>
+          </a:prstGeom>
+          <a:noFill/>
+          <a:ln/>
+        </p:spPr>
+        <p:txBody>
+          <a:bodyPr wrap="square" lIns="0" tIns="0" rIns="0" bIns="0" rtlCol="0" anchor="ctr"/>
+          <a:lstStyle/>
+          <a:p>
+            <a:pPr indent="0" marL="0">
+              <a:lnSpc>
+                <a:spcPts val="1500"/>
+              </a:lnSpc>
+              <a:buNone/>
+            </a:pPr>
+            <a:r>
+              <a:rPr lang="en-US" sz="1250" b="1" dirty="0">
                 <a:solidFill>
                   <a:srgbClr val="0B1220"/>
                 </a:solidFill>
@@ -22233,7 +23735,7 @@
               </a:rPr>
               <a:t>Payments &amp; Folio</a:t>
             </a:r>
-            <a:endParaRPr lang="en-US" sz="1350" dirty="0"/>
+            <a:endParaRPr lang="en-US" sz="1250" dirty="0"/>
           </a:p>
         </p:txBody>
       </p:sp>
@@ -22245,8 +23747,8 @@
         </p:nvSpPr>
         <p:spPr>
           <a:xfrm>
-            <a:off x="5248656" y="3493008"/>
-            <a:ext cx="2423160" cy="566928"/>
+            <a:off x="9787738" y="2898648"/>
+            <a:ext cx="1559966" cy="530352"/>
           </a:xfrm>
           <a:prstGeom prst="rect">
             <a:avLst/>
@@ -22260,12 +23762,12 @@
           <a:p>
             <a:pPr indent="0" marL="0">
               <a:lnSpc>
-                <a:spcPts val="1400"/>
+                <a:spcPts val="1250"/>
               </a:lnSpc>
               <a:buNone/>
             </a:pPr>
             <a:r>
-              <a:rPr lang="en-US" sz="1050" dirty="0">
+              <a:rPr lang="en-US" sz="950" dirty="0">
                 <a:solidFill>
                   <a:srgbClr val="5A6880"/>
                 </a:solidFill>
@@ -22273,9 +23775,9 @@
                 <a:ea typeface="Calibri" pitchFamily="34" charset="-122"/>
                 <a:cs typeface="Calibri" pitchFamily="34" charset="-120"/>
               </a:rPr>
-              <a:t>Cards, wallets, room charge, split billing, settlement</a:t>
-            </a:r>
-            <a:endParaRPr lang="en-US" sz="1050" dirty="0"/>
+              <a:t>Cards, wallets, room charge, settlement</a:t>
+            </a:r>
+            <a:endParaRPr lang="en-US" sz="950" dirty="0"/>
           </a:p>
         </p:txBody>
       </p:sp>
@@ -22287,12 +23789,12 @@
         </p:nvSpPr>
         <p:spPr>
           <a:xfrm>
-            <a:off x="8302752" y="2962656"/>
-            <a:ext cx="3429000" cy="1170432"/>
+            <a:off x="640080" y="3758184"/>
+            <a:ext cx="1962302" cy="1828800"/>
           </a:xfrm>
           <a:prstGeom prst="roundRect">
             <a:avLst>
-              <a:gd name="adj" fmla="val 7031"/>
+              <a:gd name="adj" fmla="val 4500"/>
             </a:avLst>
           </a:prstGeom>
           <a:solidFill>
@@ -22321,8 +23823,8 @@
         </p:nvSpPr>
         <p:spPr>
           <a:xfrm>
-            <a:off x="8540496" y="3200400"/>
-            <a:ext cx="420624" cy="420624"/>
+            <a:off x="841248" y="3959352"/>
+            <a:ext cx="402336" cy="402336"/>
           </a:xfrm>
           <a:prstGeom prst="ellipse">
             <a:avLst/>
@@ -22346,8 +23848,8 @@
         </p:nvSpPr>
         <p:spPr>
           <a:xfrm>
-            <a:off x="8540496" y="3200400"/>
-            <a:ext cx="420624" cy="420624"/>
+            <a:off x="841248" y="3959352"/>
+            <a:ext cx="402336" cy="402336"/>
           </a:xfrm>
           <a:prstGeom prst="rect">
             <a:avLst/>
@@ -22385,24 +23887,27 @@
         </p:nvSpPr>
         <p:spPr>
           <a:xfrm>
-            <a:off x="9079992" y="3182112"/>
-            <a:ext cx="2423160" cy="274320"/>
-          </a:xfrm>
-          <a:prstGeom prst="rect">
-            <a:avLst/>
-          </a:prstGeom>
-          <a:noFill/>
-          <a:ln/>
-        </p:spPr>
-        <p:txBody>
-          <a:bodyPr wrap="square" lIns="0" tIns="0" rIns="0" bIns="0" rtlCol="0" anchor="ctr"/>
-          <a:lstStyle/>
-          <a:p>
-            <a:pPr indent="0" marL="0">
-              <a:buNone/>
-            </a:pPr>
-            <a:r>
-              <a:rPr lang="en-US" sz="1350" b="1" dirty="0">
+            <a:off x="841248" y="4471416"/>
+            <a:ext cx="1559966" cy="493776"/>
+          </a:xfrm>
+          <a:prstGeom prst="rect">
+            <a:avLst/>
+          </a:prstGeom>
+          <a:noFill/>
+          <a:ln/>
+        </p:spPr>
+        <p:txBody>
+          <a:bodyPr wrap="square" lIns="0" tIns="0" rIns="0" bIns="0" rtlCol="0" anchor="ctr"/>
+          <a:lstStyle/>
+          <a:p>
+            <a:pPr indent="0" marL="0">
+              <a:lnSpc>
+                <a:spcPts val="1500"/>
+              </a:lnSpc>
+              <a:buNone/>
+            </a:pPr>
+            <a:r>
+              <a:rPr lang="en-US" sz="1250" b="1" dirty="0">
                 <a:solidFill>
                   <a:srgbClr val="0B1220"/>
                 </a:solidFill>
@@ -22412,7 +23917,7 @@
               </a:rPr>
               <a:t>Ordering</a:t>
             </a:r>
-            <a:endParaRPr lang="en-US" sz="1350" dirty="0"/>
+            <a:endParaRPr lang="en-US" sz="1250" dirty="0"/>
           </a:p>
         </p:txBody>
       </p:sp>
@@ -22424,8 +23929,8 @@
         </p:nvSpPr>
         <p:spPr>
           <a:xfrm>
-            <a:off x="9079992" y="3493008"/>
-            <a:ext cx="2423160" cy="566928"/>
+            <a:off x="841248" y="4965192"/>
+            <a:ext cx="1559966" cy="530352"/>
           </a:xfrm>
           <a:prstGeom prst="rect">
             <a:avLst/>
@@ -22439,12 +23944,12 @@
           <a:p>
             <a:pPr indent="0" marL="0">
               <a:lnSpc>
-                <a:spcPts val="1400"/>
+                <a:spcPts val="1250"/>
               </a:lnSpc>
               <a:buNone/>
             </a:pPr>
             <a:r>
-              <a:rPr lang="en-US" sz="1050" dirty="0">
+              <a:rPr lang="en-US" sz="950" dirty="0">
                 <a:solidFill>
                   <a:srgbClr val="5A6880"/>
                 </a:solidFill>
@@ -22452,9 +23957,9 @@
                 <a:ea typeface="Calibri" pitchFamily="34" charset="-122"/>
                 <a:cs typeface="Calibri" pitchFamily="34" charset="-120"/>
               </a:rPr>
-              <a:t>Restaurant, bar, in-room dining, QR, kitchen display</a:t>
-            </a:r>
-            <a:endParaRPr lang="en-US" sz="1050" dirty="0"/>
+              <a:t>Restaurant, bar, in-room dining, kitchen display</a:t>
+            </a:r>
+            <a:endParaRPr lang="en-US" sz="950" dirty="0"/>
           </a:p>
         </p:txBody>
       </p:sp>
@@ -22466,12 +23971,12 @@
         </p:nvSpPr>
         <p:spPr>
           <a:xfrm>
-            <a:off x="640080" y="4352544"/>
-            <a:ext cx="3429000" cy="1170432"/>
+            <a:off x="2876702" y="3758184"/>
+            <a:ext cx="1962302" cy="1828800"/>
           </a:xfrm>
           <a:prstGeom prst="roundRect">
             <a:avLst>
-              <a:gd name="adj" fmla="val 7031"/>
+              <a:gd name="adj" fmla="val 4500"/>
             </a:avLst>
           </a:prstGeom>
           <a:solidFill>
@@ -22500,8 +24005,8 @@
         </p:nvSpPr>
         <p:spPr>
           <a:xfrm>
-            <a:off x="877824" y="4590288"/>
-            <a:ext cx="420624" cy="420624"/>
+            <a:off x="3077870" y="3959352"/>
+            <a:ext cx="402336" cy="402336"/>
           </a:xfrm>
           <a:prstGeom prst="ellipse">
             <a:avLst/>
@@ -22525,8 +24030,8 @@
         </p:nvSpPr>
         <p:spPr>
           <a:xfrm>
-            <a:off x="877824" y="4590288"/>
-            <a:ext cx="420624" cy="420624"/>
+            <a:off x="3077870" y="3959352"/>
+            <a:ext cx="402336" cy="402336"/>
           </a:xfrm>
           <a:prstGeom prst="rect">
             <a:avLst/>
@@ -22564,24 +24069,27 @@
         </p:nvSpPr>
         <p:spPr>
           <a:xfrm>
-            <a:off x="1417320" y="4572000"/>
-            <a:ext cx="2423160" cy="274320"/>
-          </a:xfrm>
-          <a:prstGeom prst="rect">
-            <a:avLst/>
-          </a:prstGeom>
-          <a:noFill/>
-          <a:ln/>
-        </p:spPr>
-        <p:txBody>
-          <a:bodyPr wrap="square" lIns="0" tIns="0" rIns="0" bIns="0" rtlCol="0" anchor="ctr"/>
-          <a:lstStyle/>
-          <a:p>
-            <a:pPr indent="0" marL="0">
-              <a:buNone/>
-            </a:pPr>
-            <a:r>
-              <a:rPr lang="en-US" sz="1350" b="1" dirty="0">
+            <a:off x="3077870" y="4471416"/>
+            <a:ext cx="1559966" cy="493776"/>
+          </a:xfrm>
+          <a:prstGeom prst="rect">
+            <a:avLst/>
+          </a:prstGeom>
+          <a:noFill/>
+          <a:ln/>
+        </p:spPr>
+        <p:txBody>
+          <a:bodyPr wrap="square" lIns="0" tIns="0" rIns="0" bIns="0" rtlCol="0" anchor="ctr"/>
+          <a:lstStyle/>
+          <a:p>
+            <a:pPr indent="0" marL="0">
+              <a:lnSpc>
+                <a:spcPts val="1500"/>
+              </a:lnSpc>
+              <a:buNone/>
+            </a:pPr>
+            <a:r>
+              <a:rPr lang="en-US" sz="1250" b="1" dirty="0">
                 <a:solidFill>
                   <a:srgbClr val="0B1220"/>
                 </a:solidFill>
@@ -22591,7 +24099,7 @@
               </a:rPr>
               <a:t>Concierge &amp; Service</a:t>
             </a:r>
-            <a:endParaRPr lang="en-US" sz="1350" dirty="0"/>
+            <a:endParaRPr lang="en-US" sz="1250" dirty="0"/>
           </a:p>
         </p:txBody>
       </p:sp>
@@ -22603,8 +24111,8 @@
         </p:nvSpPr>
         <p:spPr>
           <a:xfrm>
-            <a:off x="1417320" y="4882896"/>
-            <a:ext cx="2423160" cy="566928"/>
+            <a:off x="3077870" y="4965192"/>
+            <a:ext cx="1559966" cy="530352"/>
           </a:xfrm>
           <a:prstGeom prst="rect">
             <a:avLst/>
@@ -22618,12 +24126,12 @@
           <a:p>
             <a:pPr indent="0" marL="0">
               <a:lnSpc>
-                <a:spcPts val="1400"/>
+                <a:spcPts val="1250"/>
               </a:lnSpc>
               <a:buNone/>
             </a:pPr>
             <a:r>
-              <a:rPr lang="en-US" sz="1050" dirty="0">
+              <a:rPr lang="en-US" sz="950" dirty="0">
                 <a:solidFill>
                   <a:srgbClr val="5A6880"/>
                 </a:solidFill>
@@ -22631,9 +24139,9 @@
                 <a:ea typeface="Calibri" pitchFamily="34" charset="-122"/>
                 <a:cs typeface="Calibri" pitchFamily="34" charset="-120"/>
               </a:rPr>
-              <a:t>Requests, SLA ticketing, housekeeping, maintenance, chat</a:t>
-            </a:r>
-            <a:endParaRPr lang="en-US" sz="1050" dirty="0"/>
+              <a:t>Requests, SLA ticketing, housekeeping</a:t>
+            </a:r>
+            <a:endParaRPr lang="en-US" sz="950" dirty="0"/>
           </a:p>
         </p:txBody>
       </p:sp>
@@ -22645,12 +24153,12 @@
         </p:nvSpPr>
         <p:spPr>
           <a:xfrm>
-            <a:off x="4471416" y="4352544"/>
-            <a:ext cx="3429000" cy="1170432"/>
+            <a:off x="5113325" y="3758184"/>
+            <a:ext cx="1962302" cy="1828800"/>
           </a:xfrm>
           <a:prstGeom prst="roundRect">
             <a:avLst>
-              <a:gd name="adj" fmla="val 7031"/>
+              <a:gd name="adj" fmla="val 4500"/>
             </a:avLst>
           </a:prstGeom>
           <a:solidFill>
@@ -22679,8 +24187,8 @@
         </p:nvSpPr>
         <p:spPr>
           <a:xfrm>
-            <a:off x="4709160" y="4590288"/>
-            <a:ext cx="420624" cy="420624"/>
+            <a:off x="5314493" y="3959352"/>
+            <a:ext cx="402336" cy="402336"/>
           </a:xfrm>
           <a:prstGeom prst="ellipse">
             <a:avLst/>
@@ -22704,8 +24212,8 @@
         </p:nvSpPr>
         <p:spPr>
           <a:xfrm>
-            <a:off x="4709160" y="4590288"/>
-            <a:ext cx="420624" cy="420624"/>
+            <a:off x="5314493" y="3959352"/>
+            <a:ext cx="402336" cy="402336"/>
           </a:xfrm>
           <a:prstGeom prst="rect">
             <a:avLst/>
@@ -22743,24 +24251,27 @@
         </p:nvSpPr>
         <p:spPr>
           <a:xfrm>
-            <a:off x="5248656" y="4572000"/>
-            <a:ext cx="2423160" cy="274320"/>
-          </a:xfrm>
-          <a:prstGeom prst="rect">
-            <a:avLst/>
-          </a:prstGeom>
-          <a:noFill/>
-          <a:ln/>
-        </p:spPr>
-        <p:txBody>
-          <a:bodyPr wrap="square" lIns="0" tIns="0" rIns="0" bIns="0" rtlCol="0" anchor="ctr"/>
-          <a:lstStyle/>
-          <a:p>
-            <a:pPr indent="0" marL="0">
-              <a:buNone/>
-            </a:pPr>
-            <a:r>
-              <a:rPr lang="en-US" sz="1350" b="1" dirty="0">
+            <a:off x="5314493" y="4471416"/>
+            <a:ext cx="1559966" cy="493776"/>
+          </a:xfrm>
+          <a:prstGeom prst="rect">
+            <a:avLst/>
+          </a:prstGeom>
+          <a:noFill/>
+          <a:ln/>
+        </p:spPr>
+        <p:txBody>
+          <a:bodyPr wrap="square" lIns="0" tIns="0" rIns="0" bIns="0" rtlCol="0" anchor="ctr"/>
+          <a:lstStyle/>
+          <a:p>
+            <a:pPr indent="0" marL="0">
+              <a:lnSpc>
+                <a:spcPts val="1500"/>
+              </a:lnSpc>
+              <a:buNone/>
+            </a:pPr>
+            <a:r>
+              <a:rPr lang="en-US" sz="1250" b="1" dirty="0">
                 <a:solidFill>
                   <a:srgbClr val="0B1220"/>
                 </a:solidFill>
@@ -22770,7 +24281,7 @@
               </a:rPr>
               <a:t>Entertainment</a:t>
             </a:r>
-            <a:endParaRPr lang="en-US" sz="1350" dirty="0"/>
+            <a:endParaRPr lang="en-US" sz="1250" dirty="0"/>
           </a:p>
         </p:txBody>
       </p:sp>
@@ -22782,8 +24293,8 @@
         </p:nvSpPr>
         <p:spPr>
           <a:xfrm>
-            <a:off x="5248656" y="4882896"/>
-            <a:ext cx="2423160" cy="566928"/>
+            <a:off x="5314493" y="4965192"/>
+            <a:ext cx="1559966" cy="530352"/>
           </a:xfrm>
           <a:prstGeom prst="rect">
             <a:avLst/>
@@ -22797,12 +24308,12 @@
           <a:p>
             <a:pPr indent="0" marL="0">
               <a:lnSpc>
-                <a:spcPts val="1400"/>
+                <a:spcPts val="1250"/>
               </a:lnSpc>
               <a:buNone/>
             </a:pPr>
             <a:r>
-              <a:rPr lang="en-US" sz="1050" dirty="0">
+              <a:rPr lang="en-US" sz="950" dirty="0">
                 <a:solidFill>
                   <a:srgbClr val="5A6880"/>
                 </a:solidFill>
@@ -22810,9 +24321,9 @@
                 <a:ea typeface="Calibri" pitchFamily="34" charset="-122"/>
                 <a:cs typeface="Calibri" pitchFamily="34" charset="-120"/>
               </a:rPr>
-              <a:t>Guest TV application, live and on-demand, Orpheus Nations, casting</a:t>
-            </a:r>
-            <a:endParaRPr lang="en-US" sz="1050" dirty="0"/>
+              <a:t>Guest TV app, live and on-demand, casting</a:t>
+            </a:r>
+            <a:endParaRPr lang="en-US" sz="950" dirty="0"/>
           </a:p>
         </p:txBody>
       </p:sp>
@@ -22824,12 +24335,194 @@
         </p:nvSpPr>
         <p:spPr>
           <a:xfrm>
-            <a:off x="8302752" y="4352544"/>
-            <a:ext cx="3429000" cy="1170432"/>
+            <a:off x="7349947" y="3758184"/>
+            <a:ext cx="1962302" cy="1828800"/>
           </a:xfrm>
           <a:prstGeom prst="roundRect">
             <a:avLst>
-              <a:gd name="adj" fmla="val 7031"/>
+              <a:gd name="adj" fmla="val 4500"/>
+            </a:avLst>
+          </a:prstGeom>
+          <a:solidFill>
+            <a:srgbClr val="FBF6E9"/>
+          </a:solidFill>
+          <a:ln w="12700">
+            <a:solidFill>
+              <a:srgbClr val="DFE5EE"/>
+            </a:solidFill>
+            <a:prstDash val="solid"/>
+          </a:ln>
+          <a:effectLst>
+            <a:outerShdw sx="100000" sy="100000" kx="0" ky="0" algn="bl" rotWithShape="0" blurRad="127000" dist="25400" dir="5400000">
+              <a:srgbClr val="0B1220">
+                <a:alpha val="10000"/>
+              </a:srgbClr>
+            </a:outerShdw>
+          </a:effectLst>
+        </p:spPr>
+      </p:sp>
+      <p:sp>
+        <p:nvSpPr>
+          <p:cNvPr id="45" name="Shape 43"/>
+          <p:cNvSpPr/>
+          <p:nvPr/>
+        </p:nvSpPr>
+        <p:spPr>
+          <a:xfrm>
+            <a:off x="7551115" y="3959352"/>
+            <a:ext cx="402336" cy="402336"/>
+          </a:xfrm>
+          <a:prstGeom prst="ellipse">
+            <a:avLst/>
+          </a:prstGeom>
+          <a:solidFill>
+            <a:srgbClr val="A87C1F"/>
+          </a:solidFill>
+          <a:ln w="12700">
+            <a:solidFill>
+              <a:srgbClr val="A87C1F"/>
+            </a:solidFill>
+            <a:prstDash val="solid"/>
+          </a:ln>
+        </p:spPr>
+      </p:sp>
+      <p:sp>
+        <p:nvSpPr>
+          <p:cNvPr id="46" name="Text 44"/>
+          <p:cNvSpPr txBox="1"/>
+          <p:nvPr/>
+        </p:nvSpPr>
+        <p:spPr>
+          <a:xfrm>
+            <a:off x="7551115" y="3959352"/>
+            <a:ext cx="402336" cy="402336"/>
+          </a:xfrm>
+          <a:prstGeom prst="rect">
+            <a:avLst/>
+          </a:prstGeom>
+          <a:noFill/>
+          <a:ln/>
+        </p:spPr>
+        <p:txBody>
+          <a:bodyPr wrap="square" lIns="0" tIns="0" rIns="0" bIns="0" rtlCol="0" anchor="ctr"/>
+          <a:lstStyle/>
+          <a:p>
+            <a:pPr algn="ctr" indent="0" marL="0">
+              <a:buNone/>
+            </a:pPr>
+            <a:r>
+              <a:rPr lang="en-US" sz="1200" b="1" dirty="0">
+                <a:solidFill>
+                  <a:srgbClr val="FFFFFF"/>
+                </a:solidFill>
+                <a:latin typeface="Calibri" pitchFamily="34" charset="0"/>
+                <a:ea typeface="Calibri" pitchFamily="34" charset="-122"/>
+                <a:cs typeface="Calibri" pitchFamily="34" charset="-120"/>
+              </a:rPr>
+              <a:t>VO</a:t>
+            </a:r>
+            <a:endParaRPr lang="en-US" sz="1200" dirty="0"/>
+          </a:p>
+        </p:txBody>
+      </p:sp>
+      <p:sp>
+        <p:nvSpPr>
+          <p:cNvPr id="47" name="Text 45"/>
+          <p:cNvSpPr txBox="1"/>
+          <p:nvPr/>
+        </p:nvSpPr>
+        <p:spPr>
+          <a:xfrm>
+            <a:off x="7551115" y="4471416"/>
+            <a:ext cx="1559966" cy="493776"/>
+          </a:xfrm>
+          <a:prstGeom prst="rect">
+            <a:avLst/>
+          </a:prstGeom>
+          <a:noFill/>
+          <a:ln/>
+        </p:spPr>
+        <p:txBody>
+          <a:bodyPr wrap="square" lIns="0" tIns="0" rIns="0" bIns="0" rtlCol="0" anchor="ctr"/>
+          <a:lstStyle/>
+          <a:p>
+            <a:pPr indent="0" marL="0">
+              <a:lnSpc>
+                <a:spcPts val="1500"/>
+              </a:lnSpc>
+              <a:buNone/>
+            </a:pPr>
+            <a:r>
+              <a:rPr lang="en-US" sz="1250" b="1" dirty="0">
+                <a:solidFill>
+                  <a:srgbClr val="0B1220"/>
+                </a:solidFill>
+                <a:latin typeface="Calibri" pitchFamily="34" charset="0"/>
+                <a:ea typeface="Calibri" pitchFamily="34" charset="-122"/>
+                <a:cs typeface="Calibri" pitchFamily="34" charset="-120"/>
+              </a:rPr>
+              <a:t>Voice</a:t>
+            </a:r>
+            <a:endParaRPr lang="en-US" sz="1250" dirty="0"/>
+          </a:p>
+        </p:txBody>
+      </p:sp>
+      <p:sp>
+        <p:nvSpPr>
+          <p:cNvPr id="48" name="Text 46"/>
+          <p:cNvSpPr txBox="1"/>
+          <p:nvPr/>
+        </p:nvSpPr>
+        <p:spPr>
+          <a:xfrm>
+            <a:off x="7551115" y="4965192"/>
+            <a:ext cx="1559966" cy="530352"/>
+          </a:xfrm>
+          <a:prstGeom prst="rect">
+            <a:avLst/>
+          </a:prstGeom>
+          <a:noFill/>
+          <a:ln/>
+        </p:spPr>
+        <p:txBody>
+          <a:bodyPr wrap="square" lIns="0" tIns="0" rIns="0" bIns="0" rtlCol="0" anchor="ctr"/>
+          <a:lstStyle/>
+          <a:p>
+            <a:pPr indent="0" marL="0">
+              <a:lnSpc>
+                <a:spcPts val="1250"/>
+              </a:lnSpc>
+              <a:buNone/>
+            </a:pPr>
+            <a:r>
+              <a:rPr lang="en-US" sz="950" dirty="0">
+                <a:solidFill>
+                  <a:srgbClr val="5A6880"/>
+                </a:solidFill>
+                <a:latin typeface="Calibri" pitchFamily="34" charset="0"/>
+                <a:ea typeface="Calibri" pitchFamily="34" charset="-122"/>
+                <a:cs typeface="Calibri" pitchFamily="34" charset="-120"/>
+              </a:rPr>
+              <a:t>In-room SIP phone, wake-ups, call posting</a:t>
+            </a:r>
+            <a:endParaRPr lang="en-US" sz="950" dirty="0"/>
+          </a:p>
+        </p:txBody>
+      </p:sp>
+      <p:sp>
+        <p:nvSpPr>
+          <p:cNvPr id="49" name="Shape 47"/>
+          <p:cNvSpPr/>
+          <p:nvPr/>
+        </p:nvSpPr>
+        <p:spPr>
+          <a:xfrm>
+            <a:off x="9586570" y="3758184"/>
+            <a:ext cx="1962302" cy="1828800"/>
+          </a:xfrm>
+          <a:prstGeom prst="roundRect">
+            <a:avLst>
+              <a:gd name="adj" fmla="val 4500"/>
             </a:avLst>
           </a:prstGeom>
           <a:solidFill>
@@ -22852,14 +24545,14 @@
       </p:sp>
       <p:sp>
         <p:nvSpPr>
-          <p:cNvPr id="45" name="Shape 43"/>
+          <p:cNvPr id="50" name="Shape 48"/>
           <p:cNvSpPr/>
           <p:nvPr/>
         </p:nvSpPr>
         <p:spPr>
           <a:xfrm>
-            <a:off x="8540496" y="4590288"/>
-            <a:ext cx="420624" cy="420624"/>
+            <a:off x="9787738" y="3959352"/>
+            <a:ext cx="402336" cy="402336"/>
           </a:xfrm>
           <a:prstGeom prst="ellipse">
             <a:avLst/>
@@ -22877,14 +24570,14 @@
       </p:sp>
       <p:sp>
         <p:nvSpPr>
-          <p:cNvPr id="46" name="Text 44"/>
-          <p:cNvSpPr txBox="1"/>
-          <p:nvPr/>
-        </p:nvSpPr>
-        <p:spPr>
-          <a:xfrm>
-            <a:off x="8540496" y="4590288"/>
-            <a:ext cx="420624" cy="420624"/>
+          <p:cNvPr id="51" name="Text 49"/>
+          <p:cNvSpPr txBox="1"/>
+          <p:nvPr/>
+        </p:nvSpPr>
+        <p:spPr>
+          <a:xfrm>
+            <a:off x="9787738" y="3959352"/>
+            <a:ext cx="402336" cy="402336"/>
           </a:xfrm>
           <a:prstGeom prst="rect">
             <a:avLst/>
@@ -22916,30 +24609,33 @@
       </p:sp>
       <p:sp>
         <p:nvSpPr>
-          <p:cNvPr id="47" name="Text 45"/>
-          <p:cNvSpPr txBox="1"/>
-          <p:nvPr/>
-        </p:nvSpPr>
-        <p:spPr>
-          <a:xfrm>
-            <a:off x="9079992" y="4572000"/>
-            <a:ext cx="2423160" cy="274320"/>
-          </a:xfrm>
-          <a:prstGeom prst="rect">
-            <a:avLst/>
-          </a:prstGeom>
-          <a:noFill/>
-          <a:ln/>
-        </p:spPr>
-        <p:txBody>
-          <a:bodyPr wrap="square" lIns="0" tIns="0" rIns="0" bIns="0" rtlCol="0" anchor="ctr"/>
-          <a:lstStyle/>
-          <a:p>
-            <a:pPr indent="0" marL="0">
-              <a:buNone/>
-            </a:pPr>
-            <a:r>
-              <a:rPr lang="en-US" sz="1350" b="1" dirty="0">
+          <p:cNvPr id="52" name="Text 50"/>
+          <p:cNvSpPr txBox="1"/>
+          <p:nvPr/>
+        </p:nvSpPr>
+        <p:spPr>
+          <a:xfrm>
+            <a:off x="9787738" y="4471416"/>
+            <a:ext cx="1559966" cy="493776"/>
+          </a:xfrm>
+          <a:prstGeom prst="rect">
+            <a:avLst/>
+          </a:prstGeom>
+          <a:noFill/>
+          <a:ln/>
+        </p:spPr>
+        <p:txBody>
+          <a:bodyPr wrap="square" lIns="0" tIns="0" rIns="0" bIns="0" rtlCol="0" anchor="ctr"/>
+          <a:lstStyle/>
+          <a:p>
+            <a:pPr indent="0" marL="0">
+              <a:lnSpc>
+                <a:spcPts val="1500"/>
+              </a:lnSpc>
+              <a:buNone/>
+            </a:pPr>
+            <a:r>
+              <a:rPr lang="en-US" sz="1250" b="1" dirty="0">
                 <a:solidFill>
                   <a:srgbClr val="0B1220"/>
                 </a:solidFill>
@@ -22949,20 +24645,20 @@
               </a:rPr>
               <a:t>Operations</a:t>
             </a:r>
-            <a:endParaRPr lang="en-US" sz="1350" dirty="0"/>
-          </a:p>
-        </p:txBody>
-      </p:sp>
-      <p:sp>
-        <p:nvSpPr>
-          <p:cNvPr id="48" name="Text 46"/>
-          <p:cNvSpPr txBox="1"/>
-          <p:nvPr/>
-        </p:nvSpPr>
-        <p:spPr>
-          <a:xfrm>
-            <a:off x="9079992" y="4882896"/>
-            <a:ext cx="2423160" cy="566928"/>
+            <a:endParaRPr lang="en-US" sz="1250" dirty="0"/>
+          </a:p>
+        </p:txBody>
+      </p:sp>
+      <p:sp>
+        <p:nvSpPr>
+          <p:cNvPr id="53" name="Text 51"/>
+          <p:cNvSpPr txBox="1"/>
+          <p:nvPr/>
+        </p:nvSpPr>
+        <p:spPr>
+          <a:xfrm>
+            <a:off x="9787738" y="4965192"/>
+            <a:ext cx="1559966" cy="530352"/>
           </a:xfrm>
           <a:prstGeom prst="rect">
             <a:avLst/>
@@ -22976,12 +24672,12 @@
           <a:p>
             <a:pPr indent="0" marL="0">
               <a:lnSpc>
-                <a:spcPts val="1400"/>
+                <a:spcPts val="1250"/>
               </a:lnSpc>
               <a:buNone/>
             </a:pPr>
             <a:r>
-              <a:rPr lang="en-US" sz="1050" dirty="0">
+              <a:rPr lang="en-US" sz="950" dirty="0">
                 <a:solidFill>
                   <a:srgbClr val="5A6880"/>
                 </a:solidFill>
@@ -22989,21 +24685,21 @@
                 <a:ea typeface="Calibri" pitchFamily="34" charset="-122"/>
                 <a:cs typeface="Calibri" pitchFamily="34" charset="-120"/>
               </a:rPr>
-              <a:t>Property and estate dashboards, RBAC, multi-property, audit</a:t>
-            </a:r>
-            <a:endParaRPr lang="en-US" sz="1050" dirty="0"/>
-          </a:p>
-        </p:txBody>
-      </p:sp>
-      <p:sp>
-        <p:nvSpPr>
-          <p:cNvPr id="49" name="Text 47"/>
-          <p:cNvSpPr txBox="1"/>
-          <p:nvPr/>
-        </p:nvSpPr>
-        <p:spPr>
-          <a:xfrm>
-            <a:off x="640080" y="5760720"/>
+              <a:t>Dashboards, analytics, RBAC, audit</a:t>
+            </a:r>
+            <a:endParaRPr lang="en-US" sz="950" dirty="0"/>
+          </a:p>
+        </p:txBody>
+      </p:sp>
+      <p:sp>
+        <p:nvSpPr>
+          <p:cNvPr id="54" name="Text 52"/>
+          <p:cNvSpPr txBox="1"/>
+          <p:nvPr/>
+        </p:nvSpPr>
+        <p:spPr>
+          <a:xfrm>
+            <a:off x="640080" y="5806440"/>
             <a:ext cx="10911535" cy="320040"/>
           </a:xfrm>
           <a:prstGeom prst="rect">

--- a/presentation/Orpheus-Hospitality-Suite.pptx
+++ b/presentation/Orpheus-Hospitality-Suite.pptx
@@ -190,9 +190,9 @@
           </c:dLbls>
           <c:cat>
             <c:multiLvlStrRef>
-              <c:f>Sheet1!$A$2:$A$6</c:f>
+              <c:f>Sheet1!$A$2:$A$7</c:f>
               <c:multiLvlStrCache>
-                <c:ptCount val="5"/>
+                <c:ptCount val="6"/>
                 <c:lvl>
                   <c:pt idx="0">
                     <c:v>Ancillary revenue
@@ -214,16 +214,20 @@
                     <c:v>Direct booking
 (where the property runs its own)</c:v>
                   </c:pt>
+                  <c:pt idx="5">
+                    <c:v>Radio and DECT fleet avoided
+(staff handhelds are extensions)</c:v>
+                  </c:pt>
                 </c:lvl>
               </c:multiLvlStrCache>
             </c:multiLvlStrRef>
           </c:cat>
           <c:val>
             <c:numRef>
-              <c:f>Sheet1!$B$2:$B$6</c:f>
+              <c:f>Sheet1!$B$2:$B$7</c:f>
               <c:numCache>
                 <c:formatCode>General</c:formatCode>
-                <c:ptCount val="5"/>
+                <c:ptCount val="6"/>
                 <c:pt idx="0">
                   <c:v>1</c:v>
                 </c:pt>
@@ -238,6 +242,9 @@
                 </c:pt>
                 <c:pt idx="4">
                   <c:v>0.29</c:v>
+                </c:pt>
+                <c:pt idx="5">
+                  <c:v>0.19</c:v>
                 </c:pt>
               </c:numCache>
             </c:numRef>
@@ -2004,7 +2011,7 @@
           <a:p>
             <a:r>
               <a:rPr lang="en-US" dirty="0"/>
-              <a:t>Say the caveat out loud. For an enterprise buyer, offering to rebuild the model on their numbers during the systems audit is the ask that converts this meeting into a second one.</a:t>
+              <a:t>Say the caveat out loud. For an enterprise buyer, offering to rebuild the model on their numbers during the systems audit is the ask that converts this meeting into a second one. If someone asks why call revenue is not a bar: it has been falling for twenty years and pretending otherwise costs you credibility on every other bar.</a:t>
             </a:r>
             <a:endParaRPr lang="en-US" dirty="0"/>
           </a:p>
@@ -11818,7 +11825,7 @@
                 <a:ea typeface="Calibri" pitchFamily="34" charset="-122"/>
                 <a:cs typeface="Calibri" pitchFamily="34" charset="-120"/>
               </a:rPr>
-              <a:t>The in-room handset is the one exception — a standard SIP endpoint on your own PBX, not an Android device. Samsung Tizen and LG webOS sets are not native Android targets either; those properties run the same application on a small Android device until the televisions refresh.</a:t>
+              <a:t>The in-room handset is the exception — a SIP endpoint on your own PBX. Tizen and webOS sets are not native Android targets, and run the app on a small device until refresh.</a:t>
             </a:r>
             <a:endParaRPr lang="en-US" sz="900" dirty="0"/>
           </a:p>
@@ -15629,7 +15636,7 @@
                 <a:ea typeface="Calibri" pitchFamily="34" charset="-122"/>
                 <a:cs typeface="Calibri" pitchFamily="34" charset="-120"/>
               </a:rPr>
-              <a:t>Five effects, each measurable on a property P&amp;L and each multiplying by the number of properties. The chart is a worked model — we rebuild it on the group's real figures before proposal.</a:t>
+              <a:t>Six effects, each measurable on a property P&amp;L and each multiplying by the number of properties. The chart is a worked model — we rebuild it on the group's real figures before proposal.</a:t>
             </a:r>
             <a:endParaRPr lang="en-US" sz="1300" dirty="0"/>
           </a:p>
@@ -15789,7 +15796,7 @@
                 <a:ea typeface="Calibri" pitchFamily="34" charset="-122"/>
                 <a:cs typeface="Calibri" pitchFamily="34" charset="-120"/>
               </a:rPr>
-              <a:t>The middle three bars are cost, not revenue — contracts not renewed, hours not worked, hardware not bought. They are the least visible effects and usually the most certain.</a:t>
+              <a:t>Only two bars are revenue. The rest are cost — contracts not renewed, hours not worked, hardware not bought. They are the least visible effects and usually the most certain.</a:t>
             </a:r>
             <a:endParaRPr lang="en-US" sz="1050" dirty="0"/>
           </a:p>
@@ -15818,7 +15825,7 @@
                 <a:ea typeface="Calibri" pitchFamily="34" charset="-122"/>
                 <a:cs typeface="Calibri" pitchFamily="34" charset="-120"/>
               </a:rPr>
-              <a:t>At estate scale the multiplier matters more than the per-property figure: a modest, reliable effect across two hundred properties outweighs an optimistic one across ten.</a:t>
+              <a:t>Call revenue is deliberately absent: guests use their own mobiles, and telephony earns its place here on cost and compliance, not on billed minutes.</a:t>
             </a:r>
             <a:endParaRPr lang="en-US" sz="1050" dirty="0"/>
           </a:p>

--- a/presentation/Orpheus-Hospitality-Suite.pptx
+++ b/presentation/Orpheus-Hospitality-Suite.pptx
@@ -1395,7 +1395,7 @@
           <a:p>
             <a:r>
               <a:rPr lang="en-US" dirty="0"/>
-              <a:t>Volunteer the checkout reset before IT asks — every group has been burned by a guest finding the previous occupant's signed-in streaming account.</a:t>
+              <a:t>The screen on this slide is the real interface, not an illustration — the same rail, featured card and rows a subscriber sees at home. That is the point: the hotel is not commissioning a bespoke TV system, it is switching on a hospitality mode in a product that already ships. Volunteer the checkout wipe before IT asks; every group has been burned by a guest finding the previous occupant's signed-in streaming account.</a:t>
             </a:r>
             <a:endParaRPr lang="en-US" dirty="0"/>
           </a:p>
@@ -8732,11 +8732,11 @@
           </a:xfrm>
           <a:prstGeom prst="roundRect">
             <a:avLst>
-              <a:gd name="adj" fmla="val 2500"/>
+              <a:gd name="adj" fmla="val 2250"/>
             </a:avLst>
           </a:prstGeom>
           <a:solidFill>
-            <a:srgbClr val="05090F"/>
+            <a:srgbClr val="0A0613"/>
           </a:solidFill>
           <a:ln w="25400">
             <a:solidFill>
@@ -8755,30 +8755,536 @@
       </p:sp>
       <p:sp>
         <p:nvSpPr>
-          <p:cNvPr id="5" name="Text 3"/>
-          <p:cNvSpPr txBox="1"/>
-          <p:nvPr/>
-        </p:nvSpPr>
-        <p:spPr>
-          <a:xfrm>
-            <a:off x="960120" y="1938528"/>
-            <a:ext cx="4572000" cy="365760"/>
-          </a:xfrm>
-          <a:prstGeom prst="rect">
-            <a:avLst/>
-          </a:prstGeom>
-          <a:noFill/>
-          <a:ln/>
-        </p:spPr>
-        <p:txBody>
-          <a:bodyPr wrap="square" lIns="0" tIns="0" rIns="0" bIns="0" rtlCol="0" anchor="ctr"/>
-          <a:lstStyle/>
-          <a:p>
-            <a:pPr indent="0" marL="0">
-              <a:buNone/>
-            </a:pPr>
-            <a:r>
-              <a:rPr lang="en-US" sz="2100" b="1" dirty="0">
+          <p:cNvPr id="5" name="Shape 3"/>
+          <p:cNvSpPr/>
+          <p:nvPr/>
+        </p:nvSpPr>
+        <p:spPr>
+          <a:xfrm>
+            <a:off x="658368" y="1709928"/>
+            <a:ext cx="1371600" cy="3621024"/>
+          </a:xfrm>
+          <a:prstGeom prst="roundRect">
+            <a:avLst>
+              <a:gd name="adj" fmla="val 5333"/>
+            </a:avLst>
+          </a:prstGeom>
+          <a:solidFill>
+            <a:srgbClr val="120C22"/>
+          </a:solidFill>
+          <a:ln w="12700">
+            <a:solidFill>
+              <a:srgbClr val="241A3D"/>
+            </a:solidFill>
+            <a:prstDash val="solid"/>
+          </a:ln>
+        </p:spPr>
+      </p:sp>
+      <p:sp>
+        <p:nvSpPr>
+          <p:cNvPr id="6" name="Shape 4"/>
+          <p:cNvSpPr/>
+          <p:nvPr/>
+        </p:nvSpPr>
+        <p:spPr>
+          <a:xfrm>
+            <a:off x="786384" y="1847088"/>
+            <a:ext cx="182880" cy="182880"/>
+          </a:xfrm>
+          <a:prstGeom prst="ellipse">
+            <a:avLst/>
+          </a:prstGeom>
+          <a:solidFill>
+            <a:srgbClr val="3A2560"/>
+          </a:solidFill>
+          <a:ln w="12700">
+            <a:solidFill>
+              <a:srgbClr val="553A8A"/>
+            </a:solidFill>
+            <a:prstDash val="solid"/>
+          </a:ln>
+        </p:spPr>
+      </p:sp>
+      <p:sp>
+        <p:nvSpPr>
+          <p:cNvPr id="7" name="Text 5"/>
+          <p:cNvSpPr txBox="1"/>
+          <p:nvPr/>
+        </p:nvSpPr>
+        <p:spPr>
+          <a:xfrm>
+            <a:off x="1024128" y="1810512"/>
+            <a:ext cx="914400" cy="256032"/>
+          </a:xfrm>
+          <a:prstGeom prst="rect">
+            <a:avLst/>
+          </a:prstGeom>
+          <a:noFill/>
+          <a:ln/>
+        </p:spPr>
+        <p:txBody>
+          <a:bodyPr wrap="square" lIns="0" tIns="0" rIns="0" bIns="0" rtlCol="0" anchor="ctr"/>
+          <a:lstStyle/>
+          <a:p>
+            <a:pPr indent="0" marL="0">
+              <a:buNone/>
+            </a:pPr>
+            <a:r>
+              <a:rPr lang="en-US" sz="1100" b="1" dirty="0">
+                <a:solidFill>
+                  <a:srgbClr val="B06BFF"/>
+                </a:solidFill>
+                <a:latin typeface="Calibri" pitchFamily="34" charset="0"/>
+                <a:ea typeface="Calibri" pitchFamily="34" charset="-122"/>
+                <a:cs typeface="Calibri" pitchFamily="34" charset="-120"/>
+              </a:rPr>
+              <a:t>Orph</a:t>
+            </a:r>
+            <a:pPr indent="0" marL="0">
+              <a:buNone/>
+            </a:pPr>
+            <a:r>
+              <a:rPr lang="en-US" sz="1100" b="1" dirty="0">
+                <a:solidFill>
+                  <a:srgbClr val="F05CE0"/>
+                </a:solidFill>
+                <a:latin typeface="Calibri" pitchFamily="34" charset="0"/>
+                <a:ea typeface="Calibri" pitchFamily="34" charset="-122"/>
+                <a:cs typeface="Calibri" pitchFamily="34" charset="-120"/>
+              </a:rPr>
+              <a:t>eus</a:t>
+            </a:r>
+            <a:endParaRPr lang="en-US" sz="1100" dirty="0"/>
+          </a:p>
+        </p:txBody>
+      </p:sp>
+      <p:sp>
+        <p:nvSpPr>
+          <p:cNvPr id="8" name="Shape 6"/>
+          <p:cNvSpPr/>
+          <p:nvPr/>
+        </p:nvSpPr>
+        <p:spPr>
+          <a:xfrm>
+            <a:off x="768096" y="2249424"/>
+            <a:ext cx="1152144" cy="237744"/>
+          </a:xfrm>
+          <a:prstGeom prst="roundRect">
+            <a:avLst>
+              <a:gd name="adj" fmla="val 19231"/>
+            </a:avLst>
+          </a:prstGeom>
+          <a:solidFill>
+            <a:srgbClr val="231640"/>
+          </a:solidFill>
+          <a:ln w="12700">
+            <a:solidFill>
+              <a:srgbClr val="231640"/>
+            </a:solidFill>
+            <a:prstDash val="solid"/>
+          </a:ln>
+        </p:spPr>
+      </p:sp>
+      <p:sp>
+        <p:nvSpPr>
+          <p:cNvPr id="9" name="Text 7"/>
+          <p:cNvSpPr txBox="1"/>
+          <p:nvPr/>
+        </p:nvSpPr>
+        <p:spPr>
+          <a:xfrm>
+            <a:off x="859536" y="2249424"/>
+            <a:ext cx="1060704" cy="237744"/>
+          </a:xfrm>
+          <a:prstGeom prst="rect">
+            <a:avLst/>
+          </a:prstGeom>
+          <a:noFill/>
+          <a:ln/>
+        </p:spPr>
+        <p:txBody>
+          <a:bodyPr wrap="square" lIns="0" tIns="0" rIns="0" bIns="0" rtlCol="0" anchor="ctr"/>
+          <a:lstStyle/>
+          <a:p>
+            <a:pPr indent="0" marL="0">
+              <a:buNone/>
+            </a:pPr>
+            <a:r>
+              <a:rPr lang="en-US" sz="800" b="1" dirty="0">
+                <a:solidFill>
+                  <a:srgbClr val="F4F1EA"/>
+                </a:solidFill>
+                <a:latin typeface="Calibri" pitchFamily="34" charset="0"/>
+                <a:ea typeface="Calibri" pitchFamily="34" charset="-122"/>
+                <a:cs typeface="Calibri" pitchFamily="34" charset="-120"/>
+              </a:rPr>
+              <a:t>Home</a:t>
+            </a:r>
+            <a:endParaRPr lang="en-US" sz="800" dirty="0"/>
+          </a:p>
+        </p:txBody>
+      </p:sp>
+      <p:sp>
+        <p:nvSpPr>
+          <p:cNvPr id="10" name="Text 8"/>
+          <p:cNvSpPr txBox="1"/>
+          <p:nvPr/>
+        </p:nvSpPr>
+        <p:spPr>
+          <a:xfrm>
+            <a:off x="859536" y="2523744"/>
+            <a:ext cx="1060704" cy="237744"/>
+          </a:xfrm>
+          <a:prstGeom prst="rect">
+            <a:avLst/>
+          </a:prstGeom>
+          <a:noFill/>
+          <a:ln/>
+        </p:spPr>
+        <p:txBody>
+          <a:bodyPr wrap="square" lIns="0" tIns="0" rIns="0" bIns="0" rtlCol="0" anchor="ctr"/>
+          <a:lstStyle/>
+          <a:p>
+            <a:pPr indent="0" marL="0">
+              <a:buNone/>
+            </a:pPr>
+            <a:r>
+              <a:rPr lang="en-US" sz="800" b="1" dirty="0">
+                <a:solidFill>
+                  <a:srgbClr val="A79CC4"/>
+                </a:solidFill>
+                <a:latin typeface="Calibri" pitchFamily="34" charset="0"/>
+                <a:ea typeface="Calibri" pitchFamily="34" charset="-122"/>
+                <a:cs typeface="Calibri" pitchFamily="34" charset="-120"/>
+              </a:rPr>
+              <a:t>Live TV</a:t>
+            </a:r>
+            <a:endParaRPr lang="en-US" sz="800" dirty="0"/>
+          </a:p>
+        </p:txBody>
+      </p:sp>
+      <p:sp>
+        <p:nvSpPr>
+          <p:cNvPr id="11" name="Text 9"/>
+          <p:cNvSpPr txBox="1"/>
+          <p:nvPr/>
+        </p:nvSpPr>
+        <p:spPr>
+          <a:xfrm>
+            <a:off x="859536" y="2798064"/>
+            <a:ext cx="1060704" cy="237744"/>
+          </a:xfrm>
+          <a:prstGeom prst="rect">
+            <a:avLst/>
+          </a:prstGeom>
+          <a:noFill/>
+          <a:ln/>
+        </p:spPr>
+        <p:txBody>
+          <a:bodyPr wrap="square" lIns="0" tIns="0" rIns="0" bIns="0" rtlCol="0" anchor="ctr"/>
+          <a:lstStyle/>
+          <a:p>
+            <a:pPr indent="0" marL="0">
+              <a:buNone/>
+            </a:pPr>
+            <a:r>
+              <a:rPr lang="en-US" sz="800" b="1" dirty="0">
+                <a:solidFill>
+                  <a:srgbClr val="A79CC4"/>
+                </a:solidFill>
+                <a:latin typeface="Calibri" pitchFamily="34" charset="0"/>
+                <a:ea typeface="Calibri" pitchFamily="34" charset="-122"/>
+                <a:cs typeface="Calibri" pitchFamily="34" charset="-120"/>
+              </a:rPr>
+              <a:t>Movies</a:t>
+            </a:r>
+            <a:endParaRPr lang="en-US" sz="800" dirty="0"/>
+          </a:p>
+        </p:txBody>
+      </p:sp>
+      <p:sp>
+        <p:nvSpPr>
+          <p:cNvPr id="12" name="Text 10"/>
+          <p:cNvSpPr txBox="1"/>
+          <p:nvPr/>
+        </p:nvSpPr>
+        <p:spPr>
+          <a:xfrm>
+            <a:off x="859536" y="3072384"/>
+            <a:ext cx="1060704" cy="237744"/>
+          </a:xfrm>
+          <a:prstGeom prst="rect">
+            <a:avLst/>
+          </a:prstGeom>
+          <a:noFill/>
+          <a:ln/>
+        </p:spPr>
+        <p:txBody>
+          <a:bodyPr wrap="square" lIns="0" tIns="0" rIns="0" bIns="0" rtlCol="0" anchor="ctr"/>
+          <a:lstStyle/>
+          <a:p>
+            <a:pPr indent="0" marL="0">
+              <a:buNone/>
+            </a:pPr>
+            <a:r>
+              <a:rPr lang="en-US" sz="800" b="1" dirty="0">
+                <a:solidFill>
+                  <a:srgbClr val="A79CC4"/>
+                </a:solidFill>
+                <a:latin typeface="Calibri" pitchFamily="34" charset="0"/>
+                <a:ea typeface="Calibri" pitchFamily="34" charset="-122"/>
+                <a:cs typeface="Calibri" pitchFamily="34" charset="-120"/>
+              </a:rPr>
+              <a:t>TV Shows</a:t>
+            </a:r>
+            <a:endParaRPr lang="en-US" sz="800" dirty="0"/>
+          </a:p>
+        </p:txBody>
+      </p:sp>
+      <p:sp>
+        <p:nvSpPr>
+          <p:cNvPr id="13" name="Text 11"/>
+          <p:cNvSpPr txBox="1"/>
+          <p:nvPr/>
+        </p:nvSpPr>
+        <p:spPr>
+          <a:xfrm>
+            <a:off x="859536" y="3346704"/>
+            <a:ext cx="1060704" cy="237744"/>
+          </a:xfrm>
+          <a:prstGeom prst="rect">
+            <a:avLst/>
+          </a:prstGeom>
+          <a:noFill/>
+          <a:ln/>
+        </p:spPr>
+        <p:txBody>
+          <a:bodyPr wrap="square" lIns="0" tIns="0" rIns="0" bIns="0" rtlCol="0" anchor="ctr"/>
+          <a:lstStyle/>
+          <a:p>
+            <a:pPr indent="0" marL="0">
+              <a:buNone/>
+            </a:pPr>
+            <a:r>
+              <a:rPr lang="en-US" sz="800" b="1" dirty="0">
+                <a:solidFill>
+                  <a:srgbClr val="A79CC4"/>
+                </a:solidFill>
+                <a:latin typeface="Calibri" pitchFamily="34" charset="0"/>
+                <a:ea typeface="Calibri" pitchFamily="34" charset="-122"/>
+                <a:cs typeface="Calibri" pitchFamily="34" charset="-120"/>
+              </a:rPr>
+              <a:t>Music</a:t>
+            </a:r>
+            <a:endParaRPr lang="en-US" sz="800" dirty="0"/>
+          </a:p>
+        </p:txBody>
+      </p:sp>
+      <p:sp>
+        <p:nvSpPr>
+          <p:cNvPr id="14" name="Shape 12"/>
+          <p:cNvSpPr/>
+          <p:nvPr/>
+        </p:nvSpPr>
+        <p:spPr>
+          <a:xfrm>
+            <a:off x="786384" y="3648456"/>
+            <a:ext cx="1115568" cy="0"/>
+          </a:xfrm>
+          <a:prstGeom prst="line">
+            <a:avLst/>
+          </a:prstGeom>
+          <a:noFill/>
+          <a:ln w="12700">
+            <a:solidFill>
+              <a:srgbClr val="241A3D"/>
+            </a:solidFill>
+            <a:prstDash val="solid"/>
+          </a:ln>
+        </p:spPr>
+      </p:sp>
+      <p:sp>
+        <p:nvSpPr>
+          <p:cNvPr id="15" name="Text 13"/>
+          <p:cNvSpPr txBox="1"/>
+          <p:nvPr/>
+        </p:nvSpPr>
+        <p:spPr>
+          <a:xfrm>
+            <a:off x="786384" y="3712464"/>
+            <a:ext cx="1097280" cy="146304"/>
+          </a:xfrm>
+          <a:prstGeom prst="rect">
+            <a:avLst/>
+          </a:prstGeom>
+          <a:noFill/>
+          <a:ln/>
+        </p:spPr>
+        <p:txBody>
+          <a:bodyPr wrap="square" lIns="0" tIns="0" rIns="0" bIns="0" rtlCol="0" anchor="ctr"/>
+          <a:lstStyle/>
+          <a:p>
+            <a:pPr indent="0" marL="0">
+              <a:buNone/>
+            </a:pPr>
+            <a:r>
+              <a:rPr lang="en-US" sz="550" b="1" spc="120" kern="0" dirty="0">
+                <a:solidFill>
+                  <a:srgbClr val="6B6088"/>
+                </a:solidFill>
+                <a:latin typeface="Calibri" pitchFamily="34" charset="0"/>
+                <a:ea typeface="Calibri" pitchFamily="34" charset="-122"/>
+                <a:cs typeface="Calibri" pitchFamily="34" charset="-120"/>
+              </a:rPr>
+              <a:t>YOUR STAY</a:t>
+            </a:r>
+            <a:endParaRPr lang="en-US" sz="550" dirty="0"/>
+          </a:p>
+        </p:txBody>
+      </p:sp>
+      <p:sp>
+        <p:nvSpPr>
+          <p:cNvPr id="16" name="Text 14"/>
+          <p:cNvSpPr txBox="1"/>
+          <p:nvPr/>
+        </p:nvSpPr>
+        <p:spPr>
+          <a:xfrm>
+            <a:off x="859536" y="3931920"/>
+            <a:ext cx="1060704" cy="237744"/>
+          </a:xfrm>
+          <a:prstGeom prst="rect">
+            <a:avLst/>
+          </a:prstGeom>
+          <a:noFill/>
+          <a:ln/>
+        </p:spPr>
+        <p:txBody>
+          <a:bodyPr wrap="square" lIns="0" tIns="0" rIns="0" bIns="0" rtlCol="0" anchor="ctr"/>
+          <a:lstStyle/>
+          <a:p>
+            <a:pPr indent="0" marL="0">
+              <a:buNone/>
+            </a:pPr>
+            <a:r>
+              <a:rPr lang="en-US" sz="800" b="1" dirty="0">
+                <a:solidFill>
+                  <a:srgbClr val="A79CC4"/>
+                </a:solidFill>
+                <a:latin typeface="Calibri" pitchFamily="34" charset="0"/>
+                <a:ea typeface="Calibri" pitchFamily="34" charset="-122"/>
+                <a:cs typeface="Calibri" pitchFamily="34" charset="-120"/>
+              </a:rPr>
+              <a:t>Dining</a:t>
+            </a:r>
+            <a:endParaRPr lang="en-US" sz="800" dirty="0"/>
+          </a:p>
+        </p:txBody>
+      </p:sp>
+      <p:sp>
+        <p:nvSpPr>
+          <p:cNvPr id="17" name="Text 15"/>
+          <p:cNvSpPr txBox="1"/>
+          <p:nvPr/>
+        </p:nvSpPr>
+        <p:spPr>
+          <a:xfrm>
+            <a:off x="859536" y="4206240"/>
+            <a:ext cx="1060704" cy="237744"/>
+          </a:xfrm>
+          <a:prstGeom prst="rect">
+            <a:avLst/>
+          </a:prstGeom>
+          <a:noFill/>
+          <a:ln/>
+        </p:spPr>
+        <p:txBody>
+          <a:bodyPr wrap="square" lIns="0" tIns="0" rIns="0" bIns="0" rtlCol="0" anchor="ctr"/>
+          <a:lstStyle/>
+          <a:p>
+            <a:pPr indent="0" marL="0">
+              <a:buNone/>
+            </a:pPr>
+            <a:r>
+              <a:rPr lang="en-US" sz="800" b="1" dirty="0">
+                <a:solidFill>
+                  <a:srgbClr val="A79CC4"/>
+                </a:solidFill>
+                <a:latin typeface="Calibri" pitchFamily="34" charset="0"/>
+                <a:ea typeface="Calibri" pitchFamily="34" charset="-122"/>
+                <a:cs typeface="Calibri" pitchFamily="34" charset="-120"/>
+              </a:rPr>
+              <a:t>Concierge</a:t>
+            </a:r>
+            <a:endParaRPr lang="en-US" sz="800" dirty="0"/>
+          </a:p>
+        </p:txBody>
+      </p:sp>
+      <p:sp>
+        <p:nvSpPr>
+          <p:cNvPr id="18" name="Text 16"/>
+          <p:cNvSpPr txBox="1"/>
+          <p:nvPr/>
+        </p:nvSpPr>
+        <p:spPr>
+          <a:xfrm>
+            <a:off x="859536" y="4480560"/>
+            <a:ext cx="1060704" cy="237744"/>
+          </a:xfrm>
+          <a:prstGeom prst="rect">
+            <a:avLst/>
+          </a:prstGeom>
+          <a:noFill/>
+          <a:ln/>
+        </p:spPr>
+        <p:txBody>
+          <a:bodyPr wrap="square" lIns="0" tIns="0" rIns="0" bIns="0" rtlCol="0" anchor="ctr"/>
+          <a:lstStyle/>
+          <a:p>
+            <a:pPr indent="0" marL="0">
+              <a:buNone/>
+            </a:pPr>
+            <a:r>
+              <a:rPr lang="en-US" sz="800" b="1" dirty="0">
+                <a:solidFill>
+                  <a:srgbClr val="A79CC4"/>
+                </a:solidFill>
+                <a:latin typeface="Calibri" pitchFamily="34" charset="0"/>
+                <a:ea typeface="Calibri" pitchFamily="34" charset="-122"/>
+                <a:cs typeface="Calibri" pitchFamily="34" charset="-120"/>
+              </a:rPr>
+              <a:t>My Bill</a:t>
+            </a:r>
+            <a:endParaRPr lang="en-US" sz="800" dirty="0"/>
+          </a:p>
+        </p:txBody>
+      </p:sp>
+      <p:sp>
+        <p:nvSpPr>
+          <p:cNvPr id="19" name="Text 17"/>
+          <p:cNvSpPr txBox="1"/>
+          <p:nvPr/>
+        </p:nvSpPr>
+        <p:spPr>
+          <a:xfrm>
+            <a:off x="2148840" y="1810512"/>
+            <a:ext cx="3108960" cy="274320"/>
+          </a:xfrm>
+          <a:prstGeom prst="rect">
+            <a:avLst/>
+          </a:prstGeom>
+          <a:noFill/>
+          <a:ln/>
+        </p:spPr>
+        <p:txBody>
+          <a:bodyPr wrap="square" lIns="0" tIns="0" rIns="0" bIns="0" rtlCol="0" anchor="ctr"/>
+          <a:lstStyle/>
+          <a:p>
+            <a:pPr indent="0" marL="0">
+              <a:buNone/>
+            </a:pPr>
+            <a:r>
+              <a:rPr lang="en-US" sz="1400" b="1" dirty="0">
                 <a:solidFill>
                   <a:srgbClr val="F4F1EA"/>
                 </a:solidFill>
@@ -8788,59 +9294,59 @@
               </a:rPr>
               <a:t>Good evening, Ms Reyes</a:t>
             </a:r>
-            <a:endParaRPr lang="en-US" sz="2100" dirty="0"/>
-          </a:p>
-        </p:txBody>
-      </p:sp>
-      <p:sp>
-        <p:nvSpPr>
-          <p:cNvPr id="6" name="Text 4"/>
-          <p:cNvSpPr txBox="1"/>
-          <p:nvPr/>
-        </p:nvSpPr>
-        <p:spPr>
-          <a:xfrm>
-            <a:off x="960120" y="2331720"/>
-            <a:ext cx="4937760" cy="274320"/>
-          </a:xfrm>
-          <a:prstGeom prst="rect">
-            <a:avLst/>
-          </a:prstGeom>
-          <a:noFill/>
-          <a:ln/>
-        </p:spPr>
-        <p:txBody>
-          <a:bodyPr wrap="square" lIns="0" tIns="0" rIns="0" bIns="0" rtlCol="0" anchor="ctr"/>
-          <a:lstStyle/>
-          <a:p>
-            <a:pPr indent="0" marL="0">
-              <a:buNone/>
-            </a:pPr>
-            <a:r>
-              <a:rPr lang="en-US" sz="1100" dirty="0">
-                <a:solidFill>
-                  <a:srgbClr val="9AA9C2"/>
-                </a:solidFill>
-                <a:latin typeface="Calibri" pitchFamily="34" charset="0"/>
-                <a:ea typeface="Calibri" pitchFamily="34" charset="-122"/>
-                <a:cs typeface="Calibri" pitchFamily="34" charset="-120"/>
-              </a:rPr>
-              <a:t>Room 812  ·  2 nights remaining  ·  Gold member</a:t>
-            </a:r>
-            <a:endParaRPr lang="en-US" sz="1100" dirty="0"/>
-          </a:p>
-        </p:txBody>
-      </p:sp>
-      <p:sp>
-        <p:nvSpPr>
-          <p:cNvPr id="7" name="Shape 5"/>
+            <a:endParaRPr lang="en-US" sz="1400" dirty="0"/>
+          </a:p>
+        </p:txBody>
+      </p:sp>
+      <p:sp>
+        <p:nvSpPr>
+          <p:cNvPr id="20" name="Text 18"/>
+          <p:cNvSpPr txBox="1"/>
+          <p:nvPr/>
+        </p:nvSpPr>
+        <p:spPr>
+          <a:xfrm>
+            <a:off x="2148840" y="2084832"/>
+            <a:ext cx="3108960" cy="182880"/>
+          </a:xfrm>
+          <a:prstGeom prst="rect">
+            <a:avLst/>
+          </a:prstGeom>
+          <a:noFill/>
+          <a:ln/>
+        </p:spPr>
+        <p:txBody>
+          <a:bodyPr wrap="square" lIns="0" tIns="0" rIns="0" bIns="0" rtlCol="0" anchor="ctr"/>
+          <a:lstStyle/>
+          <a:p>
+            <a:pPr indent="0" marL="0">
+              <a:buNone/>
+            </a:pPr>
+            <a:r>
+              <a:rPr lang="en-US" sz="750" dirty="0">
+                <a:solidFill>
+                  <a:srgbClr val="9C93B8"/>
+                </a:solidFill>
+                <a:latin typeface="Calibri" pitchFamily="34" charset="0"/>
+                <a:ea typeface="Calibri" pitchFamily="34" charset="-122"/>
+                <a:cs typeface="Calibri" pitchFamily="34" charset="-120"/>
+              </a:rPr>
+              <a:t>2 nights remaining  ·  Gold member</a:t>
+            </a:r>
+            <a:endParaRPr lang="en-US" sz="750" dirty="0"/>
+          </a:p>
+        </p:txBody>
+      </p:sp>
+      <p:sp>
+        <p:nvSpPr>
+          <p:cNvPr id="21" name="Shape 19"/>
           <p:cNvSpPr/>
           <p:nvPr/>
         </p:nvSpPr>
         <p:spPr>
           <a:xfrm>
-            <a:off x="5715000" y="1956816"/>
-            <a:ext cx="1097280" cy="365760"/>
+            <a:off x="5897880" y="1810512"/>
+            <a:ext cx="1143000" cy="237744"/>
           </a:xfrm>
           <a:prstGeom prst="roundRect">
             <a:avLst>
@@ -8848,11 +9354,11 @@
             </a:avLst>
           </a:prstGeom>
           <a:solidFill>
-            <a:srgbClr val="D4A94A"/>
+            <a:srgbClr val="1A1130"/>
           </a:solidFill>
           <a:ln w="12700">
             <a:solidFill>
-              <a:srgbClr val="D4A94A"/>
+              <a:srgbClr val="2E2150"/>
             </a:solidFill>
             <a:prstDash val="solid"/>
           </a:ln>
@@ -8860,14 +9366,14 @@
       </p:sp>
       <p:sp>
         <p:nvSpPr>
-          <p:cNvPr id="8" name="Text 6"/>
-          <p:cNvSpPr txBox="1"/>
-          <p:nvPr/>
-        </p:nvSpPr>
-        <p:spPr>
-          <a:xfrm>
-            <a:off x="5715000" y="1956816"/>
-            <a:ext cx="1097280" cy="365760"/>
+          <p:cNvPr id="22" name="Text 20"/>
+          <p:cNvSpPr txBox="1"/>
+          <p:nvPr/>
+        </p:nvSpPr>
+        <p:spPr>
+          <a:xfrm>
+            <a:off x="5897880" y="1810512"/>
+            <a:ext cx="1143000" cy="237744"/>
           </a:xfrm>
           <a:prstGeom prst="rect">
             <a:avLst/>
@@ -8883,42 +9389,357 @@
               <a:buNone/>
             </a:pPr>
             <a:r>
-              <a:rPr lang="en-US" sz="950" b="1" dirty="0">
-                <a:solidFill>
-                  <a:srgbClr val="0B1220"/>
-                </a:solidFill>
-                <a:latin typeface="Calibri" pitchFamily="34" charset="0"/>
-                <a:ea typeface="Calibri" pitchFamily="34" charset="-122"/>
-                <a:cs typeface="Calibri" pitchFamily="34" charset="-120"/>
-              </a:rPr>
-              <a:t>2 messages</a:t>
-            </a:r>
-            <a:endParaRPr lang="en-US" sz="950" dirty="0"/>
-          </a:p>
-        </p:txBody>
-      </p:sp>
-      <p:sp>
-        <p:nvSpPr>
-          <p:cNvPr id="9" name="Shape 7"/>
+              <a:rPr lang="en-US" sz="650" dirty="0">
+                <a:solidFill>
+                  <a:srgbClr val="CFC4EA"/>
+                </a:solidFill>
+                <a:latin typeface="Calibri" pitchFamily="34" charset="0"/>
+                <a:ea typeface="Calibri" pitchFamily="34" charset="-122"/>
+                <a:cs typeface="Calibri" pitchFamily="34" charset="-120"/>
+              </a:rPr>
+              <a:t>Room 812 · Gold</a:t>
+            </a:r>
+            <a:endParaRPr lang="en-US" sz="650" dirty="0"/>
+          </a:p>
+        </p:txBody>
+      </p:sp>
+      <p:sp>
+        <p:nvSpPr>
+          <p:cNvPr id="23" name="Shape 21"/>
           <p:cNvSpPr/>
           <p:nvPr/>
         </p:nvSpPr>
         <p:spPr>
           <a:xfrm>
-            <a:off x="960120" y="2743200"/>
-            <a:ext cx="1901952" cy="1051560"/>
+            <a:off x="2148840" y="2395728"/>
+            <a:ext cx="4892040" cy="1024128"/>
           </a:xfrm>
           <a:prstGeom prst="roundRect">
             <a:avLst>
-              <a:gd name="adj" fmla="val 6957"/>
+              <a:gd name="adj" fmla="val 6250"/>
             </a:avLst>
           </a:prstGeom>
           <a:solidFill>
-            <a:srgbClr val="1E2E4A"/>
+            <a:srgbClr val="2A1A4A"/>
+          </a:solidFill>
+          <a:ln w="12700">
+            <a:solidFill>
+              <a:srgbClr val="3A2463"/>
+            </a:solidFill>
+            <a:prstDash val="solid"/>
+          </a:ln>
+        </p:spPr>
+      </p:sp>
+      <p:sp>
+        <p:nvSpPr>
+          <p:cNvPr id="24" name="Shape 22"/>
+          <p:cNvSpPr/>
+          <p:nvPr/>
+        </p:nvSpPr>
+        <p:spPr>
+          <a:xfrm>
+            <a:off x="2258568" y="2487168"/>
+            <a:ext cx="548640" cy="841248"/>
+          </a:xfrm>
+          <a:prstGeom prst="roundRect">
+            <a:avLst>
+              <a:gd name="adj" fmla="val 6667"/>
+            </a:avLst>
+          </a:prstGeom>
+          <a:solidFill>
+            <a:srgbClr val="8E5A6B"/>
+          </a:solidFill>
+          <a:ln w="12700">
+            <a:solidFill>
+              <a:srgbClr val="8E5A6B"/>
+            </a:solidFill>
+            <a:prstDash val="solid"/>
+          </a:ln>
+        </p:spPr>
+      </p:sp>
+      <p:sp>
+        <p:nvSpPr>
+          <p:cNvPr id="25" name="Text 23"/>
+          <p:cNvSpPr txBox="1"/>
+          <p:nvPr/>
+        </p:nvSpPr>
+        <p:spPr>
+          <a:xfrm>
+            <a:off x="2907792" y="2505456"/>
+            <a:ext cx="1280160" cy="137160"/>
+          </a:xfrm>
+          <a:prstGeom prst="rect">
+            <a:avLst/>
+          </a:prstGeom>
+          <a:noFill/>
+          <a:ln/>
+        </p:spPr>
+        <p:txBody>
+          <a:bodyPr wrap="square" lIns="0" tIns="0" rIns="0" bIns="0" rtlCol="0" anchor="ctr"/>
+          <a:lstStyle/>
+          <a:p>
+            <a:pPr indent="0" marL="0">
+              <a:buNone/>
+            </a:pPr>
+            <a:r>
+              <a:rPr lang="en-US" sz="550" b="1" spc="100" kern="0" dirty="0">
+                <a:solidFill>
+                  <a:srgbClr val="C77BFF"/>
+                </a:solidFill>
+                <a:latin typeface="Calibri" pitchFamily="34" charset="0"/>
+                <a:ea typeface="Calibri" pitchFamily="34" charset="-122"/>
+                <a:cs typeface="Calibri" pitchFamily="34" charset="-120"/>
+              </a:rPr>
+              <a:t>FEATURED</a:t>
+            </a:r>
+            <a:endParaRPr lang="en-US" sz="550" dirty="0"/>
+          </a:p>
+        </p:txBody>
+      </p:sp>
+      <p:sp>
+        <p:nvSpPr>
+          <p:cNvPr id="26" name="Text 24"/>
+          <p:cNvSpPr txBox="1"/>
+          <p:nvPr/>
+        </p:nvSpPr>
+        <p:spPr>
+          <a:xfrm>
+            <a:off x="2907792" y="2642616"/>
+            <a:ext cx="2743200" cy="237744"/>
+          </a:xfrm>
+          <a:prstGeom prst="rect">
+            <a:avLst/>
+          </a:prstGeom>
+          <a:noFill/>
+          <a:ln/>
+        </p:spPr>
+        <p:txBody>
+          <a:bodyPr wrap="square" lIns="0" tIns="0" rIns="0" bIns="0" rtlCol="0" anchor="ctr"/>
+          <a:lstStyle/>
+          <a:p>
+            <a:pPr indent="0" marL="0">
+              <a:buNone/>
+            </a:pPr>
+            <a:r>
+              <a:rPr lang="en-US" sz="1250" b="1" dirty="0">
+                <a:solidFill>
+                  <a:srgbClr val="F4F1EA"/>
+                </a:solidFill>
+                <a:latin typeface="Calibri" pitchFamily="34" charset="0"/>
+                <a:ea typeface="Calibri" pitchFamily="34" charset="-122"/>
+                <a:cs typeface="Calibri" pitchFamily="34" charset="-120"/>
+              </a:rPr>
+              <a:t>Office Romance</a:t>
+            </a:r>
+            <a:endParaRPr lang="en-US" sz="1250" dirty="0"/>
+          </a:p>
+        </p:txBody>
+      </p:sp>
+      <p:sp>
+        <p:nvSpPr>
+          <p:cNvPr id="27" name="Text 25"/>
+          <p:cNvSpPr txBox="1"/>
+          <p:nvPr/>
+        </p:nvSpPr>
+        <p:spPr>
+          <a:xfrm>
+            <a:off x="2907792" y="2880360"/>
+            <a:ext cx="2194560" cy="146304"/>
+          </a:xfrm>
+          <a:prstGeom prst="rect">
+            <a:avLst/>
+          </a:prstGeom>
+          <a:noFill/>
+          <a:ln/>
+        </p:spPr>
+        <p:txBody>
+          <a:bodyPr wrap="square" lIns="0" tIns="0" rIns="0" bIns="0" rtlCol="0" anchor="ctr"/>
+          <a:lstStyle/>
+          <a:p>
+            <a:pPr indent="0" marL="0">
+              <a:buNone/>
+            </a:pPr>
+            <a:r>
+              <a:rPr lang="en-US" sz="650" dirty="0">
+                <a:solidFill>
+                  <a:srgbClr val="9C93B8"/>
+                </a:solidFill>
+                <a:latin typeface="Calibri" pitchFamily="34" charset="0"/>
+                <a:ea typeface="Calibri" pitchFamily="34" charset="-122"/>
+                <a:cs typeface="Calibri" pitchFamily="34" charset="-120"/>
+              </a:rPr>
+              <a:t>2026  ·  Movies  ·  ★ R</a:t>
+            </a:r>
+            <a:endParaRPr lang="en-US" sz="650" dirty="0"/>
+          </a:p>
+        </p:txBody>
+      </p:sp>
+      <p:sp>
+        <p:nvSpPr>
+          <p:cNvPr id="28" name="Shape 26"/>
+          <p:cNvSpPr/>
+          <p:nvPr/>
+        </p:nvSpPr>
+        <p:spPr>
+          <a:xfrm>
+            <a:off x="2907792" y="3072384"/>
+            <a:ext cx="896112" cy="201168"/>
+          </a:xfrm>
+          <a:prstGeom prst="roundRect">
+            <a:avLst>
+              <a:gd name="adj" fmla="val 18182"/>
+            </a:avLst>
+          </a:prstGeom>
+          <a:solidFill>
+            <a:srgbClr val="B94AE8"/>
+          </a:solidFill>
+          <a:ln w="12700">
+            <a:solidFill>
+              <a:srgbClr val="B94AE8"/>
+            </a:solidFill>
+            <a:prstDash val="solid"/>
+          </a:ln>
+        </p:spPr>
+      </p:sp>
+      <p:sp>
+        <p:nvSpPr>
+          <p:cNvPr id="29" name="Text 27"/>
+          <p:cNvSpPr txBox="1"/>
+          <p:nvPr/>
+        </p:nvSpPr>
+        <p:spPr>
+          <a:xfrm>
+            <a:off x="2907792" y="3072384"/>
+            <a:ext cx="896112" cy="201168"/>
+          </a:xfrm>
+          <a:prstGeom prst="rect">
+            <a:avLst/>
+          </a:prstGeom>
+          <a:noFill/>
+          <a:ln/>
+        </p:spPr>
+        <p:txBody>
+          <a:bodyPr wrap="square" lIns="0" tIns="0" rIns="0" bIns="0" rtlCol="0" anchor="ctr"/>
+          <a:lstStyle/>
+          <a:p>
+            <a:pPr algn="ctr" indent="0" marL="0">
+              <a:buNone/>
+            </a:pPr>
+            <a:r>
+              <a:rPr lang="en-US" sz="650" b="1" dirty="0">
+                <a:solidFill>
+                  <a:srgbClr val="FFFFFF"/>
+                </a:solidFill>
+                <a:latin typeface="Calibri" pitchFamily="34" charset="0"/>
+                <a:ea typeface="Calibri" pitchFamily="34" charset="-122"/>
+                <a:cs typeface="Calibri" pitchFamily="34" charset="-120"/>
+              </a:rPr>
+              <a:t>▶  Watch now</a:t>
+            </a:r>
+            <a:endParaRPr lang="en-US" sz="650" dirty="0"/>
+          </a:p>
+        </p:txBody>
+      </p:sp>
+      <p:sp>
+        <p:nvSpPr>
+          <p:cNvPr id="30" name="Text 28"/>
+          <p:cNvSpPr txBox="1"/>
+          <p:nvPr/>
+        </p:nvSpPr>
+        <p:spPr>
+          <a:xfrm>
+            <a:off x="2148840" y="3566160"/>
+            <a:ext cx="2011680" cy="164592"/>
+          </a:xfrm>
+          <a:prstGeom prst="rect">
+            <a:avLst/>
+          </a:prstGeom>
+          <a:noFill/>
+          <a:ln/>
+        </p:spPr>
+        <p:txBody>
+          <a:bodyPr wrap="square" lIns="0" tIns="0" rIns="0" bIns="0" rtlCol="0" anchor="ctr"/>
+          <a:lstStyle/>
+          <a:p>
+            <a:pPr indent="0" marL="0">
+              <a:buNone/>
+            </a:pPr>
+            <a:r>
+              <a:rPr lang="en-US" sz="650" b="1" spc="120" kern="0" dirty="0">
+                <a:solidFill>
+                  <a:srgbClr val="C77BFF"/>
+                </a:solidFill>
+                <a:latin typeface="Calibri" pitchFamily="34" charset="0"/>
+                <a:ea typeface="Calibri" pitchFamily="34" charset="-122"/>
+                <a:cs typeface="Calibri" pitchFamily="34" charset="-120"/>
+              </a:rPr>
+              <a:t>LAST ADDED MOVIES</a:t>
+            </a:r>
+            <a:endParaRPr lang="en-US" sz="650" dirty="0"/>
+          </a:p>
+        </p:txBody>
+      </p:sp>
+      <p:sp>
+        <p:nvSpPr>
+          <p:cNvPr id="31" name="Text 29"/>
+          <p:cNvSpPr txBox="1"/>
+          <p:nvPr/>
+        </p:nvSpPr>
+        <p:spPr>
+          <a:xfrm>
+            <a:off x="6309360" y="3566160"/>
+            <a:ext cx="731520" cy="164592"/>
+          </a:xfrm>
+          <a:prstGeom prst="rect">
+            <a:avLst/>
+          </a:prstGeom>
+          <a:noFill/>
+          <a:ln/>
+        </p:spPr>
+        <p:txBody>
+          <a:bodyPr wrap="square" lIns="0" tIns="0" rIns="0" bIns="0" rtlCol="0" anchor="ctr"/>
+          <a:lstStyle/>
+          <a:p>
+            <a:pPr algn="r" indent="0" marL="0">
+              <a:buNone/>
+            </a:pPr>
+            <a:r>
+              <a:rPr lang="en-US" sz="600" dirty="0">
+                <a:solidFill>
+                  <a:srgbClr val="9C93B8"/>
+                </a:solidFill>
+                <a:latin typeface="Calibri" pitchFamily="34" charset="0"/>
+                <a:ea typeface="Calibri" pitchFamily="34" charset="-122"/>
+                <a:cs typeface="Calibri" pitchFamily="34" charset="-120"/>
+              </a:rPr>
+              <a:t>See all →</a:t>
+            </a:r>
+            <a:endParaRPr lang="en-US" sz="600" dirty="0"/>
+          </a:p>
+        </p:txBody>
+      </p:sp>
+      <p:sp>
+        <p:nvSpPr>
+          <p:cNvPr id="32" name="Shape 30"/>
+          <p:cNvSpPr/>
+          <p:nvPr/>
+        </p:nvSpPr>
+        <p:spPr>
+          <a:xfrm>
+            <a:off x="2148840" y="3785616"/>
+            <a:ext cx="859536" cy="896112"/>
+          </a:xfrm>
+          <a:prstGeom prst="roundRect">
+            <a:avLst>
+              <a:gd name="adj" fmla="val 5319"/>
+            </a:avLst>
+          </a:prstGeom>
+          <a:solidFill>
+            <a:srgbClr val="8A3B22"/>
           </a:solidFill>
           <a:ln w="19050">
             <a:solidFill>
-              <a:srgbClr val="D4A94A"/>
+              <a:srgbClr val="C77BFF"/>
             </a:solidFill>
             <a:prstDash val="solid"/>
           </a:ln>
@@ -8926,107 +9747,24 @@
       </p:sp>
       <p:sp>
         <p:nvSpPr>
-          <p:cNvPr id="10" name="Text 8"/>
-          <p:cNvSpPr txBox="1"/>
-          <p:nvPr/>
-        </p:nvSpPr>
-        <p:spPr>
-          <a:xfrm>
-            <a:off x="1143000" y="2962656"/>
-            <a:ext cx="1536192" cy="292608"/>
-          </a:xfrm>
-          <a:prstGeom prst="rect">
-            <a:avLst/>
-          </a:prstGeom>
-          <a:noFill/>
-          <a:ln/>
-        </p:spPr>
-        <p:txBody>
-          <a:bodyPr wrap="square" lIns="0" tIns="0" rIns="0" bIns="0" rtlCol="0" anchor="ctr"/>
-          <a:lstStyle/>
-          <a:p>
-            <a:pPr indent="0" marL="0">
-              <a:buNone/>
-            </a:pPr>
-            <a:r>
-              <a:rPr lang="en-US" sz="1500" b="1" dirty="0">
-                <a:solidFill>
-                  <a:srgbClr val="D4A94A"/>
-                </a:solidFill>
-                <a:latin typeface="Calibri" pitchFamily="34" charset="0"/>
-                <a:ea typeface="Calibri" pitchFamily="34" charset="-122"/>
-                <a:cs typeface="Calibri" pitchFamily="34" charset="-120"/>
-              </a:rPr>
-              <a:t>Watch</a:t>
-            </a:r>
-            <a:endParaRPr lang="en-US" sz="1500" dirty="0"/>
-          </a:p>
-        </p:txBody>
-      </p:sp>
-      <p:sp>
-        <p:nvSpPr>
-          <p:cNvPr id="11" name="Text 9"/>
-          <p:cNvSpPr txBox="1"/>
-          <p:nvPr/>
-        </p:nvSpPr>
-        <p:spPr>
-          <a:xfrm>
-            <a:off x="1143000" y="3291840"/>
-            <a:ext cx="1536192" cy="384048"/>
-          </a:xfrm>
-          <a:prstGeom prst="rect">
-            <a:avLst/>
-          </a:prstGeom>
-          <a:noFill/>
-          <a:ln/>
-        </p:spPr>
-        <p:txBody>
-          <a:bodyPr wrap="square" lIns="0" tIns="0" rIns="0" bIns="0" rtlCol="0" anchor="ctr"/>
-          <a:lstStyle/>
-          <a:p>
-            <a:pPr indent="0" marL="0">
-              <a:lnSpc>
-                <a:spcPts val="1200"/>
-              </a:lnSpc>
-              <a:buNone/>
-            </a:pPr>
-            <a:r>
-              <a:rPr lang="en-US" sz="950" dirty="0">
-                <a:solidFill>
-                  <a:srgbClr val="9AA9C2"/>
-                </a:solidFill>
-                <a:latin typeface="Calibri" pitchFamily="34" charset="0"/>
-                <a:ea typeface="Calibri" pitchFamily="34" charset="-122"/>
-                <a:cs typeface="Calibri" pitchFamily="34" charset="-120"/>
-              </a:rPr>
-              <a:t>Live TV, films and series</a:t>
-            </a:r>
-            <a:endParaRPr lang="en-US" sz="950" dirty="0"/>
-          </a:p>
-        </p:txBody>
-      </p:sp>
-      <p:sp>
-        <p:nvSpPr>
-          <p:cNvPr id="12" name="Shape 10"/>
+          <p:cNvPr id="33" name="Shape 31"/>
           <p:cNvSpPr/>
           <p:nvPr/>
         </p:nvSpPr>
         <p:spPr>
           <a:xfrm>
-            <a:off x="3008376" y="2743200"/>
-            <a:ext cx="1901952" cy="1051560"/>
-          </a:xfrm>
-          <a:prstGeom prst="roundRect">
-            <a:avLst>
-              <a:gd name="adj" fmla="val 6957"/>
-            </a:avLst>
+            <a:off x="2441448" y="4096512"/>
+            <a:ext cx="274320" cy="274320"/>
+          </a:xfrm>
+          <a:prstGeom prst="ellipse">
+            <a:avLst/>
           </a:prstGeom>
           <a:solidFill>
-            <a:srgbClr val="121C2E"/>
+            <a:srgbClr val="FFFFFF"/>
           </a:solidFill>
           <a:ln w="12700">
             <a:solidFill>
-              <a:srgbClr val="1E2A40"/>
+              <a:srgbClr val="FFFFFF"/>
             </a:solidFill>
             <a:prstDash val="solid"/>
           </a:ln>
@@ -9034,30 +9772,83 @@
       </p:sp>
       <p:sp>
         <p:nvSpPr>
-          <p:cNvPr id="13" name="Text 11"/>
-          <p:cNvSpPr txBox="1"/>
-          <p:nvPr/>
-        </p:nvSpPr>
-        <p:spPr>
-          <a:xfrm>
-            <a:off x="3191256" y="2962656"/>
-            <a:ext cx="1536192" cy="292608"/>
-          </a:xfrm>
-          <a:prstGeom prst="rect">
-            <a:avLst/>
-          </a:prstGeom>
-          <a:noFill/>
-          <a:ln/>
-        </p:spPr>
-        <p:txBody>
-          <a:bodyPr wrap="square" lIns="0" tIns="0" rIns="0" bIns="0" rtlCol="0" anchor="ctr"/>
-          <a:lstStyle/>
-          <a:p>
-            <a:pPr indent="0" marL="0">
-              <a:buNone/>
-            </a:pPr>
-            <a:r>
-              <a:rPr lang="en-US" sz="1500" b="1" dirty="0">
+          <p:cNvPr id="34" name="Text 32"/>
+          <p:cNvSpPr txBox="1"/>
+          <p:nvPr/>
+        </p:nvSpPr>
+        <p:spPr>
+          <a:xfrm>
+            <a:off x="2441448" y="4096512"/>
+            <a:ext cx="274320" cy="274320"/>
+          </a:xfrm>
+          <a:prstGeom prst="rect">
+            <a:avLst/>
+          </a:prstGeom>
+          <a:noFill/>
+          <a:ln/>
+        </p:spPr>
+        <p:txBody>
+          <a:bodyPr wrap="square" lIns="0" tIns="0" rIns="0" bIns="0" rtlCol="0" anchor="ctr"/>
+          <a:lstStyle/>
+          <a:p>
+            <a:pPr algn="ctr" indent="0" marL="0">
+              <a:buNone/>
+            </a:pPr>
+            <a:r>
+              <a:rPr lang="en-US" sz="900" dirty="0">
+                <a:solidFill>
+                  <a:srgbClr val="1A0F2E"/>
+                </a:solidFill>
+                <a:latin typeface="Calibri" pitchFamily="34" charset="0"/>
+                <a:ea typeface="Calibri" pitchFamily="34" charset="-122"/>
+                <a:cs typeface="Calibri" pitchFamily="34" charset="-120"/>
+              </a:rPr>
+              <a:t>▶</a:t>
+            </a:r>
+            <a:endParaRPr lang="en-US" sz="900" dirty="0"/>
+          </a:p>
+        </p:txBody>
+      </p:sp>
+      <p:sp>
+        <p:nvSpPr>
+          <p:cNvPr id="35" name="Text 33"/>
+          <p:cNvSpPr txBox="1"/>
+          <p:nvPr/>
+        </p:nvSpPr>
+        <p:spPr>
+          <a:xfrm>
+            <a:off x="2148840" y="4727448"/>
+            <a:ext cx="896112" cy="146304"/>
+          </a:xfrm>
+          <a:prstGeom prst="rect">
+            <a:avLst/>
+          </a:prstGeom>
+          <a:noFill/>
+          <a:ln/>
+        </p:spPr>
+        <p:txBody>
+          <a:bodyPr wrap="square" lIns="0" tIns="0" rIns="0" bIns="0" rtlCol="0" anchor="ctr"/>
+          <a:lstStyle/>
+          <a:p>
+            <a:pPr indent="0" marL="0">
+              <a:buNone/>
+            </a:pPr>
+            <a:r>
+              <a:rPr lang="en-US" sz="500" b="1" dirty="0">
+                <a:solidFill>
+                  <a:srgbClr val="EC4899"/>
+                </a:solidFill>
+                <a:latin typeface="Calibri" pitchFamily="34" charset="0"/>
+                <a:ea typeface="Calibri" pitchFamily="34" charset="-122"/>
+                <a:cs typeface="Calibri" pitchFamily="34" charset="-120"/>
+              </a:rPr>
+              <a:t>▶ </a:t>
+            </a:r>
+            <a:pPr indent="0" marL="0">
+              <a:buNone/>
+            </a:pPr>
+            <a:r>
+              <a:rPr lang="en-US" sz="600" b="1" dirty="0">
                 <a:solidFill>
                   <a:srgbClr val="F4F1EA"/>
                 </a:solidFill>
@@ -9065,76 +9856,73 @@
                 <a:ea typeface="Calibri" pitchFamily="34" charset="-122"/>
                 <a:cs typeface="Calibri" pitchFamily="34" charset="-120"/>
               </a:rPr>
-              <a:t>Order</a:t>
-            </a:r>
-            <a:endParaRPr lang="en-US" sz="1500" dirty="0"/>
-          </a:p>
-        </p:txBody>
-      </p:sp>
-      <p:sp>
-        <p:nvSpPr>
-          <p:cNvPr id="14" name="Text 12"/>
-          <p:cNvSpPr txBox="1"/>
-          <p:nvPr/>
-        </p:nvSpPr>
-        <p:spPr>
-          <a:xfrm>
-            <a:off x="3191256" y="3291840"/>
-            <a:ext cx="1536192" cy="384048"/>
-          </a:xfrm>
-          <a:prstGeom prst="rect">
-            <a:avLst/>
-          </a:prstGeom>
-          <a:noFill/>
-          <a:ln/>
-        </p:spPr>
-        <p:txBody>
-          <a:bodyPr wrap="square" lIns="0" tIns="0" rIns="0" bIns="0" rtlCol="0" anchor="ctr"/>
-          <a:lstStyle/>
-          <a:p>
-            <a:pPr indent="0" marL="0">
-              <a:lnSpc>
-                <a:spcPts val="1200"/>
-              </a:lnSpc>
-              <a:buNone/>
-            </a:pPr>
-            <a:r>
-              <a:rPr lang="en-US" sz="950" dirty="0">
-                <a:solidFill>
-                  <a:srgbClr val="9AA9C2"/>
-                </a:solidFill>
-                <a:latin typeface="Calibri" pitchFamily="34" charset="0"/>
-                <a:ea typeface="Calibri" pitchFamily="34" charset="-122"/>
-                <a:cs typeface="Calibri" pitchFamily="34" charset="-120"/>
-              </a:rPr>
-              <a:t>Dining, in-room, bar</a:t>
-            </a:r>
-            <a:endParaRPr lang="en-US" sz="950" dirty="0"/>
-          </a:p>
-        </p:txBody>
-      </p:sp>
-      <p:sp>
-        <p:nvSpPr>
-          <p:cNvPr id="15" name="Shape 13"/>
+              <a:t>On the Hunt</a:t>
+            </a:r>
+            <a:endParaRPr lang="en-US" sz="500" dirty="0"/>
+          </a:p>
+        </p:txBody>
+      </p:sp>
+      <p:sp>
+        <p:nvSpPr>
+          <p:cNvPr id="36" name="Text 34"/>
+          <p:cNvSpPr txBox="1"/>
+          <p:nvPr/>
+        </p:nvSpPr>
+        <p:spPr>
+          <a:xfrm>
+            <a:off x="2148840" y="4873752"/>
+            <a:ext cx="859536" cy="128016"/>
+          </a:xfrm>
+          <a:prstGeom prst="rect">
+            <a:avLst/>
+          </a:prstGeom>
+          <a:noFill/>
+          <a:ln/>
+        </p:spPr>
+        <p:txBody>
+          <a:bodyPr wrap="square" lIns="0" tIns="0" rIns="0" bIns="0" rtlCol="0" anchor="ctr"/>
+          <a:lstStyle/>
+          <a:p>
+            <a:pPr indent="0" marL="0">
+              <a:buNone/>
+            </a:pPr>
+            <a:r>
+              <a:rPr lang="en-US" sz="550" dirty="0">
+                <a:solidFill>
+                  <a:srgbClr val="9C93B8"/>
+                </a:solidFill>
+                <a:latin typeface="Calibri" pitchFamily="34" charset="0"/>
+                <a:ea typeface="Calibri" pitchFamily="34" charset="-122"/>
+                <a:cs typeface="Calibri" pitchFamily="34" charset="-120"/>
+              </a:rPr>
+              <a:t>2026</a:t>
+            </a:r>
+            <a:endParaRPr lang="en-US" sz="550" dirty="0"/>
+          </a:p>
+        </p:txBody>
+      </p:sp>
+      <p:sp>
+        <p:nvSpPr>
+          <p:cNvPr id="37" name="Shape 35"/>
           <p:cNvSpPr/>
           <p:nvPr/>
         </p:nvSpPr>
         <p:spPr>
           <a:xfrm>
-            <a:off x="5056632" y="2743200"/>
-            <a:ext cx="1901952" cy="1051560"/>
+            <a:off x="3118104" y="3785616"/>
+            <a:ext cx="859536" cy="896112"/>
           </a:xfrm>
           <a:prstGeom prst="roundRect">
             <a:avLst>
-              <a:gd name="adj" fmla="val 6957"/>
+              <a:gd name="adj" fmla="val 5319"/>
             </a:avLst>
           </a:prstGeom>
           <a:solidFill>
-            <a:srgbClr val="121C2E"/>
+            <a:srgbClr val="3A4A5C"/>
           </a:solidFill>
           <a:ln w="12700">
             <a:solidFill>
-              <a:srgbClr val="1E2A40"/>
+              <a:srgbClr val="2A1C47"/>
             </a:solidFill>
             <a:prstDash val="solid"/>
           </a:ln>
@@ -9142,30 +9930,44 @@
       </p:sp>
       <p:sp>
         <p:nvSpPr>
-          <p:cNvPr id="16" name="Text 14"/>
-          <p:cNvSpPr txBox="1"/>
-          <p:nvPr/>
-        </p:nvSpPr>
-        <p:spPr>
-          <a:xfrm>
-            <a:off x="5239512" y="2962656"/>
-            <a:ext cx="1536192" cy="292608"/>
-          </a:xfrm>
-          <a:prstGeom prst="rect">
-            <a:avLst/>
-          </a:prstGeom>
-          <a:noFill/>
-          <a:ln/>
-        </p:spPr>
-        <p:txBody>
-          <a:bodyPr wrap="square" lIns="0" tIns="0" rIns="0" bIns="0" rtlCol="0" anchor="ctr"/>
-          <a:lstStyle/>
-          <a:p>
-            <a:pPr indent="0" marL="0">
-              <a:buNone/>
-            </a:pPr>
-            <a:r>
-              <a:rPr lang="en-US" sz="1500" b="1" dirty="0">
+          <p:cNvPr id="38" name="Text 36"/>
+          <p:cNvSpPr txBox="1"/>
+          <p:nvPr/>
+        </p:nvSpPr>
+        <p:spPr>
+          <a:xfrm>
+            <a:off x="3118104" y="4727448"/>
+            <a:ext cx="896112" cy="146304"/>
+          </a:xfrm>
+          <a:prstGeom prst="rect">
+            <a:avLst/>
+          </a:prstGeom>
+          <a:noFill/>
+          <a:ln/>
+        </p:spPr>
+        <p:txBody>
+          <a:bodyPr wrap="square" lIns="0" tIns="0" rIns="0" bIns="0" rtlCol="0" anchor="ctr"/>
+          <a:lstStyle/>
+          <a:p>
+            <a:pPr indent="0" marL="0">
+              <a:buNone/>
+            </a:pPr>
+            <a:r>
+              <a:rPr lang="en-US" sz="500" b="1" dirty="0">
+                <a:solidFill>
+                  <a:srgbClr val="EC4899"/>
+                </a:solidFill>
+                <a:latin typeface="Calibri" pitchFamily="34" charset="0"/>
+                <a:ea typeface="Calibri" pitchFamily="34" charset="-122"/>
+                <a:cs typeface="Calibri" pitchFamily="34" charset="-120"/>
+              </a:rPr>
+              <a:t>▶ </a:t>
+            </a:r>
+            <a:pPr indent="0" marL="0">
+              <a:buNone/>
+            </a:pPr>
+            <a:r>
+              <a:rPr lang="en-US" sz="600" b="1" dirty="0">
                 <a:solidFill>
                   <a:srgbClr val="F4F1EA"/>
                 </a:solidFill>
@@ -9173,76 +9975,73 @@
                 <a:ea typeface="Calibri" pitchFamily="34" charset="-122"/>
                 <a:cs typeface="Calibri" pitchFamily="34" charset="-120"/>
               </a:rPr>
-              <a:t>Book</a:t>
-            </a:r>
-            <a:endParaRPr lang="en-US" sz="1500" dirty="0"/>
-          </a:p>
-        </p:txBody>
-      </p:sp>
-      <p:sp>
-        <p:nvSpPr>
-          <p:cNvPr id="17" name="Text 15"/>
-          <p:cNvSpPr txBox="1"/>
-          <p:nvPr/>
-        </p:nvSpPr>
-        <p:spPr>
-          <a:xfrm>
-            <a:off x="5239512" y="3291840"/>
-            <a:ext cx="1536192" cy="384048"/>
-          </a:xfrm>
-          <a:prstGeom prst="rect">
-            <a:avLst/>
-          </a:prstGeom>
-          <a:noFill/>
-          <a:ln/>
-        </p:spPr>
-        <p:txBody>
-          <a:bodyPr wrap="square" lIns="0" tIns="0" rIns="0" bIns="0" rtlCol="0" anchor="ctr"/>
-          <a:lstStyle/>
-          <a:p>
-            <a:pPr indent="0" marL="0">
-              <a:lnSpc>
-                <a:spcPts val="1200"/>
-              </a:lnSpc>
-              <a:buNone/>
-            </a:pPr>
-            <a:r>
-              <a:rPr lang="en-US" sz="950" dirty="0">
-                <a:solidFill>
-                  <a:srgbClr val="9AA9C2"/>
-                </a:solidFill>
-                <a:latin typeface="Calibri" pitchFamily="34" charset="0"/>
-                <a:ea typeface="Calibri" pitchFamily="34" charset="-122"/>
-                <a:cs typeface="Calibri" pitchFamily="34" charset="-120"/>
-              </a:rPr>
-              <a:t>Spa, tables, tours</a:t>
-            </a:r>
-            <a:endParaRPr lang="en-US" sz="950" dirty="0"/>
-          </a:p>
-        </p:txBody>
-      </p:sp>
-      <p:sp>
-        <p:nvSpPr>
-          <p:cNvPr id="18" name="Shape 16"/>
+              <a:t>One Mile I</a:t>
+            </a:r>
+            <a:endParaRPr lang="en-US" sz="500" dirty="0"/>
+          </a:p>
+        </p:txBody>
+      </p:sp>
+      <p:sp>
+        <p:nvSpPr>
+          <p:cNvPr id="39" name="Text 37"/>
+          <p:cNvSpPr txBox="1"/>
+          <p:nvPr/>
+        </p:nvSpPr>
+        <p:spPr>
+          <a:xfrm>
+            <a:off x="3118104" y="4873752"/>
+            <a:ext cx="859536" cy="128016"/>
+          </a:xfrm>
+          <a:prstGeom prst="rect">
+            <a:avLst/>
+          </a:prstGeom>
+          <a:noFill/>
+          <a:ln/>
+        </p:spPr>
+        <p:txBody>
+          <a:bodyPr wrap="square" lIns="0" tIns="0" rIns="0" bIns="0" rtlCol="0" anchor="ctr"/>
+          <a:lstStyle/>
+          <a:p>
+            <a:pPr indent="0" marL="0">
+              <a:buNone/>
+            </a:pPr>
+            <a:r>
+              <a:rPr lang="en-US" sz="550" dirty="0">
+                <a:solidFill>
+                  <a:srgbClr val="9C93B8"/>
+                </a:solidFill>
+                <a:latin typeface="Calibri" pitchFamily="34" charset="0"/>
+                <a:ea typeface="Calibri" pitchFamily="34" charset="-122"/>
+                <a:cs typeface="Calibri" pitchFamily="34" charset="-120"/>
+              </a:rPr>
+              <a:t>2026</a:t>
+            </a:r>
+            <a:endParaRPr lang="en-US" sz="550" dirty="0"/>
+          </a:p>
+        </p:txBody>
+      </p:sp>
+      <p:sp>
+        <p:nvSpPr>
+          <p:cNvPr id="40" name="Shape 38"/>
           <p:cNvSpPr/>
           <p:nvPr/>
         </p:nvSpPr>
         <p:spPr>
           <a:xfrm>
-            <a:off x="960120" y="3959352"/>
-            <a:ext cx="1901952" cy="1051560"/>
+            <a:off x="4087368" y="3785616"/>
+            <a:ext cx="859536" cy="896112"/>
           </a:xfrm>
           <a:prstGeom prst="roundRect">
             <a:avLst>
-              <a:gd name="adj" fmla="val 6957"/>
+              <a:gd name="adj" fmla="val 5319"/>
             </a:avLst>
           </a:prstGeom>
           <a:solidFill>
-            <a:srgbClr val="121C2E"/>
+            <a:srgbClr val="4A4438"/>
           </a:solidFill>
           <a:ln w="12700">
             <a:solidFill>
-              <a:srgbClr val="1E2A40"/>
+              <a:srgbClr val="2A1C47"/>
             </a:solidFill>
             <a:prstDash val="solid"/>
           </a:ln>
@@ -9250,30 +10049,44 @@
       </p:sp>
       <p:sp>
         <p:nvSpPr>
-          <p:cNvPr id="19" name="Text 17"/>
-          <p:cNvSpPr txBox="1"/>
-          <p:nvPr/>
-        </p:nvSpPr>
-        <p:spPr>
-          <a:xfrm>
-            <a:off x="1143000" y="4178808"/>
-            <a:ext cx="1536192" cy="292608"/>
-          </a:xfrm>
-          <a:prstGeom prst="rect">
-            <a:avLst/>
-          </a:prstGeom>
-          <a:noFill/>
-          <a:ln/>
-        </p:spPr>
-        <p:txBody>
-          <a:bodyPr wrap="square" lIns="0" tIns="0" rIns="0" bIns="0" rtlCol="0" anchor="ctr"/>
-          <a:lstStyle/>
-          <a:p>
-            <a:pPr indent="0" marL="0">
-              <a:buNone/>
-            </a:pPr>
-            <a:r>
-              <a:rPr lang="en-US" sz="1500" b="1" dirty="0">
+          <p:cNvPr id="41" name="Text 39"/>
+          <p:cNvSpPr txBox="1"/>
+          <p:nvPr/>
+        </p:nvSpPr>
+        <p:spPr>
+          <a:xfrm>
+            <a:off x="4087368" y="4727448"/>
+            <a:ext cx="896112" cy="146304"/>
+          </a:xfrm>
+          <a:prstGeom prst="rect">
+            <a:avLst/>
+          </a:prstGeom>
+          <a:noFill/>
+          <a:ln/>
+        </p:spPr>
+        <p:txBody>
+          <a:bodyPr wrap="square" lIns="0" tIns="0" rIns="0" bIns="0" rtlCol="0" anchor="ctr"/>
+          <a:lstStyle/>
+          <a:p>
+            <a:pPr indent="0" marL="0">
+              <a:buNone/>
+            </a:pPr>
+            <a:r>
+              <a:rPr lang="en-US" sz="500" b="1" dirty="0">
+                <a:solidFill>
+                  <a:srgbClr val="EC4899"/>
+                </a:solidFill>
+                <a:latin typeface="Calibri" pitchFamily="34" charset="0"/>
+                <a:ea typeface="Calibri" pitchFamily="34" charset="-122"/>
+                <a:cs typeface="Calibri" pitchFamily="34" charset="-120"/>
+              </a:rPr>
+              <a:t>▶ </a:t>
+            </a:r>
+            <a:pPr indent="0" marL="0">
+              <a:buNone/>
+            </a:pPr>
+            <a:r>
+              <a:rPr lang="en-US" sz="600" b="1" dirty="0">
                 <a:solidFill>
                   <a:srgbClr val="F4F1EA"/>
                 </a:solidFill>
@@ -9281,76 +10094,73 @@
                 <a:ea typeface="Calibri" pitchFamily="34" charset="-122"/>
                 <a:cs typeface="Calibri" pitchFamily="34" charset="-120"/>
               </a:rPr>
-              <a:t>Ask</a:t>
-            </a:r>
-            <a:endParaRPr lang="en-US" sz="1500" dirty="0"/>
-          </a:p>
-        </p:txBody>
-      </p:sp>
-      <p:sp>
-        <p:nvSpPr>
-          <p:cNvPr id="20" name="Text 18"/>
-          <p:cNvSpPr txBox="1"/>
-          <p:nvPr/>
-        </p:nvSpPr>
-        <p:spPr>
-          <a:xfrm>
-            <a:off x="1143000" y="4507992"/>
-            <a:ext cx="1536192" cy="384048"/>
-          </a:xfrm>
-          <a:prstGeom prst="rect">
-            <a:avLst/>
-          </a:prstGeom>
-          <a:noFill/>
-          <a:ln/>
-        </p:spPr>
-        <p:txBody>
-          <a:bodyPr wrap="square" lIns="0" tIns="0" rIns="0" bIns="0" rtlCol="0" anchor="ctr"/>
-          <a:lstStyle/>
-          <a:p>
-            <a:pPr indent="0" marL="0">
-              <a:lnSpc>
-                <a:spcPts val="1200"/>
-              </a:lnSpc>
-              <a:buNone/>
-            </a:pPr>
-            <a:r>
-              <a:rPr lang="en-US" sz="950" dirty="0">
-                <a:solidFill>
-                  <a:srgbClr val="9AA9C2"/>
-                </a:solidFill>
-                <a:latin typeface="Calibri" pitchFamily="34" charset="0"/>
-                <a:ea typeface="Calibri" pitchFamily="34" charset="-122"/>
-                <a:cs typeface="Calibri" pitchFamily="34" charset="-120"/>
-              </a:rPr>
-              <a:t>Concierge and housekeeping</a:t>
-            </a:r>
-            <a:endParaRPr lang="en-US" sz="950" dirty="0"/>
-          </a:p>
-        </p:txBody>
-      </p:sp>
-      <p:sp>
-        <p:nvSpPr>
-          <p:cNvPr id="21" name="Shape 19"/>
+              <a:t>One Mile II</a:t>
+            </a:r>
+            <a:endParaRPr lang="en-US" sz="500" dirty="0"/>
+          </a:p>
+        </p:txBody>
+      </p:sp>
+      <p:sp>
+        <p:nvSpPr>
+          <p:cNvPr id="42" name="Text 40"/>
+          <p:cNvSpPr txBox="1"/>
+          <p:nvPr/>
+        </p:nvSpPr>
+        <p:spPr>
+          <a:xfrm>
+            <a:off x="4087368" y="4873752"/>
+            <a:ext cx="859536" cy="128016"/>
+          </a:xfrm>
+          <a:prstGeom prst="rect">
+            <a:avLst/>
+          </a:prstGeom>
+          <a:noFill/>
+          <a:ln/>
+        </p:spPr>
+        <p:txBody>
+          <a:bodyPr wrap="square" lIns="0" tIns="0" rIns="0" bIns="0" rtlCol="0" anchor="ctr"/>
+          <a:lstStyle/>
+          <a:p>
+            <a:pPr indent="0" marL="0">
+              <a:buNone/>
+            </a:pPr>
+            <a:r>
+              <a:rPr lang="en-US" sz="550" dirty="0">
+                <a:solidFill>
+                  <a:srgbClr val="9C93B8"/>
+                </a:solidFill>
+                <a:latin typeface="Calibri" pitchFamily="34" charset="0"/>
+                <a:ea typeface="Calibri" pitchFamily="34" charset="-122"/>
+                <a:cs typeface="Calibri" pitchFamily="34" charset="-120"/>
+              </a:rPr>
+              <a:t>2026</a:t>
+            </a:r>
+            <a:endParaRPr lang="en-US" sz="550" dirty="0"/>
+          </a:p>
+        </p:txBody>
+      </p:sp>
+      <p:sp>
+        <p:nvSpPr>
+          <p:cNvPr id="43" name="Shape 41"/>
           <p:cNvSpPr/>
           <p:nvPr/>
         </p:nvSpPr>
         <p:spPr>
           <a:xfrm>
-            <a:off x="3008376" y="3959352"/>
-            <a:ext cx="1901952" cy="1051560"/>
+            <a:off x="5056632" y="3785616"/>
+            <a:ext cx="859536" cy="896112"/>
           </a:xfrm>
           <a:prstGeom prst="roundRect">
             <a:avLst>
-              <a:gd name="adj" fmla="val 6957"/>
+              <a:gd name="adj" fmla="val 5319"/>
             </a:avLst>
           </a:prstGeom>
           <a:solidFill>
-            <a:srgbClr val="121C2E"/>
+            <a:srgbClr val="6B2230"/>
           </a:solidFill>
           <a:ln w="12700">
             <a:solidFill>
-              <a:srgbClr val="1E2A40"/>
+              <a:srgbClr val="2A1C47"/>
             </a:solidFill>
             <a:prstDash val="solid"/>
           </a:ln>
@@ -9358,30 +10168,44 @@
       </p:sp>
       <p:sp>
         <p:nvSpPr>
-          <p:cNvPr id="22" name="Text 20"/>
-          <p:cNvSpPr txBox="1"/>
-          <p:nvPr/>
-        </p:nvSpPr>
-        <p:spPr>
-          <a:xfrm>
-            <a:off x="3191256" y="4178808"/>
-            <a:ext cx="1536192" cy="292608"/>
-          </a:xfrm>
-          <a:prstGeom prst="rect">
-            <a:avLst/>
-          </a:prstGeom>
-          <a:noFill/>
-          <a:ln/>
-        </p:spPr>
-        <p:txBody>
-          <a:bodyPr wrap="square" lIns="0" tIns="0" rIns="0" bIns="0" rtlCol="0" anchor="ctr"/>
-          <a:lstStyle/>
-          <a:p>
-            <a:pPr indent="0" marL="0">
-              <a:buNone/>
-            </a:pPr>
-            <a:r>
-              <a:rPr lang="en-US" sz="1500" b="1" dirty="0">
+          <p:cNvPr id="44" name="Text 42"/>
+          <p:cNvSpPr txBox="1"/>
+          <p:nvPr/>
+        </p:nvSpPr>
+        <p:spPr>
+          <a:xfrm>
+            <a:off x="5056632" y="4727448"/>
+            <a:ext cx="896112" cy="146304"/>
+          </a:xfrm>
+          <a:prstGeom prst="rect">
+            <a:avLst/>
+          </a:prstGeom>
+          <a:noFill/>
+          <a:ln/>
+        </p:spPr>
+        <p:txBody>
+          <a:bodyPr wrap="square" lIns="0" tIns="0" rIns="0" bIns="0" rtlCol="0" anchor="ctr"/>
+          <a:lstStyle/>
+          <a:p>
+            <a:pPr indent="0" marL="0">
+              <a:buNone/>
+            </a:pPr>
+            <a:r>
+              <a:rPr lang="en-US" sz="500" b="1" dirty="0">
+                <a:solidFill>
+                  <a:srgbClr val="EC4899"/>
+                </a:solidFill>
+                <a:latin typeface="Calibri" pitchFamily="34" charset="0"/>
+                <a:ea typeface="Calibri" pitchFamily="34" charset="-122"/>
+                <a:cs typeface="Calibri" pitchFamily="34" charset="-120"/>
+              </a:rPr>
+              <a:t>▶ </a:t>
+            </a:r>
+            <a:pPr indent="0" marL="0">
+              <a:buNone/>
+            </a:pPr>
+            <a:r>
+              <a:rPr lang="en-US" sz="600" b="1" dirty="0">
                 <a:solidFill>
                   <a:srgbClr val="F4F1EA"/>
                 </a:solidFill>
@@ -9389,76 +10213,73 @@
                 <a:ea typeface="Calibri" pitchFamily="34" charset="-122"/>
                 <a:cs typeface="Calibri" pitchFamily="34" charset="-120"/>
               </a:rPr>
-              <a:t>Hotel</a:t>
-            </a:r>
-            <a:endParaRPr lang="en-US" sz="1500" dirty="0"/>
-          </a:p>
-        </p:txBody>
-      </p:sp>
-      <p:sp>
-        <p:nvSpPr>
-          <p:cNvPr id="23" name="Text 21"/>
-          <p:cNvSpPr txBox="1"/>
-          <p:nvPr/>
-        </p:nvSpPr>
-        <p:spPr>
-          <a:xfrm>
-            <a:off x="3191256" y="4507992"/>
-            <a:ext cx="1536192" cy="384048"/>
-          </a:xfrm>
-          <a:prstGeom prst="rect">
-            <a:avLst/>
-          </a:prstGeom>
-          <a:noFill/>
-          <a:ln/>
-        </p:spPr>
-        <p:txBody>
-          <a:bodyPr wrap="square" lIns="0" tIns="0" rIns="0" bIns="0" rtlCol="0" anchor="ctr"/>
-          <a:lstStyle/>
-          <a:p>
-            <a:pPr indent="0" marL="0">
-              <a:lnSpc>
-                <a:spcPts val="1200"/>
-              </a:lnSpc>
-              <a:buNone/>
-            </a:pPr>
-            <a:r>
-              <a:rPr lang="en-US" sz="950" dirty="0">
-                <a:solidFill>
-                  <a:srgbClr val="9AA9C2"/>
-                </a:solidFill>
-                <a:latin typeface="Calibri" pitchFamily="34" charset="0"/>
-                <a:ea typeface="Calibri" pitchFamily="34" charset="-122"/>
-                <a:cs typeface="Calibri" pitchFamily="34" charset="-120"/>
-              </a:rPr>
-              <a:t>Services and wayfinding</a:t>
-            </a:r>
-            <a:endParaRPr lang="en-US" sz="950" dirty="0"/>
-          </a:p>
-        </p:txBody>
-      </p:sp>
-      <p:sp>
-        <p:nvSpPr>
-          <p:cNvPr id="24" name="Shape 22"/>
+              <a:t>Mercy</a:t>
+            </a:r>
+            <a:endParaRPr lang="en-US" sz="500" dirty="0"/>
+          </a:p>
+        </p:txBody>
+      </p:sp>
+      <p:sp>
+        <p:nvSpPr>
+          <p:cNvPr id="45" name="Text 43"/>
+          <p:cNvSpPr txBox="1"/>
+          <p:nvPr/>
+        </p:nvSpPr>
+        <p:spPr>
+          <a:xfrm>
+            <a:off x="5056632" y="4873752"/>
+            <a:ext cx="859536" cy="128016"/>
+          </a:xfrm>
+          <a:prstGeom prst="rect">
+            <a:avLst/>
+          </a:prstGeom>
+          <a:noFill/>
+          <a:ln/>
+        </p:spPr>
+        <p:txBody>
+          <a:bodyPr wrap="square" lIns="0" tIns="0" rIns="0" bIns="0" rtlCol="0" anchor="ctr"/>
+          <a:lstStyle/>
+          <a:p>
+            <a:pPr indent="0" marL="0">
+              <a:buNone/>
+            </a:pPr>
+            <a:r>
+              <a:rPr lang="en-US" sz="550" dirty="0">
+                <a:solidFill>
+                  <a:srgbClr val="9C93B8"/>
+                </a:solidFill>
+                <a:latin typeface="Calibri" pitchFamily="34" charset="0"/>
+                <a:ea typeface="Calibri" pitchFamily="34" charset="-122"/>
+                <a:cs typeface="Calibri" pitchFamily="34" charset="-120"/>
+              </a:rPr>
+              <a:t>2026</a:t>
+            </a:r>
+            <a:endParaRPr lang="en-US" sz="550" dirty="0"/>
+          </a:p>
+        </p:txBody>
+      </p:sp>
+      <p:sp>
+        <p:nvSpPr>
+          <p:cNvPr id="46" name="Shape 44"/>
           <p:cNvSpPr/>
           <p:nvPr/>
         </p:nvSpPr>
         <p:spPr>
           <a:xfrm>
-            <a:off x="5056632" y="3959352"/>
-            <a:ext cx="1901952" cy="1051560"/>
+            <a:off x="6025896" y="3785616"/>
+            <a:ext cx="859536" cy="896112"/>
           </a:xfrm>
           <a:prstGeom prst="roundRect">
             <a:avLst>
-              <a:gd name="adj" fmla="val 6957"/>
+              <a:gd name="adj" fmla="val 5319"/>
             </a:avLst>
           </a:prstGeom>
           <a:solidFill>
-            <a:srgbClr val="121C2E"/>
+            <a:srgbClr val="8A6A2A"/>
           </a:solidFill>
           <a:ln w="12700">
             <a:solidFill>
-              <a:srgbClr val="1E2A40"/>
+              <a:srgbClr val="2A1C47"/>
             </a:solidFill>
             <a:prstDash val="solid"/>
           </a:ln>
@@ -9466,30 +10287,44 @@
       </p:sp>
       <p:sp>
         <p:nvSpPr>
-          <p:cNvPr id="25" name="Text 23"/>
-          <p:cNvSpPr txBox="1"/>
-          <p:nvPr/>
-        </p:nvSpPr>
-        <p:spPr>
-          <a:xfrm>
-            <a:off x="5239512" y="4178808"/>
-            <a:ext cx="1536192" cy="292608"/>
-          </a:xfrm>
-          <a:prstGeom prst="rect">
-            <a:avLst/>
-          </a:prstGeom>
-          <a:noFill/>
-          <a:ln/>
-        </p:spPr>
-        <p:txBody>
-          <a:bodyPr wrap="square" lIns="0" tIns="0" rIns="0" bIns="0" rtlCol="0" anchor="ctr"/>
-          <a:lstStyle/>
-          <a:p>
-            <a:pPr indent="0" marL="0">
-              <a:buNone/>
-            </a:pPr>
-            <a:r>
-              <a:rPr lang="en-US" sz="1500" b="1" dirty="0">
+          <p:cNvPr id="47" name="Text 45"/>
+          <p:cNvSpPr txBox="1"/>
+          <p:nvPr/>
+        </p:nvSpPr>
+        <p:spPr>
+          <a:xfrm>
+            <a:off x="6025896" y="4727448"/>
+            <a:ext cx="896112" cy="146304"/>
+          </a:xfrm>
+          <a:prstGeom prst="rect">
+            <a:avLst/>
+          </a:prstGeom>
+          <a:noFill/>
+          <a:ln/>
+        </p:spPr>
+        <p:txBody>
+          <a:bodyPr wrap="square" lIns="0" tIns="0" rIns="0" bIns="0" rtlCol="0" anchor="ctr"/>
+          <a:lstStyle/>
+          <a:p>
+            <a:pPr indent="0" marL="0">
+              <a:buNone/>
+            </a:pPr>
+            <a:r>
+              <a:rPr lang="en-US" sz="500" b="1" dirty="0">
+                <a:solidFill>
+                  <a:srgbClr val="EC4899"/>
+                </a:solidFill>
+                <a:latin typeface="Calibri" pitchFamily="34" charset="0"/>
+                <a:ea typeface="Calibri" pitchFamily="34" charset="-122"/>
+                <a:cs typeface="Calibri" pitchFamily="34" charset="-120"/>
+              </a:rPr>
+              <a:t>▶ </a:t>
+            </a:r>
+            <a:pPr indent="0" marL="0">
+              <a:buNone/>
+            </a:pPr>
+            <a:r>
+              <a:rPr lang="en-US" sz="600" b="1" dirty="0">
                 <a:solidFill>
                   <a:srgbClr val="F4F1EA"/>
                 </a:solidFill>
@@ -9497,57 +10332,54 @@
                 <a:ea typeface="Calibri" pitchFamily="34" charset="-122"/>
                 <a:cs typeface="Calibri" pitchFamily="34" charset="-120"/>
               </a:rPr>
-              <a:t>Bill</a:t>
-            </a:r>
-            <a:endParaRPr lang="en-US" sz="1500" dirty="0"/>
-          </a:p>
-        </p:txBody>
-      </p:sp>
-      <p:sp>
-        <p:nvSpPr>
-          <p:cNvPr id="26" name="Text 24"/>
-          <p:cNvSpPr txBox="1"/>
-          <p:nvPr/>
-        </p:nvSpPr>
-        <p:spPr>
-          <a:xfrm>
-            <a:off x="5239512" y="4507992"/>
-            <a:ext cx="1536192" cy="384048"/>
-          </a:xfrm>
-          <a:prstGeom prst="rect">
-            <a:avLst/>
-          </a:prstGeom>
-          <a:noFill/>
-          <a:ln/>
-        </p:spPr>
-        <p:txBody>
-          <a:bodyPr wrap="square" lIns="0" tIns="0" rIns="0" bIns="0" rtlCol="0" anchor="ctr"/>
-          <a:lstStyle/>
-          <a:p>
-            <a:pPr indent="0" marL="0">
-              <a:lnSpc>
-                <a:spcPts val="1200"/>
-              </a:lnSpc>
-              <a:buNone/>
-            </a:pPr>
-            <a:r>
-              <a:rPr lang="en-US" sz="950" dirty="0">
-                <a:solidFill>
-                  <a:srgbClr val="9AA9C2"/>
-                </a:solidFill>
-                <a:latin typeface="Calibri" pitchFamily="34" charset="0"/>
-                <a:ea typeface="Calibri" pitchFamily="34" charset="-122"/>
-                <a:cs typeface="Calibri" pitchFamily="34" charset="-120"/>
-              </a:rPr>
-              <a:t>Folio and express checkout</a:t>
-            </a:r>
-            <a:endParaRPr lang="en-US" sz="950" dirty="0"/>
-          </a:p>
-        </p:txBody>
-      </p:sp>
-      <p:sp>
-        <p:nvSpPr>
-          <p:cNvPr id="27" name="Text 25"/>
+              <a:t>Mexicali</a:t>
+            </a:r>
+            <a:endParaRPr lang="en-US" sz="500" dirty="0"/>
+          </a:p>
+        </p:txBody>
+      </p:sp>
+      <p:sp>
+        <p:nvSpPr>
+          <p:cNvPr id="48" name="Text 46"/>
+          <p:cNvSpPr txBox="1"/>
+          <p:nvPr/>
+        </p:nvSpPr>
+        <p:spPr>
+          <a:xfrm>
+            <a:off x="6025896" y="4873752"/>
+            <a:ext cx="859536" cy="128016"/>
+          </a:xfrm>
+          <a:prstGeom prst="rect">
+            <a:avLst/>
+          </a:prstGeom>
+          <a:noFill/>
+          <a:ln/>
+        </p:spPr>
+        <p:txBody>
+          <a:bodyPr wrap="square" lIns="0" tIns="0" rIns="0" bIns="0" rtlCol="0" anchor="ctr"/>
+          <a:lstStyle/>
+          <a:p>
+            <a:pPr indent="0" marL="0">
+              <a:buNone/>
+            </a:pPr>
+            <a:r>
+              <a:rPr lang="en-US" sz="550" dirty="0">
+                <a:solidFill>
+                  <a:srgbClr val="9C93B8"/>
+                </a:solidFill>
+                <a:latin typeface="Calibri" pitchFamily="34" charset="0"/>
+                <a:ea typeface="Calibri" pitchFamily="34" charset="-122"/>
+                <a:cs typeface="Calibri" pitchFamily="34" charset="-120"/>
+              </a:rPr>
+              <a:t>2026</a:t>
+            </a:r>
+            <a:endParaRPr lang="en-US" sz="550" dirty="0"/>
+          </a:p>
+        </p:txBody>
+      </p:sp>
+      <p:sp>
+        <p:nvSpPr>
+          <p:cNvPr id="49" name="Text 47"/>
           <p:cNvSpPr txBox="1"/>
           <p:nvPr/>
         </p:nvSpPr>
@@ -9578,7 +10410,7 @@
                 <a:ea typeface="Calibri" pitchFamily="34" charset="-122"/>
                 <a:cs typeface="Calibri" pitchFamily="34" charset="-120"/>
               </a:rPr>
-              <a:t>Personal on arrival</a:t>
+              <a:t>It is the Orpheus product</a:t>
             </a:r>
             <a:endParaRPr lang="en-US" sz="1300" dirty="0"/>
           </a:p>
@@ -9586,14 +10418,14 @@
       </p:sp>
       <p:sp>
         <p:nvSpPr>
-          <p:cNvPr id="28" name="Text 26"/>
+          <p:cNvPr id="50" name="Text 48"/>
           <p:cNvSpPr txBox="1"/>
           <p:nvPr/>
         </p:nvSpPr>
         <p:spPr>
           <a:xfrm>
             <a:off x="7498080" y="2011680"/>
-            <a:ext cx="4206240" cy="621792"/>
+            <a:ext cx="4206240" cy="658368"/>
           </a:xfrm>
           <a:prstGeom prst="rect">
             <a:avLst/>
@@ -9620,7 +10452,7 @@
                 <a:ea typeface="Calibri" pitchFamily="34" charset="-122"/>
                 <a:cs typeface="Calibri" pitchFamily="34" charset="-120"/>
               </a:rPr>
-              <a:t>Name, nights remaining and loyalty tier — drawn from the same record the front desk reads.</a:t>
+              <a:t>The same application your subscribers use at home, running in a hospitality mode — not a hotel imitation of it.</a:t>
             </a:r>
             <a:endParaRPr lang="en-US" sz="1050" dirty="0"/>
           </a:p>
@@ -9628,7 +10460,7 @@
       </p:sp>
       <p:sp>
         <p:nvSpPr>
-          <p:cNvPr id="29" name="Text 27"/>
+          <p:cNvPr id="51" name="Text 49"/>
           <p:cNvSpPr txBox="1"/>
           <p:nvPr/>
         </p:nvSpPr>
@@ -9659,7 +10491,7 @@
                 <a:ea typeface="Calibri" pitchFamily="34" charset="-122"/>
                 <a:cs typeface="Calibri" pitchFamily="34" charset="-120"/>
               </a:rPr>
-              <a:t>Identical in every property</a:t>
+              <a:t>Personal on arrival</a:t>
             </a:r>
             <a:endParaRPr lang="en-US" sz="1300" dirty="0"/>
           </a:p>
@@ -9667,14 +10499,14 @@
       </p:sp>
       <p:sp>
         <p:nvSpPr>
-          <p:cNvPr id="30" name="Text 28"/>
+          <p:cNvPr id="52" name="Text 50"/>
           <p:cNvSpPr txBox="1"/>
           <p:nvPr/>
         </p:nvSpPr>
         <p:spPr>
           <a:xfrm>
             <a:off x="7498080" y="2944368"/>
-            <a:ext cx="4206240" cy="621792"/>
+            <a:ext cx="4206240" cy="658368"/>
           </a:xfrm>
           <a:prstGeom prst="rect">
             <a:avLst/>
@@ -9701,7 +10533,7 @@
                 <a:ea typeface="Calibri" pitchFamily="34" charset="-122"/>
                 <a:cs typeface="Calibri" pitchFamily="34" charset="-120"/>
               </a:rPr>
-              <a:t>One Android application, one interface, one brand standard, on every set in the estate.</a:t>
+              <a:t>Name, nights remaining and loyalty tier, drawn from the same record the front desk reads.</a:t>
             </a:r>
             <a:endParaRPr lang="en-US" sz="1050" dirty="0"/>
           </a:p>
@@ -9709,7 +10541,7 @@
       </p:sp>
       <p:sp>
         <p:nvSpPr>
-          <p:cNvPr id="31" name="Text 29"/>
+          <p:cNvPr id="53" name="Text 51"/>
           <p:cNvSpPr txBox="1"/>
           <p:nvPr/>
         </p:nvSpPr>
@@ -9748,14 +10580,14 @@
       </p:sp>
       <p:sp>
         <p:nvSpPr>
-          <p:cNvPr id="32" name="Text 30"/>
+          <p:cNvPr id="54" name="Text 52"/>
           <p:cNvSpPr txBox="1"/>
           <p:nvPr/>
         </p:nvSpPr>
         <p:spPr>
           <a:xfrm>
             <a:off x="7498080" y="3877056"/>
-            <a:ext cx="4206240" cy="621792"/>
+            <a:ext cx="4206240" cy="658368"/>
           </a:xfrm>
           <a:prstGeom prst="rect">
             <a:avLst/>
@@ -9790,7 +10622,7 @@
       </p:sp>
       <p:sp>
         <p:nvSpPr>
-          <p:cNvPr id="33" name="Text 31"/>
+          <p:cNvPr id="55" name="Text 53"/>
           <p:cNvSpPr txBox="1"/>
           <p:nvPr/>
         </p:nvSpPr>
@@ -9821,7 +10653,7 @@
                 <a:ea typeface="Calibri" pitchFamily="34" charset="-122"/>
                 <a:cs typeface="Calibri" pitchFamily="34" charset="-120"/>
               </a:rPr>
-              <a:t>Reset between guests</a:t>
+              <a:t>The stay is the subscriber</a:t>
             </a:r>
             <a:endParaRPr lang="en-US" sz="1300" dirty="0"/>
           </a:p>
@@ -9829,14 +10661,14 @@
       </p:sp>
       <p:sp>
         <p:nvSpPr>
-          <p:cNvPr id="34" name="Text 32"/>
+          <p:cNvPr id="56" name="Text 54"/>
           <p:cNvSpPr txBox="1"/>
           <p:nvPr/>
         </p:nvSpPr>
         <p:spPr>
           <a:xfrm>
             <a:off x="7498080" y="4809744"/>
-            <a:ext cx="4206240" cy="621792"/>
+            <a:ext cx="4206240" cy="658368"/>
           </a:xfrm>
           <a:prstGeom prst="rect">
             <a:avLst/>
@@ -9863,7 +10695,7 @@
                 <a:ea typeface="Calibri" pitchFamily="34" charset="-122"/>
                 <a:cs typeface="Calibri" pitchFamily="34" charset="-120"/>
               </a:rPr>
-              <a:t>Profile, cast pairings, history and cached logins cleared automatically on turnover.</a:t>
+              <a:t>Entitlement is issued to the room for the dates of the stay. Profile, history and pairings are wiped at checkout.</a:t>
             </a:r>
             <a:endParaRPr lang="en-US" sz="1050" dirty="0"/>
           </a:p>

--- a/presentation/Orpheus-Hospitality-Suite.pptx
+++ b/presentation/Orpheus-Hospitality-Suite.pptx
@@ -1659,7 +1659,7 @@
           <a:p>
             <a:r>
               <a:rPr lang="en-US" dirty="0"/>
-              <a:t>PLACEHOLDER — replace these four cards with the real Orpheus Nations catalogue, channel line-up and licensed territories before this deck goes to a client. Content specifics were not available when the deck was drafted.</a:t>
+              <a:t>Say this slide plainly; it is the one a hotel's legal team will test. We are a player and a verification service, not a content supplier — the property brings sources it already has the right to show, which is usually its existing linear contract plus free ad-supported channels. That is an easier sale than it sounds: the group keeps its content deals and gets a better player, rather than being asked to switch supplier. Never imply the platform brings a licensed library, and never let a community link list near a hospitality deployment — a hotel showing an unlicensed stream is publicly performing it commercially, and that is the property's liability and the fastest way to lose the account.</a:t>
             </a:r>
             <a:endParaRPr lang="en-US" dirty="0"/>
           </a:p>
@@ -12728,7 +12728,7 @@
                 <a:ea typeface="Calibri" pitchFamily="34" charset="-122"/>
                 <a:cs typeface="Calibri" pitchFamily="34" charset="-120"/>
               </a:rPr>
-              <a:t>THE CONTENT LAYER</a:t>
+              <a:t>THE ENTERTAINMENT LAYER</a:t>
             </a:r>
             <a:endParaRPr lang="en-US" sz="1100" dirty="0"/>
           </a:p>
@@ -12767,7 +12767,7 @@
                 <a:ea typeface="Cambria" pitchFamily="34" charset="-122"/>
                 <a:cs typeface="Cambria" pitchFamily="34" charset="-120"/>
               </a:rPr>
-              <a:t>Entertainment, powered by Orpheus Nations</a:t>
+              <a:t>A player, not a content deal</a:t>
             </a:r>
             <a:endParaRPr lang="en-US" sz="3300" dirty="0"/>
           </a:p>
@@ -12809,7 +12809,7 @@
                 <a:ea typeface="Calibri" pitchFamily="34" charset="-122"/>
                 <a:cs typeface="Calibri" pitchFamily="34" charset="-120"/>
               </a:rPr>
-              <a:t>No property negotiates with a distributor, assembles a library, or maintains a player. The entertainment layer is licensed centrally as part of the platform and deployed identically across the estate.</a:t>
+              <a:t>Orpheus Nations owns no content and holds no library. It is a multimedia player over a source registry: sources are configured per property, and the player verifies them continuously so a guest never meets a dead channel.</a:t>
             </a:r>
             <a:endParaRPr lang="en-US" sz="1300" dirty="0"/>
           </a:p>
@@ -12823,12 +12823,12 @@
         </p:nvSpPr>
         <p:spPr>
           <a:xfrm>
-            <a:off x="640080" y="2423160"/>
-            <a:ext cx="2670048" cy="2011680"/>
+            <a:off x="640080" y="2395728"/>
+            <a:ext cx="2670048" cy="2240280"/>
           </a:xfrm>
           <a:prstGeom prst="roundRect">
             <a:avLst>
-              <a:gd name="adj" fmla="val 4091"/>
+              <a:gd name="adj" fmla="val 3673"/>
             </a:avLst>
           </a:prstGeom>
           <a:solidFill>
@@ -12857,7 +12857,7 @@
         </p:nvSpPr>
         <p:spPr>
           <a:xfrm>
-            <a:off x="877824" y="2633472"/>
+            <a:off x="877824" y="2596896"/>
             <a:ext cx="402336" cy="402336"/>
           </a:xfrm>
           <a:prstGeom prst="ellipse">
@@ -12882,7 +12882,7 @@
         </p:nvSpPr>
         <p:spPr>
           <a:xfrm>
-            <a:off x="877824" y="2633472"/>
+            <a:off x="877824" y="2596896"/>
             <a:ext cx="402336" cy="402336"/>
           </a:xfrm>
           <a:prstGeom prst="rect">
@@ -12921,7 +12921,7 @@
         </p:nvSpPr>
         <p:spPr>
           <a:xfrm>
-            <a:off x="877824" y="3145536"/>
+            <a:off x="877824" y="3108960"/>
             <a:ext cx="2194560" cy="502920"/>
           </a:xfrm>
           <a:prstGeom prst="rect">
@@ -12949,7 +12949,7 @@
                 <a:ea typeface="Calibri" pitchFamily="34" charset="-122"/>
                 <a:cs typeface="Calibri" pitchFamily="34" charset="-120"/>
               </a:rPr>
-              <a:t>A curated catalogue</a:t>
+              <a:t>We are the player</a:t>
             </a:r>
             <a:endParaRPr lang="en-US" sz="1300" dirty="0"/>
           </a:p>
@@ -12963,8 +12963,8 @@
         </p:nvSpPr>
         <p:spPr>
           <a:xfrm>
-            <a:off x="877824" y="3675888"/>
-            <a:ext cx="2194560" cy="713232"/>
+            <a:off x="877824" y="3639312"/>
+            <a:ext cx="2194560" cy="804672"/>
           </a:xfrm>
           <a:prstGeom prst="rect">
             <a:avLst/>
@@ -12991,7 +12991,7 @@
                 <a:ea typeface="Calibri" pitchFamily="34" charset="-122"/>
                 <a:cs typeface="Calibri" pitchFamily="34" charset="-120"/>
               </a:rPr>
-              <a:t>On-demand entertainment presented inside your interface, not a third party's.</a:t>
+              <a:t>Nothing ships with content in it. No catalogue is bundled and no rights are held.</a:t>
             </a:r>
             <a:endParaRPr lang="en-US" sz="1050" dirty="0"/>
           </a:p>
@@ -13005,12 +13005,12 @@
         </p:nvSpPr>
         <p:spPr>
           <a:xfrm>
-            <a:off x="3593592" y="2423160"/>
-            <a:ext cx="2670048" cy="2011680"/>
+            <a:off x="3593592" y="2395728"/>
+            <a:ext cx="2670048" cy="2240280"/>
           </a:xfrm>
           <a:prstGeom prst="roundRect">
             <a:avLst>
-              <a:gd name="adj" fmla="val 4091"/>
+              <a:gd name="adj" fmla="val 3673"/>
             </a:avLst>
           </a:prstGeom>
           <a:solidFill>
@@ -13039,7 +13039,7 @@
         </p:nvSpPr>
         <p:spPr>
           <a:xfrm>
-            <a:off x="3831336" y="2633472"/>
+            <a:off x="3831336" y="2596896"/>
             <a:ext cx="402336" cy="402336"/>
           </a:xfrm>
           <a:prstGeom prst="ellipse">
@@ -13064,7 +13064,7 @@
         </p:nvSpPr>
         <p:spPr>
           <a:xfrm>
-            <a:off x="3831336" y="2633472"/>
+            <a:off x="3831336" y="2596896"/>
             <a:ext cx="402336" cy="402336"/>
           </a:xfrm>
           <a:prstGeom prst="rect">
@@ -13103,7 +13103,7 @@
         </p:nvSpPr>
         <p:spPr>
           <a:xfrm>
-            <a:off x="3831336" y="3145536"/>
+            <a:off x="3831336" y="3108960"/>
             <a:ext cx="2194560" cy="502920"/>
           </a:xfrm>
           <a:prstGeom prst="rect">
@@ -13131,7 +13131,7 @@
                 <a:ea typeface="Calibri" pitchFamily="34" charset="-122"/>
                 <a:cs typeface="Calibri" pitchFamily="34" charset="-120"/>
               </a:rPr>
-              <a:t>Live television</a:t>
+              <a:t>The sources are yours</a:t>
             </a:r>
             <a:endParaRPr lang="en-US" sz="1300" dirty="0"/>
           </a:p>
@@ -13145,8 +13145,8 @@
         </p:nvSpPr>
         <p:spPr>
           <a:xfrm>
-            <a:off x="3831336" y="3675888"/>
-            <a:ext cx="2194560" cy="713232"/>
+            <a:off x="3831336" y="3639312"/>
+            <a:ext cx="2194560" cy="804672"/>
           </a:xfrm>
           <a:prstGeom prst="rect">
             <a:avLst/>
@@ -13173,7 +13173,7 @@
                 <a:ea typeface="Calibri" pitchFamily="34" charset="-122"/>
                 <a:cs typeface="Calibri" pitchFamily="34" charset="-120"/>
               </a:rPr>
-              <a:t>Local and international channels with a proper programme guide, over the room network.</a:t>
+              <a:t>Your existing linear feeds, your licensed on-demand provider, free ad-supported channels, and your own hotel channels.</a:t>
             </a:r>
             <a:endParaRPr lang="en-US" sz="1050" dirty="0"/>
           </a:p>
@@ -13187,12 +13187,12 @@
         </p:nvSpPr>
         <p:spPr>
           <a:xfrm>
-            <a:off x="6547104" y="2423160"/>
-            <a:ext cx="2670048" cy="2011680"/>
+            <a:off x="6547104" y="2395728"/>
+            <a:ext cx="2670048" cy="2240280"/>
           </a:xfrm>
           <a:prstGeom prst="roundRect">
             <a:avLst>
-              <a:gd name="adj" fmla="val 4091"/>
+              <a:gd name="adj" fmla="val 3673"/>
             </a:avLst>
           </a:prstGeom>
           <a:solidFill>
@@ -13221,7 +13221,7 @@
         </p:nvSpPr>
         <p:spPr>
           <a:xfrm>
-            <a:off x="6784848" y="2633472"/>
+            <a:off x="6784848" y="2596896"/>
             <a:ext cx="402336" cy="402336"/>
           </a:xfrm>
           <a:prstGeom prst="ellipse">
@@ -13246,7 +13246,7 @@
         </p:nvSpPr>
         <p:spPr>
           <a:xfrm>
-            <a:off x="6784848" y="2633472"/>
+            <a:off x="6784848" y="2596896"/>
             <a:ext cx="402336" cy="402336"/>
           </a:xfrm>
           <a:prstGeom prst="rect">
@@ -13285,7 +13285,7 @@
         </p:nvSpPr>
         <p:spPr>
           <a:xfrm>
-            <a:off x="6784848" y="3145536"/>
+            <a:off x="6784848" y="3108960"/>
             <a:ext cx="2194560" cy="502920"/>
           </a:xfrm>
           <a:prstGeom prst="rect">
@@ -13313,7 +13313,7 @@
                 <a:ea typeface="Calibri" pitchFamily="34" charset="-122"/>
                 <a:cs typeface="Calibri" pitchFamily="34" charset="-120"/>
               </a:rPr>
-              <a:t>The guest's own services</a:t>
+              <a:t>Smart search keeps it alive</a:t>
             </a:r>
             <a:endParaRPr lang="en-US" sz="1300" dirty="0"/>
           </a:p>
@@ -13327,8 +13327,8 @@
         </p:nvSpPr>
         <p:spPr>
           <a:xfrm>
-            <a:off x="6784848" y="3675888"/>
-            <a:ext cx="2194560" cy="713232"/>
+            <a:off x="6784848" y="3639312"/>
+            <a:ext cx="2194560" cy="804672"/>
           </a:xfrm>
           <a:prstGeom prst="rect">
             <a:avLst/>
@@ -13355,7 +13355,7 @@
                 <a:ea typeface="Calibri" pitchFamily="34" charset="-122"/>
                 <a:cs typeface="Calibri" pitchFamily="34" charset="-120"/>
               </a:rPr>
-              <a:t>Casting and mirroring from their phone, so their subscriptions travel with them.</a:t>
+              <a:t>Every source is probed continuously for reachability. A dead endpoint is dropped before a guest can select it.</a:t>
             </a:r>
             <a:endParaRPr lang="en-US" sz="1050" dirty="0"/>
           </a:p>
@@ -13369,12 +13369,12 @@
         </p:nvSpPr>
         <p:spPr>
           <a:xfrm>
-            <a:off x="9500616" y="2423160"/>
-            <a:ext cx="2670048" cy="2011680"/>
+            <a:off x="9500616" y="2395728"/>
+            <a:ext cx="2670048" cy="2240280"/>
           </a:xfrm>
           <a:prstGeom prst="roundRect">
             <a:avLst>
-              <a:gd name="adj" fmla="val 4091"/>
+              <a:gd name="adj" fmla="val 3673"/>
             </a:avLst>
           </a:prstGeom>
           <a:solidFill>
@@ -13403,7 +13403,7 @@
         </p:nvSpPr>
         <p:spPr>
           <a:xfrm>
-            <a:off x="9738360" y="2633472"/>
+            <a:off x="9738360" y="2596896"/>
             <a:ext cx="402336" cy="402336"/>
           </a:xfrm>
           <a:prstGeom prst="ellipse">
@@ -13428,7 +13428,7 @@
         </p:nvSpPr>
         <p:spPr>
           <a:xfrm>
-            <a:off x="9738360" y="2633472"/>
+            <a:off x="9738360" y="2596896"/>
             <a:ext cx="402336" cy="402336"/>
           </a:xfrm>
           <a:prstGeom prst="rect">
@@ -13467,7 +13467,7 @@
         </p:nvSpPr>
         <p:spPr>
           <a:xfrm>
-            <a:off x="9738360" y="3145536"/>
+            <a:off x="9738360" y="3108960"/>
             <a:ext cx="2194560" cy="502920"/>
           </a:xfrm>
           <a:prstGeom prst="rect">
@@ -13495,7 +13495,7 @@
                 <a:ea typeface="Calibri" pitchFamily="34" charset="-122"/>
                 <a:cs typeface="Calibri" pitchFamily="34" charset="-120"/>
               </a:rPr>
-              <a:t>Your channels</a:t>
+              <a:t>Change sources, not systems</a:t>
             </a:r>
             <a:endParaRPr lang="en-US" sz="1300" dirty="0"/>
           </a:p>
@@ -13509,8 +13509,8 @@
         </p:nvSpPr>
         <p:spPr>
           <a:xfrm>
-            <a:off x="9738360" y="3675888"/>
-            <a:ext cx="2194560" cy="713232"/>
+            <a:off x="9738360" y="3639312"/>
+            <a:ext cx="2194560" cy="804672"/>
           </a:xfrm>
           <a:prstGeom prst="rect">
             <a:avLst/>
@@ -13537,7 +13537,7 @@
                 <a:ea typeface="Calibri" pitchFamily="34" charset="-122"/>
                 <a:cs typeface="Calibri" pitchFamily="34" charset="-120"/>
               </a:rPr>
-              <a:t>Property information, dining, spa, events and promotion, alongside the entertainment.</a:t>
+              <a:t>Sources are dynamic and can be updated at any time without touching a single television in the estate.</a:t>
             </a:r>
             <a:endParaRPr lang="en-US" sz="1050" dirty="0"/>
           </a:p>
@@ -13551,12 +13551,12 @@
         </p:nvSpPr>
         <p:spPr>
           <a:xfrm>
-            <a:off x="640080" y="4617720"/>
-            <a:ext cx="10911535" cy="777240"/>
+            <a:off x="640080" y="4828032"/>
+            <a:ext cx="10911535" cy="960120"/>
           </a:xfrm>
           <a:prstGeom prst="roundRect">
             <a:avLst>
-              <a:gd name="adj" fmla="val 10588"/>
+              <a:gd name="adj" fmla="val 8571"/>
             </a:avLst>
           </a:prstGeom>
           <a:solidFill>
@@ -13585,24 +13585,24 @@
         </p:nvSpPr>
         <p:spPr>
           <a:xfrm>
-            <a:off x="960120" y="4617720"/>
-            <a:ext cx="10271455" cy="777240"/>
-          </a:xfrm>
-          <a:prstGeom prst="rect">
-            <a:avLst/>
-          </a:prstGeom>
-          <a:noFill/>
-          <a:ln/>
-        </p:spPr>
-        <p:txBody>
-          <a:bodyPr wrap="square" lIns="0" tIns="0" rIns="0" bIns="0" rtlCol="0" anchor="ctr"/>
-          <a:lstStyle/>
-          <a:p>
-            <a:pPr indent="0" marL="0">
-              <a:buNone/>
-            </a:pPr>
-            <a:r>
-              <a:rPr lang="en-US" sz="1300" i="1" dirty="0">
+            <a:off x="960120" y="4974336"/>
+            <a:ext cx="3108960" cy="256032"/>
+          </a:xfrm>
+          <a:prstGeom prst="rect">
+            <a:avLst/>
+          </a:prstGeom>
+          <a:noFill/>
+          <a:ln/>
+        </p:spPr>
+        <p:txBody>
+          <a:bodyPr wrap="square" lIns="0" tIns="0" rIns="0" bIns="0" rtlCol="0" anchor="ctr"/>
+          <a:lstStyle/>
+          <a:p>
+            <a:pPr indent="0" marL="0">
+              <a:buNone/>
+            </a:pPr>
+            <a:r>
+              <a:rPr lang="en-US" sz="1200" b="1" dirty="0">
                 <a:solidFill>
                   <a:srgbClr val="D4A94A"/>
                 </a:solidFill>
@@ -13610,9 +13610,90 @@
                 <a:ea typeface="Calibri" pitchFamily="34" charset="-122"/>
                 <a:cs typeface="Calibri" pitchFamily="34" charset="-120"/>
               </a:rPr>
-              <a:t>The entertainment is why the guest picks up the remote. Everything else in this deck is why the operator is glad they did.</a:t>
-            </a:r>
-            <a:endParaRPr lang="en-US" sz="1300" dirty="0"/>
+              <a:t>Where the rights sit</a:t>
+            </a:r>
+            <a:endParaRPr lang="en-US" sz="1200" dirty="0"/>
+          </a:p>
+        </p:txBody>
+      </p:sp>
+      <p:sp>
+        <p:nvSpPr>
+          <p:cNvPr id="27" name="Text 25"/>
+          <p:cNvSpPr txBox="1"/>
+          <p:nvPr/>
+        </p:nvSpPr>
+        <p:spPr>
+          <a:xfrm>
+            <a:off x="960120" y="5248656"/>
+            <a:ext cx="10271455" cy="457200"/>
+          </a:xfrm>
+          <a:prstGeom prst="rect">
+            <a:avLst/>
+          </a:prstGeom>
+          <a:noFill/>
+          <a:ln/>
+        </p:spPr>
+        <p:txBody>
+          <a:bodyPr wrap="square" lIns="0" tIns="0" rIns="0" bIns="0" rtlCol="0" anchor="ctr"/>
+          <a:lstStyle/>
+          <a:p>
+            <a:pPr indent="0" marL="0">
+              <a:lnSpc>
+                <a:spcPts val="1450"/>
+              </a:lnSpc>
+              <a:buNone/>
+            </a:pPr>
+            <a:r>
+              <a:rPr lang="en-US" sz="1100" dirty="0">
+                <a:solidFill>
+                  <a:srgbClr val="F4F1EA"/>
+                </a:solidFill>
+                <a:latin typeface="Calibri" pitchFamily="34" charset="0"/>
+                <a:ea typeface="Calibri" pitchFamily="34" charset="-122"/>
+                <a:cs typeface="Calibri" pitchFamily="34" charset="-120"/>
+              </a:rPr>
+              <a:t>The property or the group supplies its sources and holds the right to show them. We supply the player, the interface and the verification. Put that boundary in the contract — a hotel is publicly performing whatever it puts on a guest television, and licensing that is the property's obligation.</a:t>
+            </a:r>
+            <a:endParaRPr lang="en-US" sz="1100" dirty="0"/>
+          </a:p>
+        </p:txBody>
+      </p:sp>
+      <p:sp>
+        <p:nvSpPr>
+          <p:cNvPr id="28" name="Text 26"/>
+          <p:cNvSpPr txBox="1"/>
+          <p:nvPr/>
+        </p:nvSpPr>
+        <p:spPr>
+          <a:xfrm>
+            <a:off x="640080" y="6291072"/>
+            <a:ext cx="10911535" cy="274320"/>
+          </a:xfrm>
+          <a:prstGeom prst="rect">
+            <a:avLst/>
+          </a:prstGeom>
+          <a:noFill/>
+          <a:ln/>
+        </p:spPr>
+        <p:txBody>
+          <a:bodyPr wrap="square" lIns="0" tIns="0" rIns="0" bIns="0" rtlCol="0" anchor="ctr"/>
+          <a:lstStyle/>
+          <a:p>
+            <a:pPr indent="0" marL="0">
+              <a:buNone/>
+            </a:pPr>
+            <a:r>
+              <a:rPr lang="en-US" sz="900" i="1" dirty="0">
+                <a:solidFill>
+                  <a:srgbClr val="6B7A94"/>
+                </a:solidFill>
+                <a:latin typeface="Calibri" pitchFamily="34" charset="0"/>
+                <a:ea typeface="Calibri" pitchFamily="34" charset="-122"/>
+                <a:cs typeface="Calibri" pitchFamily="34" charset="-120"/>
+              </a:rPr>
+              <a:t>Community-maintained link lists are not a licensed source for commercial redistribution. Hospitality estates are provisioned against the property's own licensed feeds.</a:t>
+            </a:r>
+            <a:endParaRPr lang="en-US" sz="900" dirty="0"/>
           </a:p>
         </p:txBody>
       </p:sp>
